--- a/slides/01_what_is_ml.pptx
+++ b/slides/01_what_is_ml.pptx
@@ -5,17 +5,19 @@
     <p:sldMasterId id="2147483648" r:id="rId1"/>
   </p:sldMasterIdLst>
   <p:notesMasterIdLst>
-    <p:notesMasterId r:id="rId10"/>
+    <p:notesMasterId r:id="rId12"/>
   </p:notesMasterIdLst>
   <p:sldIdLst>
     <p:sldId id="256" r:id="rId2"/>
     <p:sldId id="257" r:id="rId3"/>
-    <p:sldId id="258" r:id="rId4"/>
-    <p:sldId id="259" r:id="rId5"/>
-    <p:sldId id="260" r:id="rId6"/>
-    <p:sldId id="261" r:id="rId7"/>
-    <p:sldId id="262" r:id="rId8"/>
-    <p:sldId id="263" r:id="rId9"/>
+    <p:sldId id="264" r:id="rId4"/>
+    <p:sldId id="265" r:id="rId5"/>
+    <p:sldId id="266" r:id="rId6"/>
+    <p:sldId id="259" r:id="rId7"/>
+    <p:sldId id="260" r:id="rId8"/>
+    <p:sldId id="261" r:id="rId9"/>
+    <p:sldId id="262" r:id="rId10"/>
+    <p:sldId id="263" r:id="rId11"/>
   </p:sldIdLst>
   <p:sldSz cx="12192000" cy="6858000"/>
   <p:notesSz cx="6858000" cy="9144000"/>
@@ -114,6 +116,11 @@
       </a:defRPr>
     </a:lvl9pPr>
   </p:defaultTextStyle>
+  <p:extLst>
+    <p:ext uri="{EFAFB233-063F-42B5-8137-9DF3F51BA10A}">
+      <p15:sldGuideLst xmlns:p15="http://schemas.microsoft.com/office/powerpoint/2012/main"/>
+    </p:ext>
+  </p:extLst>
 </p:presentation>
 </file>
 
@@ -199,7 +206,7 @@
           <a:p>
             <a:fld id="{DA3B5F47-542D-2F4A-A589-8990110BEF85}" type="datetimeFigureOut">
               <a:rPr lang="en-US" smtClean="0"/>
-              <a:t>3/30/26</a:t>
+              <a:t>3/31/26</a:t>
             </a:fld>
             <a:endParaRPr lang="en-US"/>
           </a:p>
@@ -561,6 +568,244 @@
 </p:notes>
 </file>
 
+<file path=ppt/notesSlides/notesSlide2.xml><?xml version="1.0" encoding="utf-8"?>
+<p:notes xmlns:a="http://schemas.openxmlformats.org/drawingml/2006/main" xmlns:r="http://schemas.openxmlformats.org/officeDocument/2006/relationships" xmlns:p="http://schemas.openxmlformats.org/presentationml/2006/main">
+  <p:cSld>
+    <p:spTree>
+      <p:nvGrpSpPr>
+        <p:cNvPr id="1" name="">
+          <a:extLst>
+            <a:ext uri="{FF2B5EF4-FFF2-40B4-BE49-F238E27FC236}">
+              <a16:creationId xmlns:a16="http://schemas.microsoft.com/office/drawing/2014/main" id="{3F25C84D-0C20-A2DC-6291-38E80B768035}"/>
+            </a:ext>
+          </a:extLst>
+        </p:cNvPr>
+        <p:cNvGrpSpPr/>
+        <p:nvPr/>
+      </p:nvGrpSpPr>
+      <p:grpSpPr>
+        <a:xfrm>
+          <a:off x="0" y="0"/>
+          <a:ext cx="0" cy="0"/>
+          <a:chOff x="0" y="0"/>
+          <a:chExt cx="0" cy="0"/>
+        </a:xfrm>
+      </p:grpSpPr>
+      <p:sp>
+        <p:nvSpPr>
+          <p:cNvPr id="2" name="Slide Image Placeholder 1">
+            <a:extLst>
+              <a:ext uri="{FF2B5EF4-FFF2-40B4-BE49-F238E27FC236}">
+                <a16:creationId xmlns:a16="http://schemas.microsoft.com/office/drawing/2014/main" id="{52050D61-204D-DD3C-F48C-27625251A884}"/>
+              </a:ext>
+            </a:extLst>
+          </p:cNvPr>
+          <p:cNvSpPr>
+            <a:spLocks noGrp="1" noRot="1" noChangeAspect="1"/>
+          </p:cNvSpPr>
+          <p:nvPr>
+            <p:ph type="sldImg"/>
+          </p:nvPr>
+        </p:nvSpPr>
+        <p:spPr/>
+      </p:sp>
+      <p:sp>
+        <p:nvSpPr>
+          <p:cNvPr id="3" name="Notes Placeholder 2">
+            <a:extLst>
+              <a:ext uri="{FF2B5EF4-FFF2-40B4-BE49-F238E27FC236}">
+                <a16:creationId xmlns:a16="http://schemas.microsoft.com/office/drawing/2014/main" id="{7D48D780-E676-5074-2C7F-C24D41406414}"/>
+              </a:ext>
+            </a:extLst>
+          </p:cNvPr>
+          <p:cNvSpPr>
+            <a:spLocks noGrp="1"/>
+          </p:cNvSpPr>
+          <p:nvPr>
+            <p:ph type="body" idx="1"/>
+          </p:nvPr>
+        </p:nvSpPr>
+        <p:spPr/>
+        <p:txBody>
+          <a:bodyPr/>
+          <a:lstStyle/>
+          <a:p>
+            <a:r>
+              <a:rPr lang="en-US" dirty="0"/>
+              <a:t>[Molnar, C. Modeling mindsets: the many cultures of learning from data.](https://</a:t>
+            </a:r>
+            <a:r>
+              <a:rPr lang="en-US" dirty="0" err="1"/>
+              <a:t>christophmolnar.com</a:t>
+            </a:r>
+            <a:r>
+              <a:rPr lang="en-US" dirty="0"/>
+              <a:t>/books/modeling-mindsets)</a:t>
+            </a:r>
+          </a:p>
+        </p:txBody>
+      </p:sp>
+      <p:sp>
+        <p:nvSpPr>
+          <p:cNvPr id="4" name="Slide Number Placeholder 3">
+            <a:extLst>
+              <a:ext uri="{FF2B5EF4-FFF2-40B4-BE49-F238E27FC236}">
+                <a16:creationId xmlns:a16="http://schemas.microsoft.com/office/drawing/2014/main" id="{57CFE9F0-67FE-1A05-CA34-1E523B480A45}"/>
+              </a:ext>
+            </a:extLst>
+          </p:cNvPr>
+          <p:cNvSpPr>
+            <a:spLocks noGrp="1"/>
+          </p:cNvSpPr>
+          <p:nvPr>
+            <p:ph type="sldNum" sz="quarter" idx="5"/>
+          </p:nvPr>
+        </p:nvSpPr>
+        <p:spPr/>
+        <p:txBody>
+          <a:bodyPr/>
+          <a:lstStyle/>
+          <a:p>
+            <a:fld id="{51D417A5-630B-DE42-860C-96747A2C59DE}" type="slidenum">
+              <a:rPr lang="en-US" smtClean="0"/>
+              <a:t>3</a:t>
+            </a:fld>
+            <a:endParaRPr lang="en-US"/>
+          </a:p>
+        </p:txBody>
+      </p:sp>
+    </p:spTree>
+    <p:extLst>
+      <p:ext uri="{BB962C8B-B14F-4D97-AF65-F5344CB8AC3E}">
+        <p14:creationId xmlns:p14="http://schemas.microsoft.com/office/powerpoint/2010/main" val="2140901328"/>
+      </p:ext>
+    </p:extLst>
+  </p:cSld>
+  <p:clrMapOvr>
+    <a:masterClrMapping/>
+  </p:clrMapOvr>
+</p:notes>
+</file>
+
+<file path=ppt/notesSlides/notesSlide3.xml><?xml version="1.0" encoding="utf-8"?>
+<p:notes xmlns:a="http://schemas.openxmlformats.org/drawingml/2006/main" xmlns:r="http://schemas.openxmlformats.org/officeDocument/2006/relationships" xmlns:p="http://schemas.openxmlformats.org/presentationml/2006/main">
+  <p:cSld>
+    <p:spTree>
+      <p:nvGrpSpPr>
+        <p:cNvPr id="1" name="">
+          <a:extLst>
+            <a:ext uri="{FF2B5EF4-FFF2-40B4-BE49-F238E27FC236}">
+              <a16:creationId xmlns:a16="http://schemas.microsoft.com/office/drawing/2014/main" id="{D4550BB0-497A-39B7-EA28-1E35775854C0}"/>
+            </a:ext>
+          </a:extLst>
+        </p:cNvPr>
+        <p:cNvGrpSpPr/>
+        <p:nvPr/>
+      </p:nvGrpSpPr>
+      <p:grpSpPr>
+        <a:xfrm>
+          <a:off x="0" y="0"/>
+          <a:ext cx="0" cy="0"/>
+          <a:chOff x="0" y="0"/>
+          <a:chExt cx="0" cy="0"/>
+        </a:xfrm>
+      </p:grpSpPr>
+      <p:sp>
+        <p:nvSpPr>
+          <p:cNvPr id="2" name="Slide Image Placeholder 1">
+            <a:extLst>
+              <a:ext uri="{FF2B5EF4-FFF2-40B4-BE49-F238E27FC236}">
+                <a16:creationId xmlns:a16="http://schemas.microsoft.com/office/drawing/2014/main" id="{5ED50DAC-95E3-F24C-D7A3-888E902232C9}"/>
+              </a:ext>
+            </a:extLst>
+          </p:cNvPr>
+          <p:cNvSpPr>
+            <a:spLocks noGrp="1" noRot="1" noChangeAspect="1"/>
+          </p:cNvSpPr>
+          <p:nvPr>
+            <p:ph type="sldImg"/>
+          </p:nvPr>
+        </p:nvSpPr>
+        <p:spPr/>
+      </p:sp>
+      <p:sp>
+        <p:nvSpPr>
+          <p:cNvPr id="3" name="Notes Placeholder 2">
+            <a:extLst>
+              <a:ext uri="{FF2B5EF4-FFF2-40B4-BE49-F238E27FC236}">
+                <a16:creationId xmlns:a16="http://schemas.microsoft.com/office/drawing/2014/main" id="{25E8B883-13C4-2B1F-51D0-4AE9811193ED}"/>
+              </a:ext>
+            </a:extLst>
+          </p:cNvPr>
+          <p:cNvSpPr>
+            <a:spLocks noGrp="1"/>
+          </p:cNvSpPr>
+          <p:nvPr>
+            <p:ph type="body" idx="1"/>
+          </p:nvPr>
+        </p:nvSpPr>
+        <p:spPr/>
+        <p:txBody>
+          <a:bodyPr/>
+          <a:lstStyle/>
+          <a:p>
+            <a:r>
+              <a:rPr lang="en-US" dirty="0"/>
+              <a:t>[Molnar, C. Modeling mindsets: the many cultures of learning from data.](https://</a:t>
+            </a:r>
+            <a:r>
+              <a:rPr lang="en-US" dirty="0" err="1"/>
+              <a:t>christophmolnar.com</a:t>
+            </a:r>
+            <a:r>
+              <a:rPr lang="en-US" dirty="0"/>
+              <a:t>/books/modeling-mindsets)</a:t>
+            </a:r>
+          </a:p>
+        </p:txBody>
+      </p:sp>
+      <p:sp>
+        <p:nvSpPr>
+          <p:cNvPr id="4" name="Slide Number Placeholder 3">
+            <a:extLst>
+              <a:ext uri="{FF2B5EF4-FFF2-40B4-BE49-F238E27FC236}">
+                <a16:creationId xmlns:a16="http://schemas.microsoft.com/office/drawing/2014/main" id="{AE4B44BE-4C44-B3F2-3013-B1BFCFFA3F1F}"/>
+              </a:ext>
+            </a:extLst>
+          </p:cNvPr>
+          <p:cNvSpPr>
+            <a:spLocks noGrp="1"/>
+          </p:cNvSpPr>
+          <p:nvPr>
+            <p:ph type="sldNum" sz="quarter" idx="5"/>
+          </p:nvPr>
+        </p:nvSpPr>
+        <p:spPr/>
+        <p:txBody>
+          <a:bodyPr/>
+          <a:lstStyle/>
+          <a:p>
+            <a:fld id="{51D417A5-630B-DE42-860C-96747A2C59DE}" type="slidenum">
+              <a:rPr lang="en-US" smtClean="0"/>
+              <a:t>4</a:t>
+            </a:fld>
+            <a:endParaRPr lang="en-US"/>
+          </a:p>
+        </p:txBody>
+      </p:sp>
+    </p:spTree>
+    <p:extLst>
+      <p:ext uri="{BB962C8B-B14F-4D97-AF65-F5344CB8AC3E}">
+        <p14:creationId xmlns:p14="http://schemas.microsoft.com/office/powerpoint/2010/main" val="233797556"/>
+      </p:ext>
+    </p:extLst>
+  </p:cSld>
+  <p:clrMapOvr>
+    <a:masterClrMapping/>
+  </p:clrMapOvr>
+</p:notes>
+</file>
+
 <file path=ppt/slideLayouts/slideLayout1.xml><?xml version="1.0" encoding="utf-8"?>
 <p:sldLayout xmlns:a="http://schemas.openxmlformats.org/drawingml/2006/main" xmlns:r="http://schemas.openxmlformats.org/officeDocument/2006/relationships" xmlns:p="http://schemas.openxmlformats.org/presentationml/2006/main" type="title" preserve="1">
   <p:cSld name="Title Slide">
@@ -708,7 +953,7 @@
           <a:p>
             <a:fld id="{19EC6F6F-998C-264C-A700-8215E11AE5BD}" type="datetimeFigureOut">
               <a:rPr lang="en-US" smtClean="0"/>
-              <a:t>3/30/26</a:t>
+              <a:t>3/31/26</a:t>
             </a:fld>
             <a:endParaRPr lang="en-US"/>
           </a:p>
@@ -906,7 +1151,7 @@
           <a:p>
             <a:fld id="{19EC6F6F-998C-264C-A700-8215E11AE5BD}" type="datetimeFigureOut">
               <a:rPr lang="en-US" smtClean="0"/>
-              <a:t>3/30/26</a:t>
+              <a:t>3/31/26</a:t>
             </a:fld>
             <a:endParaRPr lang="en-US"/>
           </a:p>
@@ -1114,7 +1359,7 @@
           <a:p>
             <a:fld id="{19EC6F6F-998C-264C-A700-8215E11AE5BD}" type="datetimeFigureOut">
               <a:rPr lang="en-US" smtClean="0"/>
-              <a:t>3/30/26</a:t>
+              <a:t>3/31/26</a:t>
             </a:fld>
             <a:endParaRPr lang="en-US"/>
           </a:p>
@@ -1312,7 +1557,7 @@
           <a:p>
             <a:fld id="{19EC6F6F-998C-264C-A700-8215E11AE5BD}" type="datetimeFigureOut">
               <a:rPr lang="en-US" smtClean="0"/>
-              <a:t>3/30/26</a:t>
+              <a:t>3/31/26</a:t>
             </a:fld>
             <a:endParaRPr lang="en-US"/>
           </a:p>
@@ -1587,7 +1832,7 @@
           <a:p>
             <a:fld id="{19EC6F6F-998C-264C-A700-8215E11AE5BD}" type="datetimeFigureOut">
               <a:rPr lang="en-US" smtClean="0"/>
-              <a:t>3/30/26</a:t>
+              <a:t>3/31/26</a:t>
             </a:fld>
             <a:endParaRPr lang="en-US"/>
           </a:p>
@@ -1852,7 +2097,7 @@
           <a:p>
             <a:fld id="{19EC6F6F-998C-264C-A700-8215E11AE5BD}" type="datetimeFigureOut">
               <a:rPr lang="en-US" smtClean="0"/>
-              <a:t>3/30/26</a:t>
+              <a:t>3/31/26</a:t>
             </a:fld>
             <a:endParaRPr lang="en-US"/>
           </a:p>
@@ -2264,7 +2509,7 @@
           <a:p>
             <a:fld id="{19EC6F6F-998C-264C-A700-8215E11AE5BD}" type="datetimeFigureOut">
               <a:rPr lang="en-US" smtClean="0"/>
-              <a:t>3/30/26</a:t>
+              <a:t>3/31/26</a:t>
             </a:fld>
             <a:endParaRPr lang="en-US"/>
           </a:p>
@@ -2405,7 +2650,7 @@
           <a:p>
             <a:fld id="{19EC6F6F-998C-264C-A700-8215E11AE5BD}" type="datetimeFigureOut">
               <a:rPr lang="en-US" smtClean="0"/>
-              <a:t>3/30/26</a:t>
+              <a:t>3/31/26</a:t>
             </a:fld>
             <a:endParaRPr lang="en-US"/>
           </a:p>
@@ -2518,7 +2763,7 @@
           <a:p>
             <a:fld id="{19EC6F6F-998C-264C-A700-8215E11AE5BD}" type="datetimeFigureOut">
               <a:rPr lang="en-US" smtClean="0"/>
-              <a:t>3/30/26</a:t>
+              <a:t>3/31/26</a:t>
             </a:fld>
             <a:endParaRPr lang="en-US"/>
           </a:p>
@@ -2829,7 +3074,7 @@
           <a:p>
             <a:fld id="{19EC6F6F-998C-264C-A700-8215E11AE5BD}" type="datetimeFigureOut">
               <a:rPr lang="en-US" smtClean="0"/>
-              <a:t>3/30/26</a:t>
+              <a:t>3/31/26</a:t>
             </a:fld>
             <a:endParaRPr lang="en-US"/>
           </a:p>
@@ -3117,7 +3362,7 @@
           <a:p>
             <a:fld id="{19EC6F6F-998C-264C-A700-8215E11AE5BD}" type="datetimeFigureOut">
               <a:rPr lang="en-US" smtClean="0"/>
-              <a:t>3/30/26</a:t>
+              <a:t>3/31/26</a:t>
             </a:fld>
             <a:endParaRPr lang="en-US"/>
           </a:p>
@@ -3358,7 +3603,7 @@
           <a:p>
             <a:fld id="{19EC6F6F-998C-264C-A700-8215E11AE5BD}" type="datetimeFigureOut">
               <a:rPr lang="en-US" smtClean="0"/>
-              <a:t>3/30/26</a:t>
+              <a:t>3/31/26</a:t>
             </a:fld>
             <a:endParaRPr lang="en-US"/>
           </a:p>
@@ -4056,6 +4301,119 @@
 </p:sld>
 </file>
 
+<file path=ppt/slides/slide10.xml><?xml version="1.0" encoding="utf-8"?>
+<p:sld xmlns:a="http://schemas.openxmlformats.org/drawingml/2006/main" xmlns:r="http://schemas.openxmlformats.org/officeDocument/2006/relationships" xmlns:p="http://schemas.openxmlformats.org/presentationml/2006/main">
+  <p:cSld>
+    <p:spTree>
+      <p:nvGrpSpPr>
+        <p:cNvPr id="1" name=""/>
+        <p:cNvGrpSpPr/>
+        <p:nvPr/>
+      </p:nvGrpSpPr>
+      <p:grpSpPr>
+        <a:xfrm>
+          <a:off x="0" y="0"/>
+          <a:ext cx="0" cy="0"/>
+          <a:chOff x="0" y="0"/>
+          <a:chExt cx="0" cy="0"/>
+        </a:xfrm>
+      </p:grpSpPr>
+      <p:sp>
+        <p:nvSpPr>
+          <p:cNvPr id="2" name="Title 1">
+            <a:extLst>
+              <a:ext uri="{FF2B5EF4-FFF2-40B4-BE49-F238E27FC236}">
+                <a16:creationId xmlns:a16="http://schemas.microsoft.com/office/drawing/2014/main" id="{8F4609B2-8DAD-0237-B6AF-7CC64EAB54FC}"/>
+              </a:ext>
+            </a:extLst>
+          </p:cNvPr>
+          <p:cNvSpPr>
+            <a:spLocks noGrp="1"/>
+          </p:cNvSpPr>
+          <p:nvPr>
+            <p:ph type="title"/>
+          </p:nvPr>
+        </p:nvSpPr>
+        <p:spPr/>
+        <p:txBody>
+          <a:bodyPr/>
+          <a:lstStyle/>
+          <a:p>
+            <a:r>
+              <a:rPr lang="en-US" dirty="0"/>
+              <a:t>Break out groups (~5min)</a:t>
+            </a:r>
+          </a:p>
+        </p:txBody>
+      </p:sp>
+      <p:sp>
+        <p:nvSpPr>
+          <p:cNvPr id="3" name="Content Placeholder 2">
+            <a:extLst>
+              <a:ext uri="{FF2B5EF4-FFF2-40B4-BE49-F238E27FC236}">
+                <a16:creationId xmlns:a16="http://schemas.microsoft.com/office/drawing/2014/main" id="{29D0A7A8-6062-EB24-E8E3-40035D8AB20C}"/>
+              </a:ext>
+            </a:extLst>
+          </p:cNvPr>
+          <p:cNvSpPr>
+            <a:spLocks noGrp="1"/>
+          </p:cNvSpPr>
+          <p:nvPr>
+            <p:ph idx="1"/>
+          </p:nvPr>
+        </p:nvSpPr>
+        <p:spPr/>
+        <p:txBody>
+          <a:bodyPr/>
+          <a:lstStyle/>
+          <a:p>
+            <a:pPr marL="0" indent="0">
+              <a:buNone/>
+            </a:pPr>
+            <a:r>
+              <a:rPr lang="en-US" dirty="0"/>
+              <a:t>Talk with folks at your table:</a:t>
+            </a:r>
+          </a:p>
+          <a:p>
+            <a:r>
+              <a:rPr lang="en-US" dirty="0"/>
+              <a:t>Names</a:t>
+            </a:r>
+          </a:p>
+          <a:p>
+            <a:r>
+              <a:rPr lang="en-US" dirty="0"/>
+              <a:t>What modeling mindset(s) you typically use in your work</a:t>
+            </a:r>
+          </a:p>
+          <a:p>
+            <a:r>
+              <a:rPr lang="en-US" dirty="0"/>
+              <a:t>What interests brought you to this workshop today</a:t>
+            </a:r>
+          </a:p>
+          <a:p>
+            <a:r>
+              <a:rPr lang="en-US" dirty="0"/>
+              <a:t>Favorite body of water (anywhere, any type)</a:t>
+            </a:r>
+          </a:p>
+        </p:txBody>
+      </p:sp>
+    </p:spTree>
+    <p:extLst>
+      <p:ext uri="{BB962C8B-B14F-4D97-AF65-F5344CB8AC3E}">
+        <p14:creationId xmlns:p14="http://schemas.microsoft.com/office/powerpoint/2010/main" val="3850885334"/>
+      </p:ext>
+    </p:extLst>
+  </p:cSld>
+  <p:clrMapOvr>
+    <a:masterClrMapping/>
+  </p:clrMapOvr>
+</p:sld>
+</file>
+
 <file path=ppt/slides/slide2.xml><?xml version="1.0" encoding="utf-8"?>
 <p:sld xmlns:a="http://schemas.openxmlformats.org/drawingml/2006/main" xmlns:r="http://schemas.openxmlformats.org/officeDocument/2006/relationships" xmlns:p="http://schemas.openxmlformats.org/presentationml/2006/main">
   <p:cSld>
@@ -4103,31 +4461,6 @@
       </p:sp>
       <p:sp>
         <p:nvSpPr>
-          <p:cNvPr id="3" name="Content Placeholder 2">
-            <a:extLst>
-              <a:ext uri="{FF2B5EF4-FFF2-40B4-BE49-F238E27FC236}">
-                <a16:creationId xmlns:a16="http://schemas.microsoft.com/office/drawing/2014/main" id="{6F1E4FAB-9E73-A0A6-58B4-1C0E65E13163}"/>
-              </a:ext>
-            </a:extLst>
-          </p:cNvPr>
-          <p:cNvSpPr>
-            <a:spLocks noGrp="1"/>
-          </p:cNvSpPr>
-          <p:nvPr>
-            <p:ph idx="1"/>
-          </p:nvPr>
-        </p:nvSpPr>
-        <p:spPr/>
-        <p:txBody>
-          <a:bodyPr/>
-          <a:lstStyle/>
-          <a:p>
-            <a:endParaRPr lang="en-US"/>
-          </a:p>
-        </p:txBody>
-      </p:sp>
-      <p:sp>
-        <p:nvSpPr>
           <p:cNvPr id="5" name="TextBox 4">
             <a:extLst>
               <a:ext uri="{FF2B5EF4-FFF2-40B4-BE49-F238E27FC236}">
@@ -4164,6 +4497,36 @@
           </a:p>
         </p:txBody>
       </p:sp>
+      <p:pic>
+        <p:nvPicPr>
+          <p:cNvPr id="4" name="Picture 3">
+            <a:extLst>
+              <a:ext uri="{FF2B5EF4-FFF2-40B4-BE49-F238E27FC236}">
+                <a16:creationId xmlns:a16="http://schemas.microsoft.com/office/drawing/2014/main" id="{0ABBDEE9-B16A-2223-F62F-97D22547101D}"/>
+              </a:ext>
+            </a:extLst>
+          </p:cNvPr>
+          <p:cNvPicPr>
+            <a:picLocks noChangeAspect="1"/>
+          </p:cNvPicPr>
+          <p:nvPr/>
+        </p:nvPicPr>
+        <p:blipFill>
+          <a:blip r:embed="rId4"/>
+          <a:stretch>
+            <a:fillRect/>
+          </a:stretch>
+        </p:blipFill>
+        <p:spPr>
+          <a:xfrm>
+            <a:off x="2209800" y="1806291"/>
+            <a:ext cx="7772400" cy="4326071"/>
+          </a:xfrm>
+          <a:prstGeom prst="rect">
+            <a:avLst/>
+          </a:prstGeom>
+        </p:spPr>
+      </p:pic>
     </p:spTree>
     <p:extLst>
       <p:ext uri="{BB962C8B-B14F-4D97-AF65-F5344CB8AC3E}">
@@ -4182,7 +4545,13 @@
   <p:cSld>
     <p:spTree>
       <p:nvGrpSpPr>
-        <p:cNvPr id="1" name=""/>
+        <p:cNvPr id="1" name="">
+          <a:extLst>
+            <a:ext uri="{FF2B5EF4-FFF2-40B4-BE49-F238E27FC236}">
+              <a16:creationId xmlns:a16="http://schemas.microsoft.com/office/drawing/2014/main" id="{CA8E8A63-C13B-DD5A-494A-6824A88D347C}"/>
+            </a:ext>
+          </a:extLst>
+        </p:cNvPr>
         <p:cNvGrpSpPr/>
         <p:nvPr/>
       </p:nvGrpSpPr>
@@ -4199,7 +4568,7 @@
           <p:cNvPr id="2" name="Title 1">
             <a:extLst>
               <a:ext uri="{FF2B5EF4-FFF2-40B4-BE49-F238E27FC236}">
-                <a16:creationId xmlns:a16="http://schemas.microsoft.com/office/drawing/2014/main" id="{D3F06ABF-D6E3-1ED0-B803-50EFB5941D72}"/>
+                <a16:creationId xmlns:a16="http://schemas.microsoft.com/office/drawing/2014/main" id="{B2D0C150-6EFF-9243-ACB9-95EAABFEE49D}"/>
               </a:ext>
             </a:extLst>
           </p:cNvPr>
@@ -4217,40 +4586,181 @@
           <a:p>
             <a:r>
               <a:rPr lang="en-US" dirty="0"/>
-              <a:t>Machine learning – focused on prediction</a:t>
-            </a:r>
-          </a:p>
-        </p:txBody>
-      </p:sp>
-      <p:sp>
-        <p:nvSpPr>
-          <p:cNvPr id="3" name="Content Placeholder 2">
-            <a:extLst>
-              <a:ext uri="{FF2B5EF4-FFF2-40B4-BE49-F238E27FC236}">
-                <a16:creationId xmlns:a16="http://schemas.microsoft.com/office/drawing/2014/main" id="{4BF9CCD4-3651-5E47-93EC-79A46D8D7BD7}"/>
-              </a:ext>
-            </a:extLst>
-          </p:cNvPr>
-          <p:cNvSpPr>
-            <a:spLocks noGrp="1"/>
-          </p:cNvSpPr>
-          <p:nvPr>
-            <p:ph idx="1"/>
-          </p:nvPr>
-        </p:nvSpPr>
-        <p:spPr/>
-        <p:txBody>
-          <a:bodyPr/>
-          <a:lstStyle/>
-          <a:p>
-            <a:endParaRPr lang="en-US"/>
+              <a:t>Modeling mindsets:</a:t>
+            </a:r>
+          </a:p>
+        </p:txBody>
+      </p:sp>
+      <p:sp>
+        <p:nvSpPr>
+          <p:cNvPr id="5" name="TextBox 4">
+            <a:extLst>
+              <a:ext uri="{FF2B5EF4-FFF2-40B4-BE49-F238E27FC236}">
+                <a16:creationId xmlns:a16="http://schemas.microsoft.com/office/drawing/2014/main" id="{BEBAE4EA-CF84-8D15-A012-827FA43EBAE9}"/>
+              </a:ext>
+            </a:extLst>
+          </p:cNvPr>
+          <p:cNvSpPr txBox="1"/>
+          <p:nvPr/>
+        </p:nvSpPr>
+        <p:spPr>
+          <a:xfrm>
+            <a:off x="4537276" y="6488668"/>
+            <a:ext cx="8191983" cy="369332"/>
+          </a:xfrm>
+          <a:prstGeom prst="rect">
+            <a:avLst/>
+          </a:prstGeom>
+          <a:noFill/>
+        </p:spPr>
+        <p:txBody>
+          <a:bodyPr wrap="square">
+            <a:spAutoFit/>
+          </a:bodyPr>
+          <a:lstStyle/>
+          <a:p>
+            <a:r>
+              <a:rPr lang="en-US" dirty="0">
+                <a:hlinkClick r:id="rId3"/>
+              </a:rPr>
+              <a:t>Molnar, C. 2023. Modeling mindsets: the many cultures of learning from data.</a:t>
+            </a:r>
+            <a:endParaRPr lang="en-US" dirty="0"/>
+          </a:p>
+        </p:txBody>
+      </p:sp>
+      <p:pic>
+        <p:nvPicPr>
+          <p:cNvPr id="4" name="Picture 3">
+            <a:extLst>
+              <a:ext uri="{FF2B5EF4-FFF2-40B4-BE49-F238E27FC236}">
+                <a16:creationId xmlns:a16="http://schemas.microsoft.com/office/drawing/2014/main" id="{842C5C56-775E-EEF7-CB65-D043B00C9B5E}"/>
+              </a:ext>
+            </a:extLst>
+          </p:cNvPr>
+          <p:cNvPicPr>
+            <a:picLocks noChangeAspect="1"/>
+          </p:cNvPicPr>
+          <p:nvPr/>
+        </p:nvPicPr>
+        <p:blipFill>
+          <a:blip r:embed="rId4"/>
+          <a:stretch>
+            <a:fillRect/>
+          </a:stretch>
+        </p:blipFill>
+        <p:spPr>
+          <a:xfrm>
+            <a:off x="2209800" y="1806291"/>
+            <a:ext cx="7772400" cy="4326071"/>
+          </a:xfrm>
+          <a:prstGeom prst="rect">
+            <a:avLst/>
+          </a:prstGeom>
+        </p:spPr>
+      </p:pic>
+      <p:sp>
+        <p:nvSpPr>
+          <p:cNvPr id="7" name="TextBox 6">
+            <a:extLst>
+              <a:ext uri="{FF2B5EF4-FFF2-40B4-BE49-F238E27FC236}">
+                <a16:creationId xmlns:a16="http://schemas.microsoft.com/office/drawing/2014/main" id="{F8E62159-9C2F-27F9-3386-557A8560833C}"/>
+              </a:ext>
+            </a:extLst>
+          </p:cNvPr>
+          <p:cNvSpPr txBox="1"/>
+          <p:nvPr/>
+        </p:nvSpPr>
+        <p:spPr>
+          <a:xfrm>
+            <a:off x="260933" y="1690688"/>
+            <a:ext cx="3897734" cy="646331"/>
+          </a:xfrm>
+          <a:prstGeom prst="rect">
+            <a:avLst/>
+          </a:prstGeom>
+          <a:noFill/>
+        </p:spPr>
+        <p:txBody>
+          <a:bodyPr wrap="none" rtlCol="0">
+            <a:spAutoFit/>
+          </a:bodyPr>
+          <a:lstStyle/>
+          <a:p>
+            <a:r>
+              <a:rPr lang="en-US" dirty="0">
+                <a:solidFill>
+                  <a:schemeClr val="accent2"/>
+                </a:solidFill>
+              </a:rPr>
+              <a:t>Everything is a probability distribution</a:t>
+            </a:r>
+          </a:p>
+          <a:p>
+            <a:r>
+              <a:rPr lang="en-US" dirty="0">
+                <a:solidFill>
+                  <a:schemeClr val="accent2"/>
+                </a:solidFill>
+              </a:rPr>
+              <a:t>Models = hypotheses</a:t>
+            </a:r>
+          </a:p>
+        </p:txBody>
+      </p:sp>
+      <p:sp>
+        <p:nvSpPr>
+          <p:cNvPr id="8" name="TextBox 7">
+            <a:extLst>
+              <a:ext uri="{FF2B5EF4-FFF2-40B4-BE49-F238E27FC236}">
+                <a16:creationId xmlns:a16="http://schemas.microsoft.com/office/drawing/2014/main" id="{6938CC4B-4A98-2DAA-33B5-974641709A35}"/>
+              </a:ext>
+            </a:extLst>
+          </p:cNvPr>
+          <p:cNvSpPr txBox="1"/>
+          <p:nvPr/>
+        </p:nvSpPr>
+        <p:spPr>
+          <a:xfrm>
+            <a:off x="7990468" y="1314843"/>
+            <a:ext cx="3787832" cy="646331"/>
+          </a:xfrm>
+          <a:prstGeom prst="rect">
+            <a:avLst/>
+          </a:prstGeom>
+          <a:noFill/>
+        </p:spPr>
+        <p:txBody>
+          <a:bodyPr wrap="none" rtlCol="0">
+            <a:spAutoFit/>
+          </a:bodyPr>
+          <a:lstStyle/>
+          <a:p>
+            <a:r>
+              <a:rPr lang="en-US" dirty="0">
+                <a:solidFill>
+                  <a:schemeClr val="accent2"/>
+                </a:solidFill>
+              </a:rPr>
+              <a:t>Models = algorithms that solve tasks</a:t>
+            </a:r>
+          </a:p>
+          <a:p>
+            <a:r>
+              <a:rPr lang="en-US" dirty="0">
+                <a:solidFill>
+                  <a:schemeClr val="accent2"/>
+                </a:solidFill>
+              </a:rPr>
+              <a:t>Prediction-focused</a:t>
+            </a:r>
           </a:p>
         </p:txBody>
       </p:sp>
     </p:spTree>
     <p:extLst>
       <p:ext uri="{BB962C8B-B14F-4D97-AF65-F5344CB8AC3E}">
-        <p14:creationId xmlns:p14="http://schemas.microsoft.com/office/powerpoint/2010/main" val="3618598819"/>
+        <p14:creationId xmlns:p14="http://schemas.microsoft.com/office/powerpoint/2010/main" val="4070516429"/>
       </p:ext>
     </p:extLst>
   </p:cSld>
@@ -4265,7 +4775,13 @@
   <p:cSld>
     <p:spTree>
       <p:nvGrpSpPr>
-        <p:cNvPr id="1" name=""/>
+        <p:cNvPr id="1" name="">
+          <a:extLst>
+            <a:ext uri="{FF2B5EF4-FFF2-40B4-BE49-F238E27FC236}">
+              <a16:creationId xmlns:a16="http://schemas.microsoft.com/office/drawing/2014/main" id="{35C5AACF-183C-4CE6-7C9C-CC4AD7841DCD}"/>
+            </a:ext>
+          </a:extLst>
+        </p:cNvPr>
         <p:cNvGrpSpPr/>
         <p:nvPr/>
       </p:nvGrpSpPr>
@@ -4282,7 +4798,7 @@
           <p:cNvPr id="2" name="Title 1">
             <a:extLst>
               <a:ext uri="{FF2B5EF4-FFF2-40B4-BE49-F238E27FC236}">
-                <a16:creationId xmlns:a16="http://schemas.microsoft.com/office/drawing/2014/main" id="{12EAFA29-EE37-3E25-4512-716D446C9A08}"/>
+                <a16:creationId xmlns:a16="http://schemas.microsoft.com/office/drawing/2014/main" id="{23D67ECA-8789-A647-2D9B-2A521FBC218C}"/>
               </a:ext>
             </a:extLst>
           </p:cNvPr>
@@ -4300,43 +4816,238 @@
           <a:p>
             <a:r>
               <a:rPr lang="en-US" dirty="0"/>
-              <a:t>In science, we often have multiple aims</a:t>
-            </a:r>
-          </a:p>
-        </p:txBody>
-      </p:sp>
-      <p:sp>
-        <p:nvSpPr>
-          <p:cNvPr id="3" name="Content Placeholder 2">
-            <a:extLst>
-              <a:ext uri="{FF2B5EF4-FFF2-40B4-BE49-F238E27FC236}">
-                <a16:creationId xmlns:a16="http://schemas.microsoft.com/office/drawing/2014/main" id="{1C8C50EC-2B77-57DB-6553-55037FAA5831}"/>
-              </a:ext>
-            </a:extLst>
-          </p:cNvPr>
-          <p:cNvSpPr>
-            <a:spLocks noGrp="1"/>
-          </p:cNvSpPr>
-          <p:nvPr>
-            <p:ph idx="1"/>
-          </p:nvPr>
-        </p:nvSpPr>
-        <p:spPr/>
-        <p:txBody>
-          <a:bodyPr/>
-          <a:lstStyle/>
-          <a:p>
-            <a:r>
-              <a:rPr lang="en-US" dirty="0"/>
-              <a:t>INSERT how the mindsets overlap, especially how ML isn’t just prediction (anymore)</a:t>
-            </a:r>
+              <a:t>Modeling mindsets:</a:t>
+            </a:r>
+          </a:p>
+        </p:txBody>
+      </p:sp>
+      <p:sp>
+        <p:nvSpPr>
+          <p:cNvPr id="5" name="TextBox 4">
+            <a:extLst>
+              <a:ext uri="{FF2B5EF4-FFF2-40B4-BE49-F238E27FC236}">
+                <a16:creationId xmlns:a16="http://schemas.microsoft.com/office/drawing/2014/main" id="{1780C0F4-C8CA-C965-A598-993797958E6A}"/>
+              </a:ext>
+            </a:extLst>
+          </p:cNvPr>
+          <p:cNvSpPr txBox="1"/>
+          <p:nvPr/>
+        </p:nvSpPr>
+        <p:spPr>
+          <a:xfrm>
+            <a:off x="4537276" y="6488668"/>
+            <a:ext cx="8191983" cy="369332"/>
+          </a:xfrm>
+          <a:prstGeom prst="rect">
+            <a:avLst/>
+          </a:prstGeom>
+          <a:noFill/>
+        </p:spPr>
+        <p:txBody>
+          <a:bodyPr wrap="square">
+            <a:spAutoFit/>
+          </a:bodyPr>
+          <a:lstStyle/>
+          <a:p>
+            <a:r>
+              <a:rPr lang="en-US" dirty="0">
+                <a:hlinkClick r:id="rId3"/>
+              </a:rPr>
+              <a:t>Molnar, C. 2023. Modeling mindsets: the many cultures of learning from data.</a:t>
+            </a:r>
+            <a:endParaRPr lang="en-US" dirty="0"/>
+          </a:p>
+        </p:txBody>
+      </p:sp>
+      <p:pic>
+        <p:nvPicPr>
+          <p:cNvPr id="4" name="Picture 3">
+            <a:extLst>
+              <a:ext uri="{FF2B5EF4-FFF2-40B4-BE49-F238E27FC236}">
+                <a16:creationId xmlns:a16="http://schemas.microsoft.com/office/drawing/2014/main" id="{08C6B90A-F609-9895-9F14-FBB0004B007E}"/>
+              </a:ext>
+            </a:extLst>
+          </p:cNvPr>
+          <p:cNvPicPr>
+            <a:picLocks noChangeAspect="1"/>
+          </p:cNvPicPr>
+          <p:nvPr/>
+        </p:nvPicPr>
+        <p:blipFill>
+          <a:blip r:embed="rId4"/>
+          <a:stretch>
+            <a:fillRect/>
+          </a:stretch>
+        </p:blipFill>
+        <p:spPr>
+          <a:xfrm>
+            <a:off x="2209800" y="1806291"/>
+            <a:ext cx="7772400" cy="4326071"/>
+          </a:xfrm>
+          <a:prstGeom prst="rect">
+            <a:avLst/>
+          </a:prstGeom>
+        </p:spPr>
+      </p:pic>
+      <p:sp>
+        <p:nvSpPr>
+          <p:cNvPr id="7" name="TextBox 6">
+            <a:extLst>
+              <a:ext uri="{FF2B5EF4-FFF2-40B4-BE49-F238E27FC236}">
+                <a16:creationId xmlns:a16="http://schemas.microsoft.com/office/drawing/2014/main" id="{1631F4C1-10A5-2ED7-FF28-F9C2637215CE}"/>
+              </a:ext>
+            </a:extLst>
+          </p:cNvPr>
+          <p:cNvSpPr txBox="1"/>
+          <p:nvPr/>
+        </p:nvSpPr>
+        <p:spPr>
+          <a:xfrm>
+            <a:off x="260933" y="1690688"/>
+            <a:ext cx="3897734" cy="646331"/>
+          </a:xfrm>
+          <a:prstGeom prst="rect">
+            <a:avLst/>
+          </a:prstGeom>
+          <a:noFill/>
+        </p:spPr>
+        <p:txBody>
+          <a:bodyPr wrap="none" rtlCol="0">
+            <a:spAutoFit/>
+          </a:bodyPr>
+          <a:lstStyle/>
+          <a:p>
+            <a:r>
+              <a:rPr lang="en-US" dirty="0">
+                <a:solidFill>
+                  <a:schemeClr val="accent2"/>
+                </a:solidFill>
+              </a:rPr>
+              <a:t>Everything is a probability distribution</a:t>
+            </a:r>
+          </a:p>
+          <a:p>
+            <a:r>
+              <a:rPr lang="en-US" dirty="0">
+                <a:solidFill>
+                  <a:schemeClr val="accent2"/>
+                </a:solidFill>
+              </a:rPr>
+              <a:t>Models = hypotheses</a:t>
+            </a:r>
+          </a:p>
+        </p:txBody>
+      </p:sp>
+      <p:sp>
+        <p:nvSpPr>
+          <p:cNvPr id="8" name="TextBox 7">
+            <a:extLst>
+              <a:ext uri="{FF2B5EF4-FFF2-40B4-BE49-F238E27FC236}">
+                <a16:creationId xmlns:a16="http://schemas.microsoft.com/office/drawing/2014/main" id="{D99F50EB-19FD-33C3-848A-2D1B9B2C4576}"/>
+              </a:ext>
+            </a:extLst>
+          </p:cNvPr>
+          <p:cNvSpPr txBox="1"/>
+          <p:nvPr/>
+        </p:nvSpPr>
+        <p:spPr>
+          <a:xfrm>
+            <a:off x="7990468" y="1314843"/>
+            <a:ext cx="3787832" cy="646331"/>
+          </a:xfrm>
+          <a:prstGeom prst="rect">
+            <a:avLst/>
+          </a:prstGeom>
+          <a:noFill/>
+        </p:spPr>
+        <p:txBody>
+          <a:bodyPr wrap="none" rtlCol="0">
+            <a:spAutoFit/>
+          </a:bodyPr>
+          <a:lstStyle/>
+          <a:p>
+            <a:r>
+              <a:rPr lang="en-US" dirty="0">
+                <a:solidFill>
+                  <a:schemeClr val="accent2"/>
+                </a:solidFill>
+              </a:rPr>
+              <a:t>Models = algorithms that solve tasks</a:t>
+            </a:r>
+          </a:p>
+          <a:p>
+            <a:r>
+              <a:rPr lang="en-US" dirty="0">
+                <a:solidFill>
+                  <a:schemeClr val="accent2"/>
+                </a:solidFill>
+              </a:rPr>
+              <a:t>Prediction-focused</a:t>
+            </a:r>
+          </a:p>
+        </p:txBody>
+      </p:sp>
+      <p:sp>
+        <p:nvSpPr>
+          <p:cNvPr id="3" name="L-Shape 2">
+            <a:extLst>
+              <a:ext uri="{FF2B5EF4-FFF2-40B4-BE49-F238E27FC236}">
+                <a16:creationId xmlns:a16="http://schemas.microsoft.com/office/drawing/2014/main" id="{E4CACA2F-C7C4-9B88-0F05-61329F8C8FDA}"/>
+              </a:ext>
+            </a:extLst>
+          </p:cNvPr>
+          <p:cNvSpPr/>
+          <p:nvPr/>
+        </p:nvSpPr>
+        <p:spPr>
+          <a:xfrm rot="16200000">
+            <a:off x="6776567" y="2297985"/>
+            <a:ext cx="2714124" cy="3697147"/>
+          </a:xfrm>
+          <a:prstGeom prst="corner">
+            <a:avLst>
+              <a:gd name="adj1" fmla="val 73167"/>
+              <a:gd name="adj2" fmla="val 54564"/>
+            </a:avLst>
+          </a:prstGeom>
+          <a:solidFill>
+            <a:srgbClr val="FFFFFF">
+              <a:alpha val="80000"/>
+            </a:srgbClr>
+          </a:solidFill>
+          <a:ln>
+            <a:noFill/>
+          </a:ln>
+        </p:spPr>
+        <p:style>
+          <a:lnRef idx="2">
+            <a:schemeClr val="accent1">
+              <a:shade val="15000"/>
+            </a:schemeClr>
+          </a:lnRef>
+          <a:fillRef idx="1">
+            <a:schemeClr val="accent1"/>
+          </a:fillRef>
+          <a:effectRef idx="0">
+            <a:schemeClr val="accent1"/>
+          </a:effectRef>
+          <a:fontRef idx="minor">
+            <a:schemeClr val="lt1"/>
+          </a:fontRef>
+        </p:style>
+        <p:txBody>
+          <a:bodyPr rtlCol="0" anchor="ctr"/>
+          <a:lstStyle/>
+          <a:p>
+            <a:pPr algn="ctr"/>
+            <a:endParaRPr lang="en-US"/>
           </a:p>
         </p:txBody>
       </p:sp>
     </p:spTree>
     <p:extLst>
       <p:ext uri="{BB962C8B-B14F-4D97-AF65-F5344CB8AC3E}">
-        <p14:creationId xmlns:p14="http://schemas.microsoft.com/office/powerpoint/2010/main" val="1836443162"/>
+        <p14:creationId xmlns:p14="http://schemas.microsoft.com/office/powerpoint/2010/main" val="537992282"/>
       </p:ext>
     </p:extLst>
   </p:cSld>
@@ -4368,7 +5079,7 @@
           <p:cNvPr id="2" name="Title 1">
             <a:extLst>
               <a:ext uri="{FF2B5EF4-FFF2-40B4-BE49-F238E27FC236}">
-                <a16:creationId xmlns:a16="http://schemas.microsoft.com/office/drawing/2014/main" id="{C9B32982-8ECF-843F-BE49-2E046B46EC43}"/>
+                <a16:creationId xmlns:a16="http://schemas.microsoft.com/office/drawing/2014/main" id="{39A625AB-F6E4-98FC-D933-D387F1C7A211}"/>
               </a:ext>
             </a:extLst>
           </p:cNvPr>
@@ -4386,7 +5097,7 @@
           <a:p>
             <a:r>
               <a:rPr lang="en-US" dirty="0"/>
-              <a:t>Why prediction matters for science, and especially environmental science</a:t>
+              <a:t>The same “model” can fit into multiple mindsets</a:t>
             </a:r>
           </a:p>
         </p:txBody>
@@ -4396,7 +5107,7 @@
           <p:cNvPr id="3" name="Content Placeholder 2">
             <a:extLst>
               <a:ext uri="{FF2B5EF4-FFF2-40B4-BE49-F238E27FC236}">
-                <a16:creationId xmlns:a16="http://schemas.microsoft.com/office/drawing/2014/main" id="{EFC01B0B-71D1-BCA4-5138-21A233C4CFFA}"/>
+                <a16:creationId xmlns:a16="http://schemas.microsoft.com/office/drawing/2014/main" id="{8B1AFB84-49E9-1766-E894-C057538D6BC6}"/>
               </a:ext>
             </a:extLst>
           </p:cNvPr>
@@ -4407,19 +5118,77 @@
             <p:ph idx="1"/>
           </p:nvPr>
         </p:nvSpPr>
-        <p:spPr/>
-        <p:txBody>
-          <a:bodyPr/>
-          <a:lstStyle/>
-          <a:p>
-            <a:endParaRPr lang="en-US"/>
-          </a:p>
-        </p:txBody>
-      </p:sp>
+        <p:spPr>
+          <a:xfrm>
+            <a:off x="838200" y="1825625"/>
+            <a:ext cx="5539451" cy="4351338"/>
+          </a:xfrm>
+        </p:spPr>
+        <p:txBody>
+          <a:bodyPr>
+            <a:normAutofit lnSpcReduction="10000"/>
+          </a:bodyPr>
+          <a:lstStyle/>
+          <a:p>
+            <a:r>
+              <a:rPr lang="en-US" dirty="0"/>
+              <a:t>A frequentist can use a linear regression to test a hypothesis</a:t>
+            </a:r>
+          </a:p>
+          <a:p>
+            <a:endParaRPr lang="en-US" dirty="0"/>
+          </a:p>
+          <a:p>
+            <a:r>
+              <a:rPr lang="en-US" dirty="0"/>
+              <a:t>A Bayesian can measure the posterior distribution of a linear coefficient</a:t>
+            </a:r>
+          </a:p>
+          <a:p>
+            <a:endParaRPr lang="en-US" dirty="0"/>
+          </a:p>
+          <a:p>
+            <a:r>
+              <a:rPr lang="en-US" dirty="0"/>
+              <a:t>A machine learner can use a linear regression to predict unobserved data</a:t>
+            </a:r>
+          </a:p>
+        </p:txBody>
+      </p:sp>
+      <p:pic>
+        <p:nvPicPr>
+          <p:cNvPr id="4" name="Picture 3">
+            <a:extLst>
+              <a:ext uri="{FF2B5EF4-FFF2-40B4-BE49-F238E27FC236}">
+                <a16:creationId xmlns:a16="http://schemas.microsoft.com/office/drawing/2014/main" id="{E871CE6A-172E-F53A-D1BB-B794941166C8}"/>
+              </a:ext>
+            </a:extLst>
+          </p:cNvPr>
+          <p:cNvPicPr>
+            <a:picLocks noChangeAspect="1"/>
+          </p:cNvPicPr>
+          <p:nvPr/>
+        </p:nvPicPr>
+        <p:blipFill>
+          <a:blip r:embed="rId2"/>
+          <a:stretch>
+            <a:fillRect/>
+          </a:stretch>
+        </p:blipFill>
+        <p:spPr>
+          <a:xfrm>
+            <a:off x="6866082" y="1825625"/>
+            <a:ext cx="3835400" cy="3721100"/>
+          </a:xfrm>
+          <a:prstGeom prst="rect">
+            <a:avLst/>
+          </a:prstGeom>
+        </p:spPr>
+      </p:pic>
     </p:spTree>
     <p:extLst>
       <p:ext uri="{BB962C8B-B14F-4D97-AF65-F5344CB8AC3E}">
-        <p14:creationId xmlns:p14="http://schemas.microsoft.com/office/powerpoint/2010/main" val="2164193552"/>
+        <p14:creationId xmlns:p14="http://schemas.microsoft.com/office/powerpoint/2010/main" val="3411858404"/>
       </p:ext>
     </p:extLst>
   </p:cSld>
@@ -4451,7 +5220,7 @@
           <p:cNvPr id="2" name="Title 1">
             <a:extLst>
               <a:ext uri="{FF2B5EF4-FFF2-40B4-BE49-F238E27FC236}">
-                <a16:creationId xmlns:a16="http://schemas.microsoft.com/office/drawing/2014/main" id="{2ED9C620-C9E2-7961-B5F8-4FE45A9746AC}"/>
+                <a16:creationId xmlns:a16="http://schemas.microsoft.com/office/drawing/2014/main" id="{12EAFA29-EE37-3E25-4512-716D446C9A08}"/>
               </a:ext>
             </a:extLst>
           </p:cNvPr>
@@ -4469,11 +5238,7 @@
           <a:p>
             <a:r>
               <a:rPr lang="en-US" dirty="0"/>
-              <a:t>Here, we’ll focus on </a:t>
-            </a:r>
-            <a:r>
-              <a:rPr lang="en-US" b="1" dirty="0"/>
-              <a:t>supervised machine learning</a:t>
+              <a:t>In science, we often have multiple aims</a:t>
             </a:r>
           </a:p>
         </p:txBody>
@@ -4483,7 +5248,7 @@
           <p:cNvPr id="3" name="Content Placeholder 2">
             <a:extLst>
               <a:ext uri="{FF2B5EF4-FFF2-40B4-BE49-F238E27FC236}">
-                <a16:creationId xmlns:a16="http://schemas.microsoft.com/office/drawing/2014/main" id="{2CE455A1-1296-7EDE-EF6F-761FAC88DD18}"/>
+                <a16:creationId xmlns:a16="http://schemas.microsoft.com/office/drawing/2014/main" id="{1C8C50EC-2B77-57DB-6553-55037FAA5831}"/>
               </a:ext>
             </a:extLst>
           </p:cNvPr>
@@ -4501,13 +5266,7 @@
           <a:p>
             <a:r>
               <a:rPr lang="en-US" dirty="0"/>
-              <a:t>Point to other techniques and their uses</a:t>
-            </a:r>
-          </a:p>
-          <a:p>
-            <a:r>
-              <a:rPr lang="en-US" dirty="0"/>
-              <a:t>Highlight supervised ML methods and their advantages</a:t>
+              <a:t>INSERT how the mindsets overlap, especially how ML isn’t just prediction (anymore)</a:t>
             </a:r>
           </a:p>
         </p:txBody>
@@ -4515,7 +5274,7 @@
     </p:spTree>
     <p:extLst>
       <p:ext uri="{BB962C8B-B14F-4D97-AF65-F5344CB8AC3E}">
-        <p14:creationId xmlns:p14="http://schemas.microsoft.com/office/powerpoint/2010/main" val="1190854385"/>
+        <p14:creationId xmlns:p14="http://schemas.microsoft.com/office/powerpoint/2010/main" val="1836443162"/>
       </p:ext>
     </p:extLst>
   </p:cSld>
@@ -4547,7 +5306,7 @@
           <p:cNvPr id="2" name="Title 1">
             <a:extLst>
               <a:ext uri="{FF2B5EF4-FFF2-40B4-BE49-F238E27FC236}">
-                <a16:creationId xmlns:a16="http://schemas.microsoft.com/office/drawing/2014/main" id="{153415BC-5788-8EC6-12AC-481C31DFB6A3}"/>
+                <a16:creationId xmlns:a16="http://schemas.microsoft.com/office/drawing/2014/main" id="{C9B32982-8ECF-843F-BE49-2E046B46EC43}"/>
               </a:ext>
             </a:extLst>
           </p:cNvPr>
@@ -4565,7 +5324,7 @@
           <a:p>
             <a:r>
               <a:rPr lang="en-US" dirty="0"/>
-              <a:t>Overview of the day</a:t>
+              <a:t>Why prediction matters for science, and especially environmental science</a:t>
             </a:r>
           </a:p>
         </p:txBody>
@@ -4575,7 +5334,7 @@
           <p:cNvPr id="3" name="Content Placeholder 2">
             <a:extLst>
               <a:ext uri="{FF2B5EF4-FFF2-40B4-BE49-F238E27FC236}">
-                <a16:creationId xmlns:a16="http://schemas.microsoft.com/office/drawing/2014/main" id="{907FD6AA-9804-3A4F-934C-265DF31BAADB}"/>
+                <a16:creationId xmlns:a16="http://schemas.microsoft.com/office/drawing/2014/main" id="{EFC01B0B-71D1-BCA4-5138-21A233C4CFFA}"/>
               </a:ext>
             </a:extLst>
           </p:cNvPr>
@@ -4598,7 +5357,7 @@
     </p:spTree>
     <p:extLst>
       <p:ext uri="{BB962C8B-B14F-4D97-AF65-F5344CB8AC3E}">
-        <p14:creationId xmlns:p14="http://schemas.microsoft.com/office/powerpoint/2010/main" val="2376821870"/>
+        <p14:creationId xmlns:p14="http://schemas.microsoft.com/office/powerpoint/2010/main" val="2164193552"/>
       </p:ext>
     </p:extLst>
   </p:cSld>
@@ -4630,7 +5389,7 @@
           <p:cNvPr id="2" name="Title 1">
             <a:extLst>
               <a:ext uri="{FF2B5EF4-FFF2-40B4-BE49-F238E27FC236}">
-                <a16:creationId xmlns:a16="http://schemas.microsoft.com/office/drawing/2014/main" id="{8F4609B2-8DAD-0237-B6AF-7CC64EAB54FC}"/>
+                <a16:creationId xmlns:a16="http://schemas.microsoft.com/office/drawing/2014/main" id="{2ED9C620-C9E2-7961-B5F8-4FE45A9746AC}"/>
               </a:ext>
             </a:extLst>
           </p:cNvPr>
@@ -4648,7 +5407,11 @@
           <a:p>
             <a:r>
               <a:rPr lang="en-US" dirty="0"/>
-              <a:t>Break out groups (~5min)</a:t>
+              <a:t>Here, we’ll focus on </a:t>
+            </a:r>
+            <a:r>
+              <a:rPr lang="en-US" b="1" dirty="0"/>
+              <a:t>supervised machine learning</a:t>
             </a:r>
           </a:p>
         </p:txBody>
@@ -4658,7 +5421,7 @@
           <p:cNvPr id="3" name="Content Placeholder 2">
             <a:extLst>
               <a:ext uri="{FF2B5EF4-FFF2-40B4-BE49-F238E27FC236}">
-                <a16:creationId xmlns:a16="http://schemas.microsoft.com/office/drawing/2014/main" id="{29D0A7A8-6062-EB24-E8E3-40035D8AB20C}"/>
+                <a16:creationId xmlns:a16="http://schemas.microsoft.com/office/drawing/2014/main" id="{2CE455A1-1296-7EDE-EF6F-761FAC88DD18}"/>
               </a:ext>
             </a:extLst>
           </p:cNvPr>
@@ -4674,36 +5437,15 @@
           <a:bodyPr/>
           <a:lstStyle/>
           <a:p>
-            <a:pPr marL="0" indent="0">
-              <a:buNone/>
-            </a:pPr>
             <a:r>
               <a:rPr lang="en-US" dirty="0"/>
-              <a:t>Talk with folks at your table:</a:t>
+              <a:t>Point to other techniques and their uses</a:t>
             </a:r>
           </a:p>
           <a:p>
             <a:r>
               <a:rPr lang="en-US" dirty="0"/>
-              <a:t>Names</a:t>
-            </a:r>
-          </a:p>
-          <a:p>
-            <a:r>
-              <a:rPr lang="en-US" dirty="0"/>
-              <a:t>What modeling mindset(s) you typically use in your work</a:t>
-            </a:r>
-          </a:p>
-          <a:p>
-            <a:r>
-              <a:rPr lang="en-US" dirty="0"/>
-              <a:t>What interests brought you to this workshop today</a:t>
-            </a:r>
-          </a:p>
-          <a:p>
-            <a:r>
-              <a:rPr lang="en-US" dirty="0"/>
-              <a:t>Favorite body of water (anywhere, any type)</a:t>
+              <a:t>Highlight supervised ML methods and their advantages</a:t>
             </a:r>
           </a:p>
         </p:txBody>
@@ -4711,7 +5453,90 @@
     </p:spTree>
     <p:extLst>
       <p:ext uri="{BB962C8B-B14F-4D97-AF65-F5344CB8AC3E}">
-        <p14:creationId xmlns:p14="http://schemas.microsoft.com/office/powerpoint/2010/main" val="3850885334"/>
+        <p14:creationId xmlns:p14="http://schemas.microsoft.com/office/powerpoint/2010/main" val="1190854385"/>
+      </p:ext>
+    </p:extLst>
+  </p:cSld>
+  <p:clrMapOvr>
+    <a:masterClrMapping/>
+  </p:clrMapOvr>
+</p:sld>
+</file>
+
+<file path=ppt/slides/slide9.xml><?xml version="1.0" encoding="utf-8"?>
+<p:sld xmlns:a="http://schemas.openxmlformats.org/drawingml/2006/main" xmlns:r="http://schemas.openxmlformats.org/officeDocument/2006/relationships" xmlns:p="http://schemas.openxmlformats.org/presentationml/2006/main">
+  <p:cSld>
+    <p:spTree>
+      <p:nvGrpSpPr>
+        <p:cNvPr id="1" name=""/>
+        <p:cNvGrpSpPr/>
+        <p:nvPr/>
+      </p:nvGrpSpPr>
+      <p:grpSpPr>
+        <a:xfrm>
+          <a:off x="0" y="0"/>
+          <a:ext cx="0" cy="0"/>
+          <a:chOff x="0" y="0"/>
+          <a:chExt cx="0" cy="0"/>
+        </a:xfrm>
+      </p:grpSpPr>
+      <p:sp>
+        <p:nvSpPr>
+          <p:cNvPr id="2" name="Title 1">
+            <a:extLst>
+              <a:ext uri="{FF2B5EF4-FFF2-40B4-BE49-F238E27FC236}">
+                <a16:creationId xmlns:a16="http://schemas.microsoft.com/office/drawing/2014/main" id="{153415BC-5788-8EC6-12AC-481C31DFB6A3}"/>
+              </a:ext>
+            </a:extLst>
+          </p:cNvPr>
+          <p:cNvSpPr>
+            <a:spLocks noGrp="1"/>
+          </p:cNvSpPr>
+          <p:nvPr>
+            <p:ph type="title"/>
+          </p:nvPr>
+        </p:nvSpPr>
+        <p:spPr/>
+        <p:txBody>
+          <a:bodyPr/>
+          <a:lstStyle/>
+          <a:p>
+            <a:r>
+              <a:rPr lang="en-US" dirty="0"/>
+              <a:t>Overview of the day</a:t>
+            </a:r>
+          </a:p>
+        </p:txBody>
+      </p:sp>
+      <p:sp>
+        <p:nvSpPr>
+          <p:cNvPr id="3" name="Content Placeholder 2">
+            <a:extLst>
+              <a:ext uri="{FF2B5EF4-FFF2-40B4-BE49-F238E27FC236}">
+                <a16:creationId xmlns:a16="http://schemas.microsoft.com/office/drawing/2014/main" id="{907FD6AA-9804-3A4F-934C-265DF31BAADB}"/>
+              </a:ext>
+            </a:extLst>
+          </p:cNvPr>
+          <p:cNvSpPr>
+            <a:spLocks noGrp="1"/>
+          </p:cNvSpPr>
+          <p:nvPr>
+            <p:ph idx="1"/>
+          </p:nvPr>
+        </p:nvSpPr>
+        <p:spPr/>
+        <p:txBody>
+          <a:bodyPr/>
+          <a:lstStyle/>
+          <a:p>
+            <a:endParaRPr lang="en-US"/>
+          </a:p>
+        </p:txBody>
+      </p:sp>
+    </p:spTree>
+    <p:extLst>
+      <p:ext uri="{BB962C8B-B14F-4D97-AF65-F5344CB8AC3E}">
+        <p14:creationId xmlns:p14="http://schemas.microsoft.com/office/powerpoint/2010/main" val="2376821870"/>
       </p:ext>
     </p:extLst>
   </p:cSld>

--- a/slides/01_what_is_ml.pptx
+++ b/slides/01_what_is_ml.pptx
@@ -5,19 +5,31 @@
     <p:sldMasterId id="2147483648" r:id="rId1"/>
   </p:sldMasterIdLst>
   <p:notesMasterIdLst>
-    <p:notesMasterId r:id="rId12"/>
+    <p:notesMasterId r:id="rId24"/>
   </p:notesMasterIdLst>
   <p:sldIdLst>
-    <p:sldId id="256" r:id="rId2"/>
-    <p:sldId id="257" r:id="rId3"/>
-    <p:sldId id="264" r:id="rId4"/>
-    <p:sldId id="265" r:id="rId5"/>
-    <p:sldId id="266" r:id="rId6"/>
-    <p:sldId id="259" r:id="rId7"/>
-    <p:sldId id="260" r:id="rId8"/>
-    <p:sldId id="261" r:id="rId9"/>
-    <p:sldId id="262" r:id="rId10"/>
-    <p:sldId id="263" r:id="rId11"/>
+    <p:sldId id="262" r:id="rId2"/>
+    <p:sldId id="256" r:id="rId3"/>
+    <p:sldId id="257" r:id="rId4"/>
+    <p:sldId id="266" r:id="rId5"/>
+    <p:sldId id="271" r:id="rId6"/>
+    <p:sldId id="267" r:id="rId7"/>
+    <p:sldId id="272" r:id="rId8"/>
+    <p:sldId id="273" r:id="rId9"/>
+    <p:sldId id="268" r:id="rId10"/>
+    <p:sldId id="269" r:id="rId11"/>
+    <p:sldId id="274" r:id="rId12"/>
+    <p:sldId id="275" r:id="rId13"/>
+    <p:sldId id="278" r:id="rId14"/>
+    <p:sldId id="277" r:id="rId15"/>
+    <p:sldId id="279" r:id="rId16"/>
+    <p:sldId id="270" r:id="rId17"/>
+    <p:sldId id="259" r:id="rId18"/>
+    <p:sldId id="281" r:id="rId19"/>
+    <p:sldId id="282" r:id="rId20"/>
+    <p:sldId id="280" r:id="rId21"/>
+    <p:sldId id="261" r:id="rId22"/>
+    <p:sldId id="263" r:id="rId23"/>
   </p:sldIdLst>
   <p:sldSz cx="12192000" cy="6858000"/>
   <p:notesSz cx="6858000" cy="9144000"/>
@@ -206,7 +218,7 @@
           <a:p>
             <a:fld id="{DA3B5F47-542D-2F4A-A589-8990110BEF85}" type="datetimeFigureOut">
               <a:rPr lang="en-US" smtClean="0"/>
-              <a:t>3/31/26</a:t>
+              <a:t>4/6/26</a:t>
             </a:fld>
             <a:endParaRPr lang="en-US"/>
           </a:p>
@@ -519,15 +531,7 @@
           <a:p>
             <a:r>
               <a:rPr lang="en-US" dirty="0"/>
-              <a:t>[Molnar, C. Modeling mindsets: the many cultures of learning from data.](https://</a:t>
-            </a:r>
-            <a:r>
-              <a:rPr lang="en-US" dirty="0" err="1"/>
-              <a:t>christophmolnar.com</a:t>
-            </a:r>
-            <a:r>
-              <a:rPr lang="en-US" dirty="0"/>
-              <a:t>/books/modeling-mindsets)</a:t>
+              <a:t>Breaks, restroom locations, food/coffee locations, overall schedule, etc.</a:t>
             </a:r>
           </a:p>
         </p:txBody>
@@ -549,7 +553,7 @@
           <a:p>
             <a:fld id="{51D417A5-630B-DE42-860C-96747A2C59DE}" type="slidenum">
               <a:rPr lang="en-US" smtClean="0"/>
-              <a:t>2</a:t>
+              <a:t>1</a:t>
             </a:fld>
             <a:endParaRPr lang="en-US"/>
           </a:p>
@@ -558,7 +562,547 @@
     </p:spTree>
     <p:extLst>
       <p:ext uri="{BB962C8B-B14F-4D97-AF65-F5344CB8AC3E}">
-        <p14:creationId xmlns:p14="http://schemas.microsoft.com/office/powerpoint/2010/main" val="434144401"/>
+        <p14:creationId xmlns:p14="http://schemas.microsoft.com/office/powerpoint/2010/main" val="1967135812"/>
+      </p:ext>
+    </p:extLst>
+  </p:cSld>
+  <p:clrMapOvr>
+    <a:masterClrMapping/>
+  </p:clrMapOvr>
+</p:notes>
+</file>
+
+<file path=ppt/notesSlides/notesSlide10.xml><?xml version="1.0" encoding="utf-8"?>
+<p:notes xmlns:a="http://schemas.openxmlformats.org/drawingml/2006/main" xmlns:r="http://schemas.openxmlformats.org/officeDocument/2006/relationships" xmlns:p="http://schemas.openxmlformats.org/presentationml/2006/main">
+  <p:cSld>
+    <p:spTree>
+      <p:nvGrpSpPr>
+        <p:cNvPr id="1" name="">
+          <a:extLst>
+            <a:ext uri="{FF2B5EF4-FFF2-40B4-BE49-F238E27FC236}">
+              <a16:creationId xmlns:a16="http://schemas.microsoft.com/office/drawing/2014/main" id="{DD3B1FF5-9FF8-4AAC-6706-DD096F16ABF2}"/>
+            </a:ext>
+          </a:extLst>
+        </p:cNvPr>
+        <p:cNvGrpSpPr/>
+        <p:nvPr/>
+      </p:nvGrpSpPr>
+      <p:grpSpPr>
+        <a:xfrm>
+          <a:off x="0" y="0"/>
+          <a:ext cx="0" cy="0"/>
+          <a:chOff x="0" y="0"/>
+          <a:chExt cx="0" cy="0"/>
+        </a:xfrm>
+      </p:grpSpPr>
+      <p:sp>
+        <p:nvSpPr>
+          <p:cNvPr id="2" name="Slide Image Placeholder 1">
+            <a:extLst>
+              <a:ext uri="{FF2B5EF4-FFF2-40B4-BE49-F238E27FC236}">
+                <a16:creationId xmlns:a16="http://schemas.microsoft.com/office/drawing/2014/main" id="{85471D35-9D54-20B1-B072-9AD2AE2FE6B1}"/>
+              </a:ext>
+            </a:extLst>
+          </p:cNvPr>
+          <p:cNvSpPr>
+            <a:spLocks noGrp="1" noRot="1" noChangeAspect="1"/>
+          </p:cNvSpPr>
+          <p:nvPr>
+            <p:ph type="sldImg"/>
+          </p:nvPr>
+        </p:nvSpPr>
+        <p:spPr/>
+      </p:sp>
+      <p:sp>
+        <p:nvSpPr>
+          <p:cNvPr id="3" name="Notes Placeholder 2">
+            <a:extLst>
+              <a:ext uri="{FF2B5EF4-FFF2-40B4-BE49-F238E27FC236}">
+                <a16:creationId xmlns:a16="http://schemas.microsoft.com/office/drawing/2014/main" id="{0003FB06-DC9C-994A-BA7D-B95B23DF81A6}"/>
+              </a:ext>
+            </a:extLst>
+          </p:cNvPr>
+          <p:cNvSpPr>
+            <a:spLocks noGrp="1"/>
+          </p:cNvSpPr>
+          <p:nvPr>
+            <p:ph type="body" idx="1"/>
+          </p:nvPr>
+        </p:nvSpPr>
+        <p:spPr/>
+        <p:txBody>
+          <a:bodyPr/>
+          <a:lstStyle/>
+          <a:p>
+            <a:endParaRPr lang="en-US" dirty="0"/>
+          </a:p>
+        </p:txBody>
+      </p:sp>
+      <p:sp>
+        <p:nvSpPr>
+          <p:cNvPr id="4" name="Slide Number Placeholder 3">
+            <a:extLst>
+              <a:ext uri="{FF2B5EF4-FFF2-40B4-BE49-F238E27FC236}">
+                <a16:creationId xmlns:a16="http://schemas.microsoft.com/office/drawing/2014/main" id="{323575BD-65FB-FD21-9ADA-4ADE63C7BCBC}"/>
+              </a:ext>
+            </a:extLst>
+          </p:cNvPr>
+          <p:cNvSpPr>
+            <a:spLocks noGrp="1"/>
+          </p:cNvSpPr>
+          <p:nvPr>
+            <p:ph type="sldNum" sz="quarter" idx="5"/>
+          </p:nvPr>
+        </p:nvSpPr>
+        <p:spPr/>
+        <p:txBody>
+          <a:bodyPr/>
+          <a:lstStyle/>
+          <a:p>
+            <a:fld id="{51D417A5-630B-DE42-860C-96747A2C59DE}" type="slidenum">
+              <a:rPr lang="en-US" smtClean="0"/>
+              <a:t>12</a:t>
+            </a:fld>
+            <a:endParaRPr lang="en-US"/>
+          </a:p>
+        </p:txBody>
+      </p:sp>
+    </p:spTree>
+    <p:extLst>
+      <p:ext uri="{BB962C8B-B14F-4D97-AF65-F5344CB8AC3E}">
+        <p14:creationId xmlns:p14="http://schemas.microsoft.com/office/powerpoint/2010/main" val="2848449098"/>
+      </p:ext>
+    </p:extLst>
+  </p:cSld>
+  <p:clrMapOvr>
+    <a:masterClrMapping/>
+  </p:clrMapOvr>
+</p:notes>
+</file>
+
+<file path=ppt/notesSlides/notesSlide11.xml><?xml version="1.0" encoding="utf-8"?>
+<p:notes xmlns:a="http://schemas.openxmlformats.org/drawingml/2006/main" xmlns:r="http://schemas.openxmlformats.org/officeDocument/2006/relationships" xmlns:p="http://schemas.openxmlformats.org/presentationml/2006/main">
+  <p:cSld>
+    <p:spTree>
+      <p:nvGrpSpPr>
+        <p:cNvPr id="1" name="">
+          <a:extLst>
+            <a:ext uri="{FF2B5EF4-FFF2-40B4-BE49-F238E27FC236}">
+              <a16:creationId xmlns:a16="http://schemas.microsoft.com/office/drawing/2014/main" id="{6043E99F-4DF0-E990-9FA6-F93BB5C1C737}"/>
+            </a:ext>
+          </a:extLst>
+        </p:cNvPr>
+        <p:cNvGrpSpPr/>
+        <p:nvPr/>
+      </p:nvGrpSpPr>
+      <p:grpSpPr>
+        <a:xfrm>
+          <a:off x="0" y="0"/>
+          <a:ext cx="0" cy="0"/>
+          <a:chOff x="0" y="0"/>
+          <a:chExt cx="0" cy="0"/>
+        </a:xfrm>
+      </p:grpSpPr>
+      <p:sp>
+        <p:nvSpPr>
+          <p:cNvPr id="2" name="Slide Image Placeholder 1">
+            <a:extLst>
+              <a:ext uri="{FF2B5EF4-FFF2-40B4-BE49-F238E27FC236}">
+                <a16:creationId xmlns:a16="http://schemas.microsoft.com/office/drawing/2014/main" id="{B928A67A-9F1C-4642-0721-4CB4B1F313C0}"/>
+              </a:ext>
+            </a:extLst>
+          </p:cNvPr>
+          <p:cNvSpPr>
+            <a:spLocks noGrp="1" noRot="1" noChangeAspect="1"/>
+          </p:cNvSpPr>
+          <p:nvPr>
+            <p:ph type="sldImg"/>
+          </p:nvPr>
+        </p:nvSpPr>
+        <p:spPr/>
+      </p:sp>
+      <p:sp>
+        <p:nvSpPr>
+          <p:cNvPr id="3" name="Notes Placeholder 2">
+            <a:extLst>
+              <a:ext uri="{FF2B5EF4-FFF2-40B4-BE49-F238E27FC236}">
+                <a16:creationId xmlns:a16="http://schemas.microsoft.com/office/drawing/2014/main" id="{EEDA3326-3BC8-9786-CD72-0BBAEFD88A9C}"/>
+              </a:ext>
+            </a:extLst>
+          </p:cNvPr>
+          <p:cNvSpPr>
+            <a:spLocks noGrp="1"/>
+          </p:cNvSpPr>
+          <p:nvPr>
+            <p:ph type="body" idx="1"/>
+          </p:nvPr>
+        </p:nvSpPr>
+        <p:spPr/>
+        <p:txBody>
+          <a:bodyPr/>
+          <a:lstStyle/>
+          <a:p>
+            <a:endParaRPr lang="en-US" dirty="0"/>
+          </a:p>
+        </p:txBody>
+      </p:sp>
+      <p:sp>
+        <p:nvSpPr>
+          <p:cNvPr id="4" name="Slide Number Placeholder 3">
+            <a:extLst>
+              <a:ext uri="{FF2B5EF4-FFF2-40B4-BE49-F238E27FC236}">
+                <a16:creationId xmlns:a16="http://schemas.microsoft.com/office/drawing/2014/main" id="{7109EC6F-200C-0B7A-AAA9-88DCA0BB8DDC}"/>
+              </a:ext>
+            </a:extLst>
+          </p:cNvPr>
+          <p:cNvSpPr>
+            <a:spLocks noGrp="1"/>
+          </p:cNvSpPr>
+          <p:nvPr>
+            <p:ph type="sldNum" sz="quarter" idx="5"/>
+          </p:nvPr>
+        </p:nvSpPr>
+        <p:spPr/>
+        <p:txBody>
+          <a:bodyPr/>
+          <a:lstStyle/>
+          <a:p>
+            <a:fld id="{51D417A5-630B-DE42-860C-96747A2C59DE}" type="slidenum">
+              <a:rPr lang="en-US" smtClean="0"/>
+              <a:t>13</a:t>
+            </a:fld>
+            <a:endParaRPr lang="en-US"/>
+          </a:p>
+        </p:txBody>
+      </p:sp>
+    </p:spTree>
+    <p:extLst>
+      <p:ext uri="{BB962C8B-B14F-4D97-AF65-F5344CB8AC3E}">
+        <p14:creationId xmlns:p14="http://schemas.microsoft.com/office/powerpoint/2010/main" val="2055235757"/>
+      </p:ext>
+    </p:extLst>
+  </p:cSld>
+  <p:clrMapOvr>
+    <a:masterClrMapping/>
+  </p:clrMapOvr>
+</p:notes>
+</file>
+
+<file path=ppt/notesSlides/notesSlide12.xml><?xml version="1.0" encoding="utf-8"?>
+<p:notes xmlns:a="http://schemas.openxmlformats.org/drawingml/2006/main" xmlns:r="http://schemas.openxmlformats.org/officeDocument/2006/relationships" xmlns:p="http://schemas.openxmlformats.org/presentationml/2006/main">
+  <p:cSld>
+    <p:spTree>
+      <p:nvGrpSpPr>
+        <p:cNvPr id="1" name="">
+          <a:extLst>
+            <a:ext uri="{FF2B5EF4-FFF2-40B4-BE49-F238E27FC236}">
+              <a16:creationId xmlns:a16="http://schemas.microsoft.com/office/drawing/2014/main" id="{DB3452C9-8F93-24CF-1BBE-0F33ED898497}"/>
+            </a:ext>
+          </a:extLst>
+        </p:cNvPr>
+        <p:cNvGrpSpPr/>
+        <p:nvPr/>
+      </p:nvGrpSpPr>
+      <p:grpSpPr>
+        <a:xfrm>
+          <a:off x="0" y="0"/>
+          <a:ext cx="0" cy="0"/>
+          <a:chOff x="0" y="0"/>
+          <a:chExt cx="0" cy="0"/>
+        </a:xfrm>
+      </p:grpSpPr>
+      <p:sp>
+        <p:nvSpPr>
+          <p:cNvPr id="2" name="Slide Image Placeholder 1">
+            <a:extLst>
+              <a:ext uri="{FF2B5EF4-FFF2-40B4-BE49-F238E27FC236}">
+                <a16:creationId xmlns:a16="http://schemas.microsoft.com/office/drawing/2014/main" id="{A68A99A1-D644-E79F-313E-059C657FD2E5}"/>
+              </a:ext>
+            </a:extLst>
+          </p:cNvPr>
+          <p:cNvSpPr>
+            <a:spLocks noGrp="1" noRot="1" noChangeAspect="1"/>
+          </p:cNvSpPr>
+          <p:nvPr>
+            <p:ph type="sldImg"/>
+          </p:nvPr>
+        </p:nvSpPr>
+        <p:spPr/>
+      </p:sp>
+      <p:sp>
+        <p:nvSpPr>
+          <p:cNvPr id="3" name="Notes Placeholder 2">
+            <a:extLst>
+              <a:ext uri="{FF2B5EF4-FFF2-40B4-BE49-F238E27FC236}">
+                <a16:creationId xmlns:a16="http://schemas.microsoft.com/office/drawing/2014/main" id="{1C4341E3-87D6-485B-42B3-0E44146FD264}"/>
+              </a:ext>
+            </a:extLst>
+          </p:cNvPr>
+          <p:cNvSpPr>
+            <a:spLocks noGrp="1"/>
+          </p:cNvSpPr>
+          <p:nvPr>
+            <p:ph type="body" idx="1"/>
+          </p:nvPr>
+        </p:nvSpPr>
+        <p:spPr/>
+        <p:txBody>
+          <a:bodyPr/>
+          <a:lstStyle/>
+          <a:p>
+            <a:endParaRPr lang="en-US" dirty="0"/>
+          </a:p>
+        </p:txBody>
+      </p:sp>
+      <p:sp>
+        <p:nvSpPr>
+          <p:cNvPr id="4" name="Slide Number Placeholder 3">
+            <a:extLst>
+              <a:ext uri="{FF2B5EF4-FFF2-40B4-BE49-F238E27FC236}">
+                <a16:creationId xmlns:a16="http://schemas.microsoft.com/office/drawing/2014/main" id="{5BCFE3DE-FDBD-CF60-2BFB-56B9AA0EA053}"/>
+              </a:ext>
+            </a:extLst>
+          </p:cNvPr>
+          <p:cNvSpPr>
+            <a:spLocks noGrp="1"/>
+          </p:cNvSpPr>
+          <p:nvPr>
+            <p:ph type="sldNum" sz="quarter" idx="5"/>
+          </p:nvPr>
+        </p:nvSpPr>
+        <p:spPr/>
+        <p:txBody>
+          <a:bodyPr/>
+          <a:lstStyle/>
+          <a:p>
+            <a:fld id="{51D417A5-630B-DE42-860C-96747A2C59DE}" type="slidenum">
+              <a:rPr lang="en-US" smtClean="0"/>
+              <a:t>14</a:t>
+            </a:fld>
+            <a:endParaRPr lang="en-US"/>
+          </a:p>
+        </p:txBody>
+      </p:sp>
+    </p:spTree>
+    <p:extLst>
+      <p:ext uri="{BB962C8B-B14F-4D97-AF65-F5344CB8AC3E}">
+        <p14:creationId xmlns:p14="http://schemas.microsoft.com/office/powerpoint/2010/main" val="2099728309"/>
+      </p:ext>
+    </p:extLst>
+  </p:cSld>
+  <p:clrMapOvr>
+    <a:masterClrMapping/>
+  </p:clrMapOvr>
+</p:notes>
+</file>
+
+<file path=ppt/notesSlides/notesSlide13.xml><?xml version="1.0" encoding="utf-8"?>
+<p:notes xmlns:a="http://schemas.openxmlformats.org/drawingml/2006/main" xmlns:r="http://schemas.openxmlformats.org/officeDocument/2006/relationships" xmlns:p="http://schemas.openxmlformats.org/presentationml/2006/main">
+  <p:cSld>
+    <p:spTree>
+      <p:nvGrpSpPr>
+        <p:cNvPr id="1" name="">
+          <a:extLst>
+            <a:ext uri="{FF2B5EF4-FFF2-40B4-BE49-F238E27FC236}">
+              <a16:creationId xmlns:a16="http://schemas.microsoft.com/office/drawing/2014/main" id="{8893DE68-F2F1-E8B1-58F0-21E432825A22}"/>
+            </a:ext>
+          </a:extLst>
+        </p:cNvPr>
+        <p:cNvGrpSpPr/>
+        <p:nvPr/>
+      </p:nvGrpSpPr>
+      <p:grpSpPr>
+        <a:xfrm>
+          <a:off x="0" y="0"/>
+          <a:ext cx="0" cy="0"/>
+          <a:chOff x="0" y="0"/>
+          <a:chExt cx="0" cy="0"/>
+        </a:xfrm>
+      </p:grpSpPr>
+      <p:sp>
+        <p:nvSpPr>
+          <p:cNvPr id="2" name="Slide Image Placeholder 1">
+            <a:extLst>
+              <a:ext uri="{FF2B5EF4-FFF2-40B4-BE49-F238E27FC236}">
+                <a16:creationId xmlns:a16="http://schemas.microsoft.com/office/drawing/2014/main" id="{2B87E953-7678-DAA3-6496-5AF70A78FA17}"/>
+              </a:ext>
+            </a:extLst>
+          </p:cNvPr>
+          <p:cNvSpPr>
+            <a:spLocks noGrp="1" noRot="1" noChangeAspect="1"/>
+          </p:cNvSpPr>
+          <p:nvPr>
+            <p:ph type="sldImg"/>
+          </p:nvPr>
+        </p:nvSpPr>
+        <p:spPr/>
+      </p:sp>
+      <p:sp>
+        <p:nvSpPr>
+          <p:cNvPr id="3" name="Notes Placeholder 2">
+            <a:extLst>
+              <a:ext uri="{FF2B5EF4-FFF2-40B4-BE49-F238E27FC236}">
+                <a16:creationId xmlns:a16="http://schemas.microsoft.com/office/drawing/2014/main" id="{1A0A6E52-7687-CA2C-1E7F-1ABCEA373F8A}"/>
+              </a:ext>
+            </a:extLst>
+          </p:cNvPr>
+          <p:cNvSpPr>
+            <a:spLocks noGrp="1"/>
+          </p:cNvSpPr>
+          <p:nvPr>
+            <p:ph type="body" idx="1"/>
+          </p:nvPr>
+        </p:nvSpPr>
+        <p:spPr/>
+        <p:txBody>
+          <a:bodyPr/>
+          <a:lstStyle/>
+          <a:p>
+            <a:endParaRPr lang="en-US" dirty="0"/>
+          </a:p>
+        </p:txBody>
+      </p:sp>
+      <p:sp>
+        <p:nvSpPr>
+          <p:cNvPr id="4" name="Slide Number Placeholder 3">
+            <a:extLst>
+              <a:ext uri="{FF2B5EF4-FFF2-40B4-BE49-F238E27FC236}">
+                <a16:creationId xmlns:a16="http://schemas.microsoft.com/office/drawing/2014/main" id="{9640B730-52ED-48F7-FF8E-2E66EC842E92}"/>
+              </a:ext>
+            </a:extLst>
+          </p:cNvPr>
+          <p:cNvSpPr>
+            <a:spLocks noGrp="1"/>
+          </p:cNvSpPr>
+          <p:nvPr>
+            <p:ph type="sldNum" sz="quarter" idx="5"/>
+          </p:nvPr>
+        </p:nvSpPr>
+        <p:spPr/>
+        <p:txBody>
+          <a:bodyPr/>
+          <a:lstStyle/>
+          <a:p>
+            <a:fld id="{51D417A5-630B-DE42-860C-96747A2C59DE}" type="slidenum">
+              <a:rPr lang="en-US" smtClean="0"/>
+              <a:t>15</a:t>
+            </a:fld>
+            <a:endParaRPr lang="en-US"/>
+          </a:p>
+        </p:txBody>
+      </p:sp>
+    </p:spTree>
+    <p:extLst>
+      <p:ext uri="{BB962C8B-B14F-4D97-AF65-F5344CB8AC3E}">
+        <p14:creationId xmlns:p14="http://schemas.microsoft.com/office/powerpoint/2010/main" val="3949548667"/>
+      </p:ext>
+    </p:extLst>
+  </p:cSld>
+  <p:clrMapOvr>
+    <a:masterClrMapping/>
+  </p:clrMapOvr>
+</p:notes>
+</file>
+
+<file path=ppt/notesSlides/notesSlide14.xml><?xml version="1.0" encoding="utf-8"?>
+<p:notes xmlns:a="http://schemas.openxmlformats.org/drawingml/2006/main" xmlns:r="http://schemas.openxmlformats.org/officeDocument/2006/relationships" xmlns:p="http://schemas.openxmlformats.org/presentationml/2006/main">
+  <p:cSld>
+    <p:spTree>
+      <p:nvGrpSpPr>
+        <p:cNvPr id="1" name="">
+          <a:extLst>
+            <a:ext uri="{FF2B5EF4-FFF2-40B4-BE49-F238E27FC236}">
+              <a16:creationId xmlns:a16="http://schemas.microsoft.com/office/drawing/2014/main" id="{35F16DBE-CCD3-587A-BBCE-CDBAF3669FA6}"/>
+            </a:ext>
+          </a:extLst>
+        </p:cNvPr>
+        <p:cNvGrpSpPr/>
+        <p:nvPr/>
+      </p:nvGrpSpPr>
+      <p:grpSpPr>
+        <a:xfrm>
+          <a:off x="0" y="0"/>
+          <a:ext cx="0" cy="0"/>
+          <a:chOff x="0" y="0"/>
+          <a:chExt cx="0" cy="0"/>
+        </a:xfrm>
+      </p:grpSpPr>
+      <p:sp>
+        <p:nvSpPr>
+          <p:cNvPr id="2" name="Slide Image Placeholder 1">
+            <a:extLst>
+              <a:ext uri="{FF2B5EF4-FFF2-40B4-BE49-F238E27FC236}">
+                <a16:creationId xmlns:a16="http://schemas.microsoft.com/office/drawing/2014/main" id="{1819806D-2299-3599-9EC9-F5E6718AEADF}"/>
+              </a:ext>
+            </a:extLst>
+          </p:cNvPr>
+          <p:cNvSpPr>
+            <a:spLocks noGrp="1" noRot="1" noChangeAspect="1"/>
+          </p:cNvSpPr>
+          <p:nvPr>
+            <p:ph type="sldImg"/>
+          </p:nvPr>
+        </p:nvSpPr>
+        <p:spPr/>
+      </p:sp>
+      <p:sp>
+        <p:nvSpPr>
+          <p:cNvPr id="3" name="Notes Placeholder 2">
+            <a:extLst>
+              <a:ext uri="{FF2B5EF4-FFF2-40B4-BE49-F238E27FC236}">
+                <a16:creationId xmlns:a16="http://schemas.microsoft.com/office/drawing/2014/main" id="{4766297C-87C7-60EB-C3E0-0ECEB22BF52D}"/>
+              </a:ext>
+            </a:extLst>
+          </p:cNvPr>
+          <p:cNvSpPr>
+            <a:spLocks noGrp="1"/>
+          </p:cNvSpPr>
+          <p:nvPr>
+            <p:ph type="body" idx="1"/>
+          </p:nvPr>
+        </p:nvSpPr>
+        <p:spPr/>
+        <p:txBody>
+          <a:bodyPr/>
+          <a:lstStyle/>
+          <a:p>
+            <a:endParaRPr lang="en-US" dirty="0"/>
+          </a:p>
+        </p:txBody>
+      </p:sp>
+      <p:sp>
+        <p:nvSpPr>
+          <p:cNvPr id="4" name="Slide Number Placeholder 3">
+            <a:extLst>
+              <a:ext uri="{FF2B5EF4-FFF2-40B4-BE49-F238E27FC236}">
+                <a16:creationId xmlns:a16="http://schemas.microsoft.com/office/drawing/2014/main" id="{6B86D830-C492-B348-07A8-1F045E18B36B}"/>
+              </a:ext>
+            </a:extLst>
+          </p:cNvPr>
+          <p:cNvSpPr>
+            <a:spLocks noGrp="1"/>
+          </p:cNvSpPr>
+          <p:nvPr>
+            <p:ph type="sldNum" sz="quarter" idx="5"/>
+          </p:nvPr>
+        </p:nvSpPr>
+        <p:spPr/>
+        <p:txBody>
+          <a:bodyPr/>
+          <a:lstStyle/>
+          <a:p>
+            <a:fld id="{51D417A5-630B-DE42-860C-96747A2C59DE}" type="slidenum">
+              <a:rPr lang="en-US" smtClean="0"/>
+              <a:t>16</a:t>
+            </a:fld>
+            <a:endParaRPr lang="en-US"/>
+          </a:p>
+        </p:txBody>
+      </p:sp>
+    </p:spTree>
+    <p:extLst>
+      <p:ext uri="{BB962C8B-B14F-4D97-AF65-F5344CB8AC3E}">
+        <p14:creationId xmlns:p14="http://schemas.microsoft.com/office/powerpoint/2010/main" val="2382155648"/>
       </p:ext>
     </p:extLst>
   </p:cSld>
@@ -573,13 +1117,7 @@
   <p:cSld>
     <p:spTree>
       <p:nvGrpSpPr>
-        <p:cNvPr id="1" name="">
-          <a:extLst>
-            <a:ext uri="{FF2B5EF4-FFF2-40B4-BE49-F238E27FC236}">
-              <a16:creationId xmlns:a16="http://schemas.microsoft.com/office/drawing/2014/main" id="{3F25C84D-0C20-A2DC-6291-38E80B768035}"/>
-            </a:ext>
-          </a:extLst>
-        </p:cNvPr>
+        <p:cNvPr id="1" name=""/>
         <p:cNvGrpSpPr/>
         <p:nvPr/>
       </p:nvGrpSpPr>
@@ -593,13 +1131,7 @@
       </p:grpSpPr>
       <p:sp>
         <p:nvSpPr>
-          <p:cNvPr id="2" name="Slide Image Placeholder 1">
-            <a:extLst>
-              <a:ext uri="{FF2B5EF4-FFF2-40B4-BE49-F238E27FC236}">
-                <a16:creationId xmlns:a16="http://schemas.microsoft.com/office/drawing/2014/main" id="{52050D61-204D-DD3C-F48C-27625251A884}"/>
-              </a:ext>
-            </a:extLst>
-          </p:cNvPr>
+          <p:cNvPr id="2" name="Slide Image Placeholder 1"/>
           <p:cNvSpPr>
             <a:spLocks noGrp="1" noRot="1" noChangeAspect="1"/>
           </p:cNvSpPr>
@@ -611,13 +1143,7 @@
       </p:sp>
       <p:sp>
         <p:nvSpPr>
-          <p:cNvPr id="3" name="Notes Placeholder 2">
-            <a:extLst>
-              <a:ext uri="{FF2B5EF4-FFF2-40B4-BE49-F238E27FC236}">
-                <a16:creationId xmlns:a16="http://schemas.microsoft.com/office/drawing/2014/main" id="{7D48D780-E676-5074-2C7F-C24D41406414}"/>
-              </a:ext>
-            </a:extLst>
-          </p:cNvPr>
+          <p:cNvPr id="3" name="Notes Placeholder 2"/>
           <p:cNvSpPr>
             <a:spLocks noGrp="1"/>
           </p:cNvSpPr>
@@ -630,30 +1156,13 @@
           <a:bodyPr/>
           <a:lstStyle/>
           <a:p>
-            <a:r>
-              <a:rPr lang="en-US" dirty="0"/>
-              <a:t>[Molnar, C. Modeling mindsets: the many cultures of learning from data.](https://</a:t>
-            </a:r>
-            <a:r>
-              <a:rPr lang="en-US" dirty="0" err="1"/>
-              <a:t>christophmolnar.com</a:t>
-            </a:r>
-            <a:r>
-              <a:rPr lang="en-US" dirty="0"/>
-              <a:t>/books/modeling-mindsets)</a:t>
-            </a:r>
-          </a:p>
-        </p:txBody>
-      </p:sp>
-      <p:sp>
-        <p:nvSpPr>
-          <p:cNvPr id="4" name="Slide Number Placeholder 3">
-            <a:extLst>
-              <a:ext uri="{FF2B5EF4-FFF2-40B4-BE49-F238E27FC236}">
-                <a16:creationId xmlns:a16="http://schemas.microsoft.com/office/drawing/2014/main" id="{57CFE9F0-67FE-1A05-CA34-1E523B480A45}"/>
-              </a:ext>
-            </a:extLst>
-          </p:cNvPr>
+            <a:endParaRPr lang="en-US" dirty="0"/>
+          </a:p>
+        </p:txBody>
+      </p:sp>
+      <p:sp>
+        <p:nvSpPr>
+          <p:cNvPr id="4" name="Slide Number Placeholder 3"/>
           <p:cNvSpPr>
             <a:spLocks noGrp="1"/>
           </p:cNvSpPr>
@@ -677,7 +1186,7 @@
     </p:spTree>
     <p:extLst>
       <p:ext uri="{BB962C8B-B14F-4D97-AF65-F5344CB8AC3E}">
-        <p14:creationId xmlns:p14="http://schemas.microsoft.com/office/powerpoint/2010/main" val="2140901328"/>
+        <p14:creationId xmlns:p14="http://schemas.microsoft.com/office/powerpoint/2010/main" val="434144401"/>
       </p:ext>
     </p:extLst>
   </p:cSld>
@@ -695,7 +1204,7 @@
         <p:cNvPr id="1" name="">
           <a:extLst>
             <a:ext uri="{FF2B5EF4-FFF2-40B4-BE49-F238E27FC236}">
-              <a16:creationId xmlns:a16="http://schemas.microsoft.com/office/drawing/2014/main" id="{D4550BB0-497A-39B7-EA28-1E35775854C0}"/>
+              <a16:creationId xmlns:a16="http://schemas.microsoft.com/office/drawing/2014/main" id="{2212B104-8D53-E65A-A380-4557BF42159C}"/>
             </a:ext>
           </a:extLst>
         </p:cNvPr>
@@ -715,7 +1224,7 @@
           <p:cNvPr id="2" name="Slide Image Placeholder 1">
             <a:extLst>
               <a:ext uri="{FF2B5EF4-FFF2-40B4-BE49-F238E27FC236}">
-                <a16:creationId xmlns:a16="http://schemas.microsoft.com/office/drawing/2014/main" id="{5ED50DAC-95E3-F24C-D7A3-888E902232C9}"/>
+                <a16:creationId xmlns:a16="http://schemas.microsoft.com/office/drawing/2014/main" id="{5798AE75-9667-9E63-ED68-55A2AFB8B262}"/>
               </a:ext>
             </a:extLst>
           </p:cNvPr>
@@ -733,7 +1242,7 @@
           <p:cNvPr id="3" name="Notes Placeholder 2">
             <a:extLst>
               <a:ext uri="{FF2B5EF4-FFF2-40B4-BE49-F238E27FC236}">
-                <a16:creationId xmlns:a16="http://schemas.microsoft.com/office/drawing/2014/main" id="{25E8B883-13C4-2B1F-51D0-4AE9811193ED}"/>
+                <a16:creationId xmlns:a16="http://schemas.microsoft.com/office/drawing/2014/main" id="{E90569F5-33C7-013E-73EB-1CC7B992F96B}"/>
               </a:ext>
             </a:extLst>
           </p:cNvPr>
@@ -749,18 +1258,7 @@
           <a:bodyPr/>
           <a:lstStyle/>
           <a:p>
-            <a:r>
-              <a:rPr lang="en-US" dirty="0"/>
-              <a:t>[Molnar, C. Modeling mindsets: the many cultures of learning from data.](https://</a:t>
-            </a:r>
-            <a:r>
-              <a:rPr lang="en-US" dirty="0" err="1"/>
-              <a:t>christophmolnar.com</a:t>
-            </a:r>
-            <a:r>
-              <a:rPr lang="en-US" dirty="0"/>
-              <a:t>/books/modeling-mindsets)</a:t>
-            </a:r>
+            <a:endParaRPr lang="en-US" dirty="0"/>
           </a:p>
         </p:txBody>
       </p:sp>
@@ -769,7 +1267,7 @@
           <p:cNvPr id="4" name="Slide Number Placeholder 3">
             <a:extLst>
               <a:ext uri="{FF2B5EF4-FFF2-40B4-BE49-F238E27FC236}">
-                <a16:creationId xmlns:a16="http://schemas.microsoft.com/office/drawing/2014/main" id="{AE4B44BE-4C44-B3F2-3013-B1BFCFFA3F1F}"/>
+                <a16:creationId xmlns:a16="http://schemas.microsoft.com/office/drawing/2014/main" id="{4AD7F396-7F67-A424-7B88-5D45EB3CFF41}"/>
               </a:ext>
             </a:extLst>
           </p:cNvPr>
@@ -787,7 +1285,7 @@
           <a:p>
             <a:fld id="{51D417A5-630B-DE42-860C-96747A2C59DE}" type="slidenum">
               <a:rPr lang="en-US" smtClean="0"/>
-              <a:t>4</a:t>
+              <a:t>5</a:t>
             </a:fld>
             <a:endParaRPr lang="en-US"/>
           </a:p>
@@ -796,7 +1294,655 @@
     </p:spTree>
     <p:extLst>
       <p:ext uri="{BB962C8B-B14F-4D97-AF65-F5344CB8AC3E}">
-        <p14:creationId xmlns:p14="http://schemas.microsoft.com/office/powerpoint/2010/main" val="233797556"/>
+        <p14:creationId xmlns:p14="http://schemas.microsoft.com/office/powerpoint/2010/main" val="3313573905"/>
+      </p:ext>
+    </p:extLst>
+  </p:cSld>
+  <p:clrMapOvr>
+    <a:masterClrMapping/>
+  </p:clrMapOvr>
+</p:notes>
+</file>
+
+<file path=ppt/notesSlides/notesSlide4.xml><?xml version="1.0" encoding="utf-8"?>
+<p:notes xmlns:a="http://schemas.openxmlformats.org/drawingml/2006/main" xmlns:r="http://schemas.openxmlformats.org/officeDocument/2006/relationships" xmlns:p="http://schemas.openxmlformats.org/presentationml/2006/main">
+  <p:cSld>
+    <p:spTree>
+      <p:nvGrpSpPr>
+        <p:cNvPr id="1" name="">
+          <a:extLst>
+            <a:ext uri="{FF2B5EF4-FFF2-40B4-BE49-F238E27FC236}">
+              <a16:creationId xmlns:a16="http://schemas.microsoft.com/office/drawing/2014/main" id="{3248EFDA-073C-9FE8-85D0-152C0591F760}"/>
+            </a:ext>
+          </a:extLst>
+        </p:cNvPr>
+        <p:cNvGrpSpPr/>
+        <p:nvPr/>
+      </p:nvGrpSpPr>
+      <p:grpSpPr>
+        <a:xfrm>
+          <a:off x="0" y="0"/>
+          <a:ext cx="0" cy="0"/>
+          <a:chOff x="0" y="0"/>
+          <a:chExt cx="0" cy="0"/>
+        </a:xfrm>
+      </p:grpSpPr>
+      <p:sp>
+        <p:nvSpPr>
+          <p:cNvPr id="2" name="Slide Image Placeholder 1">
+            <a:extLst>
+              <a:ext uri="{FF2B5EF4-FFF2-40B4-BE49-F238E27FC236}">
+                <a16:creationId xmlns:a16="http://schemas.microsoft.com/office/drawing/2014/main" id="{891C7ABA-6396-A042-37CA-2E5276908825}"/>
+              </a:ext>
+            </a:extLst>
+          </p:cNvPr>
+          <p:cNvSpPr>
+            <a:spLocks noGrp="1" noRot="1" noChangeAspect="1"/>
+          </p:cNvSpPr>
+          <p:nvPr>
+            <p:ph type="sldImg"/>
+          </p:nvPr>
+        </p:nvSpPr>
+        <p:spPr/>
+      </p:sp>
+      <p:sp>
+        <p:nvSpPr>
+          <p:cNvPr id="3" name="Notes Placeholder 2">
+            <a:extLst>
+              <a:ext uri="{FF2B5EF4-FFF2-40B4-BE49-F238E27FC236}">
+                <a16:creationId xmlns:a16="http://schemas.microsoft.com/office/drawing/2014/main" id="{B3C8AD3D-2C07-BBB9-7BD5-FB307570C0E3}"/>
+              </a:ext>
+            </a:extLst>
+          </p:cNvPr>
+          <p:cNvSpPr>
+            <a:spLocks noGrp="1"/>
+          </p:cNvSpPr>
+          <p:nvPr>
+            <p:ph type="body" idx="1"/>
+          </p:nvPr>
+        </p:nvSpPr>
+        <p:spPr/>
+        <p:txBody>
+          <a:bodyPr/>
+          <a:lstStyle/>
+          <a:p>
+            <a:endParaRPr lang="en-US" dirty="0"/>
+          </a:p>
+        </p:txBody>
+      </p:sp>
+      <p:sp>
+        <p:nvSpPr>
+          <p:cNvPr id="4" name="Slide Number Placeholder 3">
+            <a:extLst>
+              <a:ext uri="{FF2B5EF4-FFF2-40B4-BE49-F238E27FC236}">
+                <a16:creationId xmlns:a16="http://schemas.microsoft.com/office/drawing/2014/main" id="{240C5B2D-47B3-2186-3C91-A851B8A7B631}"/>
+              </a:ext>
+            </a:extLst>
+          </p:cNvPr>
+          <p:cNvSpPr>
+            <a:spLocks noGrp="1"/>
+          </p:cNvSpPr>
+          <p:nvPr>
+            <p:ph type="sldNum" sz="quarter" idx="5"/>
+          </p:nvPr>
+        </p:nvSpPr>
+        <p:spPr/>
+        <p:txBody>
+          <a:bodyPr/>
+          <a:lstStyle/>
+          <a:p>
+            <a:fld id="{51D417A5-630B-DE42-860C-96747A2C59DE}" type="slidenum">
+              <a:rPr lang="en-US" smtClean="0"/>
+              <a:t>6</a:t>
+            </a:fld>
+            <a:endParaRPr lang="en-US"/>
+          </a:p>
+        </p:txBody>
+      </p:sp>
+    </p:spTree>
+    <p:extLst>
+      <p:ext uri="{BB962C8B-B14F-4D97-AF65-F5344CB8AC3E}">
+        <p14:creationId xmlns:p14="http://schemas.microsoft.com/office/powerpoint/2010/main" val="115186155"/>
+      </p:ext>
+    </p:extLst>
+  </p:cSld>
+  <p:clrMapOvr>
+    <a:masterClrMapping/>
+  </p:clrMapOvr>
+</p:notes>
+</file>
+
+<file path=ppt/notesSlides/notesSlide5.xml><?xml version="1.0" encoding="utf-8"?>
+<p:notes xmlns:a="http://schemas.openxmlformats.org/drawingml/2006/main" xmlns:r="http://schemas.openxmlformats.org/officeDocument/2006/relationships" xmlns:p="http://schemas.openxmlformats.org/presentationml/2006/main">
+  <p:cSld>
+    <p:spTree>
+      <p:nvGrpSpPr>
+        <p:cNvPr id="1" name="">
+          <a:extLst>
+            <a:ext uri="{FF2B5EF4-FFF2-40B4-BE49-F238E27FC236}">
+              <a16:creationId xmlns:a16="http://schemas.microsoft.com/office/drawing/2014/main" id="{2B20820B-2997-A955-3172-362DB909C29C}"/>
+            </a:ext>
+          </a:extLst>
+        </p:cNvPr>
+        <p:cNvGrpSpPr/>
+        <p:nvPr/>
+      </p:nvGrpSpPr>
+      <p:grpSpPr>
+        <a:xfrm>
+          <a:off x="0" y="0"/>
+          <a:ext cx="0" cy="0"/>
+          <a:chOff x="0" y="0"/>
+          <a:chExt cx="0" cy="0"/>
+        </a:xfrm>
+      </p:grpSpPr>
+      <p:sp>
+        <p:nvSpPr>
+          <p:cNvPr id="2" name="Slide Image Placeholder 1">
+            <a:extLst>
+              <a:ext uri="{FF2B5EF4-FFF2-40B4-BE49-F238E27FC236}">
+                <a16:creationId xmlns:a16="http://schemas.microsoft.com/office/drawing/2014/main" id="{A18DFA00-E0D1-6143-1B3D-465B73AA0FBD}"/>
+              </a:ext>
+            </a:extLst>
+          </p:cNvPr>
+          <p:cNvSpPr>
+            <a:spLocks noGrp="1" noRot="1" noChangeAspect="1"/>
+          </p:cNvSpPr>
+          <p:nvPr>
+            <p:ph type="sldImg"/>
+          </p:nvPr>
+        </p:nvSpPr>
+        <p:spPr/>
+      </p:sp>
+      <p:sp>
+        <p:nvSpPr>
+          <p:cNvPr id="3" name="Notes Placeholder 2">
+            <a:extLst>
+              <a:ext uri="{FF2B5EF4-FFF2-40B4-BE49-F238E27FC236}">
+                <a16:creationId xmlns:a16="http://schemas.microsoft.com/office/drawing/2014/main" id="{66040391-C351-AF47-DCAE-9EB4BD63A84C}"/>
+              </a:ext>
+            </a:extLst>
+          </p:cNvPr>
+          <p:cNvSpPr>
+            <a:spLocks noGrp="1"/>
+          </p:cNvSpPr>
+          <p:nvPr>
+            <p:ph type="body" idx="1"/>
+          </p:nvPr>
+        </p:nvSpPr>
+        <p:spPr/>
+        <p:txBody>
+          <a:bodyPr/>
+          <a:lstStyle/>
+          <a:p>
+            <a:endParaRPr lang="en-US" dirty="0"/>
+          </a:p>
+        </p:txBody>
+      </p:sp>
+      <p:sp>
+        <p:nvSpPr>
+          <p:cNvPr id="4" name="Slide Number Placeholder 3">
+            <a:extLst>
+              <a:ext uri="{FF2B5EF4-FFF2-40B4-BE49-F238E27FC236}">
+                <a16:creationId xmlns:a16="http://schemas.microsoft.com/office/drawing/2014/main" id="{BE4880CD-FDA7-C930-6DD1-446363D89923}"/>
+              </a:ext>
+            </a:extLst>
+          </p:cNvPr>
+          <p:cNvSpPr>
+            <a:spLocks noGrp="1"/>
+          </p:cNvSpPr>
+          <p:nvPr>
+            <p:ph type="sldNum" sz="quarter" idx="5"/>
+          </p:nvPr>
+        </p:nvSpPr>
+        <p:spPr/>
+        <p:txBody>
+          <a:bodyPr/>
+          <a:lstStyle/>
+          <a:p>
+            <a:fld id="{51D417A5-630B-DE42-860C-96747A2C59DE}" type="slidenum">
+              <a:rPr lang="en-US" smtClean="0"/>
+              <a:t>7</a:t>
+            </a:fld>
+            <a:endParaRPr lang="en-US"/>
+          </a:p>
+        </p:txBody>
+      </p:sp>
+    </p:spTree>
+    <p:extLst>
+      <p:ext uri="{BB962C8B-B14F-4D97-AF65-F5344CB8AC3E}">
+        <p14:creationId xmlns:p14="http://schemas.microsoft.com/office/powerpoint/2010/main" val="2304698872"/>
+      </p:ext>
+    </p:extLst>
+  </p:cSld>
+  <p:clrMapOvr>
+    <a:masterClrMapping/>
+  </p:clrMapOvr>
+</p:notes>
+</file>
+
+<file path=ppt/notesSlides/notesSlide6.xml><?xml version="1.0" encoding="utf-8"?>
+<p:notes xmlns:a="http://schemas.openxmlformats.org/drawingml/2006/main" xmlns:r="http://schemas.openxmlformats.org/officeDocument/2006/relationships" xmlns:p="http://schemas.openxmlformats.org/presentationml/2006/main">
+  <p:cSld>
+    <p:spTree>
+      <p:nvGrpSpPr>
+        <p:cNvPr id="1" name="">
+          <a:extLst>
+            <a:ext uri="{FF2B5EF4-FFF2-40B4-BE49-F238E27FC236}">
+              <a16:creationId xmlns:a16="http://schemas.microsoft.com/office/drawing/2014/main" id="{23EB57D9-363C-10C9-46F0-93DABE83AB8C}"/>
+            </a:ext>
+          </a:extLst>
+        </p:cNvPr>
+        <p:cNvGrpSpPr/>
+        <p:nvPr/>
+      </p:nvGrpSpPr>
+      <p:grpSpPr>
+        <a:xfrm>
+          <a:off x="0" y="0"/>
+          <a:ext cx="0" cy="0"/>
+          <a:chOff x="0" y="0"/>
+          <a:chExt cx="0" cy="0"/>
+        </a:xfrm>
+      </p:grpSpPr>
+      <p:sp>
+        <p:nvSpPr>
+          <p:cNvPr id="2" name="Slide Image Placeholder 1">
+            <a:extLst>
+              <a:ext uri="{FF2B5EF4-FFF2-40B4-BE49-F238E27FC236}">
+                <a16:creationId xmlns:a16="http://schemas.microsoft.com/office/drawing/2014/main" id="{06F9CD82-347B-8F74-C0B9-FB19B4680BEF}"/>
+              </a:ext>
+            </a:extLst>
+          </p:cNvPr>
+          <p:cNvSpPr>
+            <a:spLocks noGrp="1" noRot="1" noChangeAspect="1"/>
+          </p:cNvSpPr>
+          <p:nvPr>
+            <p:ph type="sldImg"/>
+          </p:nvPr>
+        </p:nvSpPr>
+        <p:spPr/>
+      </p:sp>
+      <p:sp>
+        <p:nvSpPr>
+          <p:cNvPr id="3" name="Notes Placeholder 2">
+            <a:extLst>
+              <a:ext uri="{FF2B5EF4-FFF2-40B4-BE49-F238E27FC236}">
+                <a16:creationId xmlns:a16="http://schemas.microsoft.com/office/drawing/2014/main" id="{FD45EE80-34E8-60D0-6644-FA46BD02A93E}"/>
+              </a:ext>
+            </a:extLst>
+          </p:cNvPr>
+          <p:cNvSpPr>
+            <a:spLocks noGrp="1"/>
+          </p:cNvSpPr>
+          <p:nvPr>
+            <p:ph type="body" idx="1"/>
+          </p:nvPr>
+        </p:nvSpPr>
+        <p:spPr/>
+        <p:txBody>
+          <a:bodyPr/>
+          <a:lstStyle/>
+          <a:p>
+            <a:endParaRPr lang="en-US" dirty="0"/>
+          </a:p>
+        </p:txBody>
+      </p:sp>
+      <p:sp>
+        <p:nvSpPr>
+          <p:cNvPr id="4" name="Slide Number Placeholder 3">
+            <a:extLst>
+              <a:ext uri="{FF2B5EF4-FFF2-40B4-BE49-F238E27FC236}">
+                <a16:creationId xmlns:a16="http://schemas.microsoft.com/office/drawing/2014/main" id="{0465D4F8-122A-024C-6EBF-6ED21F31D3AF}"/>
+              </a:ext>
+            </a:extLst>
+          </p:cNvPr>
+          <p:cNvSpPr>
+            <a:spLocks noGrp="1"/>
+          </p:cNvSpPr>
+          <p:nvPr>
+            <p:ph type="sldNum" sz="quarter" idx="5"/>
+          </p:nvPr>
+        </p:nvSpPr>
+        <p:spPr/>
+        <p:txBody>
+          <a:bodyPr/>
+          <a:lstStyle/>
+          <a:p>
+            <a:fld id="{51D417A5-630B-DE42-860C-96747A2C59DE}" type="slidenum">
+              <a:rPr lang="en-US" smtClean="0"/>
+              <a:t>8</a:t>
+            </a:fld>
+            <a:endParaRPr lang="en-US"/>
+          </a:p>
+        </p:txBody>
+      </p:sp>
+    </p:spTree>
+    <p:extLst>
+      <p:ext uri="{BB962C8B-B14F-4D97-AF65-F5344CB8AC3E}">
+        <p14:creationId xmlns:p14="http://schemas.microsoft.com/office/powerpoint/2010/main" val="1594232496"/>
+      </p:ext>
+    </p:extLst>
+  </p:cSld>
+  <p:clrMapOvr>
+    <a:masterClrMapping/>
+  </p:clrMapOvr>
+</p:notes>
+</file>
+
+<file path=ppt/notesSlides/notesSlide7.xml><?xml version="1.0" encoding="utf-8"?>
+<p:notes xmlns:a="http://schemas.openxmlformats.org/drawingml/2006/main" xmlns:r="http://schemas.openxmlformats.org/officeDocument/2006/relationships" xmlns:p="http://schemas.openxmlformats.org/presentationml/2006/main">
+  <p:cSld>
+    <p:spTree>
+      <p:nvGrpSpPr>
+        <p:cNvPr id="1" name="">
+          <a:extLst>
+            <a:ext uri="{FF2B5EF4-FFF2-40B4-BE49-F238E27FC236}">
+              <a16:creationId xmlns:a16="http://schemas.microsoft.com/office/drawing/2014/main" id="{776572F8-C5CA-015A-A061-04B4364C2582}"/>
+            </a:ext>
+          </a:extLst>
+        </p:cNvPr>
+        <p:cNvGrpSpPr/>
+        <p:nvPr/>
+      </p:nvGrpSpPr>
+      <p:grpSpPr>
+        <a:xfrm>
+          <a:off x="0" y="0"/>
+          <a:ext cx="0" cy="0"/>
+          <a:chOff x="0" y="0"/>
+          <a:chExt cx="0" cy="0"/>
+        </a:xfrm>
+      </p:grpSpPr>
+      <p:sp>
+        <p:nvSpPr>
+          <p:cNvPr id="2" name="Slide Image Placeholder 1">
+            <a:extLst>
+              <a:ext uri="{FF2B5EF4-FFF2-40B4-BE49-F238E27FC236}">
+                <a16:creationId xmlns:a16="http://schemas.microsoft.com/office/drawing/2014/main" id="{A69A2D84-9578-995E-271D-76101CDBE94E}"/>
+              </a:ext>
+            </a:extLst>
+          </p:cNvPr>
+          <p:cNvSpPr>
+            <a:spLocks noGrp="1" noRot="1" noChangeAspect="1"/>
+          </p:cNvSpPr>
+          <p:nvPr>
+            <p:ph type="sldImg"/>
+          </p:nvPr>
+        </p:nvSpPr>
+        <p:spPr/>
+      </p:sp>
+      <p:sp>
+        <p:nvSpPr>
+          <p:cNvPr id="3" name="Notes Placeholder 2">
+            <a:extLst>
+              <a:ext uri="{FF2B5EF4-FFF2-40B4-BE49-F238E27FC236}">
+                <a16:creationId xmlns:a16="http://schemas.microsoft.com/office/drawing/2014/main" id="{B8E5F1B4-54E0-3175-A49E-EE10D561CA85}"/>
+              </a:ext>
+            </a:extLst>
+          </p:cNvPr>
+          <p:cNvSpPr>
+            <a:spLocks noGrp="1"/>
+          </p:cNvSpPr>
+          <p:nvPr>
+            <p:ph type="body" idx="1"/>
+          </p:nvPr>
+        </p:nvSpPr>
+        <p:spPr/>
+        <p:txBody>
+          <a:bodyPr/>
+          <a:lstStyle/>
+          <a:p>
+            <a:endParaRPr lang="en-US" dirty="0"/>
+          </a:p>
+        </p:txBody>
+      </p:sp>
+      <p:sp>
+        <p:nvSpPr>
+          <p:cNvPr id="4" name="Slide Number Placeholder 3">
+            <a:extLst>
+              <a:ext uri="{FF2B5EF4-FFF2-40B4-BE49-F238E27FC236}">
+                <a16:creationId xmlns:a16="http://schemas.microsoft.com/office/drawing/2014/main" id="{47114645-5A4B-85D5-0FC2-9189F221117F}"/>
+              </a:ext>
+            </a:extLst>
+          </p:cNvPr>
+          <p:cNvSpPr>
+            <a:spLocks noGrp="1"/>
+          </p:cNvSpPr>
+          <p:nvPr>
+            <p:ph type="sldNum" sz="quarter" idx="5"/>
+          </p:nvPr>
+        </p:nvSpPr>
+        <p:spPr/>
+        <p:txBody>
+          <a:bodyPr/>
+          <a:lstStyle/>
+          <a:p>
+            <a:fld id="{51D417A5-630B-DE42-860C-96747A2C59DE}" type="slidenum">
+              <a:rPr lang="en-US" smtClean="0"/>
+              <a:t>9</a:t>
+            </a:fld>
+            <a:endParaRPr lang="en-US"/>
+          </a:p>
+        </p:txBody>
+      </p:sp>
+    </p:spTree>
+    <p:extLst>
+      <p:ext uri="{BB962C8B-B14F-4D97-AF65-F5344CB8AC3E}">
+        <p14:creationId xmlns:p14="http://schemas.microsoft.com/office/powerpoint/2010/main" val="876222244"/>
+      </p:ext>
+    </p:extLst>
+  </p:cSld>
+  <p:clrMapOvr>
+    <a:masterClrMapping/>
+  </p:clrMapOvr>
+</p:notes>
+</file>
+
+<file path=ppt/notesSlides/notesSlide8.xml><?xml version="1.0" encoding="utf-8"?>
+<p:notes xmlns:a="http://schemas.openxmlformats.org/drawingml/2006/main" xmlns:r="http://schemas.openxmlformats.org/officeDocument/2006/relationships" xmlns:p="http://schemas.openxmlformats.org/presentationml/2006/main">
+  <p:cSld>
+    <p:spTree>
+      <p:nvGrpSpPr>
+        <p:cNvPr id="1" name="">
+          <a:extLst>
+            <a:ext uri="{FF2B5EF4-FFF2-40B4-BE49-F238E27FC236}">
+              <a16:creationId xmlns:a16="http://schemas.microsoft.com/office/drawing/2014/main" id="{FABD452F-64BF-74F2-F487-BD98F98B1C7C}"/>
+            </a:ext>
+          </a:extLst>
+        </p:cNvPr>
+        <p:cNvGrpSpPr/>
+        <p:nvPr/>
+      </p:nvGrpSpPr>
+      <p:grpSpPr>
+        <a:xfrm>
+          <a:off x="0" y="0"/>
+          <a:ext cx="0" cy="0"/>
+          <a:chOff x="0" y="0"/>
+          <a:chExt cx="0" cy="0"/>
+        </a:xfrm>
+      </p:grpSpPr>
+      <p:sp>
+        <p:nvSpPr>
+          <p:cNvPr id="2" name="Slide Image Placeholder 1">
+            <a:extLst>
+              <a:ext uri="{FF2B5EF4-FFF2-40B4-BE49-F238E27FC236}">
+                <a16:creationId xmlns:a16="http://schemas.microsoft.com/office/drawing/2014/main" id="{C19C6FF9-96D7-6418-8D07-A6DAF6C4DB77}"/>
+              </a:ext>
+            </a:extLst>
+          </p:cNvPr>
+          <p:cNvSpPr>
+            <a:spLocks noGrp="1" noRot="1" noChangeAspect="1"/>
+          </p:cNvSpPr>
+          <p:nvPr>
+            <p:ph type="sldImg"/>
+          </p:nvPr>
+        </p:nvSpPr>
+        <p:spPr/>
+      </p:sp>
+      <p:sp>
+        <p:nvSpPr>
+          <p:cNvPr id="3" name="Notes Placeholder 2">
+            <a:extLst>
+              <a:ext uri="{FF2B5EF4-FFF2-40B4-BE49-F238E27FC236}">
+                <a16:creationId xmlns:a16="http://schemas.microsoft.com/office/drawing/2014/main" id="{F1B833FE-56CE-DD1D-7A26-191905EF5E98}"/>
+              </a:ext>
+            </a:extLst>
+          </p:cNvPr>
+          <p:cNvSpPr>
+            <a:spLocks noGrp="1"/>
+          </p:cNvSpPr>
+          <p:nvPr>
+            <p:ph type="body" idx="1"/>
+          </p:nvPr>
+        </p:nvSpPr>
+        <p:spPr/>
+        <p:txBody>
+          <a:bodyPr/>
+          <a:lstStyle/>
+          <a:p>
+            <a:endParaRPr lang="en-US" dirty="0"/>
+          </a:p>
+        </p:txBody>
+      </p:sp>
+      <p:sp>
+        <p:nvSpPr>
+          <p:cNvPr id="4" name="Slide Number Placeholder 3">
+            <a:extLst>
+              <a:ext uri="{FF2B5EF4-FFF2-40B4-BE49-F238E27FC236}">
+                <a16:creationId xmlns:a16="http://schemas.microsoft.com/office/drawing/2014/main" id="{A1C9C558-2009-7E02-742F-C2DA6FF1C69B}"/>
+              </a:ext>
+            </a:extLst>
+          </p:cNvPr>
+          <p:cNvSpPr>
+            <a:spLocks noGrp="1"/>
+          </p:cNvSpPr>
+          <p:nvPr>
+            <p:ph type="sldNum" sz="quarter" idx="5"/>
+          </p:nvPr>
+        </p:nvSpPr>
+        <p:spPr/>
+        <p:txBody>
+          <a:bodyPr/>
+          <a:lstStyle/>
+          <a:p>
+            <a:fld id="{51D417A5-630B-DE42-860C-96747A2C59DE}" type="slidenum">
+              <a:rPr lang="en-US" smtClean="0"/>
+              <a:t>10</a:t>
+            </a:fld>
+            <a:endParaRPr lang="en-US"/>
+          </a:p>
+        </p:txBody>
+      </p:sp>
+    </p:spTree>
+    <p:extLst>
+      <p:ext uri="{BB962C8B-B14F-4D97-AF65-F5344CB8AC3E}">
+        <p14:creationId xmlns:p14="http://schemas.microsoft.com/office/powerpoint/2010/main" val="2741859464"/>
+      </p:ext>
+    </p:extLst>
+  </p:cSld>
+  <p:clrMapOvr>
+    <a:masterClrMapping/>
+  </p:clrMapOvr>
+</p:notes>
+</file>
+
+<file path=ppt/notesSlides/notesSlide9.xml><?xml version="1.0" encoding="utf-8"?>
+<p:notes xmlns:a="http://schemas.openxmlformats.org/drawingml/2006/main" xmlns:r="http://schemas.openxmlformats.org/officeDocument/2006/relationships" xmlns:p="http://schemas.openxmlformats.org/presentationml/2006/main">
+  <p:cSld>
+    <p:spTree>
+      <p:nvGrpSpPr>
+        <p:cNvPr id="1" name="">
+          <a:extLst>
+            <a:ext uri="{FF2B5EF4-FFF2-40B4-BE49-F238E27FC236}">
+              <a16:creationId xmlns:a16="http://schemas.microsoft.com/office/drawing/2014/main" id="{0D034D46-8245-4F76-5529-027E0C11671C}"/>
+            </a:ext>
+          </a:extLst>
+        </p:cNvPr>
+        <p:cNvGrpSpPr/>
+        <p:nvPr/>
+      </p:nvGrpSpPr>
+      <p:grpSpPr>
+        <a:xfrm>
+          <a:off x="0" y="0"/>
+          <a:ext cx="0" cy="0"/>
+          <a:chOff x="0" y="0"/>
+          <a:chExt cx="0" cy="0"/>
+        </a:xfrm>
+      </p:grpSpPr>
+      <p:sp>
+        <p:nvSpPr>
+          <p:cNvPr id="2" name="Slide Image Placeholder 1">
+            <a:extLst>
+              <a:ext uri="{FF2B5EF4-FFF2-40B4-BE49-F238E27FC236}">
+                <a16:creationId xmlns:a16="http://schemas.microsoft.com/office/drawing/2014/main" id="{1B870BF3-80F8-D295-DD8A-98407B111B8A}"/>
+              </a:ext>
+            </a:extLst>
+          </p:cNvPr>
+          <p:cNvSpPr>
+            <a:spLocks noGrp="1" noRot="1" noChangeAspect="1"/>
+          </p:cNvSpPr>
+          <p:nvPr>
+            <p:ph type="sldImg"/>
+          </p:nvPr>
+        </p:nvSpPr>
+        <p:spPr/>
+      </p:sp>
+      <p:sp>
+        <p:nvSpPr>
+          <p:cNvPr id="3" name="Notes Placeholder 2">
+            <a:extLst>
+              <a:ext uri="{FF2B5EF4-FFF2-40B4-BE49-F238E27FC236}">
+                <a16:creationId xmlns:a16="http://schemas.microsoft.com/office/drawing/2014/main" id="{6EFD3070-0A3C-41B0-0401-6C516CB8A2D9}"/>
+              </a:ext>
+            </a:extLst>
+          </p:cNvPr>
+          <p:cNvSpPr>
+            <a:spLocks noGrp="1"/>
+          </p:cNvSpPr>
+          <p:nvPr>
+            <p:ph type="body" idx="1"/>
+          </p:nvPr>
+        </p:nvSpPr>
+        <p:spPr/>
+        <p:txBody>
+          <a:bodyPr/>
+          <a:lstStyle/>
+          <a:p>
+            <a:endParaRPr lang="en-US" dirty="0"/>
+          </a:p>
+        </p:txBody>
+      </p:sp>
+      <p:sp>
+        <p:nvSpPr>
+          <p:cNvPr id="4" name="Slide Number Placeholder 3">
+            <a:extLst>
+              <a:ext uri="{FF2B5EF4-FFF2-40B4-BE49-F238E27FC236}">
+                <a16:creationId xmlns:a16="http://schemas.microsoft.com/office/drawing/2014/main" id="{28DEDB4D-B31C-2CF3-C36A-16CB9195DDED}"/>
+              </a:ext>
+            </a:extLst>
+          </p:cNvPr>
+          <p:cNvSpPr>
+            <a:spLocks noGrp="1"/>
+          </p:cNvSpPr>
+          <p:nvPr>
+            <p:ph type="sldNum" sz="quarter" idx="5"/>
+          </p:nvPr>
+        </p:nvSpPr>
+        <p:spPr/>
+        <p:txBody>
+          <a:bodyPr/>
+          <a:lstStyle/>
+          <a:p>
+            <a:fld id="{51D417A5-630B-DE42-860C-96747A2C59DE}" type="slidenum">
+              <a:rPr lang="en-US" smtClean="0"/>
+              <a:t>11</a:t>
+            </a:fld>
+            <a:endParaRPr lang="en-US"/>
+          </a:p>
+        </p:txBody>
+      </p:sp>
+    </p:spTree>
+    <p:extLst>
+      <p:ext uri="{BB962C8B-B14F-4D97-AF65-F5344CB8AC3E}">
+        <p14:creationId xmlns:p14="http://schemas.microsoft.com/office/powerpoint/2010/main" val="1354125370"/>
       </p:ext>
     </p:extLst>
   </p:cSld>
@@ -953,7 +2099,7 @@
           <a:p>
             <a:fld id="{19EC6F6F-998C-264C-A700-8215E11AE5BD}" type="datetimeFigureOut">
               <a:rPr lang="en-US" smtClean="0"/>
-              <a:t>3/31/26</a:t>
+              <a:t>4/6/26</a:t>
             </a:fld>
             <a:endParaRPr lang="en-US"/>
           </a:p>
@@ -1151,7 +2297,7 @@
           <a:p>
             <a:fld id="{19EC6F6F-998C-264C-A700-8215E11AE5BD}" type="datetimeFigureOut">
               <a:rPr lang="en-US" smtClean="0"/>
-              <a:t>3/31/26</a:t>
+              <a:t>4/6/26</a:t>
             </a:fld>
             <a:endParaRPr lang="en-US"/>
           </a:p>
@@ -1359,7 +2505,7 @@
           <a:p>
             <a:fld id="{19EC6F6F-998C-264C-A700-8215E11AE5BD}" type="datetimeFigureOut">
               <a:rPr lang="en-US" smtClean="0"/>
-              <a:t>3/31/26</a:t>
+              <a:t>4/6/26</a:t>
             </a:fld>
             <a:endParaRPr lang="en-US"/>
           </a:p>
@@ -1557,7 +2703,7 @@
           <a:p>
             <a:fld id="{19EC6F6F-998C-264C-A700-8215E11AE5BD}" type="datetimeFigureOut">
               <a:rPr lang="en-US" smtClean="0"/>
-              <a:t>3/31/26</a:t>
+              <a:t>4/6/26</a:t>
             </a:fld>
             <a:endParaRPr lang="en-US"/>
           </a:p>
@@ -1832,7 +2978,7 @@
           <a:p>
             <a:fld id="{19EC6F6F-998C-264C-A700-8215E11AE5BD}" type="datetimeFigureOut">
               <a:rPr lang="en-US" smtClean="0"/>
-              <a:t>3/31/26</a:t>
+              <a:t>4/6/26</a:t>
             </a:fld>
             <a:endParaRPr lang="en-US"/>
           </a:p>
@@ -2097,7 +3243,7 @@
           <a:p>
             <a:fld id="{19EC6F6F-998C-264C-A700-8215E11AE5BD}" type="datetimeFigureOut">
               <a:rPr lang="en-US" smtClean="0"/>
-              <a:t>3/31/26</a:t>
+              <a:t>4/6/26</a:t>
             </a:fld>
             <a:endParaRPr lang="en-US"/>
           </a:p>
@@ -2509,7 +3655,7 @@
           <a:p>
             <a:fld id="{19EC6F6F-998C-264C-A700-8215E11AE5BD}" type="datetimeFigureOut">
               <a:rPr lang="en-US" smtClean="0"/>
-              <a:t>3/31/26</a:t>
+              <a:t>4/6/26</a:t>
             </a:fld>
             <a:endParaRPr lang="en-US"/>
           </a:p>
@@ -2650,7 +3796,7 @@
           <a:p>
             <a:fld id="{19EC6F6F-998C-264C-A700-8215E11AE5BD}" type="datetimeFigureOut">
               <a:rPr lang="en-US" smtClean="0"/>
-              <a:t>3/31/26</a:t>
+              <a:t>4/6/26</a:t>
             </a:fld>
             <a:endParaRPr lang="en-US"/>
           </a:p>
@@ -2763,7 +3909,7 @@
           <a:p>
             <a:fld id="{19EC6F6F-998C-264C-A700-8215E11AE5BD}" type="datetimeFigureOut">
               <a:rPr lang="en-US" smtClean="0"/>
-              <a:t>3/31/26</a:t>
+              <a:t>4/6/26</a:t>
             </a:fld>
             <a:endParaRPr lang="en-US"/>
           </a:p>
@@ -3074,7 +4220,7 @@
           <a:p>
             <a:fld id="{19EC6F6F-998C-264C-A700-8215E11AE5BD}" type="datetimeFigureOut">
               <a:rPr lang="en-US" smtClean="0"/>
-              <a:t>3/31/26</a:t>
+              <a:t>4/6/26</a:t>
             </a:fld>
             <a:endParaRPr lang="en-US"/>
           </a:p>
@@ -3362,7 +4508,7 @@
           <a:p>
             <a:fld id="{19EC6F6F-998C-264C-A700-8215E11AE5BD}" type="datetimeFigureOut">
               <a:rPr lang="en-US" smtClean="0"/>
-              <a:t>3/31/26</a:t>
+              <a:t>4/6/26</a:t>
             </a:fld>
             <a:endParaRPr lang="en-US"/>
           </a:p>
@@ -3603,7 +4749,7 @@
           <a:p>
             <a:fld id="{19EC6F6F-998C-264C-A700-8215E11AE5BD}" type="datetimeFigureOut">
               <a:rPr lang="en-US" smtClean="0"/>
-              <a:t>3/31/26</a:t>
+              <a:t>4/6/26</a:t>
             </a:fld>
             <a:endParaRPr lang="en-US"/>
           </a:p>
@@ -4025,6 +5171,3007 @@
           <p:cNvPr id="2" name="Title 1">
             <a:extLst>
               <a:ext uri="{FF2B5EF4-FFF2-40B4-BE49-F238E27FC236}">
+                <a16:creationId xmlns:a16="http://schemas.microsoft.com/office/drawing/2014/main" id="{153415BC-5788-8EC6-12AC-481C31DFB6A3}"/>
+              </a:ext>
+            </a:extLst>
+          </p:cNvPr>
+          <p:cNvSpPr>
+            <a:spLocks noGrp="1"/>
+          </p:cNvSpPr>
+          <p:nvPr>
+            <p:ph type="title"/>
+          </p:nvPr>
+        </p:nvSpPr>
+        <p:spPr/>
+        <p:txBody>
+          <a:bodyPr/>
+          <a:lstStyle/>
+          <a:p>
+            <a:r>
+              <a:rPr lang="en-US" dirty="0"/>
+              <a:t>Overview of the day</a:t>
+            </a:r>
+          </a:p>
+        </p:txBody>
+      </p:sp>
+      <p:sp>
+        <p:nvSpPr>
+          <p:cNvPr id="3" name="Content Placeholder 2">
+            <a:extLst>
+              <a:ext uri="{FF2B5EF4-FFF2-40B4-BE49-F238E27FC236}">
+                <a16:creationId xmlns:a16="http://schemas.microsoft.com/office/drawing/2014/main" id="{907FD6AA-9804-3A4F-934C-265DF31BAADB}"/>
+              </a:ext>
+            </a:extLst>
+          </p:cNvPr>
+          <p:cNvSpPr>
+            <a:spLocks noGrp="1"/>
+          </p:cNvSpPr>
+          <p:nvPr>
+            <p:ph idx="1"/>
+          </p:nvPr>
+        </p:nvSpPr>
+        <p:spPr/>
+        <p:txBody>
+          <a:bodyPr/>
+          <a:lstStyle/>
+          <a:p>
+            <a:endParaRPr lang="en-US"/>
+          </a:p>
+        </p:txBody>
+      </p:sp>
+    </p:spTree>
+    <p:extLst>
+      <p:ext uri="{BB962C8B-B14F-4D97-AF65-F5344CB8AC3E}">
+        <p14:creationId xmlns:p14="http://schemas.microsoft.com/office/powerpoint/2010/main" val="2376821870"/>
+      </p:ext>
+    </p:extLst>
+  </p:cSld>
+  <p:clrMapOvr>
+    <a:masterClrMapping/>
+  </p:clrMapOvr>
+</p:sld>
+</file>
+
+<file path=ppt/slides/slide10.xml><?xml version="1.0" encoding="utf-8"?>
+<p:sld xmlns:a="http://schemas.openxmlformats.org/drawingml/2006/main" xmlns:r="http://schemas.openxmlformats.org/officeDocument/2006/relationships" xmlns:p="http://schemas.openxmlformats.org/presentationml/2006/main">
+  <p:cSld>
+    <p:spTree>
+      <p:nvGrpSpPr>
+        <p:cNvPr id="1" name="">
+          <a:extLst>
+            <a:ext uri="{FF2B5EF4-FFF2-40B4-BE49-F238E27FC236}">
+              <a16:creationId xmlns:a16="http://schemas.microsoft.com/office/drawing/2014/main" id="{36C20D7A-E356-E09C-8D7C-C12B41C1C3E4}"/>
+            </a:ext>
+          </a:extLst>
+        </p:cNvPr>
+        <p:cNvGrpSpPr/>
+        <p:nvPr/>
+      </p:nvGrpSpPr>
+      <p:grpSpPr>
+        <a:xfrm>
+          <a:off x="0" y="0"/>
+          <a:ext cx="0" cy="0"/>
+          <a:chOff x="0" y="0"/>
+          <a:chExt cx="0" cy="0"/>
+        </a:xfrm>
+      </p:grpSpPr>
+      <p:sp>
+        <p:nvSpPr>
+          <p:cNvPr id="2" name="Title 1">
+            <a:extLst>
+              <a:ext uri="{FF2B5EF4-FFF2-40B4-BE49-F238E27FC236}">
+                <a16:creationId xmlns:a16="http://schemas.microsoft.com/office/drawing/2014/main" id="{BDE5916C-4F7D-7104-2E01-C51C9B8F3AF9}"/>
+              </a:ext>
+            </a:extLst>
+          </p:cNvPr>
+          <p:cNvSpPr>
+            <a:spLocks noGrp="1"/>
+          </p:cNvSpPr>
+          <p:nvPr>
+            <p:ph type="title"/>
+          </p:nvPr>
+        </p:nvSpPr>
+        <p:spPr/>
+        <p:txBody>
+          <a:bodyPr/>
+          <a:lstStyle/>
+          <a:p>
+            <a:r>
+              <a:rPr lang="en-US" dirty="0"/>
+              <a:t>Modeling mindsets:</a:t>
+            </a:r>
+          </a:p>
+        </p:txBody>
+      </p:sp>
+      <p:sp>
+        <p:nvSpPr>
+          <p:cNvPr id="5" name="TextBox 4">
+            <a:extLst>
+              <a:ext uri="{FF2B5EF4-FFF2-40B4-BE49-F238E27FC236}">
+                <a16:creationId xmlns:a16="http://schemas.microsoft.com/office/drawing/2014/main" id="{E9BBFA52-33A5-9A67-76AD-73E601494AD5}"/>
+              </a:ext>
+            </a:extLst>
+          </p:cNvPr>
+          <p:cNvSpPr txBox="1"/>
+          <p:nvPr/>
+        </p:nvSpPr>
+        <p:spPr>
+          <a:xfrm>
+            <a:off x="4537276" y="6488668"/>
+            <a:ext cx="8191983" cy="369332"/>
+          </a:xfrm>
+          <a:prstGeom prst="rect">
+            <a:avLst/>
+          </a:prstGeom>
+          <a:noFill/>
+        </p:spPr>
+        <p:txBody>
+          <a:bodyPr wrap="square">
+            <a:spAutoFit/>
+          </a:bodyPr>
+          <a:lstStyle/>
+          <a:p>
+            <a:r>
+              <a:rPr lang="en-US" dirty="0">
+                <a:hlinkClick r:id="rId3"/>
+              </a:rPr>
+              <a:t>Molnar, C. 2023. Modeling mindsets: the many cultures of learning from data.</a:t>
+            </a:r>
+            <a:endParaRPr lang="en-US" dirty="0"/>
+          </a:p>
+        </p:txBody>
+      </p:sp>
+      <p:pic>
+        <p:nvPicPr>
+          <p:cNvPr id="4" name="Picture 3">
+            <a:extLst>
+              <a:ext uri="{FF2B5EF4-FFF2-40B4-BE49-F238E27FC236}">
+                <a16:creationId xmlns:a16="http://schemas.microsoft.com/office/drawing/2014/main" id="{636E94A8-CD25-4464-C3DE-1303F99BC23D}"/>
+              </a:ext>
+            </a:extLst>
+          </p:cNvPr>
+          <p:cNvPicPr>
+            <a:picLocks noChangeAspect="1"/>
+          </p:cNvPicPr>
+          <p:nvPr/>
+        </p:nvPicPr>
+        <p:blipFill>
+          <a:blip r:embed="rId4"/>
+          <a:srcRect l="50001" r="105" b="11454"/>
+          <a:stretch>
+            <a:fillRect/>
+          </a:stretch>
+        </p:blipFill>
+        <p:spPr>
+          <a:xfrm>
+            <a:off x="6096000" y="1806292"/>
+            <a:ext cx="3877994" cy="3830580"/>
+          </a:xfrm>
+          <a:prstGeom prst="rect">
+            <a:avLst/>
+          </a:prstGeom>
+        </p:spPr>
+      </p:pic>
+    </p:spTree>
+    <p:extLst>
+      <p:ext uri="{BB962C8B-B14F-4D97-AF65-F5344CB8AC3E}">
+        <p14:creationId xmlns:p14="http://schemas.microsoft.com/office/powerpoint/2010/main" val="3466779110"/>
+      </p:ext>
+    </p:extLst>
+  </p:cSld>
+  <p:clrMapOvr>
+    <a:masterClrMapping/>
+  </p:clrMapOvr>
+</p:sld>
+</file>
+
+<file path=ppt/slides/slide11.xml><?xml version="1.0" encoding="utf-8"?>
+<p:sld xmlns:a="http://schemas.openxmlformats.org/drawingml/2006/main" xmlns:r="http://schemas.openxmlformats.org/officeDocument/2006/relationships" xmlns:p="http://schemas.openxmlformats.org/presentationml/2006/main">
+  <p:cSld>
+    <p:spTree>
+      <p:nvGrpSpPr>
+        <p:cNvPr id="1" name="">
+          <a:extLst>
+            <a:ext uri="{FF2B5EF4-FFF2-40B4-BE49-F238E27FC236}">
+              <a16:creationId xmlns:a16="http://schemas.microsoft.com/office/drawing/2014/main" id="{05D726B6-1EBD-11BD-B3CE-D97228E08DB6}"/>
+            </a:ext>
+          </a:extLst>
+        </p:cNvPr>
+        <p:cNvGrpSpPr/>
+        <p:nvPr/>
+      </p:nvGrpSpPr>
+      <p:grpSpPr>
+        <a:xfrm>
+          <a:off x="0" y="0"/>
+          <a:ext cx="0" cy="0"/>
+          <a:chOff x="0" y="0"/>
+          <a:chExt cx="0" cy="0"/>
+        </a:xfrm>
+      </p:grpSpPr>
+      <p:sp>
+        <p:nvSpPr>
+          <p:cNvPr id="2" name="Title 1">
+            <a:extLst>
+              <a:ext uri="{FF2B5EF4-FFF2-40B4-BE49-F238E27FC236}">
+                <a16:creationId xmlns:a16="http://schemas.microsoft.com/office/drawing/2014/main" id="{18672426-5E4D-1F59-3F62-A5EA72DE2EEF}"/>
+              </a:ext>
+            </a:extLst>
+          </p:cNvPr>
+          <p:cNvSpPr>
+            <a:spLocks noGrp="1"/>
+          </p:cNvSpPr>
+          <p:nvPr>
+            <p:ph type="title"/>
+          </p:nvPr>
+        </p:nvSpPr>
+        <p:spPr/>
+        <p:txBody>
+          <a:bodyPr/>
+          <a:lstStyle/>
+          <a:p>
+            <a:r>
+              <a:rPr lang="en-US" dirty="0"/>
+              <a:t>Modeling mindsets:</a:t>
+            </a:r>
+          </a:p>
+        </p:txBody>
+      </p:sp>
+      <p:sp>
+        <p:nvSpPr>
+          <p:cNvPr id="5" name="TextBox 4">
+            <a:extLst>
+              <a:ext uri="{FF2B5EF4-FFF2-40B4-BE49-F238E27FC236}">
+                <a16:creationId xmlns:a16="http://schemas.microsoft.com/office/drawing/2014/main" id="{A034922E-346C-1E07-EE7A-114E009E0C79}"/>
+              </a:ext>
+            </a:extLst>
+          </p:cNvPr>
+          <p:cNvSpPr txBox="1"/>
+          <p:nvPr/>
+        </p:nvSpPr>
+        <p:spPr>
+          <a:xfrm>
+            <a:off x="4537276" y="6488668"/>
+            <a:ext cx="8191983" cy="369332"/>
+          </a:xfrm>
+          <a:prstGeom prst="rect">
+            <a:avLst/>
+          </a:prstGeom>
+          <a:noFill/>
+        </p:spPr>
+        <p:txBody>
+          <a:bodyPr wrap="square">
+            <a:spAutoFit/>
+          </a:bodyPr>
+          <a:lstStyle/>
+          <a:p>
+            <a:r>
+              <a:rPr lang="en-US" dirty="0">
+                <a:hlinkClick r:id="rId3"/>
+              </a:rPr>
+              <a:t>Molnar, C. 2023. Modeling mindsets: the many cultures of learning from data.</a:t>
+            </a:r>
+            <a:endParaRPr lang="en-US" dirty="0"/>
+          </a:p>
+        </p:txBody>
+      </p:sp>
+      <p:pic>
+        <p:nvPicPr>
+          <p:cNvPr id="4" name="Picture 3">
+            <a:extLst>
+              <a:ext uri="{FF2B5EF4-FFF2-40B4-BE49-F238E27FC236}">
+                <a16:creationId xmlns:a16="http://schemas.microsoft.com/office/drawing/2014/main" id="{3BF73455-CDFF-5FBF-6E98-120C69A443C6}"/>
+              </a:ext>
+            </a:extLst>
+          </p:cNvPr>
+          <p:cNvPicPr>
+            <a:picLocks noChangeAspect="1"/>
+          </p:cNvPicPr>
+          <p:nvPr/>
+        </p:nvPicPr>
+        <p:blipFill>
+          <a:blip r:embed="rId4"/>
+          <a:srcRect l="50001" r="105" b="11454"/>
+          <a:stretch>
+            <a:fillRect/>
+          </a:stretch>
+        </p:blipFill>
+        <p:spPr>
+          <a:xfrm>
+            <a:off x="6096000" y="1806292"/>
+            <a:ext cx="3877994" cy="3830580"/>
+          </a:xfrm>
+          <a:prstGeom prst="rect">
+            <a:avLst/>
+          </a:prstGeom>
+        </p:spPr>
+      </p:pic>
+      <p:sp>
+        <p:nvSpPr>
+          <p:cNvPr id="16" name="TextBox 15">
+            <a:extLst>
+              <a:ext uri="{FF2B5EF4-FFF2-40B4-BE49-F238E27FC236}">
+                <a16:creationId xmlns:a16="http://schemas.microsoft.com/office/drawing/2014/main" id="{25C7E0D8-7272-1E8C-C7B5-5CA09CF5B2B9}"/>
+              </a:ext>
+            </a:extLst>
+          </p:cNvPr>
+          <p:cNvSpPr txBox="1"/>
+          <p:nvPr/>
+        </p:nvSpPr>
+        <p:spPr>
+          <a:xfrm>
+            <a:off x="396055" y="2161337"/>
+            <a:ext cx="4629778" cy="830997"/>
+          </a:xfrm>
+          <a:prstGeom prst="rect">
+            <a:avLst/>
+          </a:prstGeom>
+          <a:noFill/>
+        </p:spPr>
+        <p:txBody>
+          <a:bodyPr wrap="square" rtlCol="0">
+            <a:spAutoFit/>
+          </a:bodyPr>
+          <a:lstStyle/>
+          <a:p>
+            <a:r>
+              <a:rPr lang="en-US" sz="2400" b="1" dirty="0"/>
+              <a:t>Machine learning</a:t>
+            </a:r>
+            <a:r>
+              <a:rPr lang="en-US" sz="2400" dirty="0"/>
+              <a:t>: use algorithms to solve a task</a:t>
+            </a:r>
+          </a:p>
+        </p:txBody>
+      </p:sp>
+    </p:spTree>
+    <p:extLst>
+      <p:ext uri="{BB962C8B-B14F-4D97-AF65-F5344CB8AC3E}">
+        <p14:creationId xmlns:p14="http://schemas.microsoft.com/office/powerpoint/2010/main" val="2022334706"/>
+      </p:ext>
+    </p:extLst>
+  </p:cSld>
+  <p:clrMapOvr>
+    <a:masterClrMapping/>
+  </p:clrMapOvr>
+</p:sld>
+</file>
+
+<file path=ppt/slides/slide12.xml><?xml version="1.0" encoding="utf-8"?>
+<p:sld xmlns:a="http://schemas.openxmlformats.org/drawingml/2006/main" xmlns:r="http://schemas.openxmlformats.org/officeDocument/2006/relationships" xmlns:p="http://schemas.openxmlformats.org/presentationml/2006/main">
+  <p:cSld>
+    <p:spTree>
+      <p:nvGrpSpPr>
+        <p:cNvPr id="1" name="">
+          <a:extLst>
+            <a:ext uri="{FF2B5EF4-FFF2-40B4-BE49-F238E27FC236}">
+              <a16:creationId xmlns:a16="http://schemas.microsoft.com/office/drawing/2014/main" id="{18346388-3233-4589-3D0C-8F62CA692FAA}"/>
+            </a:ext>
+          </a:extLst>
+        </p:cNvPr>
+        <p:cNvGrpSpPr/>
+        <p:nvPr/>
+      </p:nvGrpSpPr>
+      <p:grpSpPr>
+        <a:xfrm>
+          <a:off x="0" y="0"/>
+          <a:ext cx="0" cy="0"/>
+          <a:chOff x="0" y="0"/>
+          <a:chExt cx="0" cy="0"/>
+        </a:xfrm>
+      </p:grpSpPr>
+      <p:sp>
+        <p:nvSpPr>
+          <p:cNvPr id="2" name="Title 1">
+            <a:extLst>
+              <a:ext uri="{FF2B5EF4-FFF2-40B4-BE49-F238E27FC236}">
+                <a16:creationId xmlns:a16="http://schemas.microsoft.com/office/drawing/2014/main" id="{BFD0C2E7-7C1C-79C6-8168-05DBF23EC46B}"/>
+              </a:ext>
+            </a:extLst>
+          </p:cNvPr>
+          <p:cNvSpPr>
+            <a:spLocks noGrp="1"/>
+          </p:cNvSpPr>
+          <p:nvPr>
+            <p:ph type="title"/>
+          </p:nvPr>
+        </p:nvSpPr>
+        <p:spPr/>
+        <p:txBody>
+          <a:bodyPr/>
+          <a:lstStyle/>
+          <a:p>
+            <a:r>
+              <a:rPr lang="en-US" dirty="0"/>
+              <a:t>Modeling mindsets:</a:t>
+            </a:r>
+          </a:p>
+        </p:txBody>
+      </p:sp>
+      <p:sp>
+        <p:nvSpPr>
+          <p:cNvPr id="5" name="TextBox 4">
+            <a:extLst>
+              <a:ext uri="{FF2B5EF4-FFF2-40B4-BE49-F238E27FC236}">
+                <a16:creationId xmlns:a16="http://schemas.microsoft.com/office/drawing/2014/main" id="{FE73C8AD-5725-6CB8-7891-D57232AE9660}"/>
+              </a:ext>
+            </a:extLst>
+          </p:cNvPr>
+          <p:cNvSpPr txBox="1"/>
+          <p:nvPr/>
+        </p:nvSpPr>
+        <p:spPr>
+          <a:xfrm>
+            <a:off x="4537276" y="6488668"/>
+            <a:ext cx="8191983" cy="369332"/>
+          </a:xfrm>
+          <a:prstGeom prst="rect">
+            <a:avLst/>
+          </a:prstGeom>
+          <a:noFill/>
+        </p:spPr>
+        <p:txBody>
+          <a:bodyPr wrap="square">
+            <a:spAutoFit/>
+          </a:bodyPr>
+          <a:lstStyle/>
+          <a:p>
+            <a:r>
+              <a:rPr lang="en-US" dirty="0">
+                <a:hlinkClick r:id="rId3"/>
+              </a:rPr>
+              <a:t>Molnar, C. 2023. Modeling mindsets: the many cultures of learning from data.</a:t>
+            </a:r>
+            <a:endParaRPr lang="en-US" dirty="0"/>
+          </a:p>
+        </p:txBody>
+      </p:sp>
+      <p:pic>
+        <p:nvPicPr>
+          <p:cNvPr id="4" name="Picture 3">
+            <a:extLst>
+              <a:ext uri="{FF2B5EF4-FFF2-40B4-BE49-F238E27FC236}">
+                <a16:creationId xmlns:a16="http://schemas.microsoft.com/office/drawing/2014/main" id="{74D71E5A-8D80-7F7B-8FF0-322EB79941A4}"/>
+              </a:ext>
+            </a:extLst>
+          </p:cNvPr>
+          <p:cNvPicPr>
+            <a:picLocks noChangeAspect="1"/>
+          </p:cNvPicPr>
+          <p:nvPr/>
+        </p:nvPicPr>
+        <p:blipFill>
+          <a:blip r:embed="rId4"/>
+          <a:srcRect l="50001" r="105" b="11454"/>
+          <a:stretch>
+            <a:fillRect/>
+          </a:stretch>
+        </p:blipFill>
+        <p:spPr>
+          <a:xfrm>
+            <a:off x="6096000" y="1806292"/>
+            <a:ext cx="3877994" cy="3830580"/>
+          </a:xfrm>
+          <a:prstGeom prst="rect">
+            <a:avLst/>
+          </a:prstGeom>
+        </p:spPr>
+      </p:pic>
+      <p:sp>
+        <p:nvSpPr>
+          <p:cNvPr id="16" name="TextBox 15">
+            <a:extLst>
+              <a:ext uri="{FF2B5EF4-FFF2-40B4-BE49-F238E27FC236}">
+                <a16:creationId xmlns:a16="http://schemas.microsoft.com/office/drawing/2014/main" id="{DCBA6C73-1ACC-2146-44DC-7101F574A24F}"/>
+              </a:ext>
+            </a:extLst>
+          </p:cNvPr>
+          <p:cNvSpPr txBox="1"/>
+          <p:nvPr/>
+        </p:nvSpPr>
+        <p:spPr>
+          <a:xfrm>
+            <a:off x="396055" y="2161337"/>
+            <a:ext cx="4629778" cy="830997"/>
+          </a:xfrm>
+          <a:prstGeom prst="rect">
+            <a:avLst/>
+          </a:prstGeom>
+          <a:noFill/>
+        </p:spPr>
+        <p:txBody>
+          <a:bodyPr wrap="square" rtlCol="0">
+            <a:spAutoFit/>
+          </a:bodyPr>
+          <a:lstStyle/>
+          <a:p>
+            <a:r>
+              <a:rPr lang="en-US" sz="2400" b="1" dirty="0"/>
+              <a:t>Machine learning</a:t>
+            </a:r>
+            <a:r>
+              <a:rPr lang="en-US" sz="2400" dirty="0"/>
+              <a:t>: use algorithms to solve a task</a:t>
+            </a:r>
+          </a:p>
+        </p:txBody>
+      </p:sp>
+      <p:sp>
+        <p:nvSpPr>
+          <p:cNvPr id="3" name="TextBox 2">
+            <a:extLst>
+              <a:ext uri="{FF2B5EF4-FFF2-40B4-BE49-F238E27FC236}">
+                <a16:creationId xmlns:a16="http://schemas.microsoft.com/office/drawing/2014/main" id="{6D2D8404-57E1-C95D-EBC3-89824E57B0D7}"/>
+              </a:ext>
+            </a:extLst>
+          </p:cNvPr>
+          <p:cNvSpPr txBox="1"/>
+          <p:nvPr/>
+        </p:nvSpPr>
+        <p:spPr>
+          <a:xfrm>
+            <a:off x="9973993" y="1772369"/>
+            <a:ext cx="1786597" cy="1015663"/>
+          </a:xfrm>
+          <a:prstGeom prst="rect">
+            <a:avLst/>
+          </a:prstGeom>
+          <a:noFill/>
+        </p:spPr>
+        <p:txBody>
+          <a:bodyPr wrap="square" rtlCol="0">
+            <a:spAutoFit/>
+          </a:bodyPr>
+          <a:lstStyle/>
+          <a:p>
+            <a:r>
+              <a:rPr lang="en-US" sz="2000" dirty="0">
+                <a:solidFill>
+                  <a:schemeClr val="accent2">
+                    <a:lumMod val="75000"/>
+                  </a:schemeClr>
+                </a:solidFill>
+              </a:rPr>
+              <a:t>Make 6 groups based on these data</a:t>
+            </a:r>
+          </a:p>
+        </p:txBody>
+      </p:sp>
+    </p:spTree>
+    <p:extLst>
+      <p:ext uri="{BB962C8B-B14F-4D97-AF65-F5344CB8AC3E}">
+        <p14:creationId xmlns:p14="http://schemas.microsoft.com/office/powerpoint/2010/main" val="554990434"/>
+      </p:ext>
+    </p:extLst>
+  </p:cSld>
+  <p:clrMapOvr>
+    <a:masterClrMapping/>
+  </p:clrMapOvr>
+</p:sld>
+</file>
+
+<file path=ppt/slides/slide13.xml><?xml version="1.0" encoding="utf-8"?>
+<p:sld xmlns:a="http://schemas.openxmlformats.org/drawingml/2006/main" xmlns:r="http://schemas.openxmlformats.org/officeDocument/2006/relationships" xmlns:p="http://schemas.openxmlformats.org/presentationml/2006/main">
+  <p:cSld>
+    <p:spTree>
+      <p:nvGrpSpPr>
+        <p:cNvPr id="1" name="">
+          <a:extLst>
+            <a:ext uri="{FF2B5EF4-FFF2-40B4-BE49-F238E27FC236}">
+              <a16:creationId xmlns:a16="http://schemas.microsoft.com/office/drawing/2014/main" id="{76E789F1-1EBE-A2EF-AFA5-B5C7CF5E5498}"/>
+            </a:ext>
+          </a:extLst>
+        </p:cNvPr>
+        <p:cNvGrpSpPr/>
+        <p:nvPr/>
+      </p:nvGrpSpPr>
+      <p:grpSpPr>
+        <a:xfrm>
+          <a:off x="0" y="0"/>
+          <a:ext cx="0" cy="0"/>
+          <a:chOff x="0" y="0"/>
+          <a:chExt cx="0" cy="0"/>
+        </a:xfrm>
+      </p:grpSpPr>
+      <p:sp>
+        <p:nvSpPr>
+          <p:cNvPr id="2" name="Title 1">
+            <a:extLst>
+              <a:ext uri="{FF2B5EF4-FFF2-40B4-BE49-F238E27FC236}">
+                <a16:creationId xmlns:a16="http://schemas.microsoft.com/office/drawing/2014/main" id="{AE35D54D-7755-4656-46E1-46EDFC1364F0}"/>
+              </a:ext>
+            </a:extLst>
+          </p:cNvPr>
+          <p:cNvSpPr>
+            <a:spLocks noGrp="1"/>
+          </p:cNvSpPr>
+          <p:nvPr>
+            <p:ph type="title"/>
+          </p:nvPr>
+        </p:nvSpPr>
+        <p:spPr/>
+        <p:txBody>
+          <a:bodyPr/>
+          <a:lstStyle/>
+          <a:p>
+            <a:r>
+              <a:rPr lang="en-US" dirty="0"/>
+              <a:t>Modeling mindsets:</a:t>
+            </a:r>
+          </a:p>
+        </p:txBody>
+      </p:sp>
+      <p:sp>
+        <p:nvSpPr>
+          <p:cNvPr id="5" name="TextBox 4">
+            <a:extLst>
+              <a:ext uri="{FF2B5EF4-FFF2-40B4-BE49-F238E27FC236}">
+                <a16:creationId xmlns:a16="http://schemas.microsoft.com/office/drawing/2014/main" id="{BA5CD8AF-C993-A242-E4CA-AEF11A2002C8}"/>
+              </a:ext>
+            </a:extLst>
+          </p:cNvPr>
+          <p:cNvSpPr txBox="1"/>
+          <p:nvPr/>
+        </p:nvSpPr>
+        <p:spPr>
+          <a:xfrm>
+            <a:off x="4537276" y="6488668"/>
+            <a:ext cx="8191983" cy="369332"/>
+          </a:xfrm>
+          <a:prstGeom prst="rect">
+            <a:avLst/>
+          </a:prstGeom>
+          <a:noFill/>
+        </p:spPr>
+        <p:txBody>
+          <a:bodyPr wrap="square">
+            <a:spAutoFit/>
+          </a:bodyPr>
+          <a:lstStyle/>
+          <a:p>
+            <a:r>
+              <a:rPr lang="en-US" dirty="0">
+                <a:hlinkClick r:id="rId3"/>
+              </a:rPr>
+              <a:t>Molnar, C. 2023. Modeling mindsets: the many cultures of learning from data.</a:t>
+            </a:r>
+            <a:endParaRPr lang="en-US" dirty="0"/>
+          </a:p>
+        </p:txBody>
+      </p:sp>
+      <p:pic>
+        <p:nvPicPr>
+          <p:cNvPr id="4" name="Picture 3">
+            <a:extLst>
+              <a:ext uri="{FF2B5EF4-FFF2-40B4-BE49-F238E27FC236}">
+                <a16:creationId xmlns:a16="http://schemas.microsoft.com/office/drawing/2014/main" id="{3BFF7966-A38B-4CA7-49BC-8134D7A4B98B}"/>
+              </a:ext>
+            </a:extLst>
+          </p:cNvPr>
+          <p:cNvPicPr>
+            <a:picLocks noChangeAspect="1"/>
+          </p:cNvPicPr>
+          <p:nvPr/>
+        </p:nvPicPr>
+        <p:blipFill>
+          <a:blip r:embed="rId4"/>
+          <a:srcRect l="50001" r="105" b="11454"/>
+          <a:stretch>
+            <a:fillRect/>
+          </a:stretch>
+        </p:blipFill>
+        <p:spPr>
+          <a:xfrm>
+            <a:off x="6096000" y="1806292"/>
+            <a:ext cx="3877994" cy="3830580"/>
+          </a:xfrm>
+          <a:prstGeom prst="rect">
+            <a:avLst/>
+          </a:prstGeom>
+        </p:spPr>
+      </p:pic>
+      <p:sp>
+        <p:nvSpPr>
+          <p:cNvPr id="16" name="TextBox 15">
+            <a:extLst>
+              <a:ext uri="{FF2B5EF4-FFF2-40B4-BE49-F238E27FC236}">
+                <a16:creationId xmlns:a16="http://schemas.microsoft.com/office/drawing/2014/main" id="{ED6C9061-0143-B9EB-58C1-72D7CB1BCD3A}"/>
+              </a:ext>
+            </a:extLst>
+          </p:cNvPr>
+          <p:cNvSpPr txBox="1"/>
+          <p:nvPr/>
+        </p:nvSpPr>
+        <p:spPr>
+          <a:xfrm>
+            <a:off x="396055" y="2161337"/>
+            <a:ext cx="4629778" cy="830997"/>
+          </a:xfrm>
+          <a:prstGeom prst="rect">
+            <a:avLst/>
+          </a:prstGeom>
+          <a:noFill/>
+        </p:spPr>
+        <p:txBody>
+          <a:bodyPr wrap="square" rtlCol="0">
+            <a:spAutoFit/>
+          </a:bodyPr>
+          <a:lstStyle/>
+          <a:p>
+            <a:r>
+              <a:rPr lang="en-US" sz="2400" b="1" dirty="0"/>
+              <a:t>Machine learning</a:t>
+            </a:r>
+            <a:r>
+              <a:rPr lang="en-US" sz="2400" dirty="0"/>
+              <a:t>: use algorithms to solve a task</a:t>
+            </a:r>
+          </a:p>
+        </p:txBody>
+      </p:sp>
+      <p:sp>
+        <p:nvSpPr>
+          <p:cNvPr id="3" name="TextBox 2">
+            <a:extLst>
+              <a:ext uri="{FF2B5EF4-FFF2-40B4-BE49-F238E27FC236}">
+                <a16:creationId xmlns:a16="http://schemas.microsoft.com/office/drawing/2014/main" id="{16E5BF2A-8730-B64B-3A40-BE49BE9B5200}"/>
+              </a:ext>
+            </a:extLst>
+          </p:cNvPr>
+          <p:cNvSpPr txBox="1"/>
+          <p:nvPr/>
+        </p:nvSpPr>
+        <p:spPr>
+          <a:xfrm>
+            <a:off x="9973993" y="1772369"/>
+            <a:ext cx="1786597" cy="1015663"/>
+          </a:xfrm>
+          <a:prstGeom prst="rect">
+            <a:avLst/>
+          </a:prstGeom>
+          <a:noFill/>
+        </p:spPr>
+        <p:txBody>
+          <a:bodyPr wrap="square" rtlCol="0">
+            <a:spAutoFit/>
+          </a:bodyPr>
+          <a:lstStyle/>
+          <a:p>
+            <a:r>
+              <a:rPr lang="en-US" sz="2000" dirty="0">
+                <a:solidFill>
+                  <a:schemeClr val="accent2">
+                    <a:lumMod val="75000"/>
+                  </a:schemeClr>
+                </a:solidFill>
+              </a:rPr>
+              <a:t>Make 6 groups based on these data</a:t>
+            </a:r>
+          </a:p>
+        </p:txBody>
+      </p:sp>
+      <p:sp>
+        <p:nvSpPr>
+          <p:cNvPr id="6" name="TextBox 5">
+            <a:extLst>
+              <a:ext uri="{FF2B5EF4-FFF2-40B4-BE49-F238E27FC236}">
+                <a16:creationId xmlns:a16="http://schemas.microsoft.com/office/drawing/2014/main" id="{5502B0E2-F354-D4BA-2BCF-C70D99956F52}"/>
+              </a:ext>
+            </a:extLst>
+          </p:cNvPr>
+          <p:cNvSpPr txBox="1"/>
+          <p:nvPr/>
+        </p:nvSpPr>
+        <p:spPr>
+          <a:xfrm>
+            <a:off x="9973994" y="4679190"/>
+            <a:ext cx="1786597" cy="707886"/>
+          </a:xfrm>
+          <a:prstGeom prst="rect">
+            <a:avLst/>
+          </a:prstGeom>
+          <a:noFill/>
+        </p:spPr>
+        <p:txBody>
+          <a:bodyPr wrap="square" rtlCol="0">
+            <a:spAutoFit/>
+          </a:bodyPr>
+          <a:lstStyle/>
+          <a:p>
+            <a:r>
+              <a:rPr lang="en-US" sz="2000" dirty="0">
+                <a:solidFill>
+                  <a:schemeClr val="accent2">
+                    <a:lumMod val="75000"/>
+                  </a:schemeClr>
+                </a:solidFill>
+              </a:rPr>
+              <a:t>Get better at chess</a:t>
+            </a:r>
+          </a:p>
+        </p:txBody>
+      </p:sp>
+    </p:spTree>
+    <p:extLst>
+      <p:ext uri="{BB962C8B-B14F-4D97-AF65-F5344CB8AC3E}">
+        <p14:creationId xmlns:p14="http://schemas.microsoft.com/office/powerpoint/2010/main" val="2946507804"/>
+      </p:ext>
+    </p:extLst>
+  </p:cSld>
+  <p:clrMapOvr>
+    <a:masterClrMapping/>
+  </p:clrMapOvr>
+</p:sld>
+</file>
+
+<file path=ppt/slides/slide14.xml><?xml version="1.0" encoding="utf-8"?>
+<p:sld xmlns:a="http://schemas.openxmlformats.org/drawingml/2006/main" xmlns:r="http://schemas.openxmlformats.org/officeDocument/2006/relationships" xmlns:p="http://schemas.openxmlformats.org/presentationml/2006/main">
+  <p:cSld>
+    <p:spTree>
+      <p:nvGrpSpPr>
+        <p:cNvPr id="1" name="">
+          <a:extLst>
+            <a:ext uri="{FF2B5EF4-FFF2-40B4-BE49-F238E27FC236}">
+              <a16:creationId xmlns:a16="http://schemas.microsoft.com/office/drawing/2014/main" id="{4C855046-890A-CB6B-40A9-F04208ED6A1E}"/>
+            </a:ext>
+          </a:extLst>
+        </p:cNvPr>
+        <p:cNvGrpSpPr/>
+        <p:nvPr/>
+      </p:nvGrpSpPr>
+      <p:grpSpPr>
+        <a:xfrm>
+          <a:off x="0" y="0"/>
+          <a:ext cx="0" cy="0"/>
+          <a:chOff x="0" y="0"/>
+          <a:chExt cx="0" cy="0"/>
+        </a:xfrm>
+      </p:grpSpPr>
+      <p:sp>
+        <p:nvSpPr>
+          <p:cNvPr id="2" name="Title 1">
+            <a:extLst>
+              <a:ext uri="{FF2B5EF4-FFF2-40B4-BE49-F238E27FC236}">
+                <a16:creationId xmlns:a16="http://schemas.microsoft.com/office/drawing/2014/main" id="{ADAD31A4-A0B3-60EE-DD21-6D2B4058ACEA}"/>
+              </a:ext>
+            </a:extLst>
+          </p:cNvPr>
+          <p:cNvSpPr>
+            <a:spLocks noGrp="1"/>
+          </p:cNvSpPr>
+          <p:nvPr>
+            <p:ph type="title"/>
+          </p:nvPr>
+        </p:nvSpPr>
+        <p:spPr/>
+        <p:txBody>
+          <a:bodyPr/>
+          <a:lstStyle/>
+          <a:p>
+            <a:r>
+              <a:rPr lang="en-US" dirty="0"/>
+              <a:t>Modeling mindsets:</a:t>
+            </a:r>
+          </a:p>
+        </p:txBody>
+      </p:sp>
+      <p:sp>
+        <p:nvSpPr>
+          <p:cNvPr id="5" name="TextBox 4">
+            <a:extLst>
+              <a:ext uri="{FF2B5EF4-FFF2-40B4-BE49-F238E27FC236}">
+                <a16:creationId xmlns:a16="http://schemas.microsoft.com/office/drawing/2014/main" id="{48709867-9DDD-DD2E-FF63-85F80814B95C}"/>
+              </a:ext>
+            </a:extLst>
+          </p:cNvPr>
+          <p:cNvSpPr txBox="1"/>
+          <p:nvPr/>
+        </p:nvSpPr>
+        <p:spPr>
+          <a:xfrm>
+            <a:off x="4537276" y="6488668"/>
+            <a:ext cx="8191983" cy="369332"/>
+          </a:xfrm>
+          <a:prstGeom prst="rect">
+            <a:avLst/>
+          </a:prstGeom>
+          <a:noFill/>
+        </p:spPr>
+        <p:txBody>
+          <a:bodyPr wrap="square">
+            <a:spAutoFit/>
+          </a:bodyPr>
+          <a:lstStyle/>
+          <a:p>
+            <a:r>
+              <a:rPr lang="en-US" dirty="0">
+                <a:hlinkClick r:id="rId3"/>
+              </a:rPr>
+              <a:t>Molnar, C. 2023. Modeling mindsets: the many cultures of learning from data.</a:t>
+            </a:r>
+            <a:endParaRPr lang="en-US" dirty="0"/>
+          </a:p>
+        </p:txBody>
+      </p:sp>
+      <p:pic>
+        <p:nvPicPr>
+          <p:cNvPr id="4" name="Picture 3">
+            <a:extLst>
+              <a:ext uri="{FF2B5EF4-FFF2-40B4-BE49-F238E27FC236}">
+                <a16:creationId xmlns:a16="http://schemas.microsoft.com/office/drawing/2014/main" id="{0F755251-75FB-D75A-C203-ECD833A7C2D4}"/>
+              </a:ext>
+            </a:extLst>
+          </p:cNvPr>
+          <p:cNvPicPr>
+            <a:picLocks noChangeAspect="1"/>
+          </p:cNvPicPr>
+          <p:nvPr/>
+        </p:nvPicPr>
+        <p:blipFill>
+          <a:blip r:embed="rId4"/>
+          <a:srcRect l="50001" r="105" b="11454"/>
+          <a:stretch>
+            <a:fillRect/>
+          </a:stretch>
+        </p:blipFill>
+        <p:spPr>
+          <a:xfrm>
+            <a:off x="6096000" y="1806292"/>
+            <a:ext cx="3877994" cy="3830580"/>
+          </a:xfrm>
+          <a:prstGeom prst="rect">
+            <a:avLst/>
+          </a:prstGeom>
+        </p:spPr>
+      </p:pic>
+      <p:sp>
+        <p:nvSpPr>
+          <p:cNvPr id="16" name="TextBox 15">
+            <a:extLst>
+              <a:ext uri="{FF2B5EF4-FFF2-40B4-BE49-F238E27FC236}">
+                <a16:creationId xmlns:a16="http://schemas.microsoft.com/office/drawing/2014/main" id="{0F6339D3-529D-F49D-C6CF-5CA7CAF3E395}"/>
+              </a:ext>
+            </a:extLst>
+          </p:cNvPr>
+          <p:cNvSpPr txBox="1"/>
+          <p:nvPr/>
+        </p:nvSpPr>
+        <p:spPr>
+          <a:xfrm>
+            <a:off x="396055" y="2161337"/>
+            <a:ext cx="4629778" cy="830997"/>
+          </a:xfrm>
+          <a:prstGeom prst="rect">
+            <a:avLst/>
+          </a:prstGeom>
+          <a:noFill/>
+        </p:spPr>
+        <p:txBody>
+          <a:bodyPr wrap="square" rtlCol="0">
+            <a:spAutoFit/>
+          </a:bodyPr>
+          <a:lstStyle/>
+          <a:p>
+            <a:r>
+              <a:rPr lang="en-US" sz="2400" b="1" dirty="0"/>
+              <a:t>Machine learning</a:t>
+            </a:r>
+            <a:r>
+              <a:rPr lang="en-US" sz="2400" dirty="0"/>
+              <a:t>: use algorithms to solve a task</a:t>
+            </a:r>
+          </a:p>
+        </p:txBody>
+      </p:sp>
+      <p:sp>
+        <p:nvSpPr>
+          <p:cNvPr id="3" name="TextBox 2">
+            <a:extLst>
+              <a:ext uri="{FF2B5EF4-FFF2-40B4-BE49-F238E27FC236}">
+                <a16:creationId xmlns:a16="http://schemas.microsoft.com/office/drawing/2014/main" id="{FEA047F3-CE17-A414-51D0-B52CEC1C4E75}"/>
+              </a:ext>
+            </a:extLst>
+          </p:cNvPr>
+          <p:cNvSpPr txBox="1"/>
+          <p:nvPr/>
+        </p:nvSpPr>
+        <p:spPr>
+          <a:xfrm>
+            <a:off x="9973993" y="1772369"/>
+            <a:ext cx="1786597" cy="1015663"/>
+          </a:xfrm>
+          <a:prstGeom prst="rect">
+            <a:avLst/>
+          </a:prstGeom>
+          <a:noFill/>
+        </p:spPr>
+        <p:txBody>
+          <a:bodyPr wrap="square" rtlCol="0">
+            <a:spAutoFit/>
+          </a:bodyPr>
+          <a:lstStyle/>
+          <a:p>
+            <a:r>
+              <a:rPr lang="en-US" sz="2000" dirty="0">
+                <a:solidFill>
+                  <a:schemeClr val="accent2">
+                    <a:lumMod val="75000"/>
+                  </a:schemeClr>
+                </a:solidFill>
+              </a:rPr>
+              <a:t>Make 6 groups based on these data</a:t>
+            </a:r>
+          </a:p>
+        </p:txBody>
+      </p:sp>
+      <p:sp>
+        <p:nvSpPr>
+          <p:cNvPr id="6" name="TextBox 5">
+            <a:extLst>
+              <a:ext uri="{FF2B5EF4-FFF2-40B4-BE49-F238E27FC236}">
+                <a16:creationId xmlns:a16="http://schemas.microsoft.com/office/drawing/2014/main" id="{9E8ED3B7-035F-8C33-C3D1-A2FDFAD72799}"/>
+              </a:ext>
+            </a:extLst>
+          </p:cNvPr>
+          <p:cNvSpPr txBox="1"/>
+          <p:nvPr/>
+        </p:nvSpPr>
+        <p:spPr>
+          <a:xfrm>
+            <a:off x="9973994" y="4679190"/>
+            <a:ext cx="1786597" cy="707886"/>
+          </a:xfrm>
+          <a:prstGeom prst="rect">
+            <a:avLst/>
+          </a:prstGeom>
+          <a:noFill/>
+        </p:spPr>
+        <p:txBody>
+          <a:bodyPr wrap="square" rtlCol="0">
+            <a:spAutoFit/>
+          </a:bodyPr>
+          <a:lstStyle/>
+          <a:p>
+            <a:r>
+              <a:rPr lang="en-US" sz="2000" dirty="0">
+                <a:solidFill>
+                  <a:schemeClr val="accent2">
+                    <a:lumMod val="75000"/>
+                  </a:schemeClr>
+                </a:solidFill>
+              </a:rPr>
+              <a:t>Get better at chess</a:t>
+            </a:r>
+          </a:p>
+        </p:txBody>
+      </p:sp>
+      <p:sp>
+        <p:nvSpPr>
+          <p:cNvPr id="7" name="TextBox 6">
+            <a:extLst>
+              <a:ext uri="{FF2B5EF4-FFF2-40B4-BE49-F238E27FC236}">
+                <a16:creationId xmlns:a16="http://schemas.microsoft.com/office/drawing/2014/main" id="{985D4474-5E70-8D82-D275-45318364EF1C}"/>
+              </a:ext>
+            </a:extLst>
+          </p:cNvPr>
+          <p:cNvSpPr txBox="1"/>
+          <p:nvPr/>
+        </p:nvSpPr>
+        <p:spPr>
+          <a:xfrm>
+            <a:off x="7402343" y="5453142"/>
+            <a:ext cx="1727589" cy="707886"/>
+          </a:xfrm>
+          <a:prstGeom prst="rect">
+            <a:avLst/>
+          </a:prstGeom>
+          <a:noFill/>
+        </p:spPr>
+        <p:txBody>
+          <a:bodyPr wrap="square" rtlCol="0">
+            <a:spAutoFit/>
+          </a:bodyPr>
+          <a:lstStyle/>
+          <a:p>
+            <a:r>
+              <a:rPr lang="en-US" sz="2000" dirty="0">
+                <a:solidFill>
+                  <a:schemeClr val="accent2">
+                    <a:lumMod val="75000"/>
+                  </a:schemeClr>
+                </a:solidFill>
+              </a:rPr>
+              <a:t>Identify things in images</a:t>
+            </a:r>
+          </a:p>
+        </p:txBody>
+      </p:sp>
+    </p:spTree>
+    <p:extLst>
+      <p:ext uri="{BB962C8B-B14F-4D97-AF65-F5344CB8AC3E}">
+        <p14:creationId xmlns:p14="http://schemas.microsoft.com/office/powerpoint/2010/main" val="3067042251"/>
+      </p:ext>
+    </p:extLst>
+  </p:cSld>
+  <p:clrMapOvr>
+    <a:masterClrMapping/>
+  </p:clrMapOvr>
+</p:sld>
+</file>
+
+<file path=ppt/slides/slide15.xml><?xml version="1.0" encoding="utf-8"?>
+<p:sld xmlns:a="http://schemas.openxmlformats.org/drawingml/2006/main" xmlns:r="http://schemas.openxmlformats.org/officeDocument/2006/relationships" xmlns:p="http://schemas.openxmlformats.org/presentationml/2006/main">
+  <p:cSld>
+    <p:spTree>
+      <p:nvGrpSpPr>
+        <p:cNvPr id="1" name="">
+          <a:extLst>
+            <a:ext uri="{FF2B5EF4-FFF2-40B4-BE49-F238E27FC236}">
+              <a16:creationId xmlns:a16="http://schemas.microsoft.com/office/drawing/2014/main" id="{391E9223-C683-3314-8C1E-8F55B885384F}"/>
+            </a:ext>
+          </a:extLst>
+        </p:cNvPr>
+        <p:cNvGrpSpPr/>
+        <p:nvPr/>
+      </p:nvGrpSpPr>
+      <p:grpSpPr>
+        <a:xfrm>
+          <a:off x="0" y="0"/>
+          <a:ext cx="0" cy="0"/>
+          <a:chOff x="0" y="0"/>
+          <a:chExt cx="0" cy="0"/>
+        </a:xfrm>
+      </p:grpSpPr>
+      <p:sp>
+        <p:nvSpPr>
+          <p:cNvPr id="2" name="Title 1">
+            <a:extLst>
+              <a:ext uri="{FF2B5EF4-FFF2-40B4-BE49-F238E27FC236}">
+                <a16:creationId xmlns:a16="http://schemas.microsoft.com/office/drawing/2014/main" id="{81535DA3-B6F3-2294-2F45-AE25CFA67BC8}"/>
+              </a:ext>
+            </a:extLst>
+          </p:cNvPr>
+          <p:cNvSpPr>
+            <a:spLocks noGrp="1"/>
+          </p:cNvSpPr>
+          <p:nvPr>
+            <p:ph type="title"/>
+          </p:nvPr>
+        </p:nvSpPr>
+        <p:spPr/>
+        <p:txBody>
+          <a:bodyPr/>
+          <a:lstStyle/>
+          <a:p>
+            <a:r>
+              <a:rPr lang="en-US" dirty="0"/>
+              <a:t>Modeling mindsets:</a:t>
+            </a:r>
+          </a:p>
+        </p:txBody>
+      </p:sp>
+      <p:sp>
+        <p:nvSpPr>
+          <p:cNvPr id="5" name="TextBox 4">
+            <a:extLst>
+              <a:ext uri="{FF2B5EF4-FFF2-40B4-BE49-F238E27FC236}">
+                <a16:creationId xmlns:a16="http://schemas.microsoft.com/office/drawing/2014/main" id="{7CA254A6-30C4-7B24-C279-D72797579634}"/>
+              </a:ext>
+            </a:extLst>
+          </p:cNvPr>
+          <p:cNvSpPr txBox="1"/>
+          <p:nvPr/>
+        </p:nvSpPr>
+        <p:spPr>
+          <a:xfrm>
+            <a:off x="4537276" y="6488668"/>
+            <a:ext cx="8191983" cy="369332"/>
+          </a:xfrm>
+          <a:prstGeom prst="rect">
+            <a:avLst/>
+          </a:prstGeom>
+          <a:noFill/>
+        </p:spPr>
+        <p:txBody>
+          <a:bodyPr wrap="square">
+            <a:spAutoFit/>
+          </a:bodyPr>
+          <a:lstStyle/>
+          <a:p>
+            <a:r>
+              <a:rPr lang="en-US" dirty="0">
+                <a:hlinkClick r:id="rId3"/>
+              </a:rPr>
+              <a:t>Molnar, C. 2023. Modeling mindsets: the many cultures of learning from data.</a:t>
+            </a:r>
+            <a:endParaRPr lang="en-US" dirty="0"/>
+          </a:p>
+        </p:txBody>
+      </p:sp>
+      <p:pic>
+        <p:nvPicPr>
+          <p:cNvPr id="4" name="Picture 3">
+            <a:extLst>
+              <a:ext uri="{FF2B5EF4-FFF2-40B4-BE49-F238E27FC236}">
+                <a16:creationId xmlns:a16="http://schemas.microsoft.com/office/drawing/2014/main" id="{86D3FB0E-837D-76F7-87DA-AA8779404CB0}"/>
+              </a:ext>
+            </a:extLst>
+          </p:cNvPr>
+          <p:cNvPicPr>
+            <a:picLocks noChangeAspect="1"/>
+          </p:cNvPicPr>
+          <p:nvPr/>
+        </p:nvPicPr>
+        <p:blipFill>
+          <a:blip r:embed="rId4"/>
+          <a:srcRect l="50001" r="105" b="11454"/>
+          <a:stretch>
+            <a:fillRect/>
+          </a:stretch>
+        </p:blipFill>
+        <p:spPr>
+          <a:xfrm>
+            <a:off x="6096000" y="1806292"/>
+            <a:ext cx="3877994" cy="3830580"/>
+          </a:xfrm>
+          <a:prstGeom prst="rect">
+            <a:avLst/>
+          </a:prstGeom>
+        </p:spPr>
+      </p:pic>
+      <p:sp>
+        <p:nvSpPr>
+          <p:cNvPr id="16" name="TextBox 15">
+            <a:extLst>
+              <a:ext uri="{FF2B5EF4-FFF2-40B4-BE49-F238E27FC236}">
+                <a16:creationId xmlns:a16="http://schemas.microsoft.com/office/drawing/2014/main" id="{C7737A33-D651-060A-938E-EB1019CFE9E7}"/>
+              </a:ext>
+            </a:extLst>
+          </p:cNvPr>
+          <p:cNvSpPr txBox="1"/>
+          <p:nvPr/>
+        </p:nvSpPr>
+        <p:spPr>
+          <a:xfrm>
+            <a:off x="396055" y="2161337"/>
+            <a:ext cx="4629778" cy="830997"/>
+          </a:xfrm>
+          <a:prstGeom prst="rect">
+            <a:avLst/>
+          </a:prstGeom>
+          <a:noFill/>
+        </p:spPr>
+        <p:txBody>
+          <a:bodyPr wrap="square" rtlCol="0">
+            <a:spAutoFit/>
+          </a:bodyPr>
+          <a:lstStyle/>
+          <a:p>
+            <a:r>
+              <a:rPr lang="en-US" sz="2400" b="1" dirty="0"/>
+              <a:t>Machine learning</a:t>
+            </a:r>
+            <a:r>
+              <a:rPr lang="en-US" sz="2400" dirty="0"/>
+              <a:t>: use algorithms to solve a task</a:t>
+            </a:r>
+          </a:p>
+        </p:txBody>
+      </p:sp>
+      <p:sp>
+        <p:nvSpPr>
+          <p:cNvPr id="3" name="L-Shape 2">
+            <a:extLst>
+              <a:ext uri="{FF2B5EF4-FFF2-40B4-BE49-F238E27FC236}">
+                <a16:creationId xmlns:a16="http://schemas.microsoft.com/office/drawing/2014/main" id="{F61C3626-E767-C6E0-CA3C-BFB3AD4E5784}"/>
+              </a:ext>
+            </a:extLst>
+          </p:cNvPr>
+          <p:cNvSpPr/>
+          <p:nvPr/>
+        </p:nvSpPr>
+        <p:spPr>
+          <a:xfrm rot="16200000">
+            <a:off x="6776567" y="2297985"/>
+            <a:ext cx="2714124" cy="3697147"/>
+          </a:xfrm>
+          <a:prstGeom prst="corner">
+            <a:avLst>
+              <a:gd name="adj1" fmla="val 73167"/>
+              <a:gd name="adj2" fmla="val 54564"/>
+            </a:avLst>
+          </a:prstGeom>
+          <a:solidFill>
+            <a:srgbClr val="FFFFFF">
+              <a:alpha val="80000"/>
+            </a:srgbClr>
+          </a:solidFill>
+          <a:ln>
+            <a:noFill/>
+          </a:ln>
+        </p:spPr>
+        <p:style>
+          <a:lnRef idx="2">
+            <a:schemeClr val="accent1">
+              <a:shade val="15000"/>
+            </a:schemeClr>
+          </a:lnRef>
+          <a:fillRef idx="1">
+            <a:schemeClr val="accent1"/>
+          </a:fillRef>
+          <a:effectRef idx="0">
+            <a:schemeClr val="accent1"/>
+          </a:effectRef>
+          <a:fontRef idx="minor">
+            <a:schemeClr val="lt1"/>
+          </a:fontRef>
+        </p:style>
+        <p:txBody>
+          <a:bodyPr rtlCol="0" anchor="ctr"/>
+          <a:lstStyle/>
+          <a:p>
+            <a:pPr algn="ctr"/>
+            <a:endParaRPr lang="en-US"/>
+          </a:p>
+        </p:txBody>
+      </p:sp>
+    </p:spTree>
+    <p:extLst>
+      <p:ext uri="{BB962C8B-B14F-4D97-AF65-F5344CB8AC3E}">
+        <p14:creationId xmlns:p14="http://schemas.microsoft.com/office/powerpoint/2010/main" val="580422287"/>
+      </p:ext>
+    </p:extLst>
+  </p:cSld>
+  <p:clrMapOvr>
+    <a:masterClrMapping/>
+  </p:clrMapOvr>
+</p:sld>
+</file>
+
+<file path=ppt/slides/slide16.xml><?xml version="1.0" encoding="utf-8"?>
+<p:sld xmlns:a="http://schemas.openxmlformats.org/drawingml/2006/main" xmlns:r="http://schemas.openxmlformats.org/officeDocument/2006/relationships" xmlns:p="http://schemas.openxmlformats.org/presentationml/2006/main">
+  <p:cSld>
+    <p:spTree>
+      <p:nvGrpSpPr>
+        <p:cNvPr id="1" name="">
+          <a:extLst>
+            <a:ext uri="{FF2B5EF4-FFF2-40B4-BE49-F238E27FC236}">
+              <a16:creationId xmlns:a16="http://schemas.microsoft.com/office/drawing/2014/main" id="{1188174D-68F7-FD76-5C1B-3C197A575B49}"/>
+            </a:ext>
+          </a:extLst>
+        </p:cNvPr>
+        <p:cNvGrpSpPr/>
+        <p:nvPr/>
+      </p:nvGrpSpPr>
+      <p:grpSpPr>
+        <a:xfrm>
+          <a:off x="0" y="0"/>
+          <a:ext cx="0" cy="0"/>
+          <a:chOff x="0" y="0"/>
+          <a:chExt cx="0" cy="0"/>
+        </a:xfrm>
+      </p:grpSpPr>
+      <p:sp>
+        <p:nvSpPr>
+          <p:cNvPr id="2" name="Title 1">
+            <a:extLst>
+              <a:ext uri="{FF2B5EF4-FFF2-40B4-BE49-F238E27FC236}">
+                <a16:creationId xmlns:a16="http://schemas.microsoft.com/office/drawing/2014/main" id="{F70AE48D-4E1A-A96B-B6FF-766FB413387B}"/>
+              </a:ext>
+            </a:extLst>
+          </p:cNvPr>
+          <p:cNvSpPr>
+            <a:spLocks noGrp="1"/>
+          </p:cNvSpPr>
+          <p:nvPr>
+            <p:ph type="title"/>
+          </p:nvPr>
+        </p:nvSpPr>
+        <p:spPr/>
+        <p:txBody>
+          <a:bodyPr/>
+          <a:lstStyle/>
+          <a:p>
+            <a:r>
+              <a:rPr lang="en-US" dirty="0"/>
+              <a:t>Modeling mindsets:</a:t>
+            </a:r>
+          </a:p>
+        </p:txBody>
+      </p:sp>
+      <p:sp>
+        <p:nvSpPr>
+          <p:cNvPr id="5" name="TextBox 4">
+            <a:extLst>
+              <a:ext uri="{FF2B5EF4-FFF2-40B4-BE49-F238E27FC236}">
+                <a16:creationId xmlns:a16="http://schemas.microsoft.com/office/drawing/2014/main" id="{41D4E93C-6768-F4B0-F476-E0E7C792ED05}"/>
+              </a:ext>
+            </a:extLst>
+          </p:cNvPr>
+          <p:cNvSpPr txBox="1"/>
+          <p:nvPr/>
+        </p:nvSpPr>
+        <p:spPr>
+          <a:xfrm>
+            <a:off x="4537276" y="6488668"/>
+            <a:ext cx="8191983" cy="369332"/>
+          </a:xfrm>
+          <a:prstGeom prst="rect">
+            <a:avLst/>
+          </a:prstGeom>
+          <a:noFill/>
+        </p:spPr>
+        <p:txBody>
+          <a:bodyPr wrap="square">
+            <a:spAutoFit/>
+          </a:bodyPr>
+          <a:lstStyle/>
+          <a:p>
+            <a:r>
+              <a:rPr lang="en-US" dirty="0">
+                <a:hlinkClick r:id="rId3"/>
+              </a:rPr>
+              <a:t>Molnar, C. 2023. Modeling mindsets: the many cultures of learning from data.</a:t>
+            </a:r>
+            <a:endParaRPr lang="en-US" dirty="0"/>
+          </a:p>
+        </p:txBody>
+      </p:sp>
+      <p:pic>
+        <p:nvPicPr>
+          <p:cNvPr id="4" name="Picture 3">
+            <a:extLst>
+              <a:ext uri="{FF2B5EF4-FFF2-40B4-BE49-F238E27FC236}">
+                <a16:creationId xmlns:a16="http://schemas.microsoft.com/office/drawing/2014/main" id="{D922350E-1500-4E8D-1CCA-40F420B4D4F9}"/>
+              </a:ext>
+            </a:extLst>
+          </p:cNvPr>
+          <p:cNvPicPr>
+            <a:picLocks noChangeAspect="1"/>
+          </p:cNvPicPr>
+          <p:nvPr/>
+        </p:nvPicPr>
+        <p:blipFill>
+          <a:blip r:embed="rId4"/>
+          <a:srcRect l="50001" r="105" b="11454"/>
+          <a:stretch>
+            <a:fillRect/>
+          </a:stretch>
+        </p:blipFill>
+        <p:spPr>
+          <a:xfrm>
+            <a:off x="6096000" y="1806292"/>
+            <a:ext cx="3877994" cy="3830580"/>
+          </a:xfrm>
+          <a:prstGeom prst="rect">
+            <a:avLst/>
+          </a:prstGeom>
+        </p:spPr>
+      </p:pic>
+      <p:grpSp>
+        <p:nvGrpSpPr>
+          <p:cNvPr id="13" name="Group 12">
+            <a:extLst>
+              <a:ext uri="{FF2B5EF4-FFF2-40B4-BE49-F238E27FC236}">
+                <a16:creationId xmlns:a16="http://schemas.microsoft.com/office/drawing/2014/main" id="{9EEE2588-1276-D119-2A85-8941E865E3E7}"/>
+              </a:ext>
+            </a:extLst>
+          </p:cNvPr>
+          <p:cNvGrpSpPr/>
+          <p:nvPr/>
+        </p:nvGrpSpPr>
+        <p:grpSpPr>
+          <a:xfrm>
+            <a:off x="6484817" y="601883"/>
+            <a:ext cx="5712083" cy="644073"/>
+            <a:chOff x="6484817" y="601883"/>
+            <a:chExt cx="5712083" cy="644073"/>
+          </a:xfrm>
+        </p:grpSpPr>
+        <p:sp>
+          <p:nvSpPr>
+            <p:cNvPr id="7" name="TextBox 6">
+              <a:extLst>
+                <a:ext uri="{FF2B5EF4-FFF2-40B4-BE49-F238E27FC236}">
+                  <a16:creationId xmlns:a16="http://schemas.microsoft.com/office/drawing/2014/main" id="{8C714988-0ECD-AC23-ACE3-26BF3C3054E2}"/>
+                </a:ext>
+              </a:extLst>
+            </p:cNvPr>
+            <p:cNvSpPr txBox="1"/>
+            <p:nvPr/>
+          </p:nvSpPr>
+          <p:spPr>
+            <a:xfrm>
+              <a:off x="10888394" y="661181"/>
+              <a:ext cx="1308506" cy="584775"/>
+            </a:xfrm>
+            <a:prstGeom prst="rect">
+              <a:avLst/>
+            </a:prstGeom>
+            <a:noFill/>
+          </p:spPr>
+          <p:txBody>
+            <a:bodyPr wrap="square" rtlCol="0">
+              <a:spAutoFit/>
+            </a:bodyPr>
+            <a:lstStyle/>
+            <a:p>
+              <a:r>
+                <a:rPr lang="en-US" sz="3200" b="1" dirty="0"/>
+                <a:t>Y</a:t>
+              </a:r>
+            </a:p>
+          </p:txBody>
+        </p:sp>
+        <p:sp>
+          <p:nvSpPr>
+            <p:cNvPr id="3" name="Rectangle 2">
+              <a:extLst>
+                <a:ext uri="{FF2B5EF4-FFF2-40B4-BE49-F238E27FC236}">
+                  <a16:creationId xmlns:a16="http://schemas.microsoft.com/office/drawing/2014/main" id="{C3AEB20D-7C8A-FFC8-6815-6E2697A331CD}"/>
+                </a:ext>
+              </a:extLst>
+            </p:cNvPr>
+            <p:cNvSpPr/>
+            <p:nvPr/>
+          </p:nvSpPr>
+          <p:spPr>
+            <a:xfrm>
+              <a:off x="7882360" y="601883"/>
+              <a:ext cx="1921397" cy="625033"/>
+            </a:xfrm>
+            <a:prstGeom prst="rect">
+              <a:avLst/>
+            </a:prstGeom>
+            <a:solidFill>
+              <a:schemeClr val="accent6">
+                <a:lumMod val="40000"/>
+                <a:lumOff val="60000"/>
+              </a:schemeClr>
+            </a:solidFill>
+            <a:ln>
+              <a:solidFill>
+                <a:schemeClr val="tx1"/>
+              </a:solidFill>
+            </a:ln>
+          </p:spPr>
+          <p:style>
+            <a:lnRef idx="2">
+              <a:schemeClr val="accent1">
+                <a:shade val="15000"/>
+              </a:schemeClr>
+            </a:lnRef>
+            <a:fillRef idx="1">
+              <a:schemeClr val="accent1"/>
+            </a:fillRef>
+            <a:effectRef idx="0">
+              <a:schemeClr val="accent1"/>
+            </a:effectRef>
+            <a:fontRef idx="minor">
+              <a:schemeClr val="lt1"/>
+            </a:fontRef>
+          </p:style>
+          <p:txBody>
+            <a:bodyPr rtlCol="0" anchor="ctr"/>
+            <a:lstStyle/>
+            <a:p>
+              <a:pPr algn="ctr"/>
+              <a:endParaRPr lang="en-US"/>
+            </a:p>
+          </p:txBody>
+        </p:sp>
+        <p:sp>
+          <p:nvSpPr>
+            <p:cNvPr id="6" name="TextBox 5">
+              <a:extLst>
+                <a:ext uri="{FF2B5EF4-FFF2-40B4-BE49-F238E27FC236}">
+                  <a16:creationId xmlns:a16="http://schemas.microsoft.com/office/drawing/2014/main" id="{0A262E88-B86A-42A5-861C-39BF950EC6DF}"/>
+                </a:ext>
+              </a:extLst>
+            </p:cNvPr>
+            <p:cNvSpPr txBox="1"/>
+            <p:nvPr/>
+          </p:nvSpPr>
+          <p:spPr>
+            <a:xfrm>
+              <a:off x="6484817" y="661181"/>
+              <a:ext cx="429926" cy="584775"/>
+            </a:xfrm>
+            <a:prstGeom prst="rect">
+              <a:avLst/>
+            </a:prstGeom>
+            <a:noFill/>
+          </p:spPr>
+          <p:txBody>
+            <a:bodyPr wrap="none" rtlCol="0">
+              <a:spAutoFit/>
+            </a:bodyPr>
+            <a:lstStyle/>
+            <a:p>
+              <a:r>
+                <a:rPr lang="en-US" sz="3200" b="1" dirty="0"/>
+                <a:t>X</a:t>
+              </a:r>
+            </a:p>
+          </p:txBody>
+        </p:sp>
+        <p:cxnSp>
+          <p:nvCxnSpPr>
+            <p:cNvPr id="9" name="Straight Arrow Connector 8">
+              <a:extLst>
+                <a:ext uri="{FF2B5EF4-FFF2-40B4-BE49-F238E27FC236}">
+                  <a16:creationId xmlns:a16="http://schemas.microsoft.com/office/drawing/2014/main" id="{B1E76B39-F0EF-0FBF-5681-5E8A2C9096AD}"/>
+                </a:ext>
+              </a:extLst>
+            </p:cNvPr>
+            <p:cNvCxnSpPr/>
+            <p:nvPr/>
+          </p:nvCxnSpPr>
+          <p:spPr>
+            <a:xfrm>
+              <a:off x="7047914" y="914399"/>
+              <a:ext cx="618978" cy="0"/>
+            </a:xfrm>
+            <a:prstGeom prst="straightConnector1">
+              <a:avLst/>
+            </a:prstGeom>
+            <a:ln w="76200">
+              <a:solidFill>
+                <a:schemeClr val="tx1"/>
+              </a:solidFill>
+              <a:tailEnd type="triangle"/>
+            </a:ln>
+          </p:spPr>
+          <p:style>
+            <a:lnRef idx="2">
+              <a:schemeClr val="accent1"/>
+            </a:lnRef>
+            <a:fillRef idx="0">
+              <a:schemeClr val="accent1"/>
+            </a:fillRef>
+            <a:effectRef idx="1">
+              <a:schemeClr val="accent1"/>
+            </a:effectRef>
+            <a:fontRef idx="minor">
+              <a:schemeClr val="tx1"/>
+            </a:fontRef>
+          </p:style>
+        </p:cxnSp>
+        <p:cxnSp>
+          <p:nvCxnSpPr>
+            <p:cNvPr id="10" name="Straight Arrow Connector 9">
+              <a:extLst>
+                <a:ext uri="{FF2B5EF4-FFF2-40B4-BE49-F238E27FC236}">
+                  <a16:creationId xmlns:a16="http://schemas.microsoft.com/office/drawing/2014/main" id="{12B6EB11-4299-A450-4F74-E7E7E70E8F88}"/>
+                </a:ext>
+              </a:extLst>
+            </p:cNvPr>
+            <p:cNvCxnSpPr/>
+            <p:nvPr/>
+          </p:nvCxnSpPr>
+          <p:spPr>
+            <a:xfrm>
+              <a:off x="10084191" y="914399"/>
+              <a:ext cx="618978" cy="0"/>
+            </a:xfrm>
+            <a:prstGeom prst="straightConnector1">
+              <a:avLst/>
+            </a:prstGeom>
+            <a:ln w="76200">
+              <a:solidFill>
+                <a:schemeClr val="tx1"/>
+              </a:solidFill>
+              <a:tailEnd type="triangle"/>
+            </a:ln>
+          </p:spPr>
+          <p:style>
+            <a:lnRef idx="2">
+              <a:schemeClr val="accent1"/>
+            </a:lnRef>
+            <a:fillRef idx="0">
+              <a:schemeClr val="accent1"/>
+            </a:fillRef>
+            <a:effectRef idx="1">
+              <a:schemeClr val="accent1"/>
+            </a:effectRef>
+            <a:fontRef idx="minor">
+              <a:schemeClr val="tx1"/>
+            </a:fontRef>
+          </p:style>
+        </p:cxnSp>
+        <p:sp>
+          <p:nvSpPr>
+            <p:cNvPr id="11" name="TextBox 10">
+              <a:extLst>
+                <a:ext uri="{FF2B5EF4-FFF2-40B4-BE49-F238E27FC236}">
+                  <a16:creationId xmlns:a16="http://schemas.microsoft.com/office/drawing/2014/main" id="{C23A0ECD-0ADD-0AC8-88E4-7902EE361259}"/>
+                </a:ext>
+              </a:extLst>
+            </p:cNvPr>
+            <p:cNvSpPr txBox="1"/>
+            <p:nvPr/>
+          </p:nvSpPr>
+          <p:spPr>
+            <a:xfrm>
+              <a:off x="8200734" y="683566"/>
+              <a:ext cx="1284647" cy="461665"/>
+            </a:xfrm>
+            <a:prstGeom prst="rect">
+              <a:avLst/>
+            </a:prstGeom>
+            <a:noFill/>
+          </p:spPr>
+          <p:txBody>
+            <a:bodyPr wrap="none" rtlCol="0">
+              <a:spAutoFit/>
+            </a:bodyPr>
+            <a:lstStyle/>
+            <a:p>
+              <a:r>
+                <a:rPr lang="en-US" sz="2400" dirty="0"/>
+                <a:t>NATURE</a:t>
+              </a:r>
+            </a:p>
+          </p:txBody>
+        </p:sp>
+      </p:grpSp>
+      <p:sp>
+        <p:nvSpPr>
+          <p:cNvPr id="8" name="TextBox 7">
+            <a:extLst>
+              <a:ext uri="{FF2B5EF4-FFF2-40B4-BE49-F238E27FC236}">
+                <a16:creationId xmlns:a16="http://schemas.microsoft.com/office/drawing/2014/main" id="{6A707165-C3F2-2160-A29E-5C929C9F23E2}"/>
+              </a:ext>
+            </a:extLst>
+          </p:cNvPr>
+          <p:cNvSpPr txBox="1"/>
+          <p:nvPr/>
+        </p:nvSpPr>
+        <p:spPr>
+          <a:xfrm>
+            <a:off x="396055" y="2161337"/>
+            <a:ext cx="4629778" cy="830997"/>
+          </a:xfrm>
+          <a:prstGeom prst="rect">
+            <a:avLst/>
+          </a:prstGeom>
+          <a:noFill/>
+        </p:spPr>
+        <p:txBody>
+          <a:bodyPr wrap="square" rtlCol="0">
+            <a:spAutoFit/>
+          </a:bodyPr>
+          <a:lstStyle/>
+          <a:p>
+            <a:r>
+              <a:rPr lang="en-US" sz="2400" b="1" dirty="0"/>
+              <a:t>Machine learning</a:t>
+            </a:r>
+            <a:r>
+              <a:rPr lang="en-US" sz="2400" dirty="0"/>
+              <a:t>: use algorithms to solve a task</a:t>
+            </a:r>
+          </a:p>
+        </p:txBody>
+      </p:sp>
+      <p:sp>
+        <p:nvSpPr>
+          <p:cNvPr id="12" name="TextBox 11">
+            <a:extLst>
+              <a:ext uri="{FF2B5EF4-FFF2-40B4-BE49-F238E27FC236}">
+                <a16:creationId xmlns:a16="http://schemas.microsoft.com/office/drawing/2014/main" id="{7E8AA65B-1EE1-98D1-BC41-BA6F03A4A08A}"/>
+              </a:ext>
+            </a:extLst>
+          </p:cNvPr>
+          <p:cNvSpPr txBox="1"/>
+          <p:nvPr/>
+        </p:nvSpPr>
+        <p:spPr>
+          <a:xfrm>
+            <a:off x="396055" y="3337349"/>
+            <a:ext cx="5767754" cy="830997"/>
+          </a:xfrm>
+          <a:prstGeom prst="rect">
+            <a:avLst/>
+          </a:prstGeom>
+          <a:noFill/>
+        </p:spPr>
+        <p:txBody>
+          <a:bodyPr wrap="square" rtlCol="0">
+            <a:spAutoFit/>
+          </a:bodyPr>
+          <a:lstStyle/>
+          <a:p>
+            <a:r>
+              <a:rPr lang="en-US" sz="2400" b="1" dirty="0"/>
+              <a:t>Supervised machine learning</a:t>
+            </a:r>
+            <a:r>
+              <a:rPr lang="en-US" sz="2400" dirty="0"/>
+              <a:t>: use algorithms to </a:t>
+            </a:r>
+            <a:r>
+              <a:rPr lang="en-US" sz="2400" i="1" dirty="0"/>
+              <a:t>mimic the outputs</a:t>
+            </a:r>
+            <a:r>
+              <a:rPr lang="en-US" sz="2400" dirty="0"/>
+              <a:t> of nature</a:t>
+            </a:r>
+          </a:p>
+        </p:txBody>
+      </p:sp>
+      <p:sp>
+        <p:nvSpPr>
+          <p:cNvPr id="14" name="L-Shape 13">
+            <a:extLst>
+              <a:ext uri="{FF2B5EF4-FFF2-40B4-BE49-F238E27FC236}">
+                <a16:creationId xmlns:a16="http://schemas.microsoft.com/office/drawing/2014/main" id="{BFCDAAEB-6F0C-023E-EB5E-38ABD0CDB574}"/>
+              </a:ext>
+            </a:extLst>
+          </p:cNvPr>
+          <p:cNvSpPr/>
+          <p:nvPr/>
+        </p:nvSpPr>
+        <p:spPr>
+          <a:xfrm rot="16200000">
+            <a:off x="6776567" y="2297985"/>
+            <a:ext cx="2714124" cy="3697147"/>
+          </a:xfrm>
+          <a:prstGeom prst="corner">
+            <a:avLst>
+              <a:gd name="adj1" fmla="val 73167"/>
+              <a:gd name="adj2" fmla="val 54564"/>
+            </a:avLst>
+          </a:prstGeom>
+          <a:solidFill>
+            <a:srgbClr val="FFFFFF">
+              <a:alpha val="80000"/>
+            </a:srgbClr>
+          </a:solidFill>
+          <a:ln>
+            <a:noFill/>
+          </a:ln>
+        </p:spPr>
+        <p:style>
+          <a:lnRef idx="2">
+            <a:schemeClr val="accent1">
+              <a:shade val="15000"/>
+            </a:schemeClr>
+          </a:lnRef>
+          <a:fillRef idx="1">
+            <a:schemeClr val="accent1"/>
+          </a:fillRef>
+          <a:effectRef idx="0">
+            <a:schemeClr val="accent1"/>
+          </a:effectRef>
+          <a:fontRef idx="minor">
+            <a:schemeClr val="lt1"/>
+          </a:fontRef>
+        </p:style>
+        <p:txBody>
+          <a:bodyPr rtlCol="0" anchor="ctr"/>
+          <a:lstStyle/>
+          <a:p>
+            <a:pPr algn="ctr"/>
+            <a:endParaRPr lang="en-US"/>
+          </a:p>
+        </p:txBody>
+      </p:sp>
+      <p:grpSp>
+        <p:nvGrpSpPr>
+          <p:cNvPr id="15" name="Group 14">
+            <a:extLst>
+              <a:ext uri="{FF2B5EF4-FFF2-40B4-BE49-F238E27FC236}">
+                <a16:creationId xmlns:a16="http://schemas.microsoft.com/office/drawing/2014/main" id="{85B1DF42-A840-492F-7A38-D92881720690}"/>
+              </a:ext>
+            </a:extLst>
+          </p:cNvPr>
+          <p:cNvGrpSpPr/>
+          <p:nvPr/>
+        </p:nvGrpSpPr>
+        <p:grpSpPr>
+          <a:xfrm>
+            <a:off x="564763" y="4644500"/>
+            <a:ext cx="5712083" cy="644073"/>
+            <a:chOff x="6484817" y="601883"/>
+            <a:chExt cx="5712083" cy="644073"/>
+          </a:xfrm>
+        </p:grpSpPr>
+        <p:sp>
+          <p:nvSpPr>
+            <p:cNvPr id="16" name="TextBox 15">
+              <a:extLst>
+                <a:ext uri="{FF2B5EF4-FFF2-40B4-BE49-F238E27FC236}">
+                  <a16:creationId xmlns:a16="http://schemas.microsoft.com/office/drawing/2014/main" id="{EB1A0531-41BA-BCA5-2323-C120FEC6B695}"/>
+                </a:ext>
+              </a:extLst>
+            </p:cNvPr>
+            <p:cNvSpPr txBox="1"/>
+            <p:nvPr/>
+          </p:nvSpPr>
+          <p:spPr>
+            <a:xfrm>
+              <a:off x="10888394" y="661181"/>
+              <a:ext cx="1308506" cy="584775"/>
+            </a:xfrm>
+            <a:prstGeom prst="rect">
+              <a:avLst/>
+            </a:prstGeom>
+            <a:noFill/>
+          </p:spPr>
+          <p:txBody>
+            <a:bodyPr wrap="square" rtlCol="0">
+              <a:spAutoFit/>
+            </a:bodyPr>
+            <a:lstStyle/>
+            <a:p>
+              <a:r>
+                <a:rPr lang="en-US" sz="3200" b="1" dirty="0"/>
+                <a:t>Y</a:t>
+              </a:r>
+            </a:p>
+          </p:txBody>
+        </p:sp>
+        <p:sp>
+          <p:nvSpPr>
+            <p:cNvPr id="17" name="Rectangle 16">
+              <a:extLst>
+                <a:ext uri="{FF2B5EF4-FFF2-40B4-BE49-F238E27FC236}">
+                  <a16:creationId xmlns:a16="http://schemas.microsoft.com/office/drawing/2014/main" id="{22CF47B0-5807-6E88-CEB3-FE89B609A452}"/>
+                </a:ext>
+              </a:extLst>
+            </p:cNvPr>
+            <p:cNvSpPr/>
+            <p:nvPr/>
+          </p:nvSpPr>
+          <p:spPr>
+            <a:xfrm>
+              <a:off x="7882360" y="601883"/>
+              <a:ext cx="1921397" cy="625033"/>
+            </a:xfrm>
+            <a:prstGeom prst="rect">
+              <a:avLst/>
+            </a:prstGeom>
+            <a:solidFill>
+              <a:schemeClr val="tx1"/>
+            </a:solidFill>
+            <a:ln>
+              <a:solidFill>
+                <a:schemeClr val="tx1"/>
+              </a:solidFill>
+            </a:ln>
+          </p:spPr>
+          <p:style>
+            <a:lnRef idx="2">
+              <a:schemeClr val="accent1">
+                <a:shade val="15000"/>
+              </a:schemeClr>
+            </a:lnRef>
+            <a:fillRef idx="1">
+              <a:schemeClr val="accent1"/>
+            </a:fillRef>
+            <a:effectRef idx="0">
+              <a:schemeClr val="accent1"/>
+            </a:effectRef>
+            <a:fontRef idx="minor">
+              <a:schemeClr val="lt1"/>
+            </a:fontRef>
+          </p:style>
+          <p:txBody>
+            <a:bodyPr rtlCol="0" anchor="ctr"/>
+            <a:lstStyle/>
+            <a:p>
+              <a:pPr algn="ctr"/>
+              <a:endParaRPr lang="en-US"/>
+            </a:p>
+          </p:txBody>
+        </p:sp>
+        <p:sp>
+          <p:nvSpPr>
+            <p:cNvPr id="18" name="TextBox 17">
+              <a:extLst>
+                <a:ext uri="{FF2B5EF4-FFF2-40B4-BE49-F238E27FC236}">
+                  <a16:creationId xmlns:a16="http://schemas.microsoft.com/office/drawing/2014/main" id="{3B69393F-62F9-C491-B462-02B7D656E69B}"/>
+                </a:ext>
+              </a:extLst>
+            </p:cNvPr>
+            <p:cNvSpPr txBox="1"/>
+            <p:nvPr/>
+          </p:nvSpPr>
+          <p:spPr>
+            <a:xfrm>
+              <a:off x="6484817" y="661181"/>
+              <a:ext cx="429926" cy="584775"/>
+            </a:xfrm>
+            <a:prstGeom prst="rect">
+              <a:avLst/>
+            </a:prstGeom>
+            <a:noFill/>
+          </p:spPr>
+          <p:txBody>
+            <a:bodyPr wrap="none" rtlCol="0">
+              <a:spAutoFit/>
+            </a:bodyPr>
+            <a:lstStyle/>
+            <a:p>
+              <a:r>
+                <a:rPr lang="en-US" sz="3200" b="1" dirty="0"/>
+                <a:t>X</a:t>
+              </a:r>
+            </a:p>
+          </p:txBody>
+        </p:sp>
+        <p:cxnSp>
+          <p:nvCxnSpPr>
+            <p:cNvPr id="19" name="Straight Arrow Connector 18">
+              <a:extLst>
+                <a:ext uri="{FF2B5EF4-FFF2-40B4-BE49-F238E27FC236}">
+                  <a16:creationId xmlns:a16="http://schemas.microsoft.com/office/drawing/2014/main" id="{176FF182-60E2-1A52-4328-2DC3850E3C39}"/>
+                </a:ext>
+              </a:extLst>
+            </p:cNvPr>
+            <p:cNvCxnSpPr/>
+            <p:nvPr/>
+          </p:nvCxnSpPr>
+          <p:spPr>
+            <a:xfrm>
+              <a:off x="7047914" y="914399"/>
+              <a:ext cx="618978" cy="0"/>
+            </a:xfrm>
+            <a:prstGeom prst="straightConnector1">
+              <a:avLst/>
+            </a:prstGeom>
+            <a:ln w="76200">
+              <a:solidFill>
+                <a:schemeClr val="tx1"/>
+              </a:solidFill>
+              <a:tailEnd type="triangle"/>
+            </a:ln>
+          </p:spPr>
+          <p:style>
+            <a:lnRef idx="2">
+              <a:schemeClr val="accent1"/>
+            </a:lnRef>
+            <a:fillRef idx="0">
+              <a:schemeClr val="accent1"/>
+            </a:fillRef>
+            <a:effectRef idx="1">
+              <a:schemeClr val="accent1"/>
+            </a:effectRef>
+            <a:fontRef idx="minor">
+              <a:schemeClr val="tx1"/>
+            </a:fontRef>
+          </p:style>
+        </p:cxnSp>
+        <p:cxnSp>
+          <p:nvCxnSpPr>
+            <p:cNvPr id="20" name="Straight Arrow Connector 19">
+              <a:extLst>
+                <a:ext uri="{FF2B5EF4-FFF2-40B4-BE49-F238E27FC236}">
+                  <a16:creationId xmlns:a16="http://schemas.microsoft.com/office/drawing/2014/main" id="{F00A3658-B281-5F27-D4F5-0878B92B659F}"/>
+                </a:ext>
+              </a:extLst>
+            </p:cNvPr>
+            <p:cNvCxnSpPr/>
+            <p:nvPr/>
+          </p:nvCxnSpPr>
+          <p:spPr>
+            <a:xfrm>
+              <a:off x="10084191" y="914399"/>
+              <a:ext cx="618978" cy="0"/>
+            </a:xfrm>
+            <a:prstGeom prst="straightConnector1">
+              <a:avLst/>
+            </a:prstGeom>
+            <a:ln w="76200">
+              <a:solidFill>
+                <a:schemeClr val="tx1"/>
+              </a:solidFill>
+              <a:tailEnd type="triangle"/>
+            </a:ln>
+          </p:spPr>
+          <p:style>
+            <a:lnRef idx="2">
+              <a:schemeClr val="accent1"/>
+            </a:lnRef>
+            <a:fillRef idx="0">
+              <a:schemeClr val="accent1"/>
+            </a:fillRef>
+            <a:effectRef idx="1">
+              <a:schemeClr val="accent1"/>
+            </a:effectRef>
+            <a:fontRef idx="minor">
+              <a:schemeClr val="tx1"/>
+            </a:fontRef>
+          </p:style>
+        </p:cxnSp>
+      </p:grpSp>
+      <p:cxnSp>
+        <p:nvCxnSpPr>
+          <p:cNvPr id="27" name="Straight Arrow Connector 26">
+            <a:extLst>
+              <a:ext uri="{FF2B5EF4-FFF2-40B4-BE49-F238E27FC236}">
+                <a16:creationId xmlns:a16="http://schemas.microsoft.com/office/drawing/2014/main" id="{C93B0608-2157-2626-8085-674C626C0168}"/>
+              </a:ext>
+            </a:extLst>
+          </p:cNvPr>
+          <p:cNvCxnSpPr/>
+          <p:nvPr/>
+        </p:nvCxnSpPr>
+        <p:spPr>
+          <a:xfrm>
+            <a:off x="994689" y="5288573"/>
+            <a:ext cx="967617" cy="535452"/>
+          </a:xfrm>
+          <a:prstGeom prst="straightConnector1">
+            <a:avLst/>
+          </a:prstGeom>
+          <a:ln w="76200">
+            <a:solidFill>
+              <a:schemeClr val="tx1"/>
+            </a:solidFill>
+            <a:headEnd type="triangle"/>
+            <a:tailEnd type="triangle"/>
+          </a:ln>
+        </p:spPr>
+        <p:style>
+          <a:lnRef idx="2">
+            <a:schemeClr val="accent1"/>
+          </a:lnRef>
+          <a:fillRef idx="0">
+            <a:schemeClr val="accent1"/>
+          </a:fillRef>
+          <a:effectRef idx="1">
+            <a:schemeClr val="accent1"/>
+          </a:effectRef>
+          <a:fontRef idx="minor">
+            <a:schemeClr val="tx1"/>
+          </a:fontRef>
+        </p:style>
+      </p:cxnSp>
+      <p:cxnSp>
+        <p:nvCxnSpPr>
+          <p:cNvPr id="28" name="Straight Arrow Connector 27">
+            <a:extLst>
+              <a:ext uri="{FF2B5EF4-FFF2-40B4-BE49-F238E27FC236}">
+                <a16:creationId xmlns:a16="http://schemas.microsoft.com/office/drawing/2014/main" id="{1383861D-A0E4-257C-4881-293AC99E16AA}"/>
+              </a:ext>
+            </a:extLst>
+          </p:cNvPr>
+          <p:cNvCxnSpPr>
+            <a:cxnSpLocks/>
+          </p:cNvCxnSpPr>
+          <p:nvPr/>
+        </p:nvCxnSpPr>
+        <p:spPr>
+          <a:xfrm flipH="1">
+            <a:off x="3699803" y="5353168"/>
+            <a:ext cx="1268537" cy="470857"/>
+          </a:xfrm>
+          <a:prstGeom prst="straightConnector1">
+            <a:avLst/>
+          </a:prstGeom>
+          <a:ln w="76200">
+            <a:solidFill>
+              <a:schemeClr val="tx1"/>
+            </a:solidFill>
+            <a:headEnd type="triangle"/>
+            <a:tailEnd type="triangle"/>
+          </a:ln>
+        </p:spPr>
+        <p:style>
+          <a:lnRef idx="2">
+            <a:schemeClr val="accent1"/>
+          </a:lnRef>
+          <a:fillRef idx="0">
+            <a:schemeClr val="accent1"/>
+          </a:fillRef>
+          <a:effectRef idx="1">
+            <a:schemeClr val="accent1"/>
+          </a:effectRef>
+          <a:fontRef idx="minor">
+            <a:schemeClr val="tx1"/>
+          </a:fontRef>
+        </p:style>
+      </p:cxnSp>
+      <p:sp>
+        <p:nvSpPr>
+          <p:cNvPr id="30" name="TextBox 29">
+            <a:extLst>
+              <a:ext uri="{FF2B5EF4-FFF2-40B4-BE49-F238E27FC236}">
+                <a16:creationId xmlns:a16="http://schemas.microsoft.com/office/drawing/2014/main" id="{28A89B15-C196-119C-D684-64F7FD8DA532}"/>
+              </a:ext>
+            </a:extLst>
+          </p:cNvPr>
+          <p:cNvSpPr txBox="1"/>
+          <p:nvPr/>
+        </p:nvSpPr>
+        <p:spPr>
+          <a:xfrm>
+            <a:off x="2235378" y="5636872"/>
+            <a:ext cx="1191352" cy="461665"/>
+          </a:xfrm>
+          <a:prstGeom prst="rect">
+            <a:avLst/>
+          </a:prstGeom>
+          <a:noFill/>
+        </p:spPr>
+        <p:txBody>
+          <a:bodyPr wrap="none" rtlCol="0">
+            <a:spAutoFit/>
+          </a:bodyPr>
+          <a:lstStyle/>
+          <a:p>
+            <a:r>
+              <a:rPr lang="en-US" sz="2400" dirty="0"/>
+              <a:t>MODEL</a:t>
+            </a:r>
+          </a:p>
+        </p:txBody>
+      </p:sp>
+    </p:spTree>
+    <p:extLst>
+      <p:ext uri="{BB962C8B-B14F-4D97-AF65-F5344CB8AC3E}">
+        <p14:creationId xmlns:p14="http://schemas.microsoft.com/office/powerpoint/2010/main" val="340535653"/>
+      </p:ext>
+    </p:extLst>
+  </p:cSld>
+  <p:clrMapOvr>
+    <a:masterClrMapping/>
+  </p:clrMapOvr>
+</p:sld>
+</file>
+
+<file path=ppt/slides/slide17.xml><?xml version="1.0" encoding="utf-8"?>
+<p:sld xmlns:a="http://schemas.openxmlformats.org/drawingml/2006/main" xmlns:r="http://schemas.openxmlformats.org/officeDocument/2006/relationships" xmlns:p="http://schemas.openxmlformats.org/presentationml/2006/main">
+  <p:cSld>
+    <p:spTree>
+      <p:nvGrpSpPr>
+        <p:cNvPr id="1" name=""/>
+        <p:cNvGrpSpPr/>
+        <p:nvPr/>
+      </p:nvGrpSpPr>
+      <p:grpSpPr>
+        <a:xfrm>
+          <a:off x="0" y="0"/>
+          <a:ext cx="0" cy="0"/>
+          <a:chOff x="0" y="0"/>
+          <a:chExt cx="0" cy="0"/>
+        </a:xfrm>
+      </p:grpSpPr>
+      <p:sp>
+        <p:nvSpPr>
+          <p:cNvPr id="2" name="Title 1">
+            <a:extLst>
+              <a:ext uri="{FF2B5EF4-FFF2-40B4-BE49-F238E27FC236}">
+                <a16:creationId xmlns:a16="http://schemas.microsoft.com/office/drawing/2014/main" id="{12EAFA29-EE37-3E25-4512-716D446C9A08}"/>
+              </a:ext>
+            </a:extLst>
+          </p:cNvPr>
+          <p:cNvSpPr>
+            <a:spLocks noGrp="1"/>
+          </p:cNvSpPr>
+          <p:nvPr>
+            <p:ph type="title"/>
+          </p:nvPr>
+        </p:nvSpPr>
+        <p:spPr>
+          <a:xfrm>
+            <a:off x="838200" y="365125"/>
+            <a:ext cx="4760742" cy="1325563"/>
+          </a:xfrm>
+        </p:spPr>
+        <p:txBody>
+          <a:bodyPr/>
+          <a:lstStyle/>
+          <a:p>
+            <a:r>
+              <a:rPr lang="en-US" dirty="0"/>
+              <a:t>In science, we often have multiple aims</a:t>
+            </a:r>
+          </a:p>
+        </p:txBody>
+      </p:sp>
+      <p:sp>
+        <p:nvSpPr>
+          <p:cNvPr id="3" name="Content Placeholder 2">
+            <a:extLst>
+              <a:ext uri="{FF2B5EF4-FFF2-40B4-BE49-F238E27FC236}">
+                <a16:creationId xmlns:a16="http://schemas.microsoft.com/office/drawing/2014/main" id="{1C8C50EC-2B77-57DB-6553-55037FAA5831}"/>
+              </a:ext>
+            </a:extLst>
+          </p:cNvPr>
+          <p:cNvSpPr>
+            <a:spLocks noGrp="1"/>
+          </p:cNvSpPr>
+          <p:nvPr>
+            <p:ph idx="1"/>
+          </p:nvPr>
+        </p:nvSpPr>
+        <p:spPr>
+          <a:xfrm>
+            <a:off x="838200" y="2124221"/>
+            <a:ext cx="3958883" cy="4052741"/>
+          </a:xfrm>
+        </p:spPr>
+        <p:txBody>
+          <a:bodyPr/>
+          <a:lstStyle/>
+          <a:p>
+            <a:r>
+              <a:rPr lang="en-US" dirty="0"/>
+              <a:t>Observe the world</a:t>
+            </a:r>
+          </a:p>
+          <a:p>
+            <a:r>
+              <a:rPr lang="en-US" dirty="0"/>
+              <a:t>Generate hypotheses</a:t>
+            </a:r>
+          </a:p>
+          <a:p>
+            <a:r>
+              <a:rPr lang="en-US" dirty="0"/>
+              <a:t>Test a hypothesis</a:t>
+            </a:r>
+          </a:p>
+          <a:p>
+            <a:r>
+              <a:rPr lang="en-US" dirty="0"/>
+              <a:t>Estimate a value</a:t>
+            </a:r>
+          </a:p>
+          <a:p>
+            <a:r>
+              <a:rPr lang="en-US" dirty="0"/>
+              <a:t>Predict something about the world</a:t>
+            </a:r>
+          </a:p>
+        </p:txBody>
+      </p:sp>
+    </p:spTree>
+    <p:extLst>
+      <p:ext uri="{BB962C8B-B14F-4D97-AF65-F5344CB8AC3E}">
+        <p14:creationId xmlns:p14="http://schemas.microsoft.com/office/powerpoint/2010/main" val="1836443162"/>
+      </p:ext>
+    </p:extLst>
+  </p:cSld>
+  <p:clrMapOvr>
+    <a:masterClrMapping/>
+  </p:clrMapOvr>
+</p:sld>
+</file>
+
+<file path=ppt/slides/slide18.xml><?xml version="1.0" encoding="utf-8"?>
+<p:sld xmlns:a="http://schemas.openxmlformats.org/drawingml/2006/main" xmlns:r="http://schemas.openxmlformats.org/officeDocument/2006/relationships" xmlns:p="http://schemas.openxmlformats.org/presentationml/2006/main">
+  <p:cSld>
+    <p:spTree>
+      <p:nvGrpSpPr>
+        <p:cNvPr id="1" name="">
+          <a:extLst>
+            <a:ext uri="{FF2B5EF4-FFF2-40B4-BE49-F238E27FC236}">
+              <a16:creationId xmlns:a16="http://schemas.microsoft.com/office/drawing/2014/main" id="{2826EFB1-5723-65CD-FDA7-EB1C063B5362}"/>
+            </a:ext>
+          </a:extLst>
+        </p:cNvPr>
+        <p:cNvGrpSpPr/>
+        <p:nvPr/>
+      </p:nvGrpSpPr>
+      <p:grpSpPr>
+        <a:xfrm>
+          <a:off x="0" y="0"/>
+          <a:ext cx="0" cy="0"/>
+          <a:chOff x="0" y="0"/>
+          <a:chExt cx="0" cy="0"/>
+        </a:xfrm>
+      </p:grpSpPr>
+      <p:sp>
+        <p:nvSpPr>
+          <p:cNvPr id="2" name="Title 1">
+            <a:extLst>
+              <a:ext uri="{FF2B5EF4-FFF2-40B4-BE49-F238E27FC236}">
+                <a16:creationId xmlns:a16="http://schemas.microsoft.com/office/drawing/2014/main" id="{CBDA17F5-8C03-AD52-4776-51775734BE9B}"/>
+              </a:ext>
+            </a:extLst>
+          </p:cNvPr>
+          <p:cNvSpPr>
+            <a:spLocks noGrp="1"/>
+          </p:cNvSpPr>
+          <p:nvPr>
+            <p:ph type="title"/>
+          </p:nvPr>
+        </p:nvSpPr>
+        <p:spPr>
+          <a:xfrm>
+            <a:off x="838200" y="365125"/>
+            <a:ext cx="4760742" cy="1325563"/>
+          </a:xfrm>
+        </p:spPr>
+        <p:txBody>
+          <a:bodyPr/>
+          <a:lstStyle/>
+          <a:p>
+            <a:r>
+              <a:rPr lang="en-US" dirty="0"/>
+              <a:t>In science, we often have multiple aims</a:t>
+            </a:r>
+          </a:p>
+        </p:txBody>
+      </p:sp>
+      <p:sp>
+        <p:nvSpPr>
+          <p:cNvPr id="3" name="Content Placeholder 2">
+            <a:extLst>
+              <a:ext uri="{FF2B5EF4-FFF2-40B4-BE49-F238E27FC236}">
+                <a16:creationId xmlns:a16="http://schemas.microsoft.com/office/drawing/2014/main" id="{876B6DEF-E64C-1B8F-D184-9C20ECA2A659}"/>
+              </a:ext>
+            </a:extLst>
+          </p:cNvPr>
+          <p:cNvSpPr>
+            <a:spLocks noGrp="1"/>
+          </p:cNvSpPr>
+          <p:nvPr>
+            <p:ph idx="1"/>
+          </p:nvPr>
+        </p:nvSpPr>
+        <p:spPr>
+          <a:xfrm>
+            <a:off x="838200" y="2124221"/>
+            <a:ext cx="3958883" cy="4052741"/>
+          </a:xfrm>
+        </p:spPr>
+        <p:txBody>
+          <a:bodyPr/>
+          <a:lstStyle/>
+          <a:p>
+            <a:r>
+              <a:rPr lang="en-US" dirty="0"/>
+              <a:t>Observe the world</a:t>
+            </a:r>
+          </a:p>
+          <a:p>
+            <a:r>
+              <a:rPr lang="en-US" dirty="0"/>
+              <a:t>Generate hypotheses</a:t>
+            </a:r>
+          </a:p>
+          <a:p>
+            <a:r>
+              <a:rPr lang="en-US" dirty="0"/>
+              <a:t>Test a hypothesis</a:t>
+            </a:r>
+          </a:p>
+          <a:p>
+            <a:r>
+              <a:rPr lang="en-US" dirty="0"/>
+              <a:t>Estimate a value</a:t>
+            </a:r>
+          </a:p>
+          <a:p>
+            <a:r>
+              <a:rPr lang="en-US" dirty="0"/>
+              <a:t>Predict something about the world</a:t>
+            </a:r>
+          </a:p>
+        </p:txBody>
+      </p:sp>
+      <p:sp>
+        <p:nvSpPr>
+          <p:cNvPr id="4" name="Title 1">
+            <a:extLst>
+              <a:ext uri="{FF2B5EF4-FFF2-40B4-BE49-F238E27FC236}">
+                <a16:creationId xmlns:a16="http://schemas.microsoft.com/office/drawing/2014/main" id="{3A05BADD-117A-0833-BBC8-3EEA03C5BF5A}"/>
+              </a:ext>
+            </a:extLst>
+          </p:cNvPr>
+          <p:cNvSpPr txBox="1">
+            <a:spLocks/>
+          </p:cNvSpPr>
+          <p:nvPr/>
+        </p:nvSpPr>
+        <p:spPr>
+          <a:xfrm>
+            <a:off x="6593058" y="365125"/>
+            <a:ext cx="4760742" cy="1325563"/>
+          </a:xfrm>
+          <a:prstGeom prst="rect">
+            <a:avLst/>
+          </a:prstGeom>
+        </p:spPr>
+        <p:txBody>
+          <a:bodyPr vert="horz" lIns="91440" tIns="45720" rIns="91440" bIns="45720" rtlCol="0" anchor="ctr">
+            <a:normAutofit fontScale="92500"/>
+          </a:bodyPr>
+          <a:lstStyle>
+            <a:lvl1pPr algn="l" defTabSz="914400" rtl="0" eaLnBrk="1" latinLnBrk="0" hangingPunct="1">
+              <a:lnSpc>
+                <a:spcPct val="90000"/>
+              </a:lnSpc>
+              <a:spcBef>
+                <a:spcPct val="0"/>
+              </a:spcBef>
+              <a:buNone/>
+              <a:defRPr sz="4400" kern="1200">
+                <a:solidFill>
+                  <a:schemeClr val="tx1"/>
+                </a:solidFill>
+                <a:latin typeface="+mj-lt"/>
+                <a:ea typeface="+mj-ea"/>
+                <a:cs typeface="+mj-cs"/>
+              </a:defRPr>
+            </a:lvl1pPr>
+          </a:lstStyle>
+          <a:p>
+            <a:r>
+              <a:rPr lang="en-US" dirty="0"/>
+              <a:t>Supervised machine learning can help!</a:t>
+            </a:r>
+          </a:p>
+        </p:txBody>
+      </p:sp>
+      <p:sp>
+        <p:nvSpPr>
+          <p:cNvPr id="5" name="Content Placeholder 2">
+            <a:extLst>
+              <a:ext uri="{FF2B5EF4-FFF2-40B4-BE49-F238E27FC236}">
+                <a16:creationId xmlns:a16="http://schemas.microsoft.com/office/drawing/2014/main" id="{90314D45-4690-1B6B-E934-CC83B86171B8}"/>
+              </a:ext>
+            </a:extLst>
+          </p:cNvPr>
+          <p:cNvSpPr txBox="1">
+            <a:spLocks/>
+          </p:cNvSpPr>
+          <p:nvPr/>
+        </p:nvSpPr>
+        <p:spPr>
+          <a:xfrm>
+            <a:off x="6593058" y="2124221"/>
+            <a:ext cx="4872111" cy="4052741"/>
+          </a:xfrm>
+          <a:prstGeom prst="rect">
+            <a:avLst/>
+          </a:prstGeom>
+        </p:spPr>
+        <p:txBody>
+          <a:bodyPr vert="horz" lIns="91440" tIns="45720" rIns="91440" bIns="45720" rtlCol="0">
+            <a:normAutofit lnSpcReduction="10000"/>
+          </a:bodyPr>
+          <a:lstStyle>
+            <a:lvl1pPr marL="228600" indent="-228600" algn="l" defTabSz="914400" rtl="0" eaLnBrk="1" latinLnBrk="0" hangingPunct="1">
+              <a:lnSpc>
+                <a:spcPct val="90000"/>
+              </a:lnSpc>
+              <a:spcBef>
+                <a:spcPts val="1000"/>
+              </a:spcBef>
+              <a:buFont typeface="Arial" panose="020B0604020202020204" pitchFamily="34" charset="0"/>
+              <a:buChar char="•"/>
+              <a:defRPr sz="2800" kern="1200">
+                <a:solidFill>
+                  <a:schemeClr val="tx1"/>
+                </a:solidFill>
+                <a:latin typeface="+mn-lt"/>
+                <a:ea typeface="+mn-ea"/>
+                <a:cs typeface="+mn-cs"/>
+              </a:defRPr>
+            </a:lvl1pPr>
+            <a:lvl2pPr marL="685800" indent="-228600" algn="l" defTabSz="914400" rtl="0" eaLnBrk="1" latinLnBrk="0" hangingPunct="1">
+              <a:lnSpc>
+                <a:spcPct val="90000"/>
+              </a:lnSpc>
+              <a:spcBef>
+                <a:spcPts val="500"/>
+              </a:spcBef>
+              <a:buFont typeface="Arial" panose="020B0604020202020204" pitchFamily="34" charset="0"/>
+              <a:buChar char="•"/>
+              <a:defRPr sz="2400" kern="1200">
+                <a:solidFill>
+                  <a:schemeClr val="tx1"/>
+                </a:solidFill>
+                <a:latin typeface="+mn-lt"/>
+                <a:ea typeface="+mn-ea"/>
+                <a:cs typeface="+mn-cs"/>
+              </a:defRPr>
+            </a:lvl2pPr>
+            <a:lvl3pPr marL="1143000" indent="-228600" algn="l" defTabSz="914400" rtl="0" eaLnBrk="1" latinLnBrk="0" hangingPunct="1">
+              <a:lnSpc>
+                <a:spcPct val="90000"/>
+              </a:lnSpc>
+              <a:spcBef>
+                <a:spcPts val="500"/>
+              </a:spcBef>
+              <a:buFont typeface="Arial" panose="020B0604020202020204" pitchFamily="34" charset="0"/>
+              <a:buChar char="•"/>
+              <a:defRPr sz="2000" kern="1200">
+                <a:solidFill>
+                  <a:schemeClr val="tx1"/>
+                </a:solidFill>
+                <a:latin typeface="+mn-lt"/>
+                <a:ea typeface="+mn-ea"/>
+                <a:cs typeface="+mn-cs"/>
+              </a:defRPr>
+            </a:lvl3pPr>
+            <a:lvl4pPr marL="1600200" indent="-228600" algn="l" defTabSz="914400" rtl="0" eaLnBrk="1" latinLnBrk="0" hangingPunct="1">
+              <a:lnSpc>
+                <a:spcPct val="90000"/>
+              </a:lnSpc>
+              <a:spcBef>
+                <a:spcPts val="500"/>
+              </a:spcBef>
+              <a:buFont typeface="Arial" panose="020B0604020202020204" pitchFamily="34" charset="0"/>
+              <a:buChar char="•"/>
+              <a:defRPr sz="1800" kern="1200">
+                <a:solidFill>
+                  <a:schemeClr val="tx1"/>
+                </a:solidFill>
+                <a:latin typeface="+mn-lt"/>
+                <a:ea typeface="+mn-ea"/>
+                <a:cs typeface="+mn-cs"/>
+              </a:defRPr>
+            </a:lvl4pPr>
+            <a:lvl5pPr marL="2057400" indent="-228600" algn="l" defTabSz="914400" rtl="0" eaLnBrk="1" latinLnBrk="0" hangingPunct="1">
+              <a:lnSpc>
+                <a:spcPct val="90000"/>
+              </a:lnSpc>
+              <a:spcBef>
+                <a:spcPts val="500"/>
+              </a:spcBef>
+              <a:buFont typeface="Arial" panose="020B0604020202020204" pitchFamily="34" charset="0"/>
+              <a:buChar char="•"/>
+              <a:defRPr sz="1800" kern="1200">
+                <a:solidFill>
+                  <a:schemeClr val="tx1"/>
+                </a:solidFill>
+                <a:latin typeface="+mn-lt"/>
+                <a:ea typeface="+mn-ea"/>
+                <a:cs typeface="+mn-cs"/>
+              </a:defRPr>
+            </a:lvl5pPr>
+            <a:lvl6pPr marL="2514600" indent="-228600" algn="l" defTabSz="914400" rtl="0" eaLnBrk="1" latinLnBrk="0" hangingPunct="1">
+              <a:lnSpc>
+                <a:spcPct val="90000"/>
+              </a:lnSpc>
+              <a:spcBef>
+                <a:spcPts val="500"/>
+              </a:spcBef>
+              <a:buFont typeface="Arial" panose="020B0604020202020204" pitchFamily="34" charset="0"/>
+              <a:buChar char="•"/>
+              <a:defRPr sz="1800" kern="1200">
+                <a:solidFill>
+                  <a:schemeClr val="tx1"/>
+                </a:solidFill>
+                <a:latin typeface="+mn-lt"/>
+                <a:ea typeface="+mn-ea"/>
+                <a:cs typeface="+mn-cs"/>
+              </a:defRPr>
+            </a:lvl6pPr>
+            <a:lvl7pPr marL="2971800" indent="-228600" algn="l" defTabSz="914400" rtl="0" eaLnBrk="1" latinLnBrk="0" hangingPunct="1">
+              <a:lnSpc>
+                <a:spcPct val="90000"/>
+              </a:lnSpc>
+              <a:spcBef>
+                <a:spcPts val="500"/>
+              </a:spcBef>
+              <a:buFont typeface="Arial" panose="020B0604020202020204" pitchFamily="34" charset="0"/>
+              <a:buChar char="•"/>
+              <a:defRPr sz="1800" kern="1200">
+                <a:solidFill>
+                  <a:schemeClr val="tx1"/>
+                </a:solidFill>
+                <a:latin typeface="+mn-lt"/>
+                <a:ea typeface="+mn-ea"/>
+                <a:cs typeface="+mn-cs"/>
+              </a:defRPr>
+            </a:lvl7pPr>
+            <a:lvl8pPr marL="3429000" indent="-228600" algn="l" defTabSz="914400" rtl="0" eaLnBrk="1" latinLnBrk="0" hangingPunct="1">
+              <a:lnSpc>
+                <a:spcPct val="90000"/>
+              </a:lnSpc>
+              <a:spcBef>
+                <a:spcPts val="500"/>
+              </a:spcBef>
+              <a:buFont typeface="Arial" panose="020B0604020202020204" pitchFamily="34" charset="0"/>
+              <a:buChar char="•"/>
+              <a:defRPr sz="1800" kern="1200">
+                <a:solidFill>
+                  <a:schemeClr val="tx1"/>
+                </a:solidFill>
+                <a:latin typeface="+mn-lt"/>
+                <a:ea typeface="+mn-ea"/>
+                <a:cs typeface="+mn-cs"/>
+              </a:defRPr>
+            </a:lvl8pPr>
+            <a:lvl9pPr marL="3886200" indent="-228600" algn="l" defTabSz="914400" rtl="0" eaLnBrk="1" latinLnBrk="0" hangingPunct="1">
+              <a:lnSpc>
+                <a:spcPct val="90000"/>
+              </a:lnSpc>
+              <a:spcBef>
+                <a:spcPts val="500"/>
+              </a:spcBef>
+              <a:buFont typeface="Arial" panose="020B0604020202020204" pitchFamily="34" charset="0"/>
+              <a:buChar char="•"/>
+              <a:defRPr sz="1800" kern="1200">
+                <a:solidFill>
+                  <a:schemeClr val="tx1"/>
+                </a:solidFill>
+                <a:latin typeface="+mn-lt"/>
+                <a:ea typeface="+mn-ea"/>
+                <a:cs typeface="+mn-cs"/>
+              </a:defRPr>
+            </a:lvl9pPr>
+          </a:lstStyle>
+          <a:p>
+            <a:r>
+              <a:rPr lang="en-US" b="1" dirty="0"/>
+              <a:t>Observe</a:t>
+            </a:r>
+            <a:r>
+              <a:rPr lang="en-US" dirty="0"/>
+              <a:t>: Classify trail camera images to identify animals at scale</a:t>
+            </a:r>
+          </a:p>
+          <a:p>
+            <a:r>
+              <a:rPr lang="en-US" b="1" dirty="0"/>
+              <a:t>Generate: </a:t>
+            </a:r>
+            <a:r>
+              <a:rPr lang="en-US" dirty="0"/>
+              <a:t>Identify patterns and suggest important variables for future experiments</a:t>
+            </a:r>
+          </a:p>
+          <a:p>
+            <a:r>
+              <a:rPr lang="en-US" b="1" dirty="0"/>
+              <a:t>Predict: </a:t>
+            </a:r>
+            <a:r>
+              <a:rPr lang="en-US" dirty="0"/>
+              <a:t>Forecast the future distribution and abundance of a plant</a:t>
+            </a:r>
+          </a:p>
+        </p:txBody>
+      </p:sp>
+    </p:spTree>
+    <p:extLst>
+      <p:ext uri="{BB962C8B-B14F-4D97-AF65-F5344CB8AC3E}">
+        <p14:creationId xmlns:p14="http://schemas.microsoft.com/office/powerpoint/2010/main" val="3867565621"/>
+      </p:ext>
+    </p:extLst>
+  </p:cSld>
+  <p:clrMapOvr>
+    <a:masterClrMapping/>
+  </p:clrMapOvr>
+</p:sld>
+</file>
+
+<file path=ppt/slides/slide19.xml><?xml version="1.0" encoding="utf-8"?>
+<p:sld xmlns:a="http://schemas.openxmlformats.org/drawingml/2006/main" xmlns:r="http://schemas.openxmlformats.org/officeDocument/2006/relationships" xmlns:p="http://schemas.openxmlformats.org/presentationml/2006/main">
+  <p:cSld>
+    <p:spTree>
+      <p:nvGrpSpPr>
+        <p:cNvPr id="1" name=""/>
+        <p:cNvGrpSpPr/>
+        <p:nvPr/>
+      </p:nvGrpSpPr>
+      <p:grpSpPr>
+        <a:xfrm>
+          <a:off x="0" y="0"/>
+          <a:ext cx="0" cy="0"/>
+          <a:chOff x="0" y="0"/>
+          <a:chExt cx="0" cy="0"/>
+        </a:xfrm>
+      </p:grpSpPr>
+      <p:pic>
+        <p:nvPicPr>
+          <p:cNvPr id="1026" name="Picture 2">
+            <a:extLst>
+              <a:ext uri="{FF2B5EF4-FFF2-40B4-BE49-F238E27FC236}">
+                <a16:creationId xmlns:a16="http://schemas.microsoft.com/office/drawing/2014/main" id="{F658F6F1-3BCD-25E3-3CB0-4D59F6073347}"/>
+              </a:ext>
+            </a:extLst>
+          </p:cNvPr>
+          <p:cNvPicPr>
+            <a:picLocks noChangeAspect="1" noChangeArrowheads="1"/>
+          </p:cNvPicPr>
+          <p:nvPr/>
+        </p:nvPicPr>
+        <p:blipFill>
+          <a:blip r:embed="rId2">
+            <a:extLst>
+              <a:ext uri="{28A0092B-C50C-407E-A947-70E740481C1C}">
+                <a14:useLocalDpi xmlns:a14="http://schemas.microsoft.com/office/drawing/2010/main" val="0"/>
+              </a:ext>
+            </a:extLst>
+          </a:blip>
+          <a:srcRect/>
+          <a:stretch>
+            <a:fillRect/>
+          </a:stretch>
+        </p:blipFill>
+        <p:spPr bwMode="auto">
+          <a:xfrm>
+            <a:off x="6304549" y="160421"/>
+            <a:ext cx="5873904" cy="6565399"/>
+          </a:xfrm>
+          <a:prstGeom prst="rect">
+            <a:avLst/>
+          </a:prstGeom>
+          <a:noFill/>
+          <a:extLst>
+            <a:ext uri="{909E8E84-426E-40DD-AFC4-6F175D3DCCD1}">
+              <a14:hiddenFill xmlns:a14="http://schemas.microsoft.com/office/drawing/2010/main">
+                <a:solidFill>
+                  <a:srgbClr val="FFFFFF"/>
+                </a:solidFill>
+              </a14:hiddenFill>
+            </a:ext>
+          </a:extLst>
+        </p:spPr>
+      </p:pic>
+      <p:sp>
+        <p:nvSpPr>
+          <p:cNvPr id="2" name="Title 1">
+            <a:extLst>
+              <a:ext uri="{FF2B5EF4-FFF2-40B4-BE49-F238E27FC236}">
+                <a16:creationId xmlns:a16="http://schemas.microsoft.com/office/drawing/2014/main" id="{88E92D53-324F-D78B-3E60-61B03FE9BDB5}"/>
+              </a:ext>
+            </a:extLst>
+          </p:cNvPr>
+          <p:cNvSpPr>
+            <a:spLocks noGrp="1"/>
+          </p:cNvSpPr>
+          <p:nvPr>
+            <p:ph type="title"/>
+          </p:nvPr>
+        </p:nvSpPr>
+        <p:spPr>
+          <a:xfrm>
+            <a:off x="838200" y="365125"/>
+            <a:ext cx="5690760" cy="1325563"/>
+          </a:xfrm>
+        </p:spPr>
+        <p:txBody>
+          <a:bodyPr/>
+          <a:lstStyle/>
+          <a:p>
+            <a:r>
+              <a:rPr lang="en-US" dirty="0"/>
+              <a:t>But we can’t understand black box models?</a:t>
+            </a:r>
+          </a:p>
+        </p:txBody>
+      </p:sp>
+      <p:sp>
+        <p:nvSpPr>
+          <p:cNvPr id="3" name="Content Placeholder 2">
+            <a:extLst>
+              <a:ext uri="{FF2B5EF4-FFF2-40B4-BE49-F238E27FC236}">
+                <a16:creationId xmlns:a16="http://schemas.microsoft.com/office/drawing/2014/main" id="{70540CAA-2A70-FEF6-22B7-FAD2EE5D4A77}"/>
+              </a:ext>
+            </a:extLst>
+          </p:cNvPr>
+          <p:cNvSpPr>
+            <a:spLocks noGrp="1"/>
+          </p:cNvSpPr>
+          <p:nvPr>
+            <p:ph idx="1"/>
+          </p:nvPr>
+        </p:nvSpPr>
+        <p:spPr>
+          <a:xfrm>
+            <a:off x="838201" y="1874629"/>
+            <a:ext cx="4792578" cy="4667250"/>
+          </a:xfrm>
+        </p:spPr>
+        <p:txBody>
+          <a:bodyPr>
+            <a:normAutofit/>
+          </a:bodyPr>
+          <a:lstStyle/>
+          <a:p>
+            <a:pPr marL="0" indent="0">
+              <a:buNone/>
+            </a:pPr>
+            <a:r>
+              <a:rPr lang="en-US" dirty="0"/>
+              <a:t>Well, sort of…</a:t>
+            </a:r>
+          </a:p>
+          <a:p>
+            <a:r>
+              <a:rPr lang="en-US" dirty="0"/>
+              <a:t>Many algorithms used to make predictions are very complex and difficult (impossible?) to understand</a:t>
+            </a:r>
+          </a:p>
+          <a:p>
+            <a:endParaRPr lang="en-US" dirty="0"/>
+          </a:p>
+          <a:p>
+            <a:r>
+              <a:rPr lang="en-US" dirty="0"/>
+              <a:t>But post-hoc approaches can identify how the model is using variables to make predictions</a:t>
+            </a:r>
+          </a:p>
+        </p:txBody>
+      </p:sp>
+      <p:sp>
+        <p:nvSpPr>
+          <p:cNvPr id="5" name="TextBox 4">
+            <a:extLst>
+              <a:ext uri="{FF2B5EF4-FFF2-40B4-BE49-F238E27FC236}">
+                <a16:creationId xmlns:a16="http://schemas.microsoft.com/office/drawing/2014/main" id="{401C8856-B762-8E44-6FF8-42BB0420CE6C}"/>
+              </a:ext>
+            </a:extLst>
+          </p:cNvPr>
+          <p:cNvSpPr txBox="1"/>
+          <p:nvPr/>
+        </p:nvSpPr>
+        <p:spPr>
+          <a:xfrm>
+            <a:off x="8049263" y="6541879"/>
+            <a:ext cx="4142737" cy="307777"/>
+          </a:xfrm>
+          <a:prstGeom prst="rect">
+            <a:avLst/>
+          </a:prstGeom>
+          <a:noFill/>
+        </p:spPr>
+        <p:txBody>
+          <a:bodyPr wrap="none" rtlCol="0">
+            <a:spAutoFit/>
+          </a:bodyPr>
+          <a:lstStyle/>
+          <a:p>
+            <a:r>
+              <a:rPr lang="en-US" sz="1400" dirty="0">
+                <a:hlinkClick r:id="rId3"/>
+              </a:rPr>
+              <a:t>https://christophm.github.io/interpretable-ml-book</a:t>
+            </a:r>
+            <a:r>
+              <a:rPr lang="en-US" sz="1400" dirty="0"/>
+              <a:t> </a:t>
+            </a:r>
+          </a:p>
+        </p:txBody>
+      </p:sp>
+    </p:spTree>
+    <p:extLst>
+      <p:ext uri="{BB962C8B-B14F-4D97-AF65-F5344CB8AC3E}">
+        <p14:creationId xmlns:p14="http://schemas.microsoft.com/office/powerpoint/2010/main" val="1044364163"/>
+      </p:ext>
+    </p:extLst>
+  </p:cSld>
+  <p:clrMapOvr>
+    <a:masterClrMapping/>
+  </p:clrMapOvr>
+</p:sld>
+</file>
+
+<file path=ppt/slides/slide2.xml><?xml version="1.0" encoding="utf-8"?>
+<p:sld xmlns:a="http://schemas.openxmlformats.org/drawingml/2006/main" xmlns:r="http://schemas.openxmlformats.org/officeDocument/2006/relationships" xmlns:p="http://schemas.openxmlformats.org/presentationml/2006/main">
+  <p:cSld>
+    <p:spTree>
+      <p:nvGrpSpPr>
+        <p:cNvPr id="1" name=""/>
+        <p:cNvGrpSpPr/>
+        <p:nvPr/>
+      </p:nvGrpSpPr>
+      <p:grpSpPr>
+        <a:xfrm>
+          <a:off x="0" y="0"/>
+          <a:ext cx="0" cy="0"/>
+          <a:chOff x="0" y="0"/>
+          <a:chExt cx="0" cy="0"/>
+        </a:xfrm>
+      </p:grpSpPr>
+      <p:sp>
+        <p:nvSpPr>
+          <p:cNvPr id="2" name="Title 1">
+            <a:extLst>
+              <a:ext uri="{FF2B5EF4-FFF2-40B4-BE49-F238E27FC236}">
                 <a16:creationId xmlns:a16="http://schemas.microsoft.com/office/drawing/2014/main" id="{47CF43D2-AABB-3923-A21F-941815B0A9E9}"/>
               </a:ext>
             </a:extLst>
@@ -4076,7 +8223,7 @@
           <a:p>
             <a:r>
               <a:rPr lang="en-US" dirty="0"/>
-              <a:t>And why is is useful (for science)?</a:t>
+              <a:t>And why is it useful (for science)?</a:t>
             </a:r>
           </a:p>
         </p:txBody>
@@ -4301,7 +8448,7 @@
 </p:sld>
 </file>
 
-<file path=ppt/slides/slide10.xml><?xml version="1.0" encoding="utf-8"?>
+<file path=ppt/slides/slide20.xml><?xml version="1.0" encoding="utf-8"?>
 <p:sld xmlns:a="http://schemas.openxmlformats.org/drawingml/2006/main" xmlns:r="http://schemas.openxmlformats.org/officeDocument/2006/relationships" xmlns:p="http://schemas.openxmlformats.org/presentationml/2006/main">
   <p:cSld>
     <p:spTree>
@@ -4323,7 +8470,7 @@
           <p:cNvPr id="2" name="Title 1">
             <a:extLst>
               <a:ext uri="{FF2B5EF4-FFF2-40B4-BE49-F238E27FC236}">
-                <a16:creationId xmlns:a16="http://schemas.microsoft.com/office/drawing/2014/main" id="{8F4609B2-8DAD-0237-B6AF-7CC64EAB54FC}"/>
+                <a16:creationId xmlns:a16="http://schemas.microsoft.com/office/drawing/2014/main" id="{48180F28-CC7D-1145-245B-7DFC81B6E3B8}"/>
               </a:ext>
             </a:extLst>
           </p:cNvPr>
@@ -4341,70 +8488,792 @@
           <a:p>
             <a:r>
               <a:rPr lang="en-US" dirty="0"/>
-              <a:t>Break out groups (~5min)</a:t>
-            </a:r>
-          </a:p>
-        </p:txBody>
-      </p:sp>
-      <p:sp>
-        <p:nvSpPr>
-          <p:cNvPr id="3" name="Content Placeholder 2">
-            <a:extLst>
-              <a:ext uri="{FF2B5EF4-FFF2-40B4-BE49-F238E27FC236}">
-                <a16:creationId xmlns:a16="http://schemas.microsoft.com/office/drawing/2014/main" id="{29D0A7A8-6062-EB24-E8E3-40035D8AB20C}"/>
-              </a:ext>
-            </a:extLst>
-          </p:cNvPr>
-          <p:cNvSpPr>
-            <a:spLocks noGrp="1"/>
-          </p:cNvSpPr>
+              <a:t>Some terminology differences…</a:t>
+            </a:r>
+          </a:p>
+        </p:txBody>
+      </p:sp>
+      <p:graphicFrame>
+        <p:nvGraphicFramePr>
+          <p:cNvPr id="4" name="Content Placeholder 3">
+            <a:extLst>
+              <a:ext uri="{FF2B5EF4-FFF2-40B4-BE49-F238E27FC236}">
+                <a16:creationId xmlns:a16="http://schemas.microsoft.com/office/drawing/2014/main" id="{1202C325-DC39-5167-086D-184D56FFCD70}"/>
+              </a:ext>
+            </a:extLst>
+          </p:cNvPr>
+          <p:cNvGraphicFramePr>
+            <a:graphicFrameLocks noGrp="1"/>
+          </p:cNvGraphicFramePr>
           <p:nvPr>
             <p:ph idx="1"/>
-          </p:nvPr>
-        </p:nvSpPr>
-        <p:spPr/>
-        <p:txBody>
-          <a:bodyPr/>
-          <a:lstStyle/>
-          <a:p>
-            <a:pPr marL="0" indent="0">
-              <a:buNone/>
-            </a:pPr>
-            <a:r>
-              <a:rPr lang="en-US" dirty="0"/>
-              <a:t>Talk with folks at your table:</a:t>
-            </a:r>
-          </a:p>
-          <a:p>
-            <a:r>
-              <a:rPr lang="en-US" dirty="0"/>
-              <a:t>Names</a:t>
-            </a:r>
-          </a:p>
-          <a:p>
-            <a:r>
-              <a:rPr lang="en-US" dirty="0"/>
-              <a:t>What modeling mindset(s) you typically use in your work</a:t>
-            </a:r>
-          </a:p>
-          <a:p>
-            <a:r>
-              <a:rPr lang="en-US" dirty="0"/>
-              <a:t>What interests brought you to this workshop today</a:t>
-            </a:r>
-          </a:p>
-          <a:p>
-            <a:r>
-              <a:rPr lang="en-US" dirty="0"/>
-              <a:t>Favorite body of water (anywhere, any type)</a:t>
-            </a:r>
-          </a:p>
-        </p:txBody>
-      </p:sp>
+            <p:extLst>
+              <p:ext uri="{D42A27DB-BD31-4B8C-83A1-F6EECF244321}">
+                <p14:modId xmlns:p14="http://schemas.microsoft.com/office/powerpoint/2010/main" val="2659336193"/>
+              </p:ext>
+            </p:extLst>
+          </p:nvPr>
+        </p:nvGraphicFramePr>
+        <p:xfrm>
+          <a:off x="1882726" y="1952233"/>
+          <a:ext cx="8426548" cy="4223480"/>
+        </p:xfrm>
+        <a:graphic>
+          <a:graphicData uri="http://schemas.openxmlformats.org/drawingml/2006/table">
+            <a:tbl>
+              <a:tblPr firstRow="1" bandRow="1">
+                <a:tableStyleId>{616DA210-FB5B-4158-B5E0-FEB733F419BA}</a:tableStyleId>
+              </a:tblPr>
+              <a:tblGrid>
+                <a:gridCol w="4213274">
+                  <a:extLst>
+                    <a:ext uri="{9D8B030D-6E8A-4147-A177-3AD203B41FA5}">
+                      <a16:colId xmlns:a16="http://schemas.microsoft.com/office/drawing/2014/main" val="4102760801"/>
+                    </a:ext>
+                  </a:extLst>
+                </a:gridCol>
+                <a:gridCol w="4213274">
+                  <a:extLst>
+                    <a:ext uri="{9D8B030D-6E8A-4147-A177-3AD203B41FA5}">
+                      <a16:colId xmlns:a16="http://schemas.microsoft.com/office/drawing/2014/main" val="3470436120"/>
+                    </a:ext>
+                  </a:extLst>
+                </a:gridCol>
+              </a:tblGrid>
+              <a:tr h="527935">
+                <a:tc>
+                  <a:txBody>
+                    <a:bodyPr/>
+                    <a:lstStyle/>
+                    <a:p>
+                      <a:pPr algn="r"/>
+                      <a:r>
+                        <a:rPr lang="en-US" sz="2400" dirty="0"/>
+                        <a:t>Statistical modeling</a:t>
+                      </a:r>
+                    </a:p>
+                  </a:txBody>
+                  <a:tcPr>
+                    <a:lnL w="12700" cmpd="sng">
+                      <a:noFill/>
+                    </a:lnL>
+                    <a:lnR w="12700" cap="flat" cmpd="sng" algn="ctr">
+                      <a:solidFill>
+                        <a:schemeClr val="tx1"/>
+                      </a:solidFill>
+                      <a:prstDash val="solid"/>
+                      <a:round/>
+                      <a:headEnd type="none" w="med" len="med"/>
+                      <a:tailEnd type="none" w="med" len="med"/>
+                    </a:lnR>
+                    <a:lnT w="12700" cmpd="sng">
+                      <a:noFill/>
+                    </a:lnT>
+                    <a:lnB w="12700" cap="flat" cmpd="sng" algn="ctr">
+                      <a:solidFill>
+                        <a:schemeClr val="tx1"/>
+                      </a:solidFill>
+                      <a:prstDash val="solid"/>
+                      <a:round/>
+                      <a:headEnd type="none" w="med" len="med"/>
+                      <a:tailEnd type="none" w="med" len="med"/>
+                    </a:lnB>
+                    <a:lnTlToBr w="12700" cmpd="sng">
+                      <a:noFill/>
+                      <a:prstDash val="solid"/>
+                    </a:lnTlToBr>
+                    <a:lnBlToTr w="12700" cmpd="sng">
+                      <a:noFill/>
+                      <a:prstDash val="solid"/>
+                    </a:lnBlToTr>
+                    <a:noFill/>
+                  </a:tcPr>
+                </a:tc>
+                <a:tc>
+                  <a:txBody>
+                    <a:bodyPr/>
+                    <a:lstStyle/>
+                    <a:p>
+                      <a:r>
+                        <a:rPr lang="en-US" sz="2400" dirty="0"/>
+                        <a:t>Machine learning</a:t>
+                      </a:r>
+                    </a:p>
+                  </a:txBody>
+                  <a:tcPr>
+                    <a:lnL w="12700" cap="flat" cmpd="sng" algn="ctr">
+                      <a:solidFill>
+                        <a:schemeClr val="tx1"/>
+                      </a:solidFill>
+                      <a:prstDash val="solid"/>
+                      <a:round/>
+                      <a:headEnd type="none" w="med" len="med"/>
+                      <a:tailEnd type="none" w="med" len="med"/>
+                    </a:lnL>
+                    <a:lnR w="12700" cmpd="sng">
+                      <a:noFill/>
+                    </a:lnR>
+                    <a:lnT w="12700" cmpd="sng">
+                      <a:noFill/>
+                    </a:lnT>
+                    <a:lnB w="12700" cap="flat" cmpd="sng" algn="ctr">
+                      <a:solidFill>
+                        <a:schemeClr val="tx1"/>
+                      </a:solidFill>
+                      <a:prstDash val="solid"/>
+                      <a:round/>
+                      <a:headEnd type="none" w="med" len="med"/>
+                      <a:tailEnd type="none" w="med" len="med"/>
+                    </a:lnB>
+                    <a:lnTlToBr w="12700" cmpd="sng">
+                      <a:noFill/>
+                      <a:prstDash val="solid"/>
+                    </a:lnTlToBr>
+                    <a:lnBlToTr w="12700" cmpd="sng">
+                      <a:noFill/>
+                      <a:prstDash val="solid"/>
+                    </a:lnBlToTr>
+                    <a:noFill/>
+                  </a:tcPr>
+                </a:tc>
+                <a:extLst>
+                  <a:ext uri="{0D108BD9-81ED-4DB2-BD59-A6C34878D82A}">
+                    <a16:rowId xmlns:a16="http://schemas.microsoft.com/office/drawing/2014/main" val="726613064"/>
+                  </a:ext>
+                </a:extLst>
+              </a:tr>
+              <a:tr h="527935">
+                <a:tc>
+                  <a:txBody>
+                    <a:bodyPr/>
+                    <a:lstStyle/>
+                    <a:p>
+                      <a:pPr algn="r"/>
+                      <a:r>
+                        <a:rPr lang="en-US" dirty="0"/>
+                        <a:t>Fit a model</a:t>
+                      </a:r>
+                    </a:p>
+                  </a:txBody>
+                  <a:tcPr>
+                    <a:lnL w="12700" cmpd="sng">
+                      <a:noFill/>
+                    </a:lnL>
+                    <a:lnR w="12700" cap="flat" cmpd="sng" algn="ctr">
+                      <a:solidFill>
+                        <a:schemeClr val="tx1"/>
+                      </a:solidFill>
+                      <a:prstDash val="solid"/>
+                      <a:round/>
+                      <a:headEnd type="none" w="med" len="med"/>
+                      <a:tailEnd type="none" w="med" len="med"/>
+                    </a:lnR>
+                    <a:lnT w="12700" cap="flat" cmpd="sng" algn="ctr">
+                      <a:solidFill>
+                        <a:schemeClr val="tx1"/>
+                      </a:solidFill>
+                      <a:prstDash val="solid"/>
+                      <a:round/>
+                      <a:headEnd type="none" w="med" len="med"/>
+                      <a:tailEnd type="none" w="med" len="med"/>
+                    </a:lnT>
+                    <a:lnB w="12700" cmpd="sng">
+                      <a:noFill/>
+                    </a:lnB>
+                    <a:lnTlToBr w="12700" cmpd="sng">
+                      <a:noFill/>
+                      <a:prstDash val="solid"/>
+                    </a:lnTlToBr>
+                    <a:lnBlToTr w="12700" cmpd="sng">
+                      <a:noFill/>
+                      <a:prstDash val="solid"/>
+                    </a:lnBlToTr>
+                    <a:noFill/>
+                  </a:tcPr>
+                </a:tc>
+                <a:tc>
+                  <a:txBody>
+                    <a:bodyPr/>
+                    <a:lstStyle/>
+                    <a:p>
+                      <a:r>
+                        <a:rPr lang="en-US" dirty="0"/>
+                        <a:t>Train a model</a:t>
+                      </a:r>
+                    </a:p>
+                  </a:txBody>
+                  <a:tcPr>
+                    <a:lnL w="12700" cap="flat" cmpd="sng" algn="ctr">
+                      <a:solidFill>
+                        <a:schemeClr val="tx1"/>
+                      </a:solidFill>
+                      <a:prstDash val="solid"/>
+                      <a:round/>
+                      <a:headEnd type="none" w="med" len="med"/>
+                      <a:tailEnd type="none" w="med" len="med"/>
+                    </a:lnL>
+                    <a:lnR w="12700" cmpd="sng">
+                      <a:noFill/>
+                    </a:lnR>
+                    <a:lnT w="12700" cap="flat" cmpd="sng" algn="ctr">
+                      <a:solidFill>
+                        <a:schemeClr val="tx1"/>
+                      </a:solidFill>
+                      <a:prstDash val="solid"/>
+                      <a:round/>
+                      <a:headEnd type="none" w="med" len="med"/>
+                      <a:tailEnd type="none" w="med" len="med"/>
+                    </a:lnT>
+                    <a:lnB w="12700" cmpd="sng">
+                      <a:noFill/>
+                    </a:lnB>
+                    <a:lnTlToBr w="12700" cmpd="sng">
+                      <a:noFill/>
+                      <a:prstDash val="solid"/>
+                    </a:lnTlToBr>
+                    <a:lnBlToTr w="12700" cmpd="sng">
+                      <a:noFill/>
+                      <a:prstDash val="solid"/>
+                    </a:lnBlToTr>
+                    <a:noFill/>
+                  </a:tcPr>
+                </a:tc>
+                <a:extLst>
+                  <a:ext uri="{0D108BD9-81ED-4DB2-BD59-A6C34878D82A}">
+                    <a16:rowId xmlns:a16="http://schemas.microsoft.com/office/drawing/2014/main" val="2097793864"/>
+                  </a:ext>
+                </a:extLst>
+              </a:tr>
+              <a:tr h="527935">
+                <a:tc>
+                  <a:txBody>
+                    <a:bodyPr/>
+                    <a:lstStyle/>
+                    <a:p>
+                      <a:pPr algn="r"/>
+                      <a:r>
+                        <a:rPr lang="en-US" dirty="0"/>
+                        <a:t>Dependent variable; Response variable</a:t>
+                      </a:r>
+                    </a:p>
+                  </a:txBody>
+                  <a:tcPr>
+                    <a:lnL w="12700" cmpd="sng">
+                      <a:noFill/>
+                    </a:lnL>
+                    <a:lnR w="12700" cap="flat" cmpd="sng" algn="ctr">
+                      <a:solidFill>
+                        <a:schemeClr val="tx1"/>
+                      </a:solidFill>
+                      <a:prstDash val="solid"/>
+                      <a:round/>
+                      <a:headEnd type="none" w="med" len="med"/>
+                      <a:tailEnd type="none" w="med" len="med"/>
+                    </a:lnR>
+                    <a:lnT w="12700" cmpd="sng">
+                      <a:noFill/>
+                    </a:lnT>
+                    <a:lnB w="12700" cmpd="sng">
+                      <a:noFill/>
+                    </a:lnB>
+                    <a:lnTlToBr w="12700" cmpd="sng">
+                      <a:noFill/>
+                      <a:prstDash val="solid"/>
+                    </a:lnTlToBr>
+                    <a:lnBlToTr w="12700" cmpd="sng">
+                      <a:noFill/>
+                      <a:prstDash val="solid"/>
+                    </a:lnBlToTr>
+                    <a:noFill/>
+                  </a:tcPr>
+                </a:tc>
+                <a:tc>
+                  <a:txBody>
+                    <a:bodyPr/>
+                    <a:lstStyle/>
+                    <a:p>
+                      <a:r>
+                        <a:rPr lang="en-US" dirty="0"/>
+                        <a:t>Response variable; Target variable</a:t>
+                      </a:r>
+                    </a:p>
+                  </a:txBody>
+                  <a:tcPr>
+                    <a:lnL w="12700" cap="flat" cmpd="sng" algn="ctr">
+                      <a:solidFill>
+                        <a:schemeClr val="tx1"/>
+                      </a:solidFill>
+                      <a:prstDash val="solid"/>
+                      <a:round/>
+                      <a:headEnd type="none" w="med" len="med"/>
+                      <a:tailEnd type="none" w="med" len="med"/>
+                    </a:lnL>
+                    <a:lnR w="12700" cmpd="sng">
+                      <a:noFill/>
+                    </a:lnR>
+                    <a:lnT w="12700" cmpd="sng">
+                      <a:noFill/>
+                    </a:lnT>
+                    <a:lnB w="12700" cmpd="sng">
+                      <a:noFill/>
+                    </a:lnB>
+                    <a:lnTlToBr w="12700" cmpd="sng">
+                      <a:noFill/>
+                      <a:prstDash val="solid"/>
+                    </a:lnTlToBr>
+                    <a:lnBlToTr w="12700" cmpd="sng">
+                      <a:noFill/>
+                      <a:prstDash val="solid"/>
+                    </a:lnBlToTr>
+                    <a:noFill/>
+                  </a:tcPr>
+                </a:tc>
+                <a:extLst>
+                  <a:ext uri="{0D108BD9-81ED-4DB2-BD59-A6C34878D82A}">
+                    <a16:rowId xmlns:a16="http://schemas.microsoft.com/office/drawing/2014/main" val="348016534"/>
+                  </a:ext>
+                </a:extLst>
+              </a:tr>
+              <a:tr h="527935">
+                <a:tc>
+                  <a:txBody>
+                    <a:bodyPr/>
+                    <a:lstStyle/>
+                    <a:p>
+                      <a:pPr algn="r"/>
+                      <a:r>
+                        <a:rPr lang="en-US" dirty="0"/>
+                        <a:t>Independent variable; Predictor variable</a:t>
+                      </a:r>
+                    </a:p>
+                  </a:txBody>
+                  <a:tcPr>
+                    <a:lnL w="12700" cmpd="sng">
+                      <a:noFill/>
+                    </a:lnL>
+                    <a:lnR w="12700" cap="flat" cmpd="sng" algn="ctr">
+                      <a:solidFill>
+                        <a:schemeClr val="tx1"/>
+                      </a:solidFill>
+                      <a:prstDash val="solid"/>
+                      <a:round/>
+                      <a:headEnd type="none" w="med" len="med"/>
+                      <a:tailEnd type="none" w="med" len="med"/>
+                    </a:lnR>
+                    <a:lnT w="12700" cmpd="sng">
+                      <a:noFill/>
+                    </a:lnT>
+                    <a:lnB w="12700" cmpd="sng">
+                      <a:noFill/>
+                    </a:lnB>
+                    <a:lnTlToBr w="12700" cmpd="sng">
+                      <a:noFill/>
+                      <a:prstDash val="solid"/>
+                    </a:lnTlToBr>
+                    <a:lnBlToTr w="12700" cmpd="sng">
+                      <a:noFill/>
+                      <a:prstDash val="solid"/>
+                    </a:lnBlToTr>
+                    <a:noFill/>
+                  </a:tcPr>
+                </a:tc>
+                <a:tc>
+                  <a:txBody>
+                    <a:bodyPr/>
+                    <a:lstStyle/>
+                    <a:p>
+                      <a:r>
+                        <a:rPr lang="en-US" dirty="0"/>
+                        <a:t>Feature variable; Predictor variable</a:t>
+                      </a:r>
+                    </a:p>
+                  </a:txBody>
+                  <a:tcPr>
+                    <a:lnL w="12700" cap="flat" cmpd="sng" algn="ctr">
+                      <a:solidFill>
+                        <a:schemeClr val="tx1"/>
+                      </a:solidFill>
+                      <a:prstDash val="solid"/>
+                      <a:round/>
+                      <a:headEnd type="none" w="med" len="med"/>
+                      <a:tailEnd type="none" w="med" len="med"/>
+                    </a:lnL>
+                    <a:lnR w="12700" cmpd="sng">
+                      <a:noFill/>
+                    </a:lnR>
+                    <a:lnT w="12700" cmpd="sng">
+                      <a:noFill/>
+                    </a:lnT>
+                    <a:lnB w="12700" cmpd="sng">
+                      <a:noFill/>
+                    </a:lnB>
+                    <a:lnTlToBr w="12700" cmpd="sng">
+                      <a:noFill/>
+                      <a:prstDash val="solid"/>
+                    </a:lnTlToBr>
+                    <a:lnBlToTr w="12700" cmpd="sng">
+                      <a:noFill/>
+                      <a:prstDash val="solid"/>
+                    </a:lnBlToTr>
+                    <a:noFill/>
+                  </a:tcPr>
+                </a:tc>
+                <a:extLst>
+                  <a:ext uri="{0D108BD9-81ED-4DB2-BD59-A6C34878D82A}">
+                    <a16:rowId xmlns:a16="http://schemas.microsoft.com/office/drawing/2014/main" val="2449975641"/>
+                  </a:ext>
+                </a:extLst>
+              </a:tr>
+              <a:tr h="527935">
+                <a:tc>
+                  <a:txBody>
+                    <a:bodyPr/>
+                    <a:lstStyle/>
+                    <a:p>
+                      <a:pPr algn="r"/>
+                      <a:endParaRPr lang="en-US" dirty="0"/>
+                    </a:p>
+                  </a:txBody>
+                  <a:tcPr>
+                    <a:lnL w="12700" cmpd="sng">
+                      <a:noFill/>
+                    </a:lnL>
+                    <a:lnR w="12700" cap="flat" cmpd="sng" algn="ctr">
+                      <a:solidFill>
+                        <a:schemeClr val="tx1"/>
+                      </a:solidFill>
+                      <a:prstDash val="solid"/>
+                      <a:round/>
+                      <a:headEnd type="none" w="med" len="med"/>
+                      <a:tailEnd type="none" w="med" len="med"/>
+                    </a:lnR>
+                    <a:lnT w="12700" cmpd="sng">
+                      <a:noFill/>
+                    </a:lnT>
+                    <a:lnB w="12700" cmpd="sng">
+                      <a:noFill/>
+                    </a:lnB>
+                    <a:lnTlToBr w="12700" cmpd="sng">
+                      <a:noFill/>
+                      <a:prstDash val="solid"/>
+                    </a:lnTlToBr>
+                    <a:lnBlToTr w="12700" cmpd="sng">
+                      <a:noFill/>
+                      <a:prstDash val="solid"/>
+                    </a:lnBlToTr>
+                    <a:noFill/>
+                  </a:tcPr>
+                </a:tc>
+                <a:tc>
+                  <a:txBody>
+                    <a:bodyPr/>
+                    <a:lstStyle/>
+                    <a:p>
+                      <a:endParaRPr lang="en-US" dirty="0"/>
+                    </a:p>
+                  </a:txBody>
+                  <a:tcPr>
+                    <a:lnL w="12700" cap="flat" cmpd="sng" algn="ctr">
+                      <a:solidFill>
+                        <a:schemeClr val="tx1"/>
+                      </a:solidFill>
+                      <a:prstDash val="solid"/>
+                      <a:round/>
+                      <a:headEnd type="none" w="med" len="med"/>
+                      <a:tailEnd type="none" w="med" len="med"/>
+                    </a:lnL>
+                    <a:lnR w="12700" cmpd="sng">
+                      <a:noFill/>
+                    </a:lnR>
+                    <a:lnT w="12700" cmpd="sng">
+                      <a:noFill/>
+                    </a:lnT>
+                    <a:lnB w="12700" cmpd="sng">
+                      <a:noFill/>
+                    </a:lnB>
+                    <a:lnTlToBr w="12700" cmpd="sng">
+                      <a:noFill/>
+                      <a:prstDash val="solid"/>
+                    </a:lnTlToBr>
+                    <a:lnBlToTr w="12700" cmpd="sng">
+                      <a:noFill/>
+                      <a:prstDash val="solid"/>
+                    </a:lnBlToTr>
+                    <a:noFill/>
+                  </a:tcPr>
+                </a:tc>
+                <a:extLst>
+                  <a:ext uri="{0D108BD9-81ED-4DB2-BD59-A6C34878D82A}">
+                    <a16:rowId xmlns:a16="http://schemas.microsoft.com/office/drawing/2014/main" val="77305544"/>
+                  </a:ext>
+                </a:extLst>
+              </a:tr>
+              <a:tr h="527935">
+                <a:tc>
+                  <a:txBody>
+                    <a:bodyPr/>
+                    <a:lstStyle/>
+                    <a:p>
+                      <a:pPr algn="r"/>
+                      <a:endParaRPr lang="en-US" dirty="0"/>
+                    </a:p>
+                  </a:txBody>
+                  <a:tcPr>
+                    <a:lnL w="12700" cmpd="sng">
+                      <a:noFill/>
+                    </a:lnL>
+                    <a:lnR w="12700" cap="flat" cmpd="sng" algn="ctr">
+                      <a:solidFill>
+                        <a:schemeClr val="tx1"/>
+                      </a:solidFill>
+                      <a:prstDash val="solid"/>
+                      <a:round/>
+                      <a:headEnd type="none" w="med" len="med"/>
+                      <a:tailEnd type="none" w="med" len="med"/>
+                    </a:lnR>
+                    <a:lnT w="12700" cmpd="sng">
+                      <a:noFill/>
+                    </a:lnT>
+                    <a:lnB w="12700" cmpd="sng">
+                      <a:noFill/>
+                    </a:lnB>
+                    <a:lnTlToBr w="12700" cmpd="sng">
+                      <a:noFill/>
+                      <a:prstDash val="solid"/>
+                    </a:lnTlToBr>
+                    <a:lnBlToTr w="12700" cmpd="sng">
+                      <a:noFill/>
+                      <a:prstDash val="solid"/>
+                    </a:lnBlToTr>
+                    <a:noFill/>
+                  </a:tcPr>
+                </a:tc>
+                <a:tc>
+                  <a:txBody>
+                    <a:bodyPr/>
+                    <a:lstStyle/>
+                    <a:p>
+                      <a:endParaRPr lang="en-US"/>
+                    </a:p>
+                  </a:txBody>
+                  <a:tcPr>
+                    <a:lnL w="12700" cap="flat" cmpd="sng" algn="ctr">
+                      <a:solidFill>
+                        <a:schemeClr val="tx1"/>
+                      </a:solidFill>
+                      <a:prstDash val="solid"/>
+                      <a:round/>
+                      <a:headEnd type="none" w="med" len="med"/>
+                      <a:tailEnd type="none" w="med" len="med"/>
+                    </a:lnL>
+                    <a:lnR w="12700" cmpd="sng">
+                      <a:noFill/>
+                    </a:lnR>
+                    <a:lnT w="12700" cmpd="sng">
+                      <a:noFill/>
+                    </a:lnT>
+                    <a:lnB w="12700" cmpd="sng">
+                      <a:noFill/>
+                    </a:lnB>
+                    <a:lnTlToBr w="12700" cmpd="sng">
+                      <a:noFill/>
+                      <a:prstDash val="solid"/>
+                    </a:lnTlToBr>
+                    <a:lnBlToTr w="12700" cmpd="sng">
+                      <a:noFill/>
+                      <a:prstDash val="solid"/>
+                    </a:lnBlToTr>
+                    <a:noFill/>
+                  </a:tcPr>
+                </a:tc>
+                <a:extLst>
+                  <a:ext uri="{0D108BD9-81ED-4DB2-BD59-A6C34878D82A}">
+                    <a16:rowId xmlns:a16="http://schemas.microsoft.com/office/drawing/2014/main" val="4279621534"/>
+                  </a:ext>
+                </a:extLst>
+              </a:tr>
+              <a:tr h="527935">
+                <a:tc>
+                  <a:txBody>
+                    <a:bodyPr/>
+                    <a:lstStyle/>
+                    <a:p>
+                      <a:pPr algn="r"/>
+                      <a:endParaRPr lang="en-US" dirty="0"/>
+                    </a:p>
+                  </a:txBody>
+                  <a:tcPr>
+                    <a:lnL w="12700" cmpd="sng">
+                      <a:noFill/>
+                    </a:lnL>
+                    <a:lnR w="12700" cap="flat" cmpd="sng" algn="ctr">
+                      <a:solidFill>
+                        <a:schemeClr val="tx1"/>
+                      </a:solidFill>
+                      <a:prstDash val="solid"/>
+                      <a:round/>
+                      <a:headEnd type="none" w="med" len="med"/>
+                      <a:tailEnd type="none" w="med" len="med"/>
+                    </a:lnR>
+                    <a:lnT w="12700" cmpd="sng">
+                      <a:noFill/>
+                    </a:lnT>
+                    <a:lnB w="12700" cmpd="sng">
+                      <a:noFill/>
+                    </a:lnB>
+                    <a:lnTlToBr w="12700" cmpd="sng">
+                      <a:noFill/>
+                      <a:prstDash val="solid"/>
+                    </a:lnTlToBr>
+                    <a:lnBlToTr w="12700" cmpd="sng">
+                      <a:noFill/>
+                      <a:prstDash val="solid"/>
+                    </a:lnBlToTr>
+                    <a:noFill/>
+                  </a:tcPr>
+                </a:tc>
+                <a:tc>
+                  <a:txBody>
+                    <a:bodyPr/>
+                    <a:lstStyle/>
+                    <a:p>
+                      <a:endParaRPr lang="en-US"/>
+                    </a:p>
+                  </a:txBody>
+                  <a:tcPr>
+                    <a:lnL w="12700" cap="flat" cmpd="sng" algn="ctr">
+                      <a:solidFill>
+                        <a:schemeClr val="tx1"/>
+                      </a:solidFill>
+                      <a:prstDash val="solid"/>
+                      <a:round/>
+                      <a:headEnd type="none" w="med" len="med"/>
+                      <a:tailEnd type="none" w="med" len="med"/>
+                    </a:lnL>
+                    <a:lnR w="12700" cmpd="sng">
+                      <a:noFill/>
+                    </a:lnR>
+                    <a:lnT w="12700" cmpd="sng">
+                      <a:noFill/>
+                    </a:lnT>
+                    <a:lnB w="12700" cmpd="sng">
+                      <a:noFill/>
+                    </a:lnB>
+                    <a:lnTlToBr w="12700" cmpd="sng">
+                      <a:noFill/>
+                      <a:prstDash val="solid"/>
+                    </a:lnTlToBr>
+                    <a:lnBlToTr w="12700" cmpd="sng">
+                      <a:noFill/>
+                      <a:prstDash val="solid"/>
+                    </a:lnBlToTr>
+                    <a:noFill/>
+                  </a:tcPr>
+                </a:tc>
+                <a:extLst>
+                  <a:ext uri="{0D108BD9-81ED-4DB2-BD59-A6C34878D82A}">
+                    <a16:rowId xmlns:a16="http://schemas.microsoft.com/office/drawing/2014/main" val="2563935296"/>
+                  </a:ext>
+                </a:extLst>
+              </a:tr>
+              <a:tr h="527935">
+                <a:tc>
+                  <a:txBody>
+                    <a:bodyPr/>
+                    <a:lstStyle/>
+                    <a:p>
+                      <a:pPr algn="r"/>
+                      <a:r>
+                        <a:rPr lang="en-US" dirty="0"/>
+                        <a:t>Examine the coefficients</a:t>
+                      </a:r>
+                    </a:p>
+                  </a:txBody>
+                  <a:tcPr>
+                    <a:lnL w="12700" cmpd="sng">
+                      <a:noFill/>
+                    </a:lnL>
+                    <a:lnR w="12700" cap="flat" cmpd="sng" algn="ctr">
+                      <a:solidFill>
+                        <a:schemeClr val="tx1"/>
+                      </a:solidFill>
+                      <a:prstDash val="solid"/>
+                      <a:round/>
+                      <a:headEnd type="none" w="med" len="med"/>
+                      <a:tailEnd type="none" w="med" len="med"/>
+                    </a:lnR>
+                    <a:lnT w="12700" cmpd="sng">
+                      <a:noFill/>
+                    </a:lnT>
+                    <a:lnB w="12700" cmpd="sng">
+                      <a:noFill/>
+                    </a:lnB>
+                    <a:lnTlToBr w="12700" cmpd="sng">
+                      <a:noFill/>
+                      <a:prstDash val="solid"/>
+                    </a:lnTlToBr>
+                    <a:lnBlToTr w="12700" cmpd="sng">
+                      <a:noFill/>
+                      <a:prstDash val="solid"/>
+                    </a:lnBlToTr>
+                    <a:noFill/>
+                  </a:tcPr>
+                </a:tc>
+                <a:tc>
+                  <a:txBody>
+                    <a:bodyPr/>
+                    <a:lstStyle/>
+                    <a:p>
+                      <a:r>
+                        <a:rPr lang="en-US" dirty="0"/>
+                        <a:t>“Interpret” or “Explain” the model</a:t>
+                      </a:r>
+                    </a:p>
+                  </a:txBody>
+                  <a:tcPr>
+                    <a:lnL w="12700" cap="flat" cmpd="sng" algn="ctr">
+                      <a:solidFill>
+                        <a:schemeClr val="tx1"/>
+                      </a:solidFill>
+                      <a:prstDash val="solid"/>
+                      <a:round/>
+                      <a:headEnd type="none" w="med" len="med"/>
+                      <a:tailEnd type="none" w="med" len="med"/>
+                    </a:lnL>
+                    <a:lnR w="12700" cmpd="sng">
+                      <a:noFill/>
+                    </a:lnR>
+                    <a:lnT w="12700" cmpd="sng">
+                      <a:noFill/>
+                    </a:lnT>
+                    <a:lnB w="12700" cmpd="sng">
+                      <a:noFill/>
+                    </a:lnB>
+                    <a:lnTlToBr w="12700" cmpd="sng">
+                      <a:noFill/>
+                      <a:prstDash val="solid"/>
+                    </a:lnTlToBr>
+                    <a:lnBlToTr w="12700" cmpd="sng">
+                      <a:noFill/>
+                      <a:prstDash val="solid"/>
+                    </a:lnBlToTr>
+                    <a:noFill/>
+                  </a:tcPr>
+                </a:tc>
+                <a:extLst>
+                  <a:ext uri="{0D108BD9-81ED-4DB2-BD59-A6C34878D82A}">
+                    <a16:rowId xmlns:a16="http://schemas.microsoft.com/office/drawing/2014/main" val="1661119405"/>
+                  </a:ext>
+                </a:extLst>
+              </a:tr>
+            </a:tbl>
+          </a:graphicData>
+        </a:graphic>
+      </p:graphicFrame>
     </p:spTree>
     <p:extLst>
       <p:ext uri="{BB962C8B-B14F-4D97-AF65-F5344CB8AC3E}">
-        <p14:creationId xmlns:p14="http://schemas.microsoft.com/office/powerpoint/2010/main" val="3850885334"/>
+        <p14:creationId xmlns:p14="http://schemas.microsoft.com/office/powerpoint/2010/main" val="2975376723"/>
       </p:ext>
     </p:extLst>
   </p:cSld>
@@ -4414,7 +9283,7 @@
 </p:sld>
 </file>
 
-<file path=ppt/slides/slide2.xml><?xml version="1.0" encoding="utf-8"?>
+<file path=ppt/slides/slide21.xml><?xml version="1.0" encoding="utf-8"?>
 <p:sld xmlns:a="http://schemas.openxmlformats.org/drawingml/2006/main" xmlns:r="http://schemas.openxmlformats.org/officeDocument/2006/relationships" xmlns:p="http://schemas.openxmlformats.org/presentationml/2006/main">
   <p:cSld>
     <p:spTree>
@@ -4436,7 +9305,7 @@
           <p:cNvPr id="2" name="Title 1">
             <a:extLst>
               <a:ext uri="{FF2B5EF4-FFF2-40B4-BE49-F238E27FC236}">
-                <a16:creationId xmlns:a16="http://schemas.microsoft.com/office/drawing/2014/main" id="{720C2576-357D-876A-70BB-664D14B59537}"/>
+                <a16:creationId xmlns:a16="http://schemas.microsoft.com/office/drawing/2014/main" id="{2ED9C620-C9E2-7961-B5F8-4FE45A9746AC}"/>
               </a:ext>
             </a:extLst>
           </p:cNvPr>
@@ -4454,17 +9323,465 @@
           <a:p>
             <a:r>
               <a:rPr lang="en-US" dirty="0"/>
-              <a:t>Modeling mindsets:</a:t>
-            </a:r>
-          </a:p>
-        </p:txBody>
-      </p:sp>
-      <p:sp>
-        <p:nvSpPr>
-          <p:cNvPr id="5" name="TextBox 4">
-            <a:extLst>
-              <a:ext uri="{FF2B5EF4-FFF2-40B4-BE49-F238E27FC236}">
-                <a16:creationId xmlns:a16="http://schemas.microsoft.com/office/drawing/2014/main" id="{0A5F1254-83D3-DAA5-948B-CC9457AD6654}"/>
+              <a:t>Today, we’ll focus on supervised machine learning and tree-based algorithms</a:t>
+            </a:r>
+            <a:endParaRPr lang="en-US" b="1" dirty="0"/>
+          </a:p>
+        </p:txBody>
+      </p:sp>
+      <p:sp>
+        <p:nvSpPr>
+          <p:cNvPr id="3" name="Content Placeholder 2">
+            <a:extLst>
+              <a:ext uri="{FF2B5EF4-FFF2-40B4-BE49-F238E27FC236}">
+                <a16:creationId xmlns:a16="http://schemas.microsoft.com/office/drawing/2014/main" id="{2CE455A1-1296-7EDE-EF6F-761FAC88DD18}"/>
+              </a:ext>
+            </a:extLst>
+          </p:cNvPr>
+          <p:cNvSpPr>
+            <a:spLocks noGrp="1"/>
+          </p:cNvSpPr>
+          <p:nvPr>
+            <p:ph idx="1"/>
+          </p:nvPr>
+        </p:nvSpPr>
+        <p:spPr>
+          <a:xfrm>
+            <a:off x="838200" y="1825625"/>
+            <a:ext cx="5081337" cy="4667250"/>
+          </a:xfrm>
+        </p:spPr>
+        <p:txBody>
+          <a:bodyPr>
+            <a:normAutofit fontScale="92500" lnSpcReduction="10000"/>
+          </a:bodyPr>
+          <a:lstStyle/>
+          <a:p>
+            <a:pPr marL="0" indent="0">
+              <a:buNone/>
+            </a:pPr>
+            <a:r>
+              <a:rPr lang="en-US" b="1" dirty="0"/>
+              <a:t>We’ll cover:</a:t>
+            </a:r>
+          </a:p>
+          <a:p>
+            <a:r>
+              <a:rPr lang="en-US" dirty="0"/>
+              <a:t>Model evaluation and cross-validation approaches</a:t>
+            </a:r>
+          </a:p>
+          <a:p>
+            <a:r>
+              <a:rPr lang="en-US" dirty="0"/>
+              <a:t>Handling correlated variables</a:t>
+            </a:r>
+          </a:p>
+          <a:p>
+            <a:r>
+              <a:rPr lang="en-US" dirty="0"/>
+              <a:t>Class-balancing</a:t>
+            </a:r>
+          </a:p>
+          <a:p>
+            <a:r>
+              <a:rPr lang="en-US" dirty="0"/>
+              <a:t>Model tuning</a:t>
+            </a:r>
+          </a:p>
+          <a:p>
+            <a:r>
+              <a:rPr lang="en-US" dirty="0"/>
+              <a:t>Model interpretation</a:t>
+            </a:r>
+          </a:p>
+          <a:p>
+            <a:r>
+              <a:rPr lang="en-US" dirty="0"/>
+              <a:t>Classification and regression trees (CART)</a:t>
+            </a:r>
+          </a:p>
+          <a:p>
+            <a:r>
+              <a:rPr lang="en-US" dirty="0"/>
+              <a:t>Random forests</a:t>
+            </a:r>
+          </a:p>
+          <a:p>
+            <a:r>
+              <a:rPr lang="en-US" dirty="0"/>
+              <a:t>Boosted regression trees</a:t>
+            </a:r>
+          </a:p>
+        </p:txBody>
+      </p:sp>
+      <p:sp>
+        <p:nvSpPr>
+          <p:cNvPr id="4" name="Content Placeholder 2">
+            <a:extLst>
+              <a:ext uri="{FF2B5EF4-FFF2-40B4-BE49-F238E27FC236}">
+                <a16:creationId xmlns:a16="http://schemas.microsoft.com/office/drawing/2014/main" id="{D81F725D-D453-E65C-E0C5-7E2C39B0779D}"/>
+              </a:ext>
+            </a:extLst>
+          </p:cNvPr>
+          <p:cNvSpPr txBox="1">
+            <a:spLocks/>
+          </p:cNvSpPr>
+          <p:nvPr/>
+        </p:nvSpPr>
+        <p:spPr>
+          <a:xfrm>
+            <a:off x="6653465" y="1786940"/>
+            <a:ext cx="5081337" cy="4667250"/>
+          </a:xfrm>
+          <a:prstGeom prst="rect">
+            <a:avLst/>
+          </a:prstGeom>
+        </p:spPr>
+        <p:txBody>
+          <a:bodyPr vert="horz" lIns="91440" tIns="45720" rIns="91440" bIns="45720" rtlCol="0">
+            <a:normAutofit lnSpcReduction="10000"/>
+          </a:bodyPr>
+          <a:lstStyle>
+            <a:lvl1pPr marL="228600" indent="-228600" algn="l" defTabSz="914400" rtl="0" eaLnBrk="1" latinLnBrk="0" hangingPunct="1">
+              <a:lnSpc>
+                <a:spcPct val="90000"/>
+              </a:lnSpc>
+              <a:spcBef>
+                <a:spcPts val="1000"/>
+              </a:spcBef>
+              <a:buFont typeface="Arial" panose="020B0604020202020204" pitchFamily="34" charset="0"/>
+              <a:buChar char="•"/>
+              <a:defRPr sz="2800" kern="1200">
+                <a:solidFill>
+                  <a:schemeClr val="tx1"/>
+                </a:solidFill>
+                <a:latin typeface="+mn-lt"/>
+                <a:ea typeface="+mn-ea"/>
+                <a:cs typeface="+mn-cs"/>
+              </a:defRPr>
+            </a:lvl1pPr>
+            <a:lvl2pPr marL="685800" indent="-228600" algn="l" defTabSz="914400" rtl="0" eaLnBrk="1" latinLnBrk="0" hangingPunct="1">
+              <a:lnSpc>
+                <a:spcPct val="90000"/>
+              </a:lnSpc>
+              <a:spcBef>
+                <a:spcPts val="500"/>
+              </a:spcBef>
+              <a:buFont typeface="Arial" panose="020B0604020202020204" pitchFamily="34" charset="0"/>
+              <a:buChar char="•"/>
+              <a:defRPr sz="2400" kern="1200">
+                <a:solidFill>
+                  <a:schemeClr val="tx1"/>
+                </a:solidFill>
+                <a:latin typeface="+mn-lt"/>
+                <a:ea typeface="+mn-ea"/>
+                <a:cs typeface="+mn-cs"/>
+              </a:defRPr>
+            </a:lvl2pPr>
+            <a:lvl3pPr marL="1143000" indent="-228600" algn="l" defTabSz="914400" rtl="0" eaLnBrk="1" latinLnBrk="0" hangingPunct="1">
+              <a:lnSpc>
+                <a:spcPct val="90000"/>
+              </a:lnSpc>
+              <a:spcBef>
+                <a:spcPts val="500"/>
+              </a:spcBef>
+              <a:buFont typeface="Arial" panose="020B0604020202020204" pitchFamily="34" charset="0"/>
+              <a:buChar char="•"/>
+              <a:defRPr sz="2000" kern="1200">
+                <a:solidFill>
+                  <a:schemeClr val="tx1"/>
+                </a:solidFill>
+                <a:latin typeface="+mn-lt"/>
+                <a:ea typeface="+mn-ea"/>
+                <a:cs typeface="+mn-cs"/>
+              </a:defRPr>
+            </a:lvl3pPr>
+            <a:lvl4pPr marL="1600200" indent="-228600" algn="l" defTabSz="914400" rtl="0" eaLnBrk="1" latinLnBrk="0" hangingPunct="1">
+              <a:lnSpc>
+                <a:spcPct val="90000"/>
+              </a:lnSpc>
+              <a:spcBef>
+                <a:spcPts val="500"/>
+              </a:spcBef>
+              <a:buFont typeface="Arial" panose="020B0604020202020204" pitchFamily="34" charset="0"/>
+              <a:buChar char="•"/>
+              <a:defRPr sz="1800" kern="1200">
+                <a:solidFill>
+                  <a:schemeClr val="tx1"/>
+                </a:solidFill>
+                <a:latin typeface="+mn-lt"/>
+                <a:ea typeface="+mn-ea"/>
+                <a:cs typeface="+mn-cs"/>
+              </a:defRPr>
+            </a:lvl4pPr>
+            <a:lvl5pPr marL="2057400" indent="-228600" algn="l" defTabSz="914400" rtl="0" eaLnBrk="1" latinLnBrk="0" hangingPunct="1">
+              <a:lnSpc>
+                <a:spcPct val="90000"/>
+              </a:lnSpc>
+              <a:spcBef>
+                <a:spcPts val="500"/>
+              </a:spcBef>
+              <a:buFont typeface="Arial" panose="020B0604020202020204" pitchFamily="34" charset="0"/>
+              <a:buChar char="•"/>
+              <a:defRPr sz="1800" kern="1200">
+                <a:solidFill>
+                  <a:schemeClr val="tx1"/>
+                </a:solidFill>
+                <a:latin typeface="+mn-lt"/>
+                <a:ea typeface="+mn-ea"/>
+                <a:cs typeface="+mn-cs"/>
+              </a:defRPr>
+            </a:lvl5pPr>
+            <a:lvl6pPr marL="2514600" indent="-228600" algn="l" defTabSz="914400" rtl="0" eaLnBrk="1" latinLnBrk="0" hangingPunct="1">
+              <a:lnSpc>
+                <a:spcPct val="90000"/>
+              </a:lnSpc>
+              <a:spcBef>
+                <a:spcPts val="500"/>
+              </a:spcBef>
+              <a:buFont typeface="Arial" panose="020B0604020202020204" pitchFamily="34" charset="0"/>
+              <a:buChar char="•"/>
+              <a:defRPr sz="1800" kern="1200">
+                <a:solidFill>
+                  <a:schemeClr val="tx1"/>
+                </a:solidFill>
+                <a:latin typeface="+mn-lt"/>
+                <a:ea typeface="+mn-ea"/>
+                <a:cs typeface="+mn-cs"/>
+              </a:defRPr>
+            </a:lvl6pPr>
+            <a:lvl7pPr marL="2971800" indent="-228600" algn="l" defTabSz="914400" rtl="0" eaLnBrk="1" latinLnBrk="0" hangingPunct="1">
+              <a:lnSpc>
+                <a:spcPct val="90000"/>
+              </a:lnSpc>
+              <a:spcBef>
+                <a:spcPts val="500"/>
+              </a:spcBef>
+              <a:buFont typeface="Arial" panose="020B0604020202020204" pitchFamily="34" charset="0"/>
+              <a:buChar char="•"/>
+              <a:defRPr sz="1800" kern="1200">
+                <a:solidFill>
+                  <a:schemeClr val="tx1"/>
+                </a:solidFill>
+                <a:latin typeface="+mn-lt"/>
+                <a:ea typeface="+mn-ea"/>
+                <a:cs typeface="+mn-cs"/>
+              </a:defRPr>
+            </a:lvl7pPr>
+            <a:lvl8pPr marL="3429000" indent="-228600" algn="l" defTabSz="914400" rtl="0" eaLnBrk="1" latinLnBrk="0" hangingPunct="1">
+              <a:lnSpc>
+                <a:spcPct val="90000"/>
+              </a:lnSpc>
+              <a:spcBef>
+                <a:spcPts val="500"/>
+              </a:spcBef>
+              <a:buFont typeface="Arial" panose="020B0604020202020204" pitchFamily="34" charset="0"/>
+              <a:buChar char="•"/>
+              <a:defRPr sz="1800" kern="1200">
+                <a:solidFill>
+                  <a:schemeClr val="tx1"/>
+                </a:solidFill>
+                <a:latin typeface="+mn-lt"/>
+                <a:ea typeface="+mn-ea"/>
+                <a:cs typeface="+mn-cs"/>
+              </a:defRPr>
+            </a:lvl8pPr>
+            <a:lvl9pPr marL="3886200" indent="-228600" algn="l" defTabSz="914400" rtl="0" eaLnBrk="1" latinLnBrk="0" hangingPunct="1">
+              <a:lnSpc>
+                <a:spcPct val="90000"/>
+              </a:lnSpc>
+              <a:spcBef>
+                <a:spcPts val="500"/>
+              </a:spcBef>
+              <a:buFont typeface="Arial" panose="020B0604020202020204" pitchFamily="34" charset="0"/>
+              <a:buChar char="•"/>
+              <a:defRPr sz="1800" kern="1200">
+                <a:solidFill>
+                  <a:schemeClr val="tx1"/>
+                </a:solidFill>
+                <a:latin typeface="+mn-lt"/>
+                <a:ea typeface="+mn-ea"/>
+                <a:cs typeface="+mn-cs"/>
+              </a:defRPr>
+            </a:lvl9pPr>
+          </a:lstStyle>
+          <a:p>
+            <a:pPr marL="0" indent="0">
+              <a:buFont typeface="Arial" panose="020B0604020202020204" pitchFamily="34" charset="0"/>
+              <a:buNone/>
+            </a:pPr>
+            <a:r>
+              <a:rPr lang="en-US" b="1" dirty="0"/>
+              <a:t>We won’t cover:</a:t>
+            </a:r>
+          </a:p>
+          <a:p>
+            <a:r>
+              <a:rPr lang="en-US" dirty="0"/>
+              <a:t>K-means clustering</a:t>
+            </a:r>
+          </a:p>
+          <a:p>
+            <a:r>
+              <a:rPr lang="en-US" dirty="0"/>
+              <a:t>Dimensionality reduction / PCA</a:t>
+            </a:r>
+          </a:p>
+          <a:p>
+            <a:r>
+              <a:rPr lang="en-US" dirty="0"/>
+              <a:t>Neural networks / deep learning</a:t>
+            </a:r>
+          </a:p>
+          <a:p>
+            <a:r>
+              <a:rPr lang="en-US" dirty="0"/>
+              <a:t>Natural language processing</a:t>
+            </a:r>
+          </a:p>
+          <a:p>
+            <a:r>
+              <a:rPr lang="en-US" dirty="0"/>
+              <a:t>Image processing</a:t>
+            </a:r>
+          </a:p>
+          <a:p>
+            <a:r>
+              <a:rPr lang="en-US" dirty="0"/>
+              <a:t>All the possible interpretation methods</a:t>
+            </a:r>
+          </a:p>
+        </p:txBody>
+      </p:sp>
+    </p:spTree>
+    <p:extLst>
+      <p:ext uri="{BB962C8B-B14F-4D97-AF65-F5344CB8AC3E}">
+        <p14:creationId xmlns:p14="http://schemas.microsoft.com/office/powerpoint/2010/main" val="1190854385"/>
+      </p:ext>
+    </p:extLst>
+  </p:cSld>
+  <p:clrMapOvr>
+    <a:masterClrMapping/>
+  </p:clrMapOvr>
+</p:sld>
+</file>
+
+<file path=ppt/slides/slide22.xml><?xml version="1.0" encoding="utf-8"?>
+<p:sld xmlns:a="http://schemas.openxmlformats.org/drawingml/2006/main" xmlns:r="http://schemas.openxmlformats.org/officeDocument/2006/relationships" xmlns:p="http://schemas.openxmlformats.org/presentationml/2006/main">
+  <p:cSld>
+    <p:spTree>
+      <p:nvGrpSpPr>
+        <p:cNvPr id="1" name=""/>
+        <p:cNvGrpSpPr/>
+        <p:nvPr/>
+      </p:nvGrpSpPr>
+      <p:grpSpPr>
+        <a:xfrm>
+          <a:off x="0" y="0"/>
+          <a:ext cx="0" cy="0"/>
+          <a:chOff x="0" y="0"/>
+          <a:chExt cx="0" cy="0"/>
+        </a:xfrm>
+      </p:grpSpPr>
+      <p:sp>
+        <p:nvSpPr>
+          <p:cNvPr id="2" name="Title 1">
+            <a:extLst>
+              <a:ext uri="{FF2B5EF4-FFF2-40B4-BE49-F238E27FC236}">
+                <a16:creationId xmlns:a16="http://schemas.microsoft.com/office/drawing/2014/main" id="{8F4609B2-8DAD-0237-B6AF-7CC64EAB54FC}"/>
+              </a:ext>
+            </a:extLst>
+          </p:cNvPr>
+          <p:cNvSpPr>
+            <a:spLocks noGrp="1"/>
+          </p:cNvSpPr>
+          <p:nvPr>
+            <p:ph type="title"/>
+          </p:nvPr>
+        </p:nvSpPr>
+        <p:spPr/>
+        <p:txBody>
+          <a:bodyPr/>
+          <a:lstStyle/>
+          <a:p>
+            <a:r>
+              <a:rPr lang="en-US" dirty="0"/>
+              <a:t>Break out groups (~5min)</a:t>
+            </a:r>
+          </a:p>
+        </p:txBody>
+      </p:sp>
+      <p:sp>
+        <p:nvSpPr>
+          <p:cNvPr id="3" name="Content Placeholder 2">
+            <a:extLst>
+              <a:ext uri="{FF2B5EF4-FFF2-40B4-BE49-F238E27FC236}">
+                <a16:creationId xmlns:a16="http://schemas.microsoft.com/office/drawing/2014/main" id="{29D0A7A8-6062-EB24-E8E3-40035D8AB20C}"/>
+              </a:ext>
+            </a:extLst>
+          </p:cNvPr>
+          <p:cNvSpPr>
+            <a:spLocks noGrp="1"/>
+          </p:cNvSpPr>
+          <p:nvPr>
+            <p:ph idx="1"/>
+          </p:nvPr>
+        </p:nvSpPr>
+        <p:spPr>
+          <a:xfrm>
+            <a:off x="838200" y="1825625"/>
+            <a:ext cx="4943622" cy="4351338"/>
+          </a:xfrm>
+        </p:spPr>
+        <p:txBody>
+          <a:bodyPr/>
+          <a:lstStyle/>
+          <a:p>
+            <a:pPr marL="0" indent="0">
+              <a:buNone/>
+            </a:pPr>
+            <a:r>
+              <a:rPr lang="en-US" b="1" dirty="0"/>
+              <a:t>Talk with folks at your table</a:t>
+            </a:r>
+            <a:r>
+              <a:rPr lang="en-US" dirty="0"/>
+              <a:t>:</a:t>
+            </a:r>
+          </a:p>
+          <a:p>
+            <a:r>
+              <a:rPr lang="en-US" dirty="0"/>
+              <a:t>Names</a:t>
+            </a:r>
+          </a:p>
+          <a:p>
+            <a:r>
+              <a:rPr lang="en-US" dirty="0"/>
+              <a:t>What modeling mindset(s) you typically use in your work</a:t>
+            </a:r>
+          </a:p>
+          <a:p>
+            <a:r>
+              <a:rPr lang="en-US" dirty="0"/>
+              <a:t>What interests brought you to this workshop today</a:t>
+            </a:r>
+          </a:p>
+          <a:p>
+            <a:r>
+              <a:rPr lang="en-US" dirty="0"/>
+              <a:t>Favorite body of water (anywhere, any type)</a:t>
+            </a:r>
+          </a:p>
+        </p:txBody>
+      </p:sp>
+      <p:sp>
+        <p:nvSpPr>
+          <p:cNvPr id="4" name="TextBox 3">
+            <a:extLst>
+              <a:ext uri="{FF2B5EF4-FFF2-40B4-BE49-F238E27FC236}">
+                <a16:creationId xmlns:a16="http://schemas.microsoft.com/office/drawing/2014/main" id="{CA576C23-1DA8-0270-9411-F5836D88E740}"/>
               </a:ext>
             </a:extLst>
           </p:cNvPr>
@@ -4489,6 +9806,133 @@
           <a:p>
             <a:r>
               <a:rPr lang="en-US" dirty="0">
+                <a:hlinkClick r:id="rId2"/>
+              </a:rPr>
+              <a:t>Molnar, C. 2023. Modeling mindsets: the many cultures of learning from data.</a:t>
+            </a:r>
+            <a:endParaRPr lang="en-US" dirty="0"/>
+          </a:p>
+        </p:txBody>
+      </p:sp>
+      <p:pic>
+        <p:nvPicPr>
+          <p:cNvPr id="5" name="Picture 4">
+            <a:extLst>
+              <a:ext uri="{FF2B5EF4-FFF2-40B4-BE49-F238E27FC236}">
+                <a16:creationId xmlns:a16="http://schemas.microsoft.com/office/drawing/2014/main" id="{989B4C0A-3C12-30B3-038B-2E26E0A88AB4}"/>
+              </a:ext>
+            </a:extLst>
+          </p:cNvPr>
+          <p:cNvPicPr>
+            <a:picLocks noChangeAspect="1"/>
+          </p:cNvPicPr>
+          <p:nvPr/>
+        </p:nvPicPr>
+        <p:blipFill>
+          <a:blip r:embed="rId3"/>
+          <a:srcRect l="-14" r="105" b="11454"/>
+          <a:stretch>
+            <a:fillRect/>
+          </a:stretch>
+        </p:blipFill>
+        <p:spPr>
+          <a:xfrm>
+            <a:off x="5962570" y="2112718"/>
+            <a:ext cx="6037171" cy="2978078"/>
+          </a:xfrm>
+          <a:prstGeom prst="rect">
+            <a:avLst/>
+          </a:prstGeom>
+        </p:spPr>
+      </p:pic>
+    </p:spTree>
+    <p:extLst>
+      <p:ext uri="{BB962C8B-B14F-4D97-AF65-F5344CB8AC3E}">
+        <p14:creationId xmlns:p14="http://schemas.microsoft.com/office/powerpoint/2010/main" val="3850885334"/>
+      </p:ext>
+    </p:extLst>
+  </p:cSld>
+  <p:clrMapOvr>
+    <a:masterClrMapping/>
+  </p:clrMapOvr>
+</p:sld>
+</file>
+
+<file path=ppt/slides/slide3.xml><?xml version="1.0" encoding="utf-8"?>
+<p:sld xmlns:a="http://schemas.openxmlformats.org/drawingml/2006/main" xmlns:r="http://schemas.openxmlformats.org/officeDocument/2006/relationships" xmlns:p="http://schemas.openxmlformats.org/presentationml/2006/main">
+  <p:cSld>
+    <p:spTree>
+      <p:nvGrpSpPr>
+        <p:cNvPr id="1" name=""/>
+        <p:cNvGrpSpPr/>
+        <p:nvPr/>
+      </p:nvGrpSpPr>
+      <p:grpSpPr>
+        <a:xfrm>
+          <a:off x="0" y="0"/>
+          <a:ext cx="0" cy="0"/>
+          <a:chOff x="0" y="0"/>
+          <a:chExt cx="0" cy="0"/>
+        </a:xfrm>
+      </p:grpSpPr>
+      <p:sp>
+        <p:nvSpPr>
+          <p:cNvPr id="2" name="Title 1">
+            <a:extLst>
+              <a:ext uri="{FF2B5EF4-FFF2-40B4-BE49-F238E27FC236}">
+                <a16:creationId xmlns:a16="http://schemas.microsoft.com/office/drawing/2014/main" id="{720C2576-357D-876A-70BB-664D14B59537}"/>
+              </a:ext>
+            </a:extLst>
+          </p:cNvPr>
+          <p:cNvSpPr>
+            <a:spLocks noGrp="1"/>
+          </p:cNvSpPr>
+          <p:nvPr>
+            <p:ph type="title"/>
+          </p:nvPr>
+        </p:nvSpPr>
+        <p:spPr/>
+        <p:txBody>
+          <a:bodyPr/>
+          <a:lstStyle/>
+          <a:p>
+            <a:r>
+              <a:rPr lang="en-US" dirty="0"/>
+              <a:t>Modeling mindsets:</a:t>
+            </a:r>
+          </a:p>
+        </p:txBody>
+      </p:sp>
+      <p:sp>
+        <p:nvSpPr>
+          <p:cNvPr id="5" name="TextBox 4">
+            <a:extLst>
+              <a:ext uri="{FF2B5EF4-FFF2-40B4-BE49-F238E27FC236}">
+                <a16:creationId xmlns:a16="http://schemas.microsoft.com/office/drawing/2014/main" id="{0A5F1254-83D3-DAA5-948B-CC9457AD6654}"/>
+              </a:ext>
+            </a:extLst>
+          </p:cNvPr>
+          <p:cNvSpPr txBox="1"/>
+          <p:nvPr/>
+        </p:nvSpPr>
+        <p:spPr>
+          <a:xfrm>
+            <a:off x="4537276" y="6488668"/>
+            <a:ext cx="8191983" cy="369332"/>
+          </a:xfrm>
+          <a:prstGeom prst="rect">
+            <a:avLst/>
+          </a:prstGeom>
+          <a:noFill/>
+        </p:spPr>
+        <p:txBody>
+          <a:bodyPr wrap="square">
+            <a:spAutoFit/>
+          </a:bodyPr>
+          <a:lstStyle/>
+          <a:p>
+            <a:r>
+              <a:rPr lang="en-US" dirty="0">
                 <a:hlinkClick r:id="rId3"/>
               </a:rPr>
               <a:t>Molnar, C. 2023. Modeling mindsets: the many cultures of learning from data.</a:t>
@@ -4513,6 +9957,7 @@
         </p:nvPicPr>
         <p:blipFill>
           <a:blip r:embed="rId4"/>
+          <a:srcRect b="14932"/>
           <a:stretch>
             <a:fillRect/>
           </a:stretch>
@@ -4520,7 +9965,7 @@
         <p:spPr>
           <a:xfrm>
             <a:off x="2209800" y="1806291"/>
-            <a:ext cx="7772400" cy="4326071"/>
+            <a:ext cx="7772400" cy="3680109"/>
           </a:xfrm>
           <a:prstGeom prst="rect">
             <a:avLst/>
@@ -4540,524 +9985,7 @@
 </p:sld>
 </file>
 
-<file path=ppt/slides/slide3.xml><?xml version="1.0" encoding="utf-8"?>
-<p:sld xmlns:a="http://schemas.openxmlformats.org/drawingml/2006/main" xmlns:r="http://schemas.openxmlformats.org/officeDocument/2006/relationships" xmlns:p="http://schemas.openxmlformats.org/presentationml/2006/main">
-  <p:cSld>
-    <p:spTree>
-      <p:nvGrpSpPr>
-        <p:cNvPr id="1" name="">
-          <a:extLst>
-            <a:ext uri="{FF2B5EF4-FFF2-40B4-BE49-F238E27FC236}">
-              <a16:creationId xmlns:a16="http://schemas.microsoft.com/office/drawing/2014/main" id="{CA8E8A63-C13B-DD5A-494A-6824A88D347C}"/>
-            </a:ext>
-          </a:extLst>
-        </p:cNvPr>
-        <p:cNvGrpSpPr/>
-        <p:nvPr/>
-      </p:nvGrpSpPr>
-      <p:grpSpPr>
-        <a:xfrm>
-          <a:off x="0" y="0"/>
-          <a:ext cx="0" cy="0"/>
-          <a:chOff x="0" y="0"/>
-          <a:chExt cx="0" cy="0"/>
-        </a:xfrm>
-      </p:grpSpPr>
-      <p:sp>
-        <p:nvSpPr>
-          <p:cNvPr id="2" name="Title 1">
-            <a:extLst>
-              <a:ext uri="{FF2B5EF4-FFF2-40B4-BE49-F238E27FC236}">
-                <a16:creationId xmlns:a16="http://schemas.microsoft.com/office/drawing/2014/main" id="{B2D0C150-6EFF-9243-ACB9-95EAABFEE49D}"/>
-              </a:ext>
-            </a:extLst>
-          </p:cNvPr>
-          <p:cNvSpPr>
-            <a:spLocks noGrp="1"/>
-          </p:cNvSpPr>
-          <p:nvPr>
-            <p:ph type="title"/>
-          </p:nvPr>
-        </p:nvSpPr>
-        <p:spPr/>
-        <p:txBody>
-          <a:bodyPr/>
-          <a:lstStyle/>
-          <a:p>
-            <a:r>
-              <a:rPr lang="en-US" dirty="0"/>
-              <a:t>Modeling mindsets:</a:t>
-            </a:r>
-          </a:p>
-        </p:txBody>
-      </p:sp>
-      <p:sp>
-        <p:nvSpPr>
-          <p:cNvPr id="5" name="TextBox 4">
-            <a:extLst>
-              <a:ext uri="{FF2B5EF4-FFF2-40B4-BE49-F238E27FC236}">
-                <a16:creationId xmlns:a16="http://schemas.microsoft.com/office/drawing/2014/main" id="{BEBAE4EA-CF84-8D15-A012-827FA43EBAE9}"/>
-              </a:ext>
-            </a:extLst>
-          </p:cNvPr>
-          <p:cNvSpPr txBox="1"/>
-          <p:nvPr/>
-        </p:nvSpPr>
-        <p:spPr>
-          <a:xfrm>
-            <a:off x="4537276" y="6488668"/>
-            <a:ext cx="8191983" cy="369332"/>
-          </a:xfrm>
-          <a:prstGeom prst="rect">
-            <a:avLst/>
-          </a:prstGeom>
-          <a:noFill/>
-        </p:spPr>
-        <p:txBody>
-          <a:bodyPr wrap="square">
-            <a:spAutoFit/>
-          </a:bodyPr>
-          <a:lstStyle/>
-          <a:p>
-            <a:r>
-              <a:rPr lang="en-US" dirty="0">
-                <a:hlinkClick r:id="rId3"/>
-              </a:rPr>
-              <a:t>Molnar, C. 2023. Modeling mindsets: the many cultures of learning from data.</a:t>
-            </a:r>
-            <a:endParaRPr lang="en-US" dirty="0"/>
-          </a:p>
-        </p:txBody>
-      </p:sp>
-      <p:pic>
-        <p:nvPicPr>
-          <p:cNvPr id="4" name="Picture 3">
-            <a:extLst>
-              <a:ext uri="{FF2B5EF4-FFF2-40B4-BE49-F238E27FC236}">
-                <a16:creationId xmlns:a16="http://schemas.microsoft.com/office/drawing/2014/main" id="{842C5C56-775E-EEF7-CB65-D043B00C9B5E}"/>
-              </a:ext>
-            </a:extLst>
-          </p:cNvPr>
-          <p:cNvPicPr>
-            <a:picLocks noChangeAspect="1"/>
-          </p:cNvPicPr>
-          <p:nvPr/>
-        </p:nvPicPr>
-        <p:blipFill>
-          <a:blip r:embed="rId4"/>
-          <a:stretch>
-            <a:fillRect/>
-          </a:stretch>
-        </p:blipFill>
-        <p:spPr>
-          <a:xfrm>
-            <a:off x="2209800" y="1806291"/>
-            <a:ext cx="7772400" cy="4326071"/>
-          </a:xfrm>
-          <a:prstGeom prst="rect">
-            <a:avLst/>
-          </a:prstGeom>
-        </p:spPr>
-      </p:pic>
-      <p:sp>
-        <p:nvSpPr>
-          <p:cNvPr id="7" name="TextBox 6">
-            <a:extLst>
-              <a:ext uri="{FF2B5EF4-FFF2-40B4-BE49-F238E27FC236}">
-                <a16:creationId xmlns:a16="http://schemas.microsoft.com/office/drawing/2014/main" id="{F8E62159-9C2F-27F9-3386-557A8560833C}"/>
-              </a:ext>
-            </a:extLst>
-          </p:cNvPr>
-          <p:cNvSpPr txBox="1"/>
-          <p:nvPr/>
-        </p:nvSpPr>
-        <p:spPr>
-          <a:xfrm>
-            <a:off x="260933" y="1690688"/>
-            <a:ext cx="3897734" cy="646331"/>
-          </a:xfrm>
-          <a:prstGeom prst="rect">
-            <a:avLst/>
-          </a:prstGeom>
-          <a:noFill/>
-        </p:spPr>
-        <p:txBody>
-          <a:bodyPr wrap="none" rtlCol="0">
-            <a:spAutoFit/>
-          </a:bodyPr>
-          <a:lstStyle/>
-          <a:p>
-            <a:r>
-              <a:rPr lang="en-US" dirty="0">
-                <a:solidFill>
-                  <a:schemeClr val="accent2"/>
-                </a:solidFill>
-              </a:rPr>
-              <a:t>Everything is a probability distribution</a:t>
-            </a:r>
-          </a:p>
-          <a:p>
-            <a:r>
-              <a:rPr lang="en-US" dirty="0">
-                <a:solidFill>
-                  <a:schemeClr val="accent2"/>
-                </a:solidFill>
-              </a:rPr>
-              <a:t>Models = hypotheses</a:t>
-            </a:r>
-          </a:p>
-        </p:txBody>
-      </p:sp>
-      <p:sp>
-        <p:nvSpPr>
-          <p:cNvPr id="8" name="TextBox 7">
-            <a:extLst>
-              <a:ext uri="{FF2B5EF4-FFF2-40B4-BE49-F238E27FC236}">
-                <a16:creationId xmlns:a16="http://schemas.microsoft.com/office/drawing/2014/main" id="{6938CC4B-4A98-2DAA-33B5-974641709A35}"/>
-              </a:ext>
-            </a:extLst>
-          </p:cNvPr>
-          <p:cNvSpPr txBox="1"/>
-          <p:nvPr/>
-        </p:nvSpPr>
-        <p:spPr>
-          <a:xfrm>
-            <a:off x="7990468" y="1314843"/>
-            <a:ext cx="3787832" cy="646331"/>
-          </a:xfrm>
-          <a:prstGeom prst="rect">
-            <a:avLst/>
-          </a:prstGeom>
-          <a:noFill/>
-        </p:spPr>
-        <p:txBody>
-          <a:bodyPr wrap="none" rtlCol="0">
-            <a:spAutoFit/>
-          </a:bodyPr>
-          <a:lstStyle/>
-          <a:p>
-            <a:r>
-              <a:rPr lang="en-US" dirty="0">
-                <a:solidFill>
-                  <a:schemeClr val="accent2"/>
-                </a:solidFill>
-              </a:rPr>
-              <a:t>Models = algorithms that solve tasks</a:t>
-            </a:r>
-          </a:p>
-          <a:p>
-            <a:r>
-              <a:rPr lang="en-US" dirty="0">
-                <a:solidFill>
-                  <a:schemeClr val="accent2"/>
-                </a:solidFill>
-              </a:rPr>
-              <a:t>Prediction-focused</a:t>
-            </a:r>
-          </a:p>
-        </p:txBody>
-      </p:sp>
-    </p:spTree>
-    <p:extLst>
-      <p:ext uri="{BB962C8B-B14F-4D97-AF65-F5344CB8AC3E}">
-        <p14:creationId xmlns:p14="http://schemas.microsoft.com/office/powerpoint/2010/main" val="4070516429"/>
-      </p:ext>
-    </p:extLst>
-  </p:cSld>
-  <p:clrMapOvr>
-    <a:masterClrMapping/>
-  </p:clrMapOvr>
-</p:sld>
-</file>
-
 <file path=ppt/slides/slide4.xml><?xml version="1.0" encoding="utf-8"?>
-<p:sld xmlns:a="http://schemas.openxmlformats.org/drawingml/2006/main" xmlns:r="http://schemas.openxmlformats.org/officeDocument/2006/relationships" xmlns:p="http://schemas.openxmlformats.org/presentationml/2006/main">
-  <p:cSld>
-    <p:spTree>
-      <p:nvGrpSpPr>
-        <p:cNvPr id="1" name="">
-          <a:extLst>
-            <a:ext uri="{FF2B5EF4-FFF2-40B4-BE49-F238E27FC236}">
-              <a16:creationId xmlns:a16="http://schemas.microsoft.com/office/drawing/2014/main" id="{35C5AACF-183C-4CE6-7C9C-CC4AD7841DCD}"/>
-            </a:ext>
-          </a:extLst>
-        </p:cNvPr>
-        <p:cNvGrpSpPr/>
-        <p:nvPr/>
-      </p:nvGrpSpPr>
-      <p:grpSpPr>
-        <a:xfrm>
-          <a:off x="0" y="0"/>
-          <a:ext cx="0" cy="0"/>
-          <a:chOff x="0" y="0"/>
-          <a:chExt cx="0" cy="0"/>
-        </a:xfrm>
-      </p:grpSpPr>
-      <p:sp>
-        <p:nvSpPr>
-          <p:cNvPr id="2" name="Title 1">
-            <a:extLst>
-              <a:ext uri="{FF2B5EF4-FFF2-40B4-BE49-F238E27FC236}">
-                <a16:creationId xmlns:a16="http://schemas.microsoft.com/office/drawing/2014/main" id="{23D67ECA-8789-A647-2D9B-2A521FBC218C}"/>
-              </a:ext>
-            </a:extLst>
-          </p:cNvPr>
-          <p:cNvSpPr>
-            <a:spLocks noGrp="1"/>
-          </p:cNvSpPr>
-          <p:nvPr>
-            <p:ph type="title"/>
-          </p:nvPr>
-        </p:nvSpPr>
-        <p:spPr/>
-        <p:txBody>
-          <a:bodyPr/>
-          <a:lstStyle/>
-          <a:p>
-            <a:r>
-              <a:rPr lang="en-US" dirty="0"/>
-              <a:t>Modeling mindsets:</a:t>
-            </a:r>
-          </a:p>
-        </p:txBody>
-      </p:sp>
-      <p:sp>
-        <p:nvSpPr>
-          <p:cNvPr id="5" name="TextBox 4">
-            <a:extLst>
-              <a:ext uri="{FF2B5EF4-FFF2-40B4-BE49-F238E27FC236}">
-                <a16:creationId xmlns:a16="http://schemas.microsoft.com/office/drawing/2014/main" id="{1780C0F4-C8CA-C965-A598-993797958E6A}"/>
-              </a:ext>
-            </a:extLst>
-          </p:cNvPr>
-          <p:cNvSpPr txBox="1"/>
-          <p:nvPr/>
-        </p:nvSpPr>
-        <p:spPr>
-          <a:xfrm>
-            <a:off x="4537276" y="6488668"/>
-            <a:ext cx="8191983" cy="369332"/>
-          </a:xfrm>
-          <a:prstGeom prst="rect">
-            <a:avLst/>
-          </a:prstGeom>
-          <a:noFill/>
-        </p:spPr>
-        <p:txBody>
-          <a:bodyPr wrap="square">
-            <a:spAutoFit/>
-          </a:bodyPr>
-          <a:lstStyle/>
-          <a:p>
-            <a:r>
-              <a:rPr lang="en-US" dirty="0">
-                <a:hlinkClick r:id="rId3"/>
-              </a:rPr>
-              <a:t>Molnar, C. 2023. Modeling mindsets: the many cultures of learning from data.</a:t>
-            </a:r>
-            <a:endParaRPr lang="en-US" dirty="0"/>
-          </a:p>
-        </p:txBody>
-      </p:sp>
-      <p:pic>
-        <p:nvPicPr>
-          <p:cNvPr id="4" name="Picture 3">
-            <a:extLst>
-              <a:ext uri="{FF2B5EF4-FFF2-40B4-BE49-F238E27FC236}">
-                <a16:creationId xmlns:a16="http://schemas.microsoft.com/office/drawing/2014/main" id="{08C6B90A-F609-9895-9F14-FBB0004B007E}"/>
-              </a:ext>
-            </a:extLst>
-          </p:cNvPr>
-          <p:cNvPicPr>
-            <a:picLocks noChangeAspect="1"/>
-          </p:cNvPicPr>
-          <p:nvPr/>
-        </p:nvPicPr>
-        <p:blipFill>
-          <a:blip r:embed="rId4"/>
-          <a:stretch>
-            <a:fillRect/>
-          </a:stretch>
-        </p:blipFill>
-        <p:spPr>
-          <a:xfrm>
-            <a:off x="2209800" y="1806291"/>
-            <a:ext cx="7772400" cy="4326071"/>
-          </a:xfrm>
-          <a:prstGeom prst="rect">
-            <a:avLst/>
-          </a:prstGeom>
-        </p:spPr>
-      </p:pic>
-      <p:sp>
-        <p:nvSpPr>
-          <p:cNvPr id="7" name="TextBox 6">
-            <a:extLst>
-              <a:ext uri="{FF2B5EF4-FFF2-40B4-BE49-F238E27FC236}">
-                <a16:creationId xmlns:a16="http://schemas.microsoft.com/office/drawing/2014/main" id="{1631F4C1-10A5-2ED7-FF28-F9C2637215CE}"/>
-              </a:ext>
-            </a:extLst>
-          </p:cNvPr>
-          <p:cNvSpPr txBox="1"/>
-          <p:nvPr/>
-        </p:nvSpPr>
-        <p:spPr>
-          <a:xfrm>
-            <a:off x="260933" y="1690688"/>
-            <a:ext cx="3897734" cy="646331"/>
-          </a:xfrm>
-          <a:prstGeom prst="rect">
-            <a:avLst/>
-          </a:prstGeom>
-          <a:noFill/>
-        </p:spPr>
-        <p:txBody>
-          <a:bodyPr wrap="none" rtlCol="0">
-            <a:spAutoFit/>
-          </a:bodyPr>
-          <a:lstStyle/>
-          <a:p>
-            <a:r>
-              <a:rPr lang="en-US" dirty="0">
-                <a:solidFill>
-                  <a:schemeClr val="accent2"/>
-                </a:solidFill>
-              </a:rPr>
-              <a:t>Everything is a probability distribution</a:t>
-            </a:r>
-          </a:p>
-          <a:p>
-            <a:r>
-              <a:rPr lang="en-US" dirty="0">
-                <a:solidFill>
-                  <a:schemeClr val="accent2"/>
-                </a:solidFill>
-              </a:rPr>
-              <a:t>Models = hypotheses</a:t>
-            </a:r>
-          </a:p>
-        </p:txBody>
-      </p:sp>
-      <p:sp>
-        <p:nvSpPr>
-          <p:cNvPr id="8" name="TextBox 7">
-            <a:extLst>
-              <a:ext uri="{FF2B5EF4-FFF2-40B4-BE49-F238E27FC236}">
-                <a16:creationId xmlns:a16="http://schemas.microsoft.com/office/drawing/2014/main" id="{D99F50EB-19FD-33C3-848A-2D1B9B2C4576}"/>
-              </a:ext>
-            </a:extLst>
-          </p:cNvPr>
-          <p:cNvSpPr txBox="1"/>
-          <p:nvPr/>
-        </p:nvSpPr>
-        <p:spPr>
-          <a:xfrm>
-            <a:off x="7990468" y="1314843"/>
-            <a:ext cx="3787832" cy="646331"/>
-          </a:xfrm>
-          <a:prstGeom prst="rect">
-            <a:avLst/>
-          </a:prstGeom>
-          <a:noFill/>
-        </p:spPr>
-        <p:txBody>
-          <a:bodyPr wrap="none" rtlCol="0">
-            <a:spAutoFit/>
-          </a:bodyPr>
-          <a:lstStyle/>
-          <a:p>
-            <a:r>
-              <a:rPr lang="en-US" dirty="0">
-                <a:solidFill>
-                  <a:schemeClr val="accent2"/>
-                </a:solidFill>
-              </a:rPr>
-              <a:t>Models = algorithms that solve tasks</a:t>
-            </a:r>
-          </a:p>
-          <a:p>
-            <a:r>
-              <a:rPr lang="en-US" dirty="0">
-                <a:solidFill>
-                  <a:schemeClr val="accent2"/>
-                </a:solidFill>
-              </a:rPr>
-              <a:t>Prediction-focused</a:t>
-            </a:r>
-          </a:p>
-        </p:txBody>
-      </p:sp>
-      <p:sp>
-        <p:nvSpPr>
-          <p:cNvPr id="3" name="L-Shape 2">
-            <a:extLst>
-              <a:ext uri="{FF2B5EF4-FFF2-40B4-BE49-F238E27FC236}">
-                <a16:creationId xmlns:a16="http://schemas.microsoft.com/office/drawing/2014/main" id="{E4CACA2F-C7C4-9B88-0F05-61329F8C8FDA}"/>
-              </a:ext>
-            </a:extLst>
-          </p:cNvPr>
-          <p:cNvSpPr/>
-          <p:nvPr/>
-        </p:nvSpPr>
-        <p:spPr>
-          <a:xfrm rot="16200000">
-            <a:off x="6776567" y="2297985"/>
-            <a:ext cx="2714124" cy="3697147"/>
-          </a:xfrm>
-          <a:prstGeom prst="corner">
-            <a:avLst>
-              <a:gd name="adj1" fmla="val 73167"/>
-              <a:gd name="adj2" fmla="val 54564"/>
-            </a:avLst>
-          </a:prstGeom>
-          <a:solidFill>
-            <a:srgbClr val="FFFFFF">
-              <a:alpha val="80000"/>
-            </a:srgbClr>
-          </a:solidFill>
-          <a:ln>
-            <a:noFill/>
-          </a:ln>
-        </p:spPr>
-        <p:style>
-          <a:lnRef idx="2">
-            <a:schemeClr val="accent1">
-              <a:shade val="15000"/>
-            </a:schemeClr>
-          </a:lnRef>
-          <a:fillRef idx="1">
-            <a:schemeClr val="accent1"/>
-          </a:fillRef>
-          <a:effectRef idx="0">
-            <a:schemeClr val="accent1"/>
-          </a:effectRef>
-          <a:fontRef idx="minor">
-            <a:schemeClr val="lt1"/>
-          </a:fontRef>
-        </p:style>
-        <p:txBody>
-          <a:bodyPr rtlCol="0" anchor="ctr"/>
-          <a:lstStyle/>
-          <a:p>
-            <a:pPr algn="ctr"/>
-            <a:endParaRPr lang="en-US"/>
-          </a:p>
-        </p:txBody>
-      </p:sp>
-    </p:spTree>
-    <p:extLst>
-      <p:ext uri="{BB962C8B-B14F-4D97-AF65-F5344CB8AC3E}">
-        <p14:creationId xmlns:p14="http://schemas.microsoft.com/office/powerpoint/2010/main" val="537992282"/>
-      </p:ext>
-    </p:extLst>
-  </p:cSld>
-  <p:clrMapOvr>
-    <a:masterClrMapping/>
-  </p:clrMapOvr>
-</p:sld>
-</file>
-
-<file path=ppt/slides/slide5.xml><?xml version="1.0" encoding="utf-8"?>
 <p:sld xmlns:a="http://schemas.openxmlformats.org/drawingml/2006/main" xmlns:r="http://schemas.openxmlformats.org/officeDocument/2006/relationships" xmlns:p="http://schemas.openxmlformats.org/presentationml/2006/main">
   <p:cSld>
     <p:spTree>
@@ -5198,12 +10126,18 @@
 </p:sld>
 </file>
 
-<file path=ppt/slides/slide6.xml><?xml version="1.0" encoding="utf-8"?>
+<file path=ppt/slides/slide5.xml><?xml version="1.0" encoding="utf-8"?>
 <p:sld xmlns:a="http://schemas.openxmlformats.org/drawingml/2006/main" xmlns:r="http://schemas.openxmlformats.org/officeDocument/2006/relationships" xmlns:p="http://schemas.openxmlformats.org/presentationml/2006/main">
   <p:cSld>
     <p:spTree>
       <p:nvGrpSpPr>
-        <p:cNvPr id="1" name=""/>
+        <p:cNvPr id="1" name="">
+          <a:extLst>
+            <a:ext uri="{FF2B5EF4-FFF2-40B4-BE49-F238E27FC236}">
+              <a16:creationId xmlns:a16="http://schemas.microsoft.com/office/drawing/2014/main" id="{22B8D1D6-B4DC-B596-0B85-47EA6B7049E5}"/>
+            </a:ext>
+          </a:extLst>
+        </p:cNvPr>
         <p:cNvGrpSpPr/>
         <p:nvPr/>
       </p:nvGrpSpPr>
@@ -5220,7 +10154,7 @@
           <p:cNvPr id="2" name="Title 1">
             <a:extLst>
               <a:ext uri="{FF2B5EF4-FFF2-40B4-BE49-F238E27FC236}">
-                <a16:creationId xmlns:a16="http://schemas.microsoft.com/office/drawing/2014/main" id="{12EAFA29-EE37-3E25-4512-716D446C9A08}"/>
+                <a16:creationId xmlns:a16="http://schemas.microsoft.com/office/drawing/2014/main" id="{C9B8FB7E-FC18-BCC4-CB1C-20402DF1E81C}"/>
               </a:ext>
             </a:extLst>
           </p:cNvPr>
@@ -5238,43 +10172,217 @@
           <a:p>
             <a:r>
               <a:rPr lang="en-US" dirty="0"/>
-              <a:t>In science, we often have multiple aims</a:t>
-            </a:r>
-          </a:p>
-        </p:txBody>
-      </p:sp>
-      <p:sp>
-        <p:nvSpPr>
-          <p:cNvPr id="3" name="Content Placeholder 2">
-            <a:extLst>
-              <a:ext uri="{FF2B5EF4-FFF2-40B4-BE49-F238E27FC236}">
-                <a16:creationId xmlns:a16="http://schemas.microsoft.com/office/drawing/2014/main" id="{1C8C50EC-2B77-57DB-6553-55037FAA5831}"/>
-              </a:ext>
-            </a:extLst>
-          </p:cNvPr>
-          <p:cNvSpPr>
-            <a:spLocks noGrp="1"/>
-          </p:cNvSpPr>
-          <p:nvPr>
-            <p:ph idx="1"/>
-          </p:nvPr>
-        </p:nvSpPr>
-        <p:spPr/>
-        <p:txBody>
-          <a:bodyPr/>
-          <a:lstStyle/>
-          <a:p>
-            <a:r>
-              <a:rPr lang="en-US" dirty="0"/>
-              <a:t>INSERT how the mindsets overlap, especially how ML isn’t just prediction (anymore)</a:t>
-            </a:r>
-          </a:p>
-        </p:txBody>
-      </p:sp>
+              <a:t>Modeling mindsets:</a:t>
+            </a:r>
+          </a:p>
+        </p:txBody>
+      </p:sp>
+      <p:sp>
+        <p:nvSpPr>
+          <p:cNvPr id="5" name="TextBox 4">
+            <a:extLst>
+              <a:ext uri="{FF2B5EF4-FFF2-40B4-BE49-F238E27FC236}">
+                <a16:creationId xmlns:a16="http://schemas.microsoft.com/office/drawing/2014/main" id="{8E467182-1372-58B9-6D7E-D9F816BC1A57}"/>
+              </a:ext>
+            </a:extLst>
+          </p:cNvPr>
+          <p:cNvSpPr txBox="1"/>
+          <p:nvPr/>
+        </p:nvSpPr>
+        <p:spPr>
+          <a:xfrm>
+            <a:off x="4537276" y="6488668"/>
+            <a:ext cx="8191983" cy="369332"/>
+          </a:xfrm>
+          <a:prstGeom prst="rect">
+            <a:avLst/>
+          </a:prstGeom>
+          <a:noFill/>
+        </p:spPr>
+        <p:txBody>
+          <a:bodyPr wrap="square">
+            <a:spAutoFit/>
+          </a:bodyPr>
+          <a:lstStyle/>
+          <a:p>
+            <a:r>
+              <a:rPr lang="en-US" dirty="0">
+                <a:hlinkClick r:id="rId3"/>
+              </a:rPr>
+              <a:t>Molnar, C. 2023. Modeling mindsets: the many cultures of learning from data.</a:t>
+            </a:r>
+            <a:endParaRPr lang="en-US" dirty="0"/>
+          </a:p>
+        </p:txBody>
+      </p:sp>
+      <p:pic>
+        <p:nvPicPr>
+          <p:cNvPr id="4" name="Picture 3">
+            <a:extLst>
+              <a:ext uri="{FF2B5EF4-FFF2-40B4-BE49-F238E27FC236}">
+                <a16:creationId xmlns:a16="http://schemas.microsoft.com/office/drawing/2014/main" id="{D8920288-24FC-D288-94CB-C425BF29BEAD}"/>
+              </a:ext>
+            </a:extLst>
+          </p:cNvPr>
+          <p:cNvPicPr>
+            <a:picLocks noChangeAspect="1"/>
+          </p:cNvPicPr>
+          <p:nvPr/>
+        </p:nvPicPr>
+        <p:blipFill>
+          <a:blip r:embed="rId4"/>
+          <a:srcRect l="-14" r="105" b="11454"/>
+          <a:stretch>
+            <a:fillRect/>
+          </a:stretch>
+        </p:blipFill>
+        <p:spPr>
+          <a:xfrm>
+            <a:off x="2208628" y="1806292"/>
+            <a:ext cx="7765366" cy="3830580"/>
+          </a:xfrm>
+          <a:prstGeom prst="rect">
+            <a:avLst/>
+          </a:prstGeom>
+        </p:spPr>
+      </p:pic>
     </p:spTree>
     <p:extLst>
       <p:ext uri="{BB962C8B-B14F-4D97-AF65-F5344CB8AC3E}">
-        <p14:creationId xmlns:p14="http://schemas.microsoft.com/office/powerpoint/2010/main" val="1836443162"/>
+        <p14:creationId xmlns:p14="http://schemas.microsoft.com/office/powerpoint/2010/main" val="2333523852"/>
+      </p:ext>
+    </p:extLst>
+  </p:cSld>
+  <p:clrMapOvr>
+    <a:masterClrMapping/>
+  </p:clrMapOvr>
+</p:sld>
+</file>
+
+<file path=ppt/slides/slide6.xml><?xml version="1.0" encoding="utf-8"?>
+<p:sld xmlns:a="http://schemas.openxmlformats.org/drawingml/2006/main" xmlns:r="http://schemas.openxmlformats.org/officeDocument/2006/relationships" xmlns:p="http://schemas.openxmlformats.org/presentationml/2006/main">
+  <p:cSld>
+    <p:spTree>
+      <p:nvGrpSpPr>
+        <p:cNvPr id="1" name="">
+          <a:extLst>
+            <a:ext uri="{FF2B5EF4-FFF2-40B4-BE49-F238E27FC236}">
+              <a16:creationId xmlns:a16="http://schemas.microsoft.com/office/drawing/2014/main" id="{3806FA5A-7C62-A16A-9C35-2399EFDDAA3B}"/>
+            </a:ext>
+          </a:extLst>
+        </p:cNvPr>
+        <p:cNvGrpSpPr/>
+        <p:nvPr/>
+      </p:nvGrpSpPr>
+      <p:grpSpPr>
+        <a:xfrm>
+          <a:off x="0" y="0"/>
+          <a:ext cx="0" cy="0"/>
+          <a:chOff x="0" y="0"/>
+          <a:chExt cx="0" cy="0"/>
+        </a:xfrm>
+      </p:grpSpPr>
+      <p:sp>
+        <p:nvSpPr>
+          <p:cNvPr id="2" name="Title 1">
+            <a:extLst>
+              <a:ext uri="{FF2B5EF4-FFF2-40B4-BE49-F238E27FC236}">
+                <a16:creationId xmlns:a16="http://schemas.microsoft.com/office/drawing/2014/main" id="{41A2F0B1-EC7D-588F-DFA3-19F1BF13DDF2}"/>
+              </a:ext>
+            </a:extLst>
+          </p:cNvPr>
+          <p:cNvSpPr>
+            <a:spLocks noGrp="1"/>
+          </p:cNvSpPr>
+          <p:nvPr>
+            <p:ph type="title"/>
+          </p:nvPr>
+        </p:nvSpPr>
+        <p:spPr/>
+        <p:txBody>
+          <a:bodyPr/>
+          <a:lstStyle/>
+          <a:p>
+            <a:r>
+              <a:rPr lang="en-US" dirty="0"/>
+              <a:t>Modeling mindsets:</a:t>
+            </a:r>
+          </a:p>
+        </p:txBody>
+      </p:sp>
+      <p:sp>
+        <p:nvSpPr>
+          <p:cNvPr id="5" name="TextBox 4">
+            <a:extLst>
+              <a:ext uri="{FF2B5EF4-FFF2-40B4-BE49-F238E27FC236}">
+                <a16:creationId xmlns:a16="http://schemas.microsoft.com/office/drawing/2014/main" id="{8996EF22-6154-D52E-D8F8-7C255A02A943}"/>
+              </a:ext>
+            </a:extLst>
+          </p:cNvPr>
+          <p:cNvSpPr txBox="1"/>
+          <p:nvPr/>
+        </p:nvSpPr>
+        <p:spPr>
+          <a:xfrm>
+            <a:off x="4537276" y="6488668"/>
+            <a:ext cx="8191983" cy="369332"/>
+          </a:xfrm>
+          <a:prstGeom prst="rect">
+            <a:avLst/>
+          </a:prstGeom>
+          <a:noFill/>
+        </p:spPr>
+        <p:txBody>
+          <a:bodyPr wrap="square">
+            <a:spAutoFit/>
+          </a:bodyPr>
+          <a:lstStyle/>
+          <a:p>
+            <a:r>
+              <a:rPr lang="en-US" dirty="0">
+                <a:hlinkClick r:id="rId3"/>
+              </a:rPr>
+              <a:t>Molnar, C. 2023. Modeling mindsets: the many cultures of learning from data.</a:t>
+            </a:r>
+            <a:endParaRPr lang="en-US" dirty="0"/>
+          </a:p>
+        </p:txBody>
+      </p:sp>
+      <p:pic>
+        <p:nvPicPr>
+          <p:cNvPr id="4" name="Picture 3">
+            <a:extLst>
+              <a:ext uri="{FF2B5EF4-FFF2-40B4-BE49-F238E27FC236}">
+                <a16:creationId xmlns:a16="http://schemas.microsoft.com/office/drawing/2014/main" id="{448DA2DA-B959-E83B-B7F5-D0703582F0E7}"/>
+              </a:ext>
+            </a:extLst>
+          </p:cNvPr>
+          <p:cNvPicPr>
+            <a:picLocks noChangeAspect="1"/>
+          </p:cNvPicPr>
+          <p:nvPr/>
+        </p:nvPicPr>
+        <p:blipFill>
+          <a:blip r:embed="rId4"/>
+          <a:srcRect r="50000" b="11454"/>
+          <a:stretch>
+            <a:fillRect/>
+          </a:stretch>
+        </p:blipFill>
+        <p:spPr>
+          <a:xfrm>
+            <a:off x="2209800" y="1806292"/>
+            <a:ext cx="3886200" cy="3830580"/>
+          </a:xfrm>
+          <a:prstGeom prst="rect">
+            <a:avLst/>
+          </a:prstGeom>
+        </p:spPr>
+      </p:pic>
+    </p:spTree>
+    <p:extLst>
+      <p:ext uri="{BB962C8B-B14F-4D97-AF65-F5344CB8AC3E}">
+        <p14:creationId xmlns:p14="http://schemas.microsoft.com/office/powerpoint/2010/main" val="3048432127"/>
       </p:ext>
     </p:extLst>
   </p:cSld>
@@ -5289,7 +10397,13 @@
   <p:cSld>
     <p:spTree>
       <p:nvGrpSpPr>
-        <p:cNvPr id="1" name=""/>
+        <p:cNvPr id="1" name="">
+          <a:extLst>
+            <a:ext uri="{FF2B5EF4-FFF2-40B4-BE49-F238E27FC236}">
+              <a16:creationId xmlns:a16="http://schemas.microsoft.com/office/drawing/2014/main" id="{450A311B-DCBC-3792-4894-4493CA58D979}"/>
+            </a:ext>
+          </a:extLst>
+        </p:cNvPr>
         <p:cNvGrpSpPr/>
         <p:nvPr/>
       </p:nvGrpSpPr>
@@ -5306,7 +10420,7 @@
           <p:cNvPr id="2" name="Title 1">
             <a:extLst>
               <a:ext uri="{FF2B5EF4-FFF2-40B4-BE49-F238E27FC236}">
-                <a16:creationId xmlns:a16="http://schemas.microsoft.com/office/drawing/2014/main" id="{C9B32982-8ECF-843F-BE49-2E046B46EC43}"/>
+                <a16:creationId xmlns:a16="http://schemas.microsoft.com/office/drawing/2014/main" id="{D81826CD-1CC3-8DE7-3091-644C3D50FA7C}"/>
               </a:ext>
             </a:extLst>
           </p:cNvPr>
@@ -5324,40 +10438,351 @@
           <a:p>
             <a:r>
               <a:rPr lang="en-US" dirty="0"/>
-              <a:t>Why prediction matters for science, and especially environmental science</a:t>
-            </a:r>
-          </a:p>
-        </p:txBody>
-      </p:sp>
-      <p:sp>
-        <p:nvSpPr>
-          <p:cNvPr id="3" name="Content Placeholder 2">
-            <a:extLst>
-              <a:ext uri="{FF2B5EF4-FFF2-40B4-BE49-F238E27FC236}">
-                <a16:creationId xmlns:a16="http://schemas.microsoft.com/office/drawing/2014/main" id="{EFC01B0B-71D1-BCA4-5138-21A233C4CFFA}"/>
-              </a:ext>
-            </a:extLst>
-          </p:cNvPr>
-          <p:cNvSpPr>
-            <a:spLocks noGrp="1"/>
-          </p:cNvSpPr>
-          <p:nvPr>
-            <p:ph idx="1"/>
-          </p:nvPr>
-        </p:nvSpPr>
-        <p:spPr/>
-        <p:txBody>
-          <a:bodyPr/>
-          <a:lstStyle/>
-          <a:p>
-            <a:endParaRPr lang="en-US"/>
-          </a:p>
-        </p:txBody>
-      </p:sp>
+              <a:t>Modeling mindsets:</a:t>
+            </a:r>
+          </a:p>
+        </p:txBody>
+      </p:sp>
+      <p:sp>
+        <p:nvSpPr>
+          <p:cNvPr id="5" name="TextBox 4">
+            <a:extLst>
+              <a:ext uri="{FF2B5EF4-FFF2-40B4-BE49-F238E27FC236}">
+                <a16:creationId xmlns:a16="http://schemas.microsoft.com/office/drawing/2014/main" id="{56A00044-CEEF-4E2C-85D4-ED82C4B4ECF4}"/>
+              </a:ext>
+            </a:extLst>
+          </p:cNvPr>
+          <p:cNvSpPr txBox="1"/>
+          <p:nvPr/>
+        </p:nvSpPr>
+        <p:spPr>
+          <a:xfrm>
+            <a:off x="4537276" y="6488668"/>
+            <a:ext cx="8191983" cy="369332"/>
+          </a:xfrm>
+          <a:prstGeom prst="rect">
+            <a:avLst/>
+          </a:prstGeom>
+          <a:noFill/>
+        </p:spPr>
+        <p:txBody>
+          <a:bodyPr wrap="square">
+            <a:spAutoFit/>
+          </a:bodyPr>
+          <a:lstStyle/>
+          <a:p>
+            <a:r>
+              <a:rPr lang="en-US" dirty="0">
+                <a:hlinkClick r:id="rId3"/>
+              </a:rPr>
+              <a:t>Molnar, C. 2023. Modeling mindsets: the many cultures of learning from data.</a:t>
+            </a:r>
+            <a:endParaRPr lang="en-US" dirty="0"/>
+          </a:p>
+        </p:txBody>
+      </p:sp>
+      <p:pic>
+        <p:nvPicPr>
+          <p:cNvPr id="4" name="Picture 3">
+            <a:extLst>
+              <a:ext uri="{FF2B5EF4-FFF2-40B4-BE49-F238E27FC236}">
+                <a16:creationId xmlns:a16="http://schemas.microsoft.com/office/drawing/2014/main" id="{5DB75F26-265D-183C-5424-4EEEC70A08FA}"/>
+              </a:ext>
+            </a:extLst>
+          </p:cNvPr>
+          <p:cNvPicPr>
+            <a:picLocks noChangeAspect="1"/>
+          </p:cNvPicPr>
+          <p:nvPr/>
+        </p:nvPicPr>
+        <p:blipFill>
+          <a:blip r:embed="rId4"/>
+          <a:srcRect r="50000" b="11454"/>
+          <a:stretch>
+            <a:fillRect/>
+          </a:stretch>
+        </p:blipFill>
+        <p:spPr>
+          <a:xfrm>
+            <a:off x="2209800" y="1806292"/>
+            <a:ext cx="3886200" cy="3830580"/>
+          </a:xfrm>
+          <a:prstGeom prst="rect">
+            <a:avLst/>
+          </a:prstGeom>
+        </p:spPr>
+      </p:pic>
+      <p:grpSp>
+        <p:nvGrpSpPr>
+          <p:cNvPr id="13" name="Group 12">
+            <a:extLst>
+              <a:ext uri="{FF2B5EF4-FFF2-40B4-BE49-F238E27FC236}">
+                <a16:creationId xmlns:a16="http://schemas.microsoft.com/office/drawing/2014/main" id="{54F2235B-A229-A960-68C8-0D37214D4AAE}"/>
+              </a:ext>
+            </a:extLst>
+          </p:cNvPr>
+          <p:cNvGrpSpPr/>
+          <p:nvPr/>
+        </p:nvGrpSpPr>
+        <p:grpSpPr>
+          <a:xfrm>
+            <a:off x="6484817" y="601883"/>
+            <a:ext cx="5712083" cy="644073"/>
+            <a:chOff x="6484817" y="601883"/>
+            <a:chExt cx="5712083" cy="644073"/>
+          </a:xfrm>
+        </p:grpSpPr>
+        <p:sp>
+          <p:nvSpPr>
+            <p:cNvPr id="7" name="TextBox 6">
+              <a:extLst>
+                <a:ext uri="{FF2B5EF4-FFF2-40B4-BE49-F238E27FC236}">
+                  <a16:creationId xmlns:a16="http://schemas.microsoft.com/office/drawing/2014/main" id="{0051D776-D224-0AD1-CD99-A1B62EDD5D6F}"/>
+                </a:ext>
+              </a:extLst>
+            </p:cNvPr>
+            <p:cNvSpPr txBox="1"/>
+            <p:nvPr/>
+          </p:nvSpPr>
+          <p:spPr>
+            <a:xfrm>
+              <a:off x="10888394" y="661181"/>
+              <a:ext cx="1308506" cy="584775"/>
+            </a:xfrm>
+            <a:prstGeom prst="rect">
+              <a:avLst/>
+            </a:prstGeom>
+            <a:noFill/>
+          </p:spPr>
+          <p:txBody>
+            <a:bodyPr wrap="square" rtlCol="0">
+              <a:spAutoFit/>
+            </a:bodyPr>
+            <a:lstStyle/>
+            <a:p>
+              <a:r>
+                <a:rPr lang="en-US" sz="3200" b="1" dirty="0"/>
+                <a:t>Y</a:t>
+              </a:r>
+            </a:p>
+          </p:txBody>
+        </p:sp>
+        <p:sp>
+          <p:nvSpPr>
+            <p:cNvPr id="3" name="Rectangle 2">
+              <a:extLst>
+                <a:ext uri="{FF2B5EF4-FFF2-40B4-BE49-F238E27FC236}">
+                  <a16:creationId xmlns:a16="http://schemas.microsoft.com/office/drawing/2014/main" id="{23DC2F3A-AC27-369C-8202-7157FFCBD4C5}"/>
+                </a:ext>
+              </a:extLst>
+            </p:cNvPr>
+            <p:cNvSpPr/>
+            <p:nvPr/>
+          </p:nvSpPr>
+          <p:spPr>
+            <a:xfrm>
+              <a:off x="7882360" y="601883"/>
+              <a:ext cx="1921397" cy="625033"/>
+            </a:xfrm>
+            <a:prstGeom prst="rect">
+              <a:avLst/>
+            </a:prstGeom>
+            <a:solidFill>
+              <a:schemeClr val="accent6">
+                <a:lumMod val="40000"/>
+                <a:lumOff val="60000"/>
+              </a:schemeClr>
+            </a:solidFill>
+            <a:ln>
+              <a:solidFill>
+                <a:schemeClr val="tx1"/>
+              </a:solidFill>
+            </a:ln>
+          </p:spPr>
+          <p:style>
+            <a:lnRef idx="2">
+              <a:schemeClr val="accent1">
+                <a:shade val="15000"/>
+              </a:schemeClr>
+            </a:lnRef>
+            <a:fillRef idx="1">
+              <a:schemeClr val="accent1"/>
+            </a:fillRef>
+            <a:effectRef idx="0">
+              <a:schemeClr val="accent1"/>
+            </a:effectRef>
+            <a:fontRef idx="minor">
+              <a:schemeClr val="lt1"/>
+            </a:fontRef>
+          </p:style>
+          <p:txBody>
+            <a:bodyPr rtlCol="0" anchor="ctr"/>
+            <a:lstStyle/>
+            <a:p>
+              <a:pPr algn="ctr"/>
+              <a:endParaRPr lang="en-US"/>
+            </a:p>
+          </p:txBody>
+        </p:sp>
+        <p:sp>
+          <p:nvSpPr>
+            <p:cNvPr id="6" name="TextBox 5">
+              <a:extLst>
+                <a:ext uri="{FF2B5EF4-FFF2-40B4-BE49-F238E27FC236}">
+                  <a16:creationId xmlns:a16="http://schemas.microsoft.com/office/drawing/2014/main" id="{9414A143-19D4-A6E5-9F1B-50F0AC4AA168}"/>
+                </a:ext>
+              </a:extLst>
+            </p:cNvPr>
+            <p:cNvSpPr txBox="1"/>
+            <p:nvPr/>
+          </p:nvSpPr>
+          <p:spPr>
+            <a:xfrm>
+              <a:off x="6484817" y="661181"/>
+              <a:ext cx="429926" cy="584775"/>
+            </a:xfrm>
+            <a:prstGeom prst="rect">
+              <a:avLst/>
+            </a:prstGeom>
+            <a:noFill/>
+          </p:spPr>
+          <p:txBody>
+            <a:bodyPr wrap="none" rtlCol="0">
+              <a:spAutoFit/>
+            </a:bodyPr>
+            <a:lstStyle/>
+            <a:p>
+              <a:r>
+                <a:rPr lang="en-US" sz="3200" b="1" dirty="0"/>
+                <a:t>X</a:t>
+              </a:r>
+            </a:p>
+          </p:txBody>
+        </p:sp>
+        <p:cxnSp>
+          <p:nvCxnSpPr>
+            <p:cNvPr id="9" name="Straight Arrow Connector 8">
+              <a:extLst>
+                <a:ext uri="{FF2B5EF4-FFF2-40B4-BE49-F238E27FC236}">
+                  <a16:creationId xmlns:a16="http://schemas.microsoft.com/office/drawing/2014/main" id="{6AB10614-207A-8617-CDC4-3F45A88409C6}"/>
+                </a:ext>
+              </a:extLst>
+            </p:cNvPr>
+            <p:cNvCxnSpPr/>
+            <p:nvPr/>
+          </p:nvCxnSpPr>
+          <p:spPr>
+            <a:xfrm>
+              <a:off x="7047914" y="914399"/>
+              <a:ext cx="618978" cy="0"/>
+            </a:xfrm>
+            <a:prstGeom prst="straightConnector1">
+              <a:avLst/>
+            </a:prstGeom>
+            <a:ln w="76200">
+              <a:solidFill>
+                <a:schemeClr val="tx1"/>
+              </a:solidFill>
+              <a:tailEnd type="triangle"/>
+            </a:ln>
+          </p:spPr>
+          <p:style>
+            <a:lnRef idx="2">
+              <a:schemeClr val="accent1"/>
+            </a:lnRef>
+            <a:fillRef idx="0">
+              <a:schemeClr val="accent1"/>
+            </a:fillRef>
+            <a:effectRef idx="1">
+              <a:schemeClr val="accent1"/>
+            </a:effectRef>
+            <a:fontRef idx="minor">
+              <a:schemeClr val="tx1"/>
+            </a:fontRef>
+          </p:style>
+        </p:cxnSp>
+        <p:cxnSp>
+          <p:nvCxnSpPr>
+            <p:cNvPr id="10" name="Straight Arrow Connector 9">
+              <a:extLst>
+                <a:ext uri="{FF2B5EF4-FFF2-40B4-BE49-F238E27FC236}">
+                  <a16:creationId xmlns:a16="http://schemas.microsoft.com/office/drawing/2014/main" id="{CE890C78-F9A8-F391-3FC7-3ADD9B2157F6}"/>
+                </a:ext>
+              </a:extLst>
+            </p:cNvPr>
+            <p:cNvCxnSpPr/>
+            <p:nvPr/>
+          </p:nvCxnSpPr>
+          <p:spPr>
+            <a:xfrm>
+              <a:off x="10084191" y="914399"/>
+              <a:ext cx="618978" cy="0"/>
+            </a:xfrm>
+            <a:prstGeom prst="straightConnector1">
+              <a:avLst/>
+            </a:prstGeom>
+            <a:ln w="76200">
+              <a:solidFill>
+                <a:schemeClr val="tx1"/>
+              </a:solidFill>
+              <a:tailEnd type="triangle"/>
+            </a:ln>
+          </p:spPr>
+          <p:style>
+            <a:lnRef idx="2">
+              <a:schemeClr val="accent1"/>
+            </a:lnRef>
+            <a:fillRef idx="0">
+              <a:schemeClr val="accent1"/>
+            </a:fillRef>
+            <a:effectRef idx="1">
+              <a:schemeClr val="accent1"/>
+            </a:effectRef>
+            <a:fontRef idx="minor">
+              <a:schemeClr val="tx1"/>
+            </a:fontRef>
+          </p:style>
+        </p:cxnSp>
+        <p:sp>
+          <p:nvSpPr>
+            <p:cNvPr id="11" name="TextBox 10">
+              <a:extLst>
+                <a:ext uri="{FF2B5EF4-FFF2-40B4-BE49-F238E27FC236}">
+                  <a16:creationId xmlns:a16="http://schemas.microsoft.com/office/drawing/2014/main" id="{3852D3D9-7BF4-BE3C-FE41-34E1B9B41C21}"/>
+                </a:ext>
+              </a:extLst>
+            </p:cNvPr>
+            <p:cNvSpPr txBox="1"/>
+            <p:nvPr/>
+          </p:nvSpPr>
+          <p:spPr>
+            <a:xfrm>
+              <a:off x="8200734" y="683566"/>
+              <a:ext cx="1284647" cy="461665"/>
+            </a:xfrm>
+            <a:prstGeom prst="rect">
+              <a:avLst/>
+            </a:prstGeom>
+            <a:noFill/>
+          </p:spPr>
+          <p:txBody>
+            <a:bodyPr wrap="none" rtlCol="0">
+              <a:spAutoFit/>
+            </a:bodyPr>
+            <a:lstStyle/>
+            <a:p>
+              <a:r>
+                <a:rPr lang="en-US" sz="2400" dirty="0"/>
+                <a:t>NATURE</a:t>
+              </a:r>
+            </a:p>
+          </p:txBody>
+        </p:sp>
+      </p:grpSp>
     </p:spTree>
     <p:extLst>
       <p:ext uri="{BB962C8B-B14F-4D97-AF65-F5344CB8AC3E}">
-        <p14:creationId xmlns:p14="http://schemas.microsoft.com/office/powerpoint/2010/main" val="2164193552"/>
+        <p14:creationId xmlns:p14="http://schemas.microsoft.com/office/powerpoint/2010/main" val="507124608"/>
       </p:ext>
     </p:extLst>
   </p:cSld>
@@ -5372,7 +10797,13 @@
   <p:cSld>
     <p:spTree>
       <p:nvGrpSpPr>
-        <p:cNvPr id="1" name=""/>
+        <p:cNvPr id="1" name="">
+          <a:extLst>
+            <a:ext uri="{FF2B5EF4-FFF2-40B4-BE49-F238E27FC236}">
+              <a16:creationId xmlns:a16="http://schemas.microsoft.com/office/drawing/2014/main" id="{BDE3A1A0-1F5B-DDC1-C3DB-1637BA4F3A55}"/>
+            </a:ext>
+          </a:extLst>
+        </p:cNvPr>
         <p:cNvGrpSpPr/>
         <p:nvPr/>
       </p:nvGrpSpPr>
@@ -5389,7 +10820,7 @@
           <p:cNvPr id="2" name="Title 1">
             <a:extLst>
               <a:ext uri="{FF2B5EF4-FFF2-40B4-BE49-F238E27FC236}">
-                <a16:creationId xmlns:a16="http://schemas.microsoft.com/office/drawing/2014/main" id="{2ED9C620-C9E2-7961-B5F8-4FE45A9746AC}"/>
+                <a16:creationId xmlns:a16="http://schemas.microsoft.com/office/drawing/2014/main" id="{7D9AA8DC-6D63-5F9B-FE01-5B70047530B0}"/>
               </a:ext>
             </a:extLst>
           </p:cNvPr>
@@ -5407,45 +10838,661 @@
           <a:p>
             <a:r>
               <a:rPr lang="en-US" dirty="0"/>
-              <a:t>Here, we’ll focus on </a:t>
-            </a:r>
-            <a:r>
-              <a:rPr lang="en-US" b="1" dirty="0"/>
-              <a:t>supervised machine learning</a:t>
-            </a:r>
-          </a:p>
-        </p:txBody>
-      </p:sp>
-      <p:sp>
-        <p:nvSpPr>
-          <p:cNvPr id="3" name="Content Placeholder 2">
-            <a:extLst>
-              <a:ext uri="{FF2B5EF4-FFF2-40B4-BE49-F238E27FC236}">
-                <a16:creationId xmlns:a16="http://schemas.microsoft.com/office/drawing/2014/main" id="{2CE455A1-1296-7EDE-EF6F-761FAC88DD18}"/>
-              </a:ext>
-            </a:extLst>
-          </p:cNvPr>
-          <p:cNvSpPr>
-            <a:spLocks noGrp="1"/>
-          </p:cNvSpPr>
-          <p:nvPr>
-            <p:ph idx="1"/>
-          </p:nvPr>
-        </p:nvSpPr>
-        <p:spPr/>
-        <p:txBody>
-          <a:bodyPr/>
-          <a:lstStyle/>
-          <a:p>
-            <a:r>
-              <a:rPr lang="en-US" dirty="0"/>
-              <a:t>Point to other techniques and their uses</a:t>
-            </a:r>
-          </a:p>
-          <a:p>
-            <a:r>
-              <a:rPr lang="en-US" dirty="0"/>
-              <a:t>Highlight supervised ML methods and their advantages</a:t>
+              <a:t>Modeling mindsets:</a:t>
+            </a:r>
+          </a:p>
+        </p:txBody>
+      </p:sp>
+      <p:sp>
+        <p:nvSpPr>
+          <p:cNvPr id="5" name="TextBox 4">
+            <a:extLst>
+              <a:ext uri="{FF2B5EF4-FFF2-40B4-BE49-F238E27FC236}">
+                <a16:creationId xmlns:a16="http://schemas.microsoft.com/office/drawing/2014/main" id="{F897EBAF-135C-4A7B-B38D-D951D6239E94}"/>
+              </a:ext>
+            </a:extLst>
+          </p:cNvPr>
+          <p:cNvSpPr txBox="1"/>
+          <p:nvPr/>
+        </p:nvSpPr>
+        <p:spPr>
+          <a:xfrm>
+            <a:off x="4537276" y="6488668"/>
+            <a:ext cx="8191983" cy="369332"/>
+          </a:xfrm>
+          <a:prstGeom prst="rect">
+            <a:avLst/>
+          </a:prstGeom>
+          <a:noFill/>
+        </p:spPr>
+        <p:txBody>
+          <a:bodyPr wrap="square">
+            <a:spAutoFit/>
+          </a:bodyPr>
+          <a:lstStyle/>
+          <a:p>
+            <a:r>
+              <a:rPr lang="en-US" dirty="0">
+                <a:hlinkClick r:id="rId3"/>
+              </a:rPr>
+              <a:t>Molnar, C. 2023. Modeling mindsets: the many cultures of learning from data.</a:t>
+            </a:r>
+            <a:endParaRPr lang="en-US" dirty="0"/>
+          </a:p>
+        </p:txBody>
+      </p:sp>
+      <p:pic>
+        <p:nvPicPr>
+          <p:cNvPr id="4" name="Picture 3">
+            <a:extLst>
+              <a:ext uri="{FF2B5EF4-FFF2-40B4-BE49-F238E27FC236}">
+                <a16:creationId xmlns:a16="http://schemas.microsoft.com/office/drawing/2014/main" id="{152A8145-C99D-A641-B70A-A80C902AF3F1}"/>
+              </a:ext>
+            </a:extLst>
+          </p:cNvPr>
+          <p:cNvPicPr>
+            <a:picLocks noChangeAspect="1"/>
+          </p:cNvPicPr>
+          <p:nvPr/>
+        </p:nvPicPr>
+        <p:blipFill>
+          <a:blip r:embed="rId4"/>
+          <a:srcRect r="50000" b="11454"/>
+          <a:stretch>
+            <a:fillRect/>
+          </a:stretch>
+        </p:blipFill>
+        <p:spPr>
+          <a:xfrm>
+            <a:off x="2209800" y="1806292"/>
+            <a:ext cx="3886200" cy="3830580"/>
+          </a:xfrm>
+          <a:prstGeom prst="rect">
+            <a:avLst/>
+          </a:prstGeom>
+        </p:spPr>
+      </p:pic>
+      <p:grpSp>
+        <p:nvGrpSpPr>
+          <p:cNvPr id="13" name="Group 12">
+            <a:extLst>
+              <a:ext uri="{FF2B5EF4-FFF2-40B4-BE49-F238E27FC236}">
+                <a16:creationId xmlns:a16="http://schemas.microsoft.com/office/drawing/2014/main" id="{BFD2CD4E-6340-D765-E300-6581369E00A3}"/>
+              </a:ext>
+            </a:extLst>
+          </p:cNvPr>
+          <p:cNvGrpSpPr/>
+          <p:nvPr/>
+        </p:nvGrpSpPr>
+        <p:grpSpPr>
+          <a:xfrm>
+            <a:off x="6484817" y="601883"/>
+            <a:ext cx="5712083" cy="644073"/>
+            <a:chOff x="6484817" y="601883"/>
+            <a:chExt cx="5712083" cy="644073"/>
+          </a:xfrm>
+        </p:grpSpPr>
+        <p:sp>
+          <p:nvSpPr>
+            <p:cNvPr id="7" name="TextBox 6">
+              <a:extLst>
+                <a:ext uri="{FF2B5EF4-FFF2-40B4-BE49-F238E27FC236}">
+                  <a16:creationId xmlns:a16="http://schemas.microsoft.com/office/drawing/2014/main" id="{D8533868-CA43-360F-A9C7-1FE5E0D0420B}"/>
+                </a:ext>
+              </a:extLst>
+            </p:cNvPr>
+            <p:cNvSpPr txBox="1"/>
+            <p:nvPr/>
+          </p:nvSpPr>
+          <p:spPr>
+            <a:xfrm>
+              <a:off x="10888394" y="661181"/>
+              <a:ext cx="1308506" cy="584775"/>
+            </a:xfrm>
+            <a:prstGeom prst="rect">
+              <a:avLst/>
+            </a:prstGeom>
+            <a:noFill/>
+          </p:spPr>
+          <p:txBody>
+            <a:bodyPr wrap="square" rtlCol="0">
+              <a:spAutoFit/>
+            </a:bodyPr>
+            <a:lstStyle/>
+            <a:p>
+              <a:r>
+                <a:rPr lang="en-US" sz="3200" b="1" dirty="0"/>
+                <a:t>Y</a:t>
+              </a:r>
+            </a:p>
+          </p:txBody>
+        </p:sp>
+        <p:sp>
+          <p:nvSpPr>
+            <p:cNvPr id="3" name="Rectangle 2">
+              <a:extLst>
+                <a:ext uri="{FF2B5EF4-FFF2-40B4-BE49-F238E27FC236}">
+                  <a16:creationId xmlns:a16="http://schemas.microsoft.com/office/drawing/2014/main" id="{B4FF0D15-D9E3-6117-2FB2-008E2668B091}"/>
+                </a:ext>
+              </a:extLst>
+            </p:cNvPr>
+            <p:cNvSpPr/>
+            <p:nvPr/>
+          </p:nvSpPr>
+          <p:spPr>
+            <a:xfrm>
+              <a:off x="7882360" y="601883"/>
+              <a:ext cx="1921397" cy="625033"/>
+            </a:xfrm>
+            <a:prstGeom prst="rect">
+              <a:avLst/>
+            </a:prstGeom>
+            <a:solidFill>
+              <a:schemeClr val="accent6">
+                <a:lumMod val="40000"/>
+                <a:lumOff val="60000"/>
+              </a:schemeClr>
+            </a:solidFill>
+            <a:ln>
+              <a:solidFill>
+                <a:schemeClr val="tx1"/>
+              </a:solidFill>
+            </a:ln>
+          </p:spPr>
+          <p:style>
+            <a:lnRef idx="2">
+              <a:schemeClr val="accent1">
+                <a:shade val="15000"/>
+              </a:schemeClr>
+            </a:lnRef>
+            <a:fillRef idx="1">
+              <a:schemeClr val="accent1"/>
+            </a:fillRef>
+            <a:effectRef idx="0">
+              <a:schemeClr val="accent1"/>
+            </a:effectRef>
+            <a:fontRef idx="minor">
+              <a:schemeClr val="lt1"/>
+            </a:fontRef>
+          </p:style>
+          <p:txBody>
+            <a:bodyPr rtlCol="0" anchor="ctr"/>
+            <a:lstStyle/>
+            <a:p>
+              <a:pPr algn="ctr"/>
+              <a:endParaRPr lang="en-US"/>
+            </a:p>
+          </p:txBody>
+        </p:sp>
+        <p:sp>
+          <p:nvSpPr>
+            <p:cNvPr id="6" name="TextBox 5">
+              <a:extLst>
+                <a:ext uri="{FF2B5EF4-FFF2-40B4-BE49-F238E27FC236}">
+                  <a16:creationId xmlns:a16="http://schemas.microsoft.com/office/drawing/2014/main" id="{A18F8292-0F24-3668-70D4-A69D3FCFFAED}"/>
+                </a:ext>
+              </a:extLst>
+            </p:cNvPr>
+            <p:cNvSpPr txBox="1"/>
+            <p:nvPr/>
+          </p:nvSpPr>
+          <p:spPr>
+            <a:xfrm>
+              <a:off x="6484817" y="661181"/>
+              <a:ext cx="429926" cy="584775"/>
+            </a:xfrm>
+            <a:prstGeom prst="rect">
+              <a:avLst/>
+            </a:prstGeom>
+            <a:noFill/>
+          </p:spPr>
+          <p:txBody>
+            <a:bodyPr wrap="none" rtlCol="0">
+              <a:spAutoFit/>
+            </a:bodyPr>
+            <a:lstStyle/>
+            <a:p>
+              <a:r>
+                <a:rPr lang="en-US" sz="3200" b="1" dirty="0"/>
+                <a:t>X</a:t>
+              </a:r>
+            </a:p>
+          </p:txBody>
+        </p:sp>
+        <p:cxnSp>
+          <p:nvCxnSpPr>
+            <p:cNvPr id="9" name="Straight Arrow Connector 8">
+              <a:extLst>
+                <a:ext uri="{FF2B5EF4-FFF2-40B4-BE49-F238E27FC236}">
+                  <a16:creationId xmlns:a16="http://schemas.microsoft.com/office/drawing/2014/main" id="{295C0FB7-8766-BE85-FA06-C791B0BB0790}"/>
+                </a:ext>
+              </a:extLst>
+            </p:cNvPr>
+            <p:cNvCxnSpPr/>
+            <p:nvPr/>
+          </p:nvCxnSpPr>
+          <p:spPr>
+            <a:xfrm>
+              <a:off x="7047914" y="914399"/>
+              <a:ext cx="618978" cy="0"/>
+            </a:xfrm>
+            <a:prstGeom prst="straightConnector1">
+              <a:avLst/>
+            </a:prstGeom>
+            <a:ln w="76200">
+              <a:solidFill>
+                <a:schemeClr val="tx1"/>
+              </a:solidFill>
+              <a:tailEnd type="triangle"/>
+            </a:ln>
+          </p:spPr>
+          <p:style>
+            <a:lnRef idx="2">
+              <a:schemeClr val="accent1"/>
+            </a:lnRef>
+            <a:fillRef idx="0">
+              <a:schemeClr val="accent1"/>
+            </a:fillRef>
+            <a:effectRef idx="1">
+              <a:schemeClr val="accent1"/>
+            </a:effectRef>
+            <a:fontRef idx="minor">
+              <a:schemeClr val="tx1"/>
+            </a:fontRef>
+          </p:style>
+        </p:cxnSp>
+        <p:cxnSp>
+          <p:nvCxnSpPr>
+            <p:cNvPr id="10" name="Straight Arrow Connector 9">
+              <a:extLst>
+                <a:ext uri="{FF2B5EF4-FFF2-40B4-BE49-F238E27FC236}">
+                  <a16:creationId xmlns:a16="http://schemas.microsoft.com/office/drawing/2014/main" id="{5972E2F4-C0F0-B712-6A09-0C6BA2DC278C}"/>
+                </a:ext>
+              </a:extLst>
+            </p:cNvPr>
+            <p:cNvCxnSpPr/>
+            <p:nvPr/>
+          </p:nvCxnSpPr>
+          <p:spPr>
+            <a:xfrm>
+              <a:off x="10084191" y="914399"/>
+              <a:ext cx="618978" cy="0"/>
+            </a:xfrm>
+            <a:prstGeom prst="straightConnector1">
+              <a:avLst/>
+            </a:prstGeom>
+            <a:ln w="76200">
+              <a:solidFill>
+                <a:schemeClr val="tx1"/>
+              </a:solidFill>
+              <a:tailEnd type="triangle"/>
+            </a:ln>
+          </p:spPr>
+          <p:style>
+            <a:lnRef idx="2">
+              <a:schemeClr val="accent1"/>
+            </a:lnRef>
+            <a:fillRef idx="0">
+              <a:schemeClr val="accent1"/>
+            </a:fillRef>
+            <a:effectRef idx="1">
+              <a:schemeClr val="accent1"/>
+            </a:effectRef>
+            <a:fontRef idx="minor">
+              <a:schemeClr val="tx1"/>
+            </a:fontRef>
+          </p:style>
+        </p:cxnSp>
+        <p:sp>
+          <p:nvSpPr>
+            <p:cNvPr id="11" name="TextBox 10">
+              <a:extLst>
+                <a:ext uri="{FF2B5EF4-FFF2-40B4-BE49-F238E27FC236}">
+                  <a16:creationId xmlns:a16="http://schemas.microsoft.com/office/drawing/2014/main" id="{0B7C5A6D-111B-5B31-E489-01D18E3B0E27}"/>
+                </a:ext>
+              </a:extLst>
+            </p:cNvPr>
+            <p:cNvSpPr txBox="1"/>
+            <p:nvPr/>
+          </p:nvSpPr>
+          <p:spPr>
+            <a:xfrm>
+              <a:off x="8200734" y="683566"/>
+              <a:ext cx="1284647" cy="461665"/>
+            </a:xfrm>
+            <a:prstGeom prst="rect">
+              <a:avLst/>
+            </a:prstGeom>
+            <a:noFill/>
+          </p:spPr>
+          <p:txBody>
+            <a:bodyPr wrap="none" rtlCol="0">
+              <a:spAutoFit/>
+            </a:bodyPr>
+            <a:lstStyle/>
+            <a:p>
+              <a:r>
+                <a:rPr lang="en-US" sz="2400" dirty="0"/>
+                <a:t>NATURE</a:t>
+              </a:r>
+            </a:p>
+          </p:txBody>
+        </p:sp>
+      </p:grpSp>
+      <p:grpSp>
+        <p:nvGrpSpPr>
+          <p:cNvPr id="14" name="Group 13">
+            <a:extLst>
+              <a:ext uri="{FF2B5EF4-FFF2-40B4-BE49-F238E27FC236}">
+                <a16:creationId xmlns:a16="http://schemas.microsoft.com/office/drawing/2014/main" id="{C9DFE068-D7B1-07C1-A093-05EF36140AC1}"/>
+              </a:ext>
+            </a:extLst>
+          </p:cNvPr>
+          <p:cNvGrpSpPr/>
+          <p:nvPr/>
+        </p:nvGrpSpPr>
+        <p:grpSpPr>
+          <a:xfrm>
+            <a:off x="6699780" y="4109503"/>
+            <a:ext cx="5712083" cy="674850"/>
+            <a:chOff x="6484817" y="601883"/>
+            <a:chExt cx="5712083" cy="674850"/>
+          </a:xfrm>
+        </p:grpSpPr>
+        <p:sp>
+          <p:nvSpPr>
+            <p:cNvPr id="15" name="TextBox 14">
+              <a:extLst>
+                <a:ext uri="{FF2B5EF4-FFF2-40B4-BE49-F238E27FC236}">
+                  <a16:creationId xmlns:a16="http://schemas.microsoft.com/office/drawing/2014/main" id="{F8560504-E490-2CED-27E3-C2F00F78C1EA}"/>
+                </a:ext>
+              </a:extLst>
+            </p:cNvPr>
+            <p:cNvSpPr txBox="1"/>
+            <p:nvPr/>
+          </p:nvSpPr>
+          <p:spPr>
+            <a:xfrm>
+              <a:off x="10888394" y="661181"/>
+              <a:ext cx="1308506" cy="584775"/>
+            </a:xfrm>
+            <a:prstGeom prst="rect">
+              <a:avLst/>
+            </a:prstGeom>
+            <a:noFill/>
+          </p:spPr>
+          <p:txBody>
+            <a:bodyPr wrap="square" rtlCol="0">
+              <a:spAutoFit/>
+            </a:bodyPr>
+            <a:lstStyle/>
+            <a:p>
+              <a:r>
+                <a:rPr lang="en-US" sz="3200" b="1" dirty="0"/>
+                <a:t>Y</a:t>
+              </a:r>
+            </a:p>
+          </p:txBody>
+        </p:sp>
+        <p:sp>
+          <p:nvSpPr>
+            <p:cNvPr id="16" name="Rectangle 15">
+              <a:extLst>
+                <a:ext uri="{FF2B5EF4-FFF2-40B4-BE49-F238E27FC236}">
+                  <a16:creationId xmlns:a16="http://schemas.microsoft.com/office/drawing/2014/main" id="{F13D521C-31A1-88B1-BCC1-54AEC30C2E7E}"/>
+                </a:ext>
+              </a:extLst>
+            </p:cNvPr>
+            <p:cNvSpPr/>
+            <p:nvPr/>
+          </p:nvSpPr>
+          <p:spPr>
+            <a:xfrm>
+              <a:off x="7882360" y="601883"/>
+              <a:ext cx="1921397" cy="625033"/>
+            </a:xfrm>
+            <a:prstGeom prst="rect">
+              <a:avLst/>
+            </a:prstGeom>
+            <a:solidFill>
+              <a:schemeClr val="accent6">
+                <a:lumMod val="40000"/>
+                <a:lumOff val="60000"/>
+              </a:schemeClr>
+            </a:solidFill>
+            <a:ln>
+              <a:solidFill>
+                <a:schemeClr val="tx1"/>
+              </a:solidFill>
+            </a:ln>
+          </p:spPr>
+          <p:style>
+            <a:lnRef idx="2">
+              <a:schemeClr val="accent1">
+                <a:shade val="15000"/>
+              </a:schemeClr>
+            </a:lnRef>
+            <a:fillRef idx="1">
+              <a:schemeClr val="accent1"/>
+            </a:fillRef>
+            <a:effectRef idx="0">
+              <a:schemeClr val="accent1"/>
+            </a:effectRef>
+            <a:fontRef idx="minor">
+              <a:schemeClr val="lt1"/>
+            </a:fontRef>
+          </p:style>
+          <p:txBody>
+            <a:bodyPr rtlCol="0" anchor="ctr"/>
+            <a:lstStyle/>
+            <a:p>
+              <a:pPr algn="ctr"/>
+              <a:endParaRPr lang="en-US"/>
+            </a:p>
+          </p:txBody>
+        </p:sp>
+        <p:sp>
+          <p:nvSpPr>
+            <p:cNvPr id="17" name="TextBox 16">
+              <a:extLst>
+                <a:ext uri="{FF2B5EF4-FFF2-40B4-BE49-F238E27FC236}">
+                  <a16:creationId xmlns:a16="http://schemas.microsoft.com/office/drawing/2014/main" id="{0E86A1D0-86B0-893E-BA92-21DD6E5DA89C}"/>
+                </a:ext>
+              </a:extLst>
+            </p:cNvPr>
+            <p:cNvSpPr txBox="1"/>
+            <p:nvPr/>
+          </p:nvSpPr>
+          <p:spPr>
+            <a:xfrm>
+              <a:off x="6484817" y="661181"/>
+              <a:ext cx="429926" cy="584775"/>
+            </a:xfrm>
+            <a:prstGeom prst="rect">
+              <a:avLst/>
+            </a:prstGeom>
+            <a:noFill/>
+          </p:spPr>
+          <p:txBody>
+            <a:bodyPr wrap="none" rtlCol="0">
+              <a:spAutoFit/>
+            </a:bodyPr>
+            <a:lstStyle/>
+            <a:p>
+              <a:r>
+                <a:rPr lang="en-US" sz="3200" b="1" dirty="0"/>
+                <a:t>X</a:t>
+              </a:r>
+            </a:p>
+          </p:txBody>
+        </p:sp>
+        <p:cxnSp>
+          <p:nvCxnSpPr>
+            <p:cNvPr id="18" name="Straight Arrow Connector 17">
+              <a:extLst>
+                <a:ext uri="{FF2B5EF4-FFF2-40B4-BE49-F238E27FC236}">
+                  <a16:creationId xmlns:a16="http://schemas.microsoft.com/office/drawing/2014/main" id="{E01FE9B6-AD46-A2FC-95A4-D63722D69B36}"/>
+                </a:ext>
+              </a:extLst>
+            </p:cNvPr>
+            <p:cNvCxnSpPr/>
+            <p:nvPr/>
+          </p:nvCxnSpPr>
+          <p:spPr>
+            <a:xfrm>
+              <a:off x="7047914" y="914399"/>
+              <a:ext cx="618978" cy="0"/>
+            </a:xfrm>
+            <a:prstGeom prst="straightConnector1">
+              <a:avLst/>
+            </a:prstGeom>
+            <a:ln w="76200">
+              <a:solidFill>
+                <a:schemeClr val="tx1"/>
+              </a:solidFill>
+              <a:tailEnd type="triangle"/>
+            </a:ln>
+          </p:spPr>
+          <p:style>
+            <a:lnRef idx="2">
+              <a:schemeClr val="accent1"/>
+            </a:lnRef>
+            <a:fillRef idx="0">
+              <a:schemeClr val="accent1"/>
+            </a:fillRef>
+            <a:effectRef idx="1">
+              <a:schemeClr val="accent1"/>
+            </a:effectRef>
+            <a:fontRef idx="minor">
+              <a:schemeClr val="tx1"/>
+            </a:fontRef>
+          </p:style>
+        </p:cxnSp>
+        <p:cxnSp>
+          <p:nvCxnSpPr>
+            <p:cNvPr id="19" name="Straight Arrow Connector 18">
+              <a:extLst>
+                <a:ext uri="{FF2B5EF4-FFF2-40B4-BE49-F238E27FC236}">
+                  <a16:creationId xmlns:a16="http://schemas.microsoft.com/office/drawing/2014/main" id="{1FC3016B-0E23-F9CD-E570-28F2F2E7BC97}"/>
+                </a:ext>
+              </a:extLst>
+            </p:cNvPr>
+            <p:cNvCxnSpPr/>
+            <p:nvPr/>
+          </p:nvCxnSpPr>
+          <p:spPr>
+            <a:xfrm>
+              <a:off x="10084191" y="914399"/>
+              <a:ext cx="618978" cy="0"/>
+            </a:xfrm>
+            <a:prstGeom prst="straightConnector1">
+              <a:avLst/>
+            </a:prstGeom>
+            <a:ln w="76200">
+              <a:solidFill>
+                <a:schemeClr val="tx1"/>
+              </a:solidFill>
+              <a:tailEnd type="triangle"/>
+            </a:ln>
+          </p:spPr>
+          <p:style>
+            <a:lnRef idx="2">
+              <a:schemeClr val="accent1"/>
+            </a:lnRef>
+            <a:fillRef idx="0">
+              <a:schemeClr val="accent1"/>
+            </a:fillRef>
+            <a:effectRef idx="1">
+              <a:schemeClr val="accent1"/>
+            </a:effectRef>
+            <a:fontRef idx="minor">
+              <a:schemeClr val="tx1"/>
+            </a:fontRef>
+          </p:style>
+        </p:cxnSp>
+        <p:sp>
+          <p:nvSpPr>
+            <p:cNvPr id="20" name="TextBox 19">
+              <a:extLst>
+                <a:ext uri="{FF2B5EF4-FFF2-40B4-BE49-F238E27FC236}">
+                  <a16:creationId xmlns:a16="http://schemas.microsoft.com/office/drawing/2014/main" id="{AB794395-BB0B-F970-5A20-B68CBCC71E84}"/>
+                </a:ext>
+              </a:extLst>
+            </p:cNvPr>
+            <p:cNvSpPr txBox="1"/>
+            <p:nvPr/>
+          </p:nvSpPr>
+          <p:spPr>
+            <a:xfrm>
+              <a:off x="8130203" y="630402"/>
+              <a:ext cx="1411669" cy="646331"/>
+            </a:xfrm>
+            <a:prstGeom prst="rect">
+              <a:avLst/>
+            </a:prstGeom>
+            <a:noFill/>
+          </p:spPr>
+          <p:txBody>
+            <a:bodyPr wrap="none" rtlCol="0">
+              <a:spAutoFit/>
+            </a:bodyPr>
+            <a:lstStyle/>
+            <a:p>
+              <a:pPr algn="ctr"/>
+              <a:r>
+                <a:rPr lang="en-US" dirty="0"/>
+                <a:t>STATISTICAL</a:t>
+              </a:r>
+            </a:p>
+            <a:p>
+              <a:pPr algn="ctr"/>
+              <a:r>
+                <a:rPr lang="en-US" dirty="0"/>
+                <a:t>MODEL</a:t>
+              </a:r>
+            </a:p>
+          </p:txBody>
+        </p:sp>
+      </p:grpSp>
+      <p:sp>
+        <p:nvSpPr>
+          <p:cNvPr id="21" name="TextBox 20">
+            <a:extLst>
+              <a:ext uri="{FF2B5EF4-FFF2-40B4-BE49-F238E27FC236}">
+                <a16:creationId xmlns:a16="http://schemas.microsoft.com/office/drawing/2014/main" id="{B8C8CC72-D5CE-2CAB-61F3-8D2D31E69F4C}"/>
+              </a:ext>
+            </a:extLst>
+          </p:cNvPr>
+          <p:cNvSpPr txBox="1"/>
+          <p:nvPr/>
+        </p:nvSpPr>
+        <p:spPr>
+          <a:xfrm>
+            <a:off x="6699779" y="2515732"/>
+            <a:ext cx="5285895" cy="1200329"/>
+          </a:xfrm>
+          <a:prstGeom prst="rect">
+            <a:avLst/>
+          </a:prstGeom>
+          <a:noFill/>
+        </p:spPr>
+        <p:txBody>
+          <a:bodyPr wrap="square" rtlCol="0">
+            <a:spAutoFit/>
+          </a:bodyPr>
+          <a:lstStyle/>
+          <a:p>
+            <a:r>
+              <a:rPr lang="en-US" sz="2400" b="1" dirty="0"/>
+              <a:t>Statistical model</a:t>
+            </a:r>
+            <a:r>
+              <a:rPr lang="en-US" sz="2400" dirty="0"/>
+              <a:t>: approximate how nature gets from X to Y by mimicking the </a:t>
+            </a:r>
+            <a:r>
+              <a:rPr lang="en-US" sz="2400" i="1" dirty="0"/>
+              <a:t>data generating process</a:t>
             </a:r>
           </a:p>
         </p:txBody>
@@ -5453,7 +11500,7 @@
     </p:spTree>
     <p:extLst>
       <p:ext uri="{BB962C8B-B14F-4D97-AF65-F5344CB8AC3E}">
-        <p14:creationId xmlns:p14="http://schemas.microsoft.com/office/powerpoint/2010/main" val="1190854385"/>
+        <p14:creationId xmlns:p14="http://schemas.microsoft.com/office/powerpoint/2010/main" val="2255730433"/>
       </p:ext>
     </p:extLst>
   </p:cSld>
@@ -5468,7 +11515,13 @@
   <p:cSld>
     <p:spTree>
       <p:nvGrpSpPr>
-        <p:cNvPr id="1" name=""/>
+        <p:cNvPr id="1" name="">
+          <a:extLst>
+            <a:ext uri="{FF2B5EF4-FFF2-40B4-BE49-F238E27FC236}">
+              <a16:creationId xmlns:a16="http://schemas.microsoft.com/office/drawing/2014/main" id="{F9812241-244B-055D-95DA-987DF4EAA2D5}"/>
+            </a:ext>
+          </a:extLst>
+        </p:cNvPr>
         <p:cNvGrpSpPr/>
         <p:nvPr/>
       </p:nvGrpSpPr>
@@ -5485,7 +11538,7 @@
           <p:cNvPr id="2" name="Title 1">
             <a:extLst>
               <a:ext uri="{FF2B5EF4-FFF2-40B4-BE49-F238E27FC236}">
-                <a16:creationId xmlns:a16="http://schemas.microsoft.com/office/drawing/2014/main" id="{153415BC-5788-8EC6-12AC-481C31DFB6A3}"/>
+                <a16:creationId xmlns:a16="http://schemas.microsoft.com/office/drawing/2014/main" id="{75FE6AA7-F871-9867-601A-1AAE31E9774B}"/>
               </a:ext>
             </a:extLst>
           </p:cNvPr>
@@ -5503,40 +11556,84 @@
           <a:p>
             <a:r>
               <a:rPr lang="en-US" dirty="0"/>
-              <a:t>Overview of the day</a:t>
-            </a:r>
-          </a:p>
-        </p:txBody>
-      </p:sp>
-      <p:sp>
-        <p:nvSpPr>
-          <p:cNvPr id="3" name="Content Placeholder 2">
-            <a:extLst>
-              <a:ext uri="{FF2B5EF4-FFF2-40B4-BE49-F238E27FC236}">
-                <a16:creationId xmlns:a16="http://schemas.microsoft.com/office/drawing/2014/main" id="{907FD6AA-9804-3A4F-934C-265DF31BAADB}"/>
-              </a:ext>
-            </a:extLst>
-          </p:cNvPr>
-          <p:cNvSpPr>
-            <a:spLocks noGrp="1"/>
-          </p:cNvSpPr>
-          <p:nvPr>
-            <p:ph idx="1"/>
-          </p:nvPr>
-        </p:nvSpPr>
-        <p:spPr/>
-        <p:txBody>
-          <a:bodyPr/>
-          <a:lstStyle/>
-          <a:p>
-            <a:endParaRPr lang="en-US"/>
-          </a:p>
-        </p:txBody>
-      </p:sp>
+              <a:t>Modeling mindsets:</a:t>
+            </a:r>
+          </a:p>
+        </p:txBody>
+      </p:sp>
+      <p:sp>
+        <p:nvSpPr>
+          <p:cNvPr id="5" name="TextBox 4">
+            <a:extLst>
+              <a:ext uri="{FF2B5EF4-FFF2-40B4-BE49-F238E27FC236}">
+                <a16:creationId xmlns:a16="http://schemas.microsoft.com/office/drawing/2014/main" id="{0B1164BB-72D5-4A22-DFB6-60343F96D0CA}"/>
+              </a:ext>
+            </a:extLst>
+          </p:cNvPr>
+          <p:cNvSpPr txBox="1"/>
+          <p:nvPr/>
+        </p:nvSpPr>
+        <p:spPr>
+          <a:xfrm>
+            <a:off x="4537276" y="6488668"/>
+            <a:ext cx="8191983" cy="369332"/>
+          </a:xfrm>
+          <a:prstGeom prst="rect">
+            <a:avLst/>
+          </a:prstGeom>
+          <a:noFill/>
+        </p:spPr>
+        <p:txBody>
+          <a:bodyPr wrap="square">
+            <a:spAutoFit/>
+          </a:bodyPr>
+          <a:lstStyle/>
+          <a:p>
+            <a:r>
+              <a:rPr lang="en-US" dirty="0">
+                <a:hlinkClick r:id="rId3"/>
+              </a:rPr>
+              <a:t>Molnar, C. 2023. Modeling mindsets: the many cultures of learning from data.</a:t>
+            </a:r>
+            <a:endParaRPr lang="en-US" dirty="0"/>
+          </a:p>
+        </p:txBody>
+      </p:sp>
+      <p:pic>
+        <p:nvPicPr>
+          <p:cNvPr id="4" name="Picture 3">
+            <a:extLst>
+              <a:ext uri="{FF2B5EF4-FFF2-40B4-BE49-F238E27FC236}">
+                <a16:creationId xmlns:a16="http://schemas.microsoft.com/office/drawing/2014/main" id="{6F15411E-D06D-FD4C-7FF2-987BD7935E9A}"/>
+              </a:ext>
+            </a:extLst>
+          </p:cNvPr>
+          <p:cNvPicPr>
+            <a:picLocks noChangeAspect="1"/>
+          </p:cNvPicPr>
+          <p:nvPr/>
+        </p:nvPicPr>
+        <p:blipFill>
+          <a:blip r:embed="rId4"/>
+          <a:srcRect l="-14" r="105" b="11454"/>
+          <a:stretch>
+            <a:fillRect/>
+          </a:stretch>
+        </p:blipFill>
+        <p:spPr>
+          <a:xfrm>
+            <a:off x="2208628" y="1806292"/>
+            <a:ext cx="7765366" cy="3830580"/>
+          </a:xfrm>
+          <a:prstGeom prst="rect">
+            <a:avLst/>
+          </a:prstGeom>
+        </p:spPr>
+      </p:pic>
     </p:spTree>
     <p:extLst>
       <p:ext uri="{BB962C8B-B14F-4D97-AF65-F5344CB8AC3E}">
-        <p14:creationId xmlns:p14="http://schemas.microsoft.com/office/powerpoint/2010/main" val="2376821870"/>
+        <p14:creationId xmlns:p14="http://schemas.microsoft.com/office/powerpoint/2010/main" val="3401170566"/>
       </p:ext>
     </p:extLst>
   </p:cSld>

--- a/slides/01_what_is_ml.pptx
+++ b/slides/01_what_is_ml.pptx
@@ -218,7 +218,7 @@
           <a:p>
             <a:fld id="{DA3B5F47-542D-2F4A-A589-8990110BEF85}" type="datetimeFigureOut">
               <a:rPr lang="en-US" smtClean="0"/>
-              <a:t>4/6/26</a:t>
+              <a:t>4/8/26</a:t>
             </a:fld>
             <a:endParaRPr lang="en-US"/>
           </a:p>
@@ -2099,7 +2099,7 @@
           <a:p>
             <a:fld id="{19EC6F6F-998C-264C-A700-8215E11AE5BD}" type="datetimeFigureOut">
               <a:rPr lang="en-US" smtClean="0"/>
-              <a:t>4/6/26</a:t>
+              <a:t>4/8/26</a:t>
             </a:fld>
             <a:endParaRPr lang="en-US"/>
           </a:p>
@@ -2297,7 +2297,7 @@
           <a:p>
             <a:fld id="{19EC6F6F-998C-264C-A700-8215E11AE5BD}" type="datetimeFigureOut">
               <a:rPr lang="en-US" smtClean="0"/>
-              <a:t>4/6/26</a:t>
+              <a:t>4/8/26</a:t>
             </a:fld>
             <a:endParaRPr lang="en-US"/>
           </a:p>
@@ -2505,7 +2505,7 @@
           <a:p>
             <a:fld id="{19EC6F6F-998C-264C-A700-8215E11AE5BD}" type="datetimeFigureOut">
               <a:rPr lang="en-US" smtClean="0"/>
-              <a:t>4/6/26</a:t>
+              <a:t>4/8/26</a:t>
             </a:fld>
             <a:endParaRPr lang="en-US"/>
           </a:p>
@@ -2703,7 +2703,7 @@
           <a:p>
             <a:fld id="{19EC6F6F-998C-264C-A700-8215E11AE5BD}" type="datetimeFigureOut">
               <a:rPr lang="en-US" smtClean="0"/>
-              <a:t>4/6/26</a:t>
+              <a:t>4/8/26</a:t>
             </a:fld>
             <a:endParaRPr lang="en-US"/>
           </a:p>
@@ -2978,7 +2978,7 @@
           <a:p>
             <a:fld id="{19EC6F6F-998C-264C-A700-8215E11AE5BD}" type="datetimeFigureOut">
               <a:rPr lang="en-US" smtClean="0"/>
-              <a:t>4/6/26</a:t>
+              <a:t>4/8/26</a:t>
             </a:fld>
             <a:endParaRPr lang="en-US"/>
           </a:p>
@@ -3243,7 +3243,7 @@
           <a:p>
             <a:fld id="{19EC6F6F-998C-264C-A700-8215E11AE5BD}" type="datetimeFigureOut">
               <a:rPr lang="en-US" smtClean="0"/>
-              <a:t>4/6/26</a:t>
+              <a:t>4/8/26</a:t>
             </a:fld>
             <a:endParaRPr lang="en-US"/>
           </a:p>
@@ -3655,7 +3655,7 @@
           <a:p>
             <a:fld id="{19EC6F6F-998C-264C-A700-8215E11AE5BD}" type="datetimeFigureOut">
               <a:rPr lang="en-US" smtClean="0"/>
-              <a:t>4/6/26</a:t>
+              <a:t>4/8/26</a:t>
             </a:fld>
             <a:endParaRPr lang="en-US"/>
           </a:p>
@@ -3796,7 +3796,7 @@
           <a:p>
             <a:fld id="{19EC6F6F-998C-264C-A700-8215E11AE5BD}" type="datetimeFigureOut">
               <a:rPr lang="en-US" smtClean="0"/>
-              <a:t>4/6/26</a:t>
+              <a:t>4/8/26</a:t>
             </a:fld>
             <a:endParaRPr lang="en-US"/>
           </a:p>
@@ -3909,7 +3909,7 @@
           <a:p>
             <a:fld id="{19EC6F6F-998C-264C-A700-8215E11AE5BD}" type="datetimeFigureOut">
               <a:rPr lang="en-US" smtClean="0"/>
-              <a:t>4/6/26</a:t>
+              <a:t>4/8/26</a:t>
             </a:fld>
             <a:endParaRPr lang="en-US"/>
           </a:p>
@@ -4220,7 +4220,7 @@
           <a:p>
             <a:fld id="{19EC6F6F-998C-264C-A700-8215E11AE5BD}" type="datetimeFigureOut">
               <a:rPr lang="en-US" smtClean="0"/>
-              <a:t>4/6/26</a:t>
+              <a:t>4/8/26</a:t>
             </a:fld>
             <a:endParaRPr lang="en-US"/>
           </a:p>
@@ -4508,7 +4508,7 @@
           <a:p>
             <a:fld id="{19EC6F6F-998C-264C-A700-8215E11AE5BD}" type="datetimeFigureOut">
               <a:rPr lang="en-US" smtClean="0"/>
-              <a:t>4/6/26</a:t>
+              <a:t>4/8/26</a:t>
             </a:fld>
             <a:endParaRPr lang="en-US"/>
           </a:p>
@@ -4749,7 +4749,7 @@
           <a:p>
             <a:fld id="{19EC6F6F-998C-264C-A700-8215E11AE5BD}" type="datetimeFigureOut">
               <a:rPr lang="en-US" smtClean="0"/>
-              <a:t>4/6/26</a:t>
+              <a:t>4/8/26</a:t>
             </a:fld>
             <a:endParaRPr lang="en-US"/>
           </a:p>
@@ -9404,7 +9404,7 @@
           <a:p>
             <a:r>
               <a:rPr lang="en-US" dirty="0"/>
-              <a:t>Random forests</a:t>
+              <a:t>Random forests / bagging</a:t>
             </a:r>
           </a:p>
           <a:p>

--- a/slides/01_what_is_ml.pptx
+++ b/slides/01_what_is_ml.pptx
@@ -218,7 +218,7 @@
           <a:p>
             <a:fld id="{DA3B5F47-542D-2F4A-A589-8990110BEF85}" type="datetimeFigureOut">
               <a:rPr lang="en-US" smtClean="0"/>
-              <a:t>4/8/26</a:t>
+              <a:t>4/13/26</a:t>
             </a:fld>
             <a:endParaRPr lang="en-US"/>
           </a:p>
@@ -2099,7 +2099,7 @@
           <a:p>
             <a:fld id="{19EC6F6F-998C-264C-A700-8215E11AE5BD}" type="datetimeFigureOut">
               <a:rPr lang="en-US" smtClean="0"/>
-              <a:t>4/8/26</a:t>
+              <a:t>4/13/26</a:t>
             </a:fld>
             <a:endParaRPr lang="en-US"/>
           </a:p>
@@ -2297,7 +2297,7 @@
           <a:p>
             <a:fld id="{19EC6F6F-998C-264C-A700-8215E11AE5BD}" type="datetimeFigureOut">
               <a:rPr lang="en-US" smtClean="0"/>
-              <a:t>4/8/26</a:t>
+              <a:t>4/13/26</a:t>
             </a:fld>
             <a:endParaRPr lang="en-US"/>
           </a:p>
@@ -2505,7 +2505,7 @@
           <a:p>
             <a:fld id="{19EC6F6F-998C-264C-A700-8215E11AE5BD}" type="datetimeFigureOut">
               <a:rPr lang="en-US" smtClean="0"/>
-              <a:t>4/8/26</a:t>
+              <a:t>4/13/26</a:t>
             </a:fld>
             <a:endParaRPr lang="en-US"/>
           </a:p>
@@ -2703,7 +2703,7 @@
           <a:p>
             <a:fld id="{19EC6F6F-998C-264C-A700-8215E11AE5BD}" type="datetimeFigureOut">
               <a:rPr lang="en-US" smtClean="0"/>
-              <a:t>4/8/26</a:t>
+              <a:t>4/13/26</a:t>
             </a:fld>
             <a:endParaRPr lang="en-US"/>
           </a:p>
@@ -2978,7 +2978,7 @@
           <a:p>
             <a:fld id="{19EC6F6F-998C-264C-A700-8215E11AE5BD}" type="datetimeFigureOut">
               <a:rPr lang="en-US" smtClean="0"/>
-              <a:t>4/8/26</a:t>
+              <a:t>4/13/26</a:t>
             </a:fld>
             <a:endParaRPr lang="en-US"/>
           </a:p>
@@ -3243,7 +3243,7 @@
           <a:p>
             <a:fld id="{19EC6F6F-998C-264C-A700-8215E11AE5BD}" type="datetimeFigureOut">
               <a:rPr lang="en-US" smtClean="0"/>
-              <a:t>4/8/26</a:t>
+              <a:t>4/13/26</a:t>
             </a:fld>
             <a:endParaRPr lang="en-US"/>
           </a:p>
@@ -3655,7 +3655,7 @@
           <a:p>
             <a:fld id="{19EC6F6F-998C-264C-A700-8215E11AE5BD}" type="datetimeFigureOut">
               <a:rPr lang="en-US" smtClean="0"/>
-              <a:t>4/8/26</a:t>
+              <a:t>4/13/26</a:t>
             </a:fld>
             <a:endParaRPr lang="en-US"/>
           </a:p>
@@ -3796,7 +3796,7 @@
           <a:p>
             <a:fld id="{19EC6F6F-998C-264C-A700-8215E11AE5BD}" type="datetimeFigureOut">
               <a:rPr lang="en-US" smtClean="0"/>
-              <a:t>4/8/26</a:t>
+              <a:t>4/13/26</a:t>
             </a:fld>
             <a:endParaRPr lang="en-US"/>
           </a:p>
@@ -3909,7 +3909,7 @@
           <a:p>
             <a:fld id="{19EC6F6F-998C-264C-A700-8215E11AE5BD}" type="datetimeFigureOut">
               <a:rPr lang="en-US" smtClean="0"/>
-              <a:t>4/8/26</a:t>
+              <a:t>4/13/26</a:t>
             </a:fld>
             <a:endParaRPr lang="en-US"/>
           </a:p>
@@ -4220,7 +4220,7 @@
           <a:p>
             <a:fld id="{19EC6F6F-998C-264C-A700-8215E11AE5BD}" type="datetimeFigureOut">
               <a:rPr lang="en-US" smtClean="0"/>
-              <a:t>4/8/26</a:t>
+              <a:t>4/13/26</a:t>
             </a:fld>
             <a:endParaRPr lang="en-US"/>
           </a:p>
@@ -4508,7 +4508,7 @@
           <a:p>
             <a:fld id="{19EC6F6F-998C-264C-A700-8215E11AE5BD}" type="datetimeFigureOut">
               <a:rPr lang="en-US" smtClean="0"/>
-              <a:t>4/8/26</a:t>
+              <a:t>4/13/26</a:t>
             </a:fld>
             <a:endParaRPr lang="en-US"/>
           </a:p>
@@ -4749,7 +4749,7 @@
           <a:p>
             <a:fld id="{19EC6F6F-998C-264C-A700-8215E11AE5BD}" type="datetimeFigureOut">
               <a:rPr lang="en-US" smtClean="0"/>
-              <a:t>4/8/26</a:t>
+              <a:t>4/13/26</a:t>
             </a:fld>
             <a:endParaRPr lang="en-US"/>
           </a:p>
@@ -7928,7 +7928,7 @@
             </a:r>
             <a:r>
               <a:rPr lang="en-US" dirty="0"/>
-              <a:t>Forecast the future distribution and abundance of a plant</a:t>
+              <a:t>Forecast the future distribution or abundance of a plant</a:t>
             </a:r>
           </a:p>
         </p:txBody>
@@ -8110,8 +8110,8 @@
         </p:nvSpPr>
         <p:spPr>
           <a:xfrm>
-            <a:off x="8049263" y="6541879"/>
-            <a:ext cx="4142737" cy="307777"/>
+            <a:off x="7047387" y="6541879"/>
+            <a:ext cx="5144613" cy="307777"/>
           </a:xfrm>
           <a:prstGeom prst="rect">
             <a:avLst/>
@@ -8128,7 +8128,7 @@
               <a:rPr lang="en-US" sz="1400" dirty="0">
                 <a:hlinkClick r:id="rId3"/>
               </a:rPr>
-              <a:t>https://christophm.github.io/interpretable-ml-book</a:t>
+              <a:t>FREE BOOK: https://christophm.github.io/interpretable-ml-book</a:t>
             </a:r>
             <a:r>
               <a:rPr lang="en-US" sz="1400" dirty="0"/>

--- a/slides/01_what_is_ml.pptx
+++ b/slides/01_what_is_ml.pptx
@@ -218,7 +218,7 @@
           <a:p>
             <a:fld id="{DA3B5F47-542D-2F4A-A589-8990110BEF85}" type="datetimeFigureOut">
               <a:rPr lang="en-US" smtClean="0"/>
-              <a:t>4/13/26</a:t>
+              <a:t>4/15/26</a:t>
             </a:fld>
             <a:endParaRPr lang="en-US"/>
           </a:p>
@@ -531,7 +531,7 @@
           <a:p>
             <a:r>
               <a:rPr lang="en-US" dirty="0"/>
-              <a:t>Breaks, restroom locations, food/coffee locations, overall schedule, etc.</a:t>
+              <a:t>Restroom locations, food/coffee locations, water location, people to ask questions, outlets/cords.</a:t>
             </a:r>
           </a:p>
         </p:txBody>
@@ -2099,7 +2099,7 @@
           <a:p>
             <a:fld id="{19EC6F6F-998C-264C-A700-8215E11AE5BD}" type="datetimeFigureOut">
               <a:rPr lang="en-US" smtClean="0"/>
-              <a:t>4/13/26</a:t>
+              <a:t>4/15/26</a:t>
             </a:fld>
             <a:endParaRPr lang="en-US"/>
           </a:p>
@@ -2297,7 +2297,7 @@
           <a:p>
             <a:fld id="{19EC6F6F-998C-264C-A700-8215E11AE5BD}" type="datetimeFigureOut">
               <a:rPr lang="en-US" smtClean="0"/>
-              <a:t>4/13/26</a:t>
+              <a:t>4/15/26</a:t>
             </a:fld>
             <a:endParaRPr lang="en-US"/>
           </a:p>
@@ -2505,7 +2505,7 @@
           <a:p>
             <a:fld id="{19EC6F6F-998C-264C-A700-8215E11AE5BD}" type="datetimeFigureOut">
               <a:rPr lang="en-US" smtClean="0"/>
-              <a:t>4/13/26</a:t>
+              <a:t>4/15/26</a:t>
             </a:fld>
             <a:endParaRPr lang="en-US"/>
           </a:p>
@@ -2703,7 +2703,7 @@
           <a:p>
             <a:fld id="{19EC6F6F-998C-264C-A700-8215E11AE5BD}" type="datetimeFigureOut">
               <a:rPr lang="en-US" smtClean="0"/>
-              <a:t>4/13/26</a:t>
+              <a:t>4/15/26</a:t>
             </a:fld>
             <a:endParaRPr lang="en-US"/>
           </a:p>
@@ -2978,7 +2978,7 @@
           <a:p>
             <a:fld id="{19EC6F6F-998C-264C-A700-8215E11AE5BD}" type="datetimeFigureOut">
               <a:rPr lang="en-US" smtClean="0"/>
-              <a:t>4/13/26</a:t>
+              <a:t>4/15/26</a:t>
             </a:fld>
             <a:endParaRPr lang="en-US"/>
           </a:p>
@@ -3243,7 +3243,7 @@
           <a:p>
             <a:fld id="{19EC6F6F-998C-264C-A700-8215E11AE5BD}" type="datetimeFigureOut">
               <a:rPr lang="en-US" smtClean="0"/>
-              <a:t>4/13/26</a:t>
+              <a:t>4/15/26</a:t>
             </a:fld>
             <a:endParaRPr lang="en-US"/>
           </a:p>
@@ -3655,7 +3655,7 @@
           <a:p>
             <a:fld id="{19EC6F6F-998C-264C-A700-8215E11AE5BD}" type="datetimeFigureOut">
               <a:rPr lang="en-US" smtClean="0"/>
-              <a:t>4/13/26</a:t>
+              <a:t>4/15/26</a:t>
             </a:fld>
             <a:endParaRPr lang="en-US"/>
           </a:p>
@@ -3796,7 +3796,7 @@
           <a:p>
             <a:fld id="{19EC6F6F-998C-264C-A700-8215E11AE5BD}" type="datetimeFigureOut">
               <a:rPr lang="en-US" smtClean="0"/>
-              <a:t>4/13/26</a:t>
+              <a:t>4/15/26</a:t>
             </a:fld>
             <a:endParaRPr lang="en-US"/>
           </a:p>
@@ -3909,7 +3909,7 @@
           <a:p>
             <a:fld id="{19EC6F6F-998C-264C-A700-8215E11AE5BD}" type="datetimeFigureOut">
               <a:rPr lang="en-US" smtClean="0"/>
-              <a:t>4/13/26</a:t>
+              <a:t>4/15/26</a:t>
             </a:fld>
             <a:endParaRPr lang="en-US"/>
           </a:p>
@@ -4220,7 +4220,7 @@
           <a:p>
             <a:fld id="{19EC6F6F-998C-264C-A700-8215E11AE5BD}" type="datetimeFigureOut">
               <a:rPr lang="en-US" smtClean="0"/>
-              <a:t>4/13/26</a:t>
+              <a:t>4/15/26</a:t>
             </a:fld>
             <a:endParaRPr lang="en-US"/>
           </a:p>
@@ -4508,7 +4508,7 @@
           <a:p>
             <a:fld id="{19EC6F6F-998C-264C-A700-8215E11AE5BD}" type="datetimeFigureOut">
               <a:rPr lang="en-US" smtClean="0"/>
-              <a:t>4/13/26</a:t>
+              <a:t>4/15/26</a:t>
             </a:fld>
             <a:endParaRPr lang="en-US"/>
           </a:p>
@@ -4749,7 +4749,7 @@
           <a:p>
             <a:fld id="{19EC6F6F-998C-264C-A700-8215E11AE5BD}" type="datetimeFigureOut">
               <a:rPr lang="en-US" smtClean="0"/>
-              <a:t>4/13/26</a:t>
+              <a:t>4/15/26</a:t>
             </a:fld>
             <a:endParaRPr lang="en-US"/>
           </a:p>
@@ -5196,26 +5196,499 @@
       </p:sp>
       <p:sp>
         <p:nvSpPr>
-          <p:cNvPr id="3" name="Content Placeholder 2">
-            <a:extLst>
-              <a:ext uri="{FF2B5EF4-FFF2-40B4-BE49-F238E27FC236}">
-                <a16:creationId xmlns:a16="http://schemas.microsoft.com/office/drawing/2014/main" id="{907FD6AA-9804-3A4F-934C-265DF31BAADB}"/>
-              </a:ext>
-            </a:extLst>
-          </p:cNvPr>
-          <p:cNvSpPr>
-            <a:spLocks noGrp="1"/>
+          <p:cNvPr id="5" name="Rectangle 2">
+            <a:extLst>
+              <a:ext uri="{FF2B5EF4-FFF2-40B4-BE49-F238E27FC236}">
+                <a16:creationId xmlns:a16="http://schemas.microsoft.com/office/drawing/2014/main" id="{14D8FC64-1C09-D4A8-F07F-1CCA4249212D}"/>
+              </a:ext>
+            </a:extLst>
+          </p:cNvPr>
+          <p:cNvSpPr>
+            <a:spLocks noGrp="1" noChangeArrowheads="1"/>
           </p:cNvSpPr>
           <p:nvPr>
             <p:ph idx="1"/>
           </p:nvPr>
         </p:nvSpPr>
-        <p:spPr/>
-        <p:txBody>
-          <a:bodyPr/>
-          <a:lstStyle/>
-          <a:p>
-            <a:endParaRPr lang="en-US"/>
+        <p:spPr bwMode="auto">
+          <a:xfrm>
+            <a:off x="838200" y="1840178"/>
+            <a:ext cx="4389343" cy="3416320"/>
+          </a:xfrm>
+          <a:prstGeom prst="rect">
+            <a:avLst/>
+          </a:prstGeom>
+          <a:noFill/>
+          <a:ln>
+            <a:noFill/>
+          </a:ln>
+          <a:effectLst/>
+          <a:extLst>
+            <a:ext uri="{909E8E84-426E-40DD-AFC4-6F175D3DCCD1}">
+              <a14:hiddenFill xmlns:a14="http://schemas.microsoft.com/office/drawing/2010/main">
+                <a:solidFill>
+                  <a:schemeClr val="accent1"/>
+                </a:solidFill>
+              </a14:hiddenFill>
+            </a:ext>
+            <a:ext uri="{91240B29-F687-4F45-9708-019B960494DF}">
+              <a14:hiddenLine xmlns:a14="http://schemas.microsoft.com/office/drawing/2010/main" w="9525">
+                <a:solidFill>
+                  <a:schemeClr val="tx1"/>
+                </a:solidFill>
+                <a:miter lim="800000"/>
+                <a:headEnd/>
+                <a:tailEnd/>
+              </a14:hiddenLine>
+            </a:ext>
+            <a:ext uri="{AF507438-7753-43E0-B8FC-AC1667EBCBE1}">
+              <a14:hiddenEffects xmlns:a14="http://schemas.microsoft.com/office/drawing/2010/main">
+                <a:effectLst>
+                  <a:outerShdw dist="35921" dir="2700000" algn="ctr" rotWithShape="0">
+                    <a:schemeClr val="bg2"/>
+                  </a:outerShdw>
+                </a:effectLst>
+              </a14:hiddenEffects>
+            </a:ext>
+          </a:extLst>
+        </p:spPr>
+        <p:txBody>
+          <a:bodyPr vert="horz" wrap="none" lIns="91440" tIns="45720" rIns="91440" bIns="45720" numCol="1" anchor="ctr" anchorCtr="0" compatLnSpc="1">
+            <a:prstTxWarp prst="textNoShape">
+              <a:avLst/>
+            </a:prstTxWarp>
+            <a:spAutoFit/>
+          </a:bodyPr>
+          <a:lstStyle/>
+          <a:p>
+            <a:pPr marL="0" marR="0" lvl="0" indent="0" algn="l" defTabSz="914400" rtl="0" eaLnBrk="0" fontAlgn="base" latinLnBrk="0" hangingPunct="0">
+              <a:lnSpc>
+                <a:spcPct val="100000"/>
+              </a:lnSpc>
+              <a:spcBef>
+                <a:spcPct val="0"/>
+              </a:spcBef>
+              <a:spcAft>
+                <a:spcPct val="0"/>
+              </a:spcAft>
+              <a:buClrTx/>
+              <a:buSzTx/>
+              <a:buFontTx/>
+              <a:buNone/>
+              <a:tabLst/>
+            </a:pPr>
+            <a:r>
+              <a:rPr kumimoji="0" lang="en-US" altLang="en-US" sz="2400" b="0" i="0" u="none" strike="noStrike" cap="none" normalizeH="0" baseline="0" dirty="0">
+                <a:ln>
+                  <a:noFill/>
+                </a:ln>
+                <a:solidFill>
+                  <a:srgbClr val="1F1F1F"/>
+                </a:solidFill>
+                <a:effectLst/>
+                <a:latin typeface="Google Sans"/>
+              </a:rPr>
+              <a:t>8:45-9 Check-in </a:t>
+            </a:r>
+          </a:p>
+          <a:p>
+            <a:pPr marL="0" marR="0" lvl="0" indent="0" algn="l" defTabSz="914400" rtl="0" eaLnBrk="0" fontAlgn="base" latinLnBrk="0" hangingPunct="0">
+              <a:lnSpc>
+                <a:spcPct val="100000"/>
+              </a:lnSpc>
+              <a:spcBef>
+                <a:spcPct val="0"/>
+              </a:spcBef>
+              <a:spcAft>
+                <a:spcPct val="0"/>
+              </a:spcAft>
+              <a:buClrTx/>
+              <a:buSzTx/>
+              <a:buFontTx/>
+              <a:buNone/>
+              <a:tabLst/>
+            </a:pPr>
+            <a:r>
+              <a:rPr kumimoji="0" lang="en-US" altLang="en-US" sz="2400" b="0" i="0" u="none" strike="noStrike" cap="none" normalizeH="0" baseline="0" dirty="0">
+                <a:ln>
+                  <a:noFill/>
+                </a:ln>
+                <a:solidFill>
+                  <a:srgbClr val="1F1F1F"/>
+                </a:solidFill>
+                <a:effectLst/>
+                <a:latin typeface="Google Sans"/>
+              </a:rPr>
+              <a:t>9-10:00 Session 1 </a:t>
+            </a:r>
+          </a:p>
+          <a:p>
+            <a:pPr marL="0" marR="0" lvl="0" indent="0" algn="l" defTabSz="914400" rtl="0" eaLnBrk="0" fontAlgn="base" latinLnBrk="0" hangingPunct="0">
+              <a:lnSpc>
+                <a:spcPct val="100000"/>
+              </a:lnSpc>
+              <a:spcBef>
+                <a:spcPct val="0"/>
+              </a:spcBef>
+              <a:spcAft>
+                <a:spcPct val="0"/>
+              </a:spcAft>
+              <a:buClrTx/>
+              <a:buSzTx/>
+              <a:buFontTx/>
+              <a:buNone/>
+              <a:tabLst/>
+            </a:pPr>
+            <a:r>
+              <a:rPr kumimoji="0" lang="en-US" altLang="en-US" sz="2400" b="0" i="0" u="none" strike="noStrike" cap="none" normalizeH="0" baseline="0" dirty="0">
+                <a:ln>
+                  <a:noFill/>
+                </a:ln>
+                <a:solidFill>
+                  <a:srgbClr val="1F1F1F"/>
+                </a:solidFill>
+                <a:effectLst/>
+                <a:latin typeface="Google Sans"/>
+              </a:rPr>
+              <a:t>10:00-10:15 Break </a:t>
+            </a:r>
+          </a:p>
+          <a:p>
+            <a:pPr marL="0" marR="0" lvl="0" indent="0" algn="l" defTabSz="914400" rtl="0" eaLnBrk="0" fontAlgn="base" latinLnBrk="0" hangingPunct="0">
+              <a:lnSpc>
+                <a:spcPct val="100000"/>
+              </a:lnSpc>
+              <a:spcBef>
+                <a:spcPct val="0"/>
+              </a:spcBef>
+              <a:spcAft>
+                <a:spcPct val="0"/>
+              </a:spcAft>
+              <a:buClrTx/>
+              <a:buSzTx/>
+              <a:buFontTx/>
+              <a:buNone/>
+              <a:tabLst/>
+            </a:pPr>
+            <a:r>
+              <a:rPr kumimoji="0" lang="en-US" altLang="en-US" sz="2400" b="0" i="0" u="none" strike="noStrike" cap="none" normalizeH="0" baseline="0" dirty="0">
+                <a:ln>
+                  <a:noFill/>
+                </a:ln>
+                <a:solidFill>
+                  <a:srgbClr val="1F1F1F"/>
+                </a:solidFill>
+                <a:effectLst/>
+                <a:latin typeface="Google Sans"/>
+              </a:rPr>
+              <a:t>10:15-11:30 Session 1 / Session 2 </a:t>
+            </a:r>
+          </a:p>
+          <a:p>
+            <a:pPr marL="0" marR="0" lvl="0" indent="0" algn="l" defTabSz="914400" rtl="0" eaLnBrk="0" fontAlgn="base" latinLnBrk="0" hangingPunct="0">
+              <a:lnSpc>
+                <a:spcPct val="100000"/>
+              </a:lnSpc>
+              <a:spcBef>
+                <a:spcPct val="0"/>
+              </a:spcBef>
+              <a:spcAft>
+                <a:spcPct val="0"/>
+              </a:spcAft>
+              <a:buClrTx/>
+              <a:buSzTx/>
+              <a:buFontTx/>
+              <a:buNone/>
+              <a:tabLst/>
+            </a:pPr>
+            <a:r>
+              <a:rPr kumimoji="0" lang="en-US" altLang="en-US" sz="2400" b="0" i="0" u="none" strike="noStrike" cap="none" normalizeH="0" baseline="0" dirty="0">
+                <a:ln>
+                  <a:noFill/>
+                </a:ln>
+                <a:solidFill>
+                  <a:srgbClr val="1F1F1F"/>
+                </a:solidFill>
+                <a:effectLst/>
+                <a:latin typeface="Google Sans"/>
+              </a:rPr>
+              <a:t>11:30-12:30 Lunch </a:t>
+            </a:r>
+          </a:p>
+          <a:p>
+            <a:pPr marL="0" marR="0" lvl="0" indent="0" algn="l" defTabSz="914400" rtl="0" eaLnBrk="0" fontAlgn="base" latinLnBrk="0" hangingPunct="0">
+              <a:lnSpc>
+                <a:spcPct val="100000"/>
+              </a:lnSpc>
+              <a:spcBef>
+                <a:spcPct val="0"/>
+              </a:spcBef>
+              <a:spcAft>
+                <a:spcPct val="0"/>
+              </a:spcAft>
+              <a:buClrTx/>
+              <a:buSzTx/>
+              <a:buFontTx/>
+              <a:buNone/>
+              <a:tabLst/>
+            </a:pPr>
+            <a:r>
+              <a:rPr kumimoji="0" lang="en-US" altLang="en-US" sz="2400" b="0" i="0" u="none" strike="noStrike" cap="none" normalizeH="0" baseline="0" dirty="0">
+                <a:ln>
+                  <a:noFill/>
+                </a:ln>
+                <a:solidFill>
+                  <a:srgbClr val="1F1F1F"/>
+                </a:solidFill>
+                <a:effectLst/>
+                <a:latin typeface="Google Sans"/>
+              </a:rPr>
+              <a:t>12:30-2:00 Session 2 </a:t>
+            </a:r>
+          </a:p>
+          <a:p>
+            <a:pPr marL="0" marR="0" lvl="0" indent="0" algn="l" defTabSz="914400" rtl="0" eaLnBrk="0" fontAlgn="base" latinLnBrk="0" hangingPunct="0">
+              <a:lnSpc>
+                <a:spcPct val="100000"/>
+              </a:lnSpc>
+              <a:spcBef>
+                <a:spcPct val="0"/>
+              </a:spcBef>
+              <a:spcAft>
+                <a:spcPct val="0"/>
+              </a:spcAft>
+              <a:buClrTx/>
+              <a:buSzTx/>
+              <a:buFontTx/>
+              <a:buNone/>
+              <a:tabLst/>
+            </a:pPr>
+            <a:r>
+              <a:rPr kumimoji="0" lang="en-US" altLang="en-US" sz="2400" b="0" i="0" u="none" strike="noStrike" cap="none" normalizeH="0" baseline="0" dirty="0">
+                <a:ln>
+                  <a:noFill/>
+                </a:ln>
+                <a:solidFill>
+                  <a:srgbClr val="1F1F1F"/>
+                </a:solidFill>
+                <a:effectLst/>
+                <a:latin typeface="Google Sans"/>
+              </a:rPr>
+              <a:t>2:00-2:15 Break </a:t>
+            </a:r>
+          </a:p>
+          <a:p>
+            <a:pPr marL="0" marR="0" lvl="0" indent="0" algn="l" defTabSz="914400" rtl="0" eaLnBrk="0" fontAlgn="base" latinLnBrk="0" hangingPunct="0">
+              <a:lnSpc>
+                <a:spcPct val="100000"/>
+              </a:lnSpc>
+              <a:spcBef>
+                <a:spcPct val="0"/>
+              </a:spcBef>
+              <a:spcAft>
+                <a:spcPct val="0"/>
+              </a:spcAft>
+              <a:buClrTx/>
+              <a:buSzTx/>
+              <a:buFontTx/>
+              <a:buNone/>
+              <a:tabLst/>
+            </a:pPr>
+            <a:r>
+              <a:rPr kumimoji="0" lang="en-US" altLang="en-US" sz="2400" b="0" i="0" u="none" strike="noStrike" cap="none" normalizeH="0" baseline="0" dirty="0">
+                <a:ln>
+                  <a:noFill/>
+                </a:ln>
+                <a:solidFill>
+                  <a:srgbClr val="1F1F1F"/>
+                </a:solidFill>
+                <a:effectLst/>
+                <a:latin typeface="Google Sans"/>
+              </a:rPr>
+              <a:t>2:15-4:00 Session 3 </a:t>
+            </a:r>
+          </a:p>
+          <a:p>
+            <a:pPr marL="0" marR="0" lvl="0" indent="0" algn="l" defTabSz="914400" rtl="0" eaLnBrk="0" fontAlgn="base" latinLnBrk="0" hangingPunct="0">
+              <a:lnSpc>
+                <a:spcPct val="100000"/>
+              </a:lnSpc>
+              <a:spcBef>
+                <a:spcPct val="0"/>
+              </a:spcBef>
+              <a:spcAft>
+                <a:spcPct val="0"/>
+              </a:spcAft>
+              <a:buClrTx/>
+              <a:buSzTx/>
+              <a:buFontTx/>
+              <a:buNone/>
+              <a:tabLst/>
+            </a:pPr>
+            <a:r>
+              <a:rPr kumimoji="0" lang="en-US" altLang="en-US" sz="2400" b="0" i="0" u="none" strike="noStrike" cap="none" normalizeH="0" baseline="0" dirty="0">
+                <a:ln>
+                  <a:noFill/>
+                </a:ln>
+                <a:solidFill>
+                  <a:srgbClr val="1F1F1F"/>
+                </a:solidFill>
+                <a:effectLst/>
+                <a:latin typeface="Google Sans"/>
+              </a:rPr>
+              <a:t>4:00ish Wrap up </a:t>
+            </a:r>
+          </a:p>
+        </p:txBody>
+      </p:sp>
+      <p:sp>
+        <p:nvSpPr>
+          <p:cNvPr id="6" name="TextBox 5">
+            <a:extLst>
+              <a:ext uri="{FF2B5EF4-FFF2-40B4-BE49-F238E27FC236}">
+                <a16:creationId xmlns:a16="http://schemas.microsoft.com/office/drawing/2014/main" id="{7852A3A4-B37A-F280-7B2A-7712ADD28C15}"/>
+              </a:ext>
+            </a:extLst>
+          </p:cNvPr>
+          <p:cNvSpPr txBox="1"/>
+          <p:nvPr/>
+        </p:nvSpPr>
+        <p:spPr>
+          <a:xfrm>
+            <a:off x="6749507" y="1690688"/>
+            <a:ext cx="4604293" cy="4062651"/>
+          </a:xfrm>
+          <a:prstGeom prst="rect">
+            <a:avLst/>
+          </a:prstGeom>
+          <a:noFill/>
+        </p:spPr>
+        <p:txBody>
+          <a:bodyPr wrap="square" rtlCol="0">
+            <a:spAutoFit/>
+          </a:bodyPr>
+          <a:lstStyle/>
+          <a:p>
+            <a:pPr lvl="0" eaLnBrk="0" fontAlgn="base" hangingPunct="0">
+              <a:spcBef>
+                <a:spcPct val="0"/>
+              </a:spcBef>
+              <a:spcAft>
+                <a:spcPct val="0"/>
+              </a:spcAft>
+            </a:pPr>
+            <a:r>
+              <a:rPr lang="en-US" altLang="en-US" sz="2000" b="1" dirty="0">
+                <a:solidFill>
+                  <a:srgbClr val="1F1F1F"/>
+                </a:solidFill>
+                <a:latin typeface="Google Sans"/>
+              </a:rPr>
+              <a:t>Session 1</a:t>
+            </a:r>
+            <a:r>
+              <a:rPr lang="en-US" altLang="en-US" sz="2000" dirty="0">
+                <a:solidFill>
+                  <a:srgbClr val="1F1F1F"/>
+                </a:solidFill>
+                <a:latin typeface="Google Sans"/>
+              </a:rPr>
+              <a:t>: What is machine learning, classification and regression trees, and cross-validation methods  </a:t>
+            </a:r>
+          </a:p>
+          <a:p>
+            <a:pPr lvl="0" eaLnBrk="0" fontAlgn="base" hangingPunct="0">
+              <a:spcBef>
+                <a:spcPct val="0"/>
+              </a:spcBef>
+              <a:spcAft>
+                <a:spcPct val="0"/>
+              </a:spcAft>
+            </a:pPr>
+            <a:endParaRPr lang="en-US" altLang="en-US" sz="2000" dirty="0">
+              <a:solidFill>
+                <a:srgbClr val="1F1F1F"/>
+              </a:solidFill>
+              <a:latin typeface="Google Sans"/>
+            </a:endParaRPr>
+          </a:p>
+          <a:p>
+            <a:pPr lvl="0" eaLnBrk="0" fontAlgn="base" hangingPunct="0">
+              <a:spcBef>
+                <a:spcPct val="0"/>
+              </a:spcBef>
+              <a:spcAft>
+                <a:spcPct val="0"/>
+              </a:spcAft>
+            </a:pPr>
+            <a:r>
+              <a:rPr lang="en-US" altLang="en-US" sz="2000" b="1" dirty="0">
+                <a:solidFill>
+                  <a:srgbClr val="1F1F1F"/>
+                </a:solidFill>
+                <a:latin typeface="Google Sans"/>
+              </a:rPr>
+              <a:t>Session 2</a:t>
+            </a:r>
+            <a:r>
+              <a:rPr lang="en-US" altLang="en-US" sz="2000" dirty="0">
+                <a:solidFill>
+                  <a:srgbClr val="1F1F1F"/>
+                </a:solidFill>
+                <a:latin typeface="Google Sans"/>
+              </a:rPr>
+              <a:t>: Bagging, random forests, variable importance and partial dependence plots, and correlated variables </a:t>
+            </a:r>
+          </a:p>
+          <a:p>
+            <a:pPr lvl="0" eaLnBrk="0" fontAlgn="base" hangingPunct="0">
+              <a:spcBef>
+                <a:spcPct val="0"/>
+              </a:spcBef>
+              <a:spcAft>
+                <a:spcPct val="0"/>
+              </a:spcAft>
+            </a:pPr>
+            <a:endParaRPr lang="en-US" altLang="en-US" sz="2000" dirty="0">
+              <a:solidFill>
+                <a:srgbClr val="1F1F1F"/>
+              </a:solidFill>
+              <a:latin typeface="Google Sans"/>
+            </a:endParaRPr>
+          </a:p>
+          <a:p>
+            <a:pPr lvl="0" eaLnBrk="0" fontAlgn="base" hangingPunct="0">
+              <a:spcBef>
+                <a:spcPct val="0"/>
+              </a:spcBef>
+              <a:spcAft>
+                <a:spcPct val="0"/>
+              </a:spcAft>
+            </a:pPr>
+            <a:r>
+              <a:rPr lang="en-US" altLang="en-US" sz="2000" b="1" dirty="0">
+                <a:solidFill>
+                  <a:srgbClr val="1F1F1F"/>
+                </a:solidFill>
+                <a:latin typeface="Google Sans"/>
+              </a:rPr>
+              <a:t>Session 3</a:t>
+            </a:r>
+            <a:r>
+              <a:rPr lang="en-US" altLang="en-US" sz="2000" dirty="0">
+                <a:solidFill>
+                  <a:srgbClr val="1F1F1F"/>
+                </a:solidFill>
+                <a:latin typeface="Google Sans"/>
+              </a:rPr>
+              <a:t>: Boosting, boosted regression trees, model interpretation with SHAP values</a:t>
+            </a:r>
+            <a:endParaRPr lang="en-US" altLang="en-US" sz="4400" dirty="0">
+              <a:latin typeface="Arial" panose="020B0604020202020204" pitchFamily="34" charset="0"/>
+            </a:endParaRPr>
+          </a:p>
+          <a:p>
+            <a:endParaRPr lang="en-US" sz="2000" dirty="0"/>
           </a:p>
         </p:txBody>
       </p:sp>

--- a/slides/01_what_is_ml.pptx
+++ b/slides/01_what_is_ml.pptx
@@ -531,7 +531,15 @@
           <a:p>
             <a:r>
               <a:rPr lang="en-US" dirty="0"/>
-              <a:t>Restroom locations, food/coffee locations, water location, people to ask questions, outlets/cords.</a:t>
+              <a:t>Intros for </a:t>
+            </a:r>
+            <a:r>
+              <a:rPr lang="en-US"/>
+              <a:t>facilitators, restroom </a:t>
+            </a:r>
+            <a:r>
+              <a:rPr lang="en-US" dirty="0"/>
+              <a:t>locations, food/coffee locations, water location, people to ask questions, outlets/cords.</a:t>
             </a:r>
           </a:p>
         </p:txBody>
@@ -5692,6 +5700,53 @@
           </a:p>
         </p:txBody>
       </p:sp>
+      <p:pic>
+        <p:nvPicPr>
+          <p:cNvPr id="1026" name="Picture 2">
+            <a:extLst>
+              <a:ext uri="{FF2B5EF4-FFF2-40B4-BE49-F238E27FC236}">
+                <a16:creationId xmlns:a16="http://schemas.microsoft.com/office/drawing/2014/main" id="{B6A382C2-F87D-0EF6-3E73-2AA660B16486}"/>
+              </a:ext>
+            </a:extLst>
+          </p:cNvPr>
+          <p:cNvPicPr>
+            <a:picLocks noChangeAspect="1" noChangeArrowheads="1"/>
+          </p:cNvPicPr>
+          <p:nvPr/>
+        </p:nvPicPr>
+        <p:blipFill>
+          <a:blip r:embed="rId3">
+            <a:extLst>
+              <a:ext uri="{28A0092B-C50C-407E-A947-70E740481C1C}">
+                <a14:useLocalDpi xmlns:a14="http://schemas.microsoft.com/office/drawing/2010/main" val="0"/>
+              </a:ext>
+            </a:extLst>
+          </a:blip>
+          <a:srcRect/>
+          <a:stretch>
+            <a:fillRect/>
+          </a:stretch>
+        </p:blipFill>
+        <p:spPr bwMode="auto">
+          <a:xfrm>
+            <a:off x="10103358" y="5256498"/>
+            <a:ext cx="2070984" cy="1465703"/>
+          </a:xfrm>
+          <a:prstGeom prst="rect">
+            <a:avLst/>
+          </a:prstGeom>
+          <a:noFill/>
+          <a:extLst>
+            <a:ext uri="{909E8E84-426E-40DD-AFC4-6F175D3DCCD1}">
+              <a14:hiddenFill xmlns:a14="http://schemas.microsoft.com/office/drawing/2010/main">
+                <a:solidFill>
+                  <a:srgbClr val="FFFFFF"/>
+                </a:solidFill>
+              </a14:hiddenFill>
+            </a:ext>
+          </a:extLst>
+        </p:spPr>
+      </p:pic>
     </p:spTree>
     <p:extLst>
       <p:ext uri="{BB962C8B-B14F-4D97-AF65-F5344CB8AC3E}">

--- a/slides/01_what_is_ml.pptx
+++ b/slides/01_what_is_ml.pptx
@@ -5,31 +5,32 @@
     <p:sldMasterId id="2147483648" r:id="rId1"/>
   </p:sldMasterIdLst>
   <p:notesMasterIdLst>
-    <p:notesMasterId r:id="rId24"/>
+    <p:notesMasterId r:id="rId25"/>
   </p:notesMasterIdLst>
   <p:sldIdLst>
     <p:sldId id="262" r:id="rId2"/>
-    <p:sldId id="256" r:id="rId3"/>
-    <p:sldId id="257" r:id="rId4"/>
-    <p:sldId id="266" r:id="rId5"/>
-    <p:sldId id="271" r:id="rId6"/>
-    <p:sldId id="267" r:id="rId7"/>
-    <p:sldId id="272" r:id="rId8"/>
-    <p:sldId id="273" r:id="rId9"/>
-    <p:sldId id="268" r:id="rId10"/>
-    <p:sldId id="269" r:id="rId11"/>
-    <p:sldId id="274" r:id="rId12"/>
-    <p:sldId id="275" r:id="rId13"/>
-    <p:sldId id="278" r:id="rId14"/>
-    <p:sldId id="277" r:id="rId15"/>
-    <p:sldId id="279" r:id="rId16"/>
-    <p:sldId id="270" r:id="rId17"/>
-    <p:sldId id="259" r:id="rId18"/>
-    <p:sldId id="281" r:id="rId19"/>
-    <p:sldId id="282" r:id="rId20"/>
-    <p:sldId id="280" r:id="rId21"/>
-    <p:sldId id="261" r:id="rId22"/>
-    <p:sldId id="263" r:id="rId23"/>
+    <p:sldId id="283" r:id="rId3"/>
+    <p:sldId id="256" r:id="rId4"/>
+    <p:sldId id="257" r:id="rId5"/>
+    <p:sldId id="266" r:id="rId6"/>
+    <p:sldId id="271" r:id="rId7"/>
+    <p:sldId id="267" r:id="rId8"/>
+    <p:sldId id="272" r:id="rId9"/>
+    <p:sldId id="273" r:id="rId10"/>
+    <p:sldId id="268" r:id="rId11"/>
+    <p:sldId id="269" r:id="rId12"/>
+    <p:sldId id="274" r:id="rId13"/>
+    <p:sldId id="275" r:id="rId14"/>
+    <p:sldId id="278" r:id="rId15"/>
+    <p:sldId id="277" r:id="rId16"/>
+    <p:sldId id="279" r:id="rId17"/>
+    <p:sldId id="270" r:id="rId18"/>
+    <p:sldId id="259" r:id="rId19"/>
+    <p:sldId id="281" r:id="rId20"/>
+    <p:sldId id="282" r:id="rId21"/>
+    <p:sldId id="280" r:id="rId22"/>
+    <p:sldId id="261" r:id="rId23"/>
+    <p:sldId id="263" r:id="rId24"/>
   </p:sldIdLst>
   <p:sldSz cx="12192000" cy="6858000"/>
   <p:notesSz cx="6858000" cy="9144000"/>
@@ -669,7 +670,7 @@
           <a:p>
             <a:fld id="{51D417A5-630B-DE42-860C-96747A2C59DE}" type="slidenum">
               <a:rPr lang="en-US" smtClean="0"/>
-              <a:t>12</a:t>
+              <a:t>13</a:t>
             </a:fld>
             <a:endParaRPr lang="en-US"/>
           </a:p>
@@ -777,7 +778,7 @@
           <a:p>
             <a:fld id="{51D417A5-630B-DE42-860C-96747A2C59DE}" type="slidenum">
               <a:rPr lang="en-US" smtClean="0"/>
-              <a:t>13</a:t>
+              <a:t>14</a:t>
             </a:fld>
             <a:endParaRPr lang="en-US"/>
           </a:p>
@@ -885,7 +886,7 @@
           <a:p>
             <a:fld id="{51D417A5-630B-DE42-860C-96747A2C59DE}" type="slidenum">
               <a:rPr lang="en-US" smtClean="0"/>
-              <a:t>14</a:t>
+              <a:t>15</a:t>
             </a:fld>
             <a:endParaRPr lang="en-US"/>
           </a:p>
@@ -993,7 +994,7 @@
           <a:p>
             <a:fld id="{51D417A5-630B-DE42-860C-96747A2C59DE}" type="slidenum">
               <a:rPr lang="en-US" smtClean="0"/>
-              <a:t>15</a:t>
+              <a:t>16</a:t>
             </a:fld>
             <a:endParaRPr lang="en-US"/>
           </a:p>
@@ -1101,7 +1102,7 @@
           <a:p>
             <a:fld id="{51D417A5-630B-DE42-860C-96747A2C59DE}" type="slidenum">
               <a:rPr lang="en-US" smtClean="0"/>
-              <a:t>16</a:t>
+              <a:t>17</a:t>
             </a:fld>
             <a:endParaRPr lang="en-US"/>
           </a:p>
@@ -1185,7 +1186,7 @@
           <a:p>
             <a:fld id="{51D417A5-630B-DE42-860C-96747A2C59DE}" type="slidenum">
               <a:rPr lang="en-US" smtClean="0"/>
-              <a:t>3</a:t>
+              <a:t>4</a:t>
             </a:fld>
             <a:endParaRPr lang="en-US"/>
           </a:p>
@@ -1293,7 +1294,7 @@
           <a:p>
             <a:fld id="{51D417A5-630B-DE42-860C-96747A2C59DE}" type="slidenum">
               <a:rPr lang="en-US" smtClean="0"/>
-              <a:t>5</a:t>
+              <a:t>6</a:t>
             </a:fld>
             <a:endParaRPr lang="en-US"/>
           </a:p>
@@ -1401,7 +1402,7 @@
           <a:p>
             <a:fld id="{51D417A5-630B-DE42-860C-96747A2C59DE}" type="slidenum">
               <a:rPr lang="en-US" smtClean="0"/>
-              <a:t>6</a:t>
+              <a:t>7</a:t>
             </a:fld>
             <a:endParaRPr lang="en-US"/>
           </a:p>
@@ -1509,7 +1510,7 @@
           <a:p>
             <a:fld id="{51D417A5-630B-DE42-860C-96747A2C59DE}" type="slidenum">
               <a:rPr lang="en-US" smtClean="0"/>
-              <a:t>7</a:t>
+              <a:t>8</a:t>
             </a:fld>
             <a:endParaRPr lang="en-US"/>
           </a:p>
@@ -1617,7 +1618,7 @@
           <a:p>
             <a:fld id="{51D417A5-630B-DE42-860C-96747A2C59DE}" type="slidenum">
               <a:rPr lang="en-US" smtClean="0"/>
-              <a:t>8</a:t>
+              <a:t>9</a:t>
             </a:fld>
             <a:endParaRPr lang="en-US"/>
           </a:p>
@@ -1725,7 +1726,7 @@
           <a:p>
             <a:fld id="{51D417A5-630B-DE42-860C-96747A2C59DE}" type="slidenum">
               <a:rPr lang="en-US" smtClean="0"/>
-              <a:t>9</a:t>
+              <a:t>10</a:t>
             </a:fld>
             <a:endParaRPr lang="en-US"/>
           </a:p>
@@ -1833,7 +1834,7 @@
           <a:p>
             <a:fld id="{51D417A5-630B-DE42-860C-96747A2C59DE}" type="slidenum">
               <a:rPr lang="en-US" smtClean="0"/>
-              <a:t>10</a:t>
+              <a:t>11</a:t>
             </a:fld>
             <a:endParaRPr lang="en-US"/>
           </a:p>
@@ -1941,7 +1942,7 @@
           <a:p>
             <a:fld id="{51D417A5-630B-DE42-860C-96747A2C59DE}" type="slidenum">
               <a:rPr lang="en-US" smtClean="0"/>
-              <a:t>11</a:t>
+              <a:t>12</a:t>
             </a:fld>
             <a:endParaRPr lang="en-US"/>
           </a:p>
@@ -5197,7 +5198,7 @@
           <a:p>
             <a:r>
               <a:rPr lang="en-US" dirty="0"/>
-              <a:t>Overview of the day</a:t>
+              <a:t>Welcome! Overview of the day</a:t>
             </a:r>
           </a:p>
         </p:txBody>
@@ -5768,6 +5769,139 @@
         <p:cNvPr id="1" name="">
           <a:extLst>
             <a:ext uri="{FF2B5EF4-FFF2-40B4-BE49-F238E27FC236}">
+              <a16:creationId xmlns:a16="http://schemas.microsoft.com/office/drawing/2014/main" id="{F9812241-244B-055D-95DA-987DF4EAA2D5}"/>
+            </a:ext>
+          </a:extLst>
+        </p:cNvPr>
+        <p:cNvGrpSpPr/>
+        <p:nvPr/>
+      </p:nvGrpSpPr>
+      <p:grpSpPr>
+        <a:xfrm>
+          <a:off x="0" y="0"/>
+          <a:ext cx="0" cy="0"/>
+          <a:chOff x="0" y="0"/>
+          <a:chExt cx="0" cy="0"/>
+        </a:xfrm>
+      </p:grpSpPr>
+      <p:sp>
+        <p:nvSpPr>
+          <p:cNvPr id="2" name="Title 1">
+            <a:extLst>
+              <a:ext uri="{FF2B5EF4-FFF2-40B4-BE49-F238E27FC236}">
+                <a16:creationId xmlns:a16="http://schemas.microsoft.com/office/drawing/2014/main" id="{75FE6AA7-F871-9867-601A-1AAE31E9774B}"/>
+              </a:ext>
+            </a:extLst>
+          </p:cNvPr>
+          <p:cNvSpPr>
+            <a:spLocks noGrp="1"/>
+          </p:cNvSpPr>
+          <p:nvPr>
+            <p:ph type="title"/>
+          </p:nvPr>
+        </p:nvSpPr>
+        <p:spPr/>
+        <p:txBody>
+          <a:bodyPr/>
+          <a:lstStyle/>
+          <a:p>
+            <a:r>
+              <a:rPr lang="en-US" dirty="0"/>
+              <a:t>Modeling mindsets:</a:t>
+            </a:r>
+          </a:p>
+        </p:txBody>
+      </p:sp>
+      <p:sp>
+        <p:nvSpPr>
+          <p:cNvPr id="5" name="TextBox 4">
+            <a:extLst>
+              <a:ext uri="{FF2B5EF4-FFF2-40B4-BE49-F238E27FC236}">
+                <a16:creationId xmlns:a16="http://schemas.microsoft.com/office/drawing/2014/main" id="{0B1164BB-72D5-4A22-DFB6-60343F96D0CA}"/>
+              </a:ext>
+            </a:extLst>
+          </p:cNvPr>
+          <p:cNvSpPr txBox="1"/>
+          <p:nvPr/>
+        </p:nvSpPr>
+        <p:spPr>
+          <a:xfrm>
+            <a:off x="4537276" y="6488668"/>
+            <a:ext cx="8191983" cy="369332"/>
+          </a:xfrm>
+          <a:prstGeom prst="rect">
+            <a:avLst/>
+          </a:prstGeom>
+          <a:noFill/>
+        </p:spPr>
+        <p:txBody>
+          <a:bodyPr wrap="square">
+            <a:spAutoFit/>
+          </a:bodyPr>
+          <a:lstStyle/>
+          <a:p>
+            <a:r>
+              <a:rPr lang="en-US" dirty="0">
+                <a:hlinkClick r:id="rId3"/>
+              </a:rPr>
+              <a:t>Molnar, C. 2023. Modeling mindsets: the many cultures of learning from data.</a:t>
+            </a:r>
+            <a:endParaRPr lang="en-US" dirty="0"/>
+          </a:p>
+        </p:txBody>
+      </p:sp>
+      <p:pic>
+        <p:nvPicPr>
+          <p:cNvPr id="4" name="Picture 3">
+            <a:extLst>
+              <a:ext uri="{FF2B5EF4-FFF2-40B4-BE49-F238E27FC236}">
+                <a16:creationId xmlns:a16="http://schemas.microsoft.com/office/drawing/2014/main" id="{6F15411E-D06D-FD4C-7FF2-987BD7935E9A}"/>
+              </a:ext>
+            </a:extLst>
+          </p:cNvPr>
+          <p:cNvPicPr>
+            <a:picLocks noChangeAspect="1"/>
+          </p:cNvPicPr>
+          <p:nvPr/>
+        </p:nvPicPr>
+        <p:blipFill>
+          <a:blip r:embed="rId4"/>
+          <a:srcRect l="-14" r="105" b="11454"/>
+          <a:stretch>
+            <a:fillRect/>
+          </a:stretch>
+        </p:blipFill>
+        <p:spPr>
+          <a:xfrm>
+            <a:off x="2208628" y="1806292"/>
+            <a:ext cx="7765366" cy="3830580"/>
+          </a:xfrm>
+          <a:prstGeom prst="rect">
+            <a:avLst/>
+          </a:prstGeom>
+        </p:spPr>
+      </p:pic>
+    </p:spTree>
+    <p:extLst>
+      <p:ext uri="{BB962C8B-B14F-4D97-AF65-F5344CB8AC3E}">
+        <p14:creationId xmlns:p14="http://schemas.microsoft.com/office/powerpoint/2010/main" val="3401170566"/>
+      </p:ext>
+    </p:extLst>
+  </p:cSld>
+  <p:clrMapOvr>
+    <a:masterClrMapping/>
+  </p:clrMapOvr>
+</p:sld>
+</file>
+
+<file path=ppt/slides/slide11.xml><?xml version="1.0" encoding="utf-8"?>
+<p:sld xmlns:a="http://schemas.openxmlformats.org/drawingml/2006/main" xmlns:r="http://schemas.openxmlformats.org/officeDocument/2006/relationships" xmlns:p="http://schemas.openxmlformats.org/presentationml/2006/main">
+  <p:cSld>
+    <p:spTree>
+      <p:nvGrpSpPr>
+        <p:cNvPr id="1" name="">
+          <a:extLst>
+            <a:ext uri="{FF2B5EF4-FFF2-40B4-BE49-F238E27FC236}">
               <a16:creationId xmlns:a16="http://schemas.microsoft.com/office/drawing/2014/main" id="{36C20D7A-E356-E09C-8D7C-C12B41C1C3E4}"/>
             </a:ext>
           </a:extLst>
@@ -5893,7 +6027,7 @@
 </p:sld>
 </file>
 
-<file path=ppt/slides/slide11.xml><?xml version="1.0" encoding="utf-8"?>
+<file path=ppt/slides/slide12.xml><?xml version="1.0" encoding="utf-8"?>
 <p:sld xmlns:a="http://schemas.openxmlformats.org/drawingml/2006/main" xmlns:r="http://schemas.openxmlformats.org/officeDocument/2006/relationships" xmlns:p="http://schemas.openxmlformats.org/presentationml/2006/main">
   <p:cSld>
     <p:spTree>
@@ -6065,7 +6199,7 @@
 </p:sld>
 </file>
 
-<file path=ppt/slides/slide12.xml><?xml version="1.0" encoding="utf-8"?>
+<file path=ppt/slides/slide13.xml><?xml version="1.0" encoding="utf-8"?>
 <p:sld xmlns:a="http://schemas.openxmlformats.org/drawingml/2006/main" xmlns:r="http://schemas.openxmlformats.org/officeDocument/2006/relationships" xmlns:p="http://schemas.openxmlformats.org/presentationml/2006/main">
   <p:cSld>
     <p:spTree>
@@ -6278,7 +6412,7 @@
 </p:sld>
 </file>
 
-<file path=ppt/slides/slide13.xml><?xml version="1.0" encoding="utf-8"?>
+<file path=ppt/slides/slide14.xml><?xml version="1.0" encoding="utf-8"?>
 <p:sld xmlns:a="http://schemas.openxmlformats.org/drawingml/2006/main" xmlns:r="http://schemas.openxmlformats.org/officeDocument/2006/relationships" xmlns:p="http://schemas.openxmlformats.org/presentationml/2006/main">
   <p:cSld>
     <p:spTree>
@@ -6532,7 +6666,7 @@
 </p:sld>
 </file>
 
-<file path=ppt/slides/slide14.xml><?xml version="1.0" encoding="utf-8"?>
+<file path=ppt/slides/slide15.xml><?xml version="1.0" encoding="utf-8"?>
 <p:sld xmlns:a="http://schemas.openxmlformats.org/drawingml/2006/main" xmlns:r="http://schemas.openxmlformats.org/officeDocument/2006/relationships" xmlns:p="http://schemas.openxmlformats.org/presentationml/2006/main">
   <p:cSld>
     <p:spTree>
@@ -6827,7 +6961,7 @@
 </p:sld>
 </file>
 
-<file path=ppt/slides/slide15.xml><?xml version="1.0" encoding="utf-8"?>
+<file path=ppt/slides/slide16.xml><?xml version="1.0" encoding="utf-8"?>
 <p:sld xmlns:a="http://schemas.openxmlformats.org/drawingml/2006/main" xmlns:r="http://schemas.openxmlformats.org/officeDocument/2006/relationships" xmlns:p="http://schemas.openxmlformats.org/presentationml/2006/main">
   <p:cSld>
     <p:spTree>
@@ -7056,7 +7190,7 @@
 </p:sld>
 </file>
 
-<file path=ppt/slides/slide16.xml><?xml version="1.0" encoding="utf-8"?>
+<file path=ppt/slides/slide17.xml><?xml version="1.0" encoding="utf-8"?>
 <p:sld xmlns:a="http://schemas.openxmlformats.org/drawingml/2006/main" xmlns:r="http://schemas.openxmlformats.org/officeDocument/2006/relationships" xmlns:p="http://schemas.openxmlformats.org/presentationml/2006/main">
   <p:cSld>
     <p:spTree>
@@ -7951,7 +8085,7 @@
 </p:sld>
 </file>
 
-<file path=ppt/slides/slide17.xml><?xml version="1.0" encoding="utf-8"?>
+<file path=ppt/slides/slide18.xml><?xml version="1.0" encoding="utf-8"?>
 <p:sld xmlns:a="http://schemas.openxmlformats.org/drawingml/2006/main" xmlns:r="http://schemas.openxmlformats.org/officeDocument/2006/relationships" xmlns:p="http://schemas.openxmlformats.org/presentationml/2006/main">
   <p:cSld>
     <p:spTree>
@@ -8071,7 +8205,7 @@
 </p:sld>
 </file>
 
-<file path=ppt/slides/slide18.xml><?xml version="1.0" encoding="utf-8"?>
+<file path=ppt/slides/slide19.xml><?xml version="1.0" encoding="utf-8"?>
 <p:sld xmlns:a="http://schemas.openxmlformats.org/drawingml/2006/main" xmlns:r="http://schemas.openxmlformats.org/officeDocument/2006/relationships" xmlns:p="http://schemas.openxmlformats.org/presentationml/2006/main">
   <p:cSld>
     <p:spTree>
@@ -8474,7 +8608,90 @@
 </p:sld>
 </file>
 
-<file path=ppt/slides/slide19.xml><?xml version="1.0" encoding="utf-8"?>
+<file path=ppt/slides/slide2.xml><?xml version="1.0" encoding="utf-8"?>
+<p:sld xmlns:a="http://schemas.openxmlformats.org/drawingml/2006/main" xmlns:r="http://schemas.openxmlformats.org/officeDocument/2006/relationships" xmlns:p="http://schemas.openxmlformats.org/presentationml/2006/main">
+  <p:cSld>
+    <p:spTree>
+      <p:nvGrpSpPr>
+        <p:cNvPr id="1" name=""/>
+        <p:cNvGrpSpPr/>
+        <p:nvPr/>
+      </p:nvGrpSpPr>
+      <p:grpSpPr>
+        <a:xfrm>
+          <a:off x="0" y="0"/>
+          <a:ext cx="0" cy="0"/>
+          <a:chOff x="0" y="0"/>
+          <a:chExt cx="0" cy="0"/>
+        </a:xfrm>
+      </p:grpSpPr>
+      <p:sp>
+        <p:nvSpPr>
+          <p:cNvPr id="2" name="Title 1">
+            <a:extLst>
+              <a:ext uri="{FF2B5EF4-FFF2-40B4-BE49-F238E27FC236}">
+                <a16:creationId xmlns:a16="http://schemas.microsoft.com/office/drawing/2014/main" id="{9BEB7C61-DC98-CC3C-8E5A-B2AF4CD8BBE2}"/>
+              </a:ext>
+            </a:extLst>
+          </p:cNvPr>
+          <p:cNvSpPr>
+            <a:spLocks noGrp="1"/>
+          </p:cNvSpPr>
+          <p:nvPr>
+            <p:ph type="title"/>
+          </p:nvPr>
+        </p:nvSpPr>
+        <p:spPr/>
+        <p:txBody>
+          <a:bodyPr/>
+          <a:lstStyle/>
+          <a:p>
+            <a:r>
+              <a:rPr lang="en-US"/>
+              <a:t>ADD INTROS	</a:t>
+            </a:r>
+          </a:p>
+        </p:txBody>
+      </p:sp>
+      <p:sp>
+        <p:nvSpPr>
+          <p:cNvPr id="3" name="Content Placeholder 2">
+            <a:extLst>
+              <a:ext uri="{FF2B5EF4-FFF2-40B4-BE49-F238E27FC236}">
+                <a16:creationId xmlns:a16="http://schemas.microsoft.com/office/drawing/2014/main" id="{F106FC64-C12D-7AF3-66EA-511A1D62010F}"/>
+              </a:ext>
+            </a:extLst>
+          </p:cNvPr>
+          <p:cNvSpPr>
+            <a:spLocks noGrp="1"/>
+          </p:cNvSpPr>
+          <p:nvPr>
+            <p:ph idx="1"/>
+          </p:nvPr>
+        </p:nvSpPr>
+        <p:spPr/>
+        <p:txBody>
+          <a:bodyPr/>
+          <a:lstStyle/>
+          <a:p>
+            <a:endParaRPr lang="en-US"/>
+          </a:p>
+        </p:txBody>
+      </p:sp>
+    </p:spTree>
+    <p:extLst>
+      <p:ext uri="{BB962C8B-B14F-4D97-AF65-F5344CB8AC3E}">
+        <p14:creationId xmlns:p14="http://schemas.microsoft.com/office/powerpoint/2010/main" val="3116746417"/>
+      </p:ext>
+    </p:extLst>
+  </p:cSld>
+  <p:clrMapOvr>
+    <a:masterClrMapping/>
+  </p:clrMapOvr>
+</p:sld>
+</file>
+
+<file path=ppt/slides/slide20.xml><?xml version="1.0" encoding="utf-8"?>
 <p:sld xmlns:a="http://schemas.openxmlformats.org/drawingml/2006/main" xmlns:r="http://schemas.openxmlformats.org/officeDocument/2006/relationships" xmlns:p="http://schemas.openxmlformats.org/presentationml/2006/main">
   <p:cSld>
     <p:spTree>
@@ -8678,305 +8895,7 @@
 </p:sld>
 </file>
 
-<file path=ppt/slides/slide2.xml><?xml version="1.0" encoding="utf-8"?>
-<p:sld xmlns:a="http://schemas.openxmlformats.org/drawingml/2006/main" xmlns:r="http://schemas.openxmlformats.org/officeDocument/2006/relationships" xmlns:p="http://schemas.openxmlformats.org/presentationml/2006/main">
-  <p:cSld>
-    <p:spTree>
-      <p:nvGrpSpPr>
-        <p:cNvPr id="1" name=""/>
-        <p:cNvGrpSpPr/>
-        <p:nvPr/>
-      </p:nvGrpSpPr>
-      <p:grpSpPr>
-        <a:xfrm>
-          <a:off x="0" y="0"/>
-          <a:ext cx="0" cy="0"/>
-          <a:chOff x="0" y="0"/>
-          <a:chExt cx="0" cy="0"/>
-        </a:xfrm>
-      </p:grpSpPr>
-      <p:sp>
-        <p:nvSpPr>
-          <p:cNvPr id="2" name="Title 1">
-            <a:extLst>
-              <a:ext uri="{FF2B5EF4-FFF2-40B4-BE49-F238E27FC236}">
-                <a16:creationId xmlns:a16="http://schemas.microsoft.com/office/drawing/2014/main" id="{47CF43D2-AABB-3923-A21F-941815B0A9E9}"/>
-              </a:ext>
-            </a:extLst>
-          </p:cNvPr>
-          <p:cNvSpPr>
-            <a:spLocks noGrp="1"/>
-          </p:cNvSpPr>
-          <p:nvPr>
-            <p:ph type="ctrTitle"/>
-          </p:nvPr>
-        </p:nvSpPr>
-        <p:spPr/>
-        <p:txBody>
-          <a:bodyPr/>
-          <a:lstStyle/>
-          <a:p>
-            <a:r>
-              <a:rPr lang="en-US" dirty="0"/>
-              <a:t>What is machine learning?</a:t>
-            </a:r>
-          </a:p>
-        </p:txBody>
-      </p:sp>
-      <p:sp>
-        <p:nvSpPr>
-          <p:cNvPr id="3" name="Subtitle 2">
-            <a:extLst>
-              <a:ext uri="{FF2B5EF4-FFF2-40B4-BE49-F238E27FC236}">
-                <a16:creationId xmlns:a16="http://schemas.microsoft.com/office/drawing/2014/main" id="{9E839DD3-C76D-C5AD-AC5D-13F2B28B5729}"/>
-              </a:ext>
-            </a:extLst>
-          </p:cNvPr>
-          <p:cNvSpPr>
-            <a:spLocks noGrp="1"/>
-          </p:cNvSpPr>
-          <p:nvPr>
-            <p:ph type="subTitle" idx="1"/>
-          </p:nvPr>
-        </p:nvSpPr>
-        <p:spPr>
-          <a:xfrm>
-            <a:off x="1524000" y="3602038"/>
-            <a:ext cx="9144000" cy="472251"/>
-          </a:xfrm>
-        </p:spPr>
-        <p:txBody>
-          <a:bodyPr/>
-          <a:lstStyle/>
-          <a:p>
-            <a:r>
-              <a:rPr lang="en-US" dirty="0"/>
-              <a:t>And why is it useful (for science)?</a:t>
-            </a:r>
-          </a:p>
-        </p:txBody>
-      </p:sp>
-      <p:sp>
-        <p:nvSpPr>
-          <p:cNvPr id="4" name="Subtitle 2">
-            <a:extLst>
-              <a:ext uri="{FF2B5EF4-FFF2-40B4-BE49-F238E27FC236}">
-                <a16:creationId xmlns:a16="http://schemas.microsoft.com/office/drawing/2014/main" id="{7A84C9FD-C48D-1312-800B-AD902ED34D44}"/>
-              </a:ext>
-            </a:extLst>
-          </p:cNvPr>
-          <p:cNvSpPr txBox="1">
-            <a:spLocks/>
-          </p:cNvSpPr>
-          <p:nvPr/>
-        </p:nvSpPr>
-        <p:spPr>
-          <a:xfrm>
-            <a:off x="1524000" y="4310023"/>
-            <a:ext cx="9144000" cy="472251"/>
-          </a:xfrm>
-          <a:prstGeom prst="rect">
-            <a:avLst/>
-          </a:prstGeom>
-        </p:spPr>
-        <p:txBody>
-          <a:bodyPr vert="horz" lIns="91440" tIns="45720" rIns="91440" bIns="45720" rtlCol="0">
-            <a:normAutofit/>
-          </a:bodyPr>
-          <a:lstStyle>
-            <a:lvl1pPr marL="0" indent="0" algn="ctr" defTabSz="914400" rtl="0" eaLnBrk="1" latinLnBrk="0" hangingPunct="1">
-              <a:lnSpc>
-                <a:spcPct val="90000"/>
-              </a:lnSpc>
-              <a:spcBef>
-                <a:spcPts val="1000"/>
-              </a:spcBef>
-              <a:buFont typeface="Arial" panose="020B0604020202020204" pitchFamily="34" charset="0"/>
-              <a:buNone/>
-              <a:defRPr sz="2400" kern="1200">
-                <a:solidFill>
-                  <a:schemeClr val="tx1"/>
-                </a:solidFill>
-                <a:latin typeface="+mn-lt"/>
-                <a:ea typeface="+mn-ea"/>
-                <a:cs typeface="+mn-cs"/>
-              </a:defRPr>
-            </a:lvl1pPr>
-            <a:lvl2pPr marL="457200" indent="0" algn="ctr" defTabSz="914400" rtl="0" eaLnBrk="1" latinLnBrk="0" hangingPunct="1">
-              <a:lnSpc>
-                <a:spcPct val="90000"/>
-              </a:lnSpc>
-              <a:spcBef>
-                <a:spcPts val="500"/>
-              </a:spcBef>
-              <a:buFont typeface="Arial" panose="020B0604020202020204" pitchFamily="34" charset="0"/>
-              <a:buNone/>
-              <a:defRPr sz="2000" kern="1200">
-                <a:solidFill>
-                  <a:schemeClr val="tx1"/>
-                </a:solidFill>
-                <a:latin typeface="+mn-lt"/>
-                <a:ea typeface="+mn-ea"/>
-                <a:cs typeface="+mn-cs"/>
-              </a:defRPr>
-            </a:lvl2pPr>
-            <a:lvl3pPr marL="914400" indent="0" algn="ctr" defTabSz="914400" rtl="0" eaLnBrk="1" latinLnBrk="0" hangingPunct="1">
-              <a:lnSpc>
-                <a:spcPct val="90000"/>
-              </a:lnSpc>
-              <a:spcBef>
-                <a:spcPts val="500"/>
-              </a:spcBef>
-              <a:buFont typeface="Arial" panose="020B0604020202020204" pitchFamily="34" charset="0"/>
-              <a:buNone/>
-              <a:defRPr sz="1800" kern="1200">
-                <a:solidFill>
-                  <a:schemeClr val="tx1"/>
-                </a:solidFill>
-                <a:latin typeface="+mn-lt"/>
-                <a:ea typeface="+mn-ea"/>
-                <a:cs typeface="+mn-cs"/>
-              </a:defRPr>
-            </a:lvl3pPr>
-            <a:lvl4pPr marL="1371600" indent="0" algn="ctr" defTabSz="914400" rtl="0" eaLnBrk="1" latinLnBrk="0" hangingPunct="1">
-              <a:lnSpc>
-                <a:spcPct val="90000"/>
-              </a:lnSpc>
-              <a:spcBef>
-                <a:spcPts val="500"/>
-              </a:spcBef>
-              <a:buFont typeface="Arial" panose="020B0604020202020204" pitchFamily="34" charset="0"/>
-              <a:buNone/>
-              <a:defRPr sz="1600" kern="1200">
-                <a:solidFill>
-                  <a:schemeClr val="tx1"/>
-                </a:solidFill>
-                <a:latin typeface="+mn-lt"/>
-                <a:ea typeface="+mn-ea"/>
-                <a:cs typeface="+mn-cs"/>
-              </a:defRPr>
-            </a:lvl4pPr>
-            <a:lvl5pPr marL="1828800" indent="0" algn="ctr" defTabSz="914400" rtl="0" eaLnBrk="1" latinLnBrk="0" hangingPunct="1">
-              <a:lnSpc>
-                <a:spcPct val="90000"/>
-              </a:lnSpc>
-              <a:spcBef>
-                <a:spcPts val="500"/>
-              </a:spcBef>
-              <a:buFont typeface="Arial" panose="020B0604020202020204" pitchFamily="34" charset="0"/>
-              <a:buNone/>
-              <a:defRPr sz="1600" kern="1200">
-                <a:solidFill>
-                  <a:schemeClr val="tx1"/>
-                </a:solidFill>
-                <a:latin typeface="+mn-lt"/>
-                <a:ea typeface="+mn-ea"/>
-                <a:cs typeface="+mn-cs"/>
-              </a:defRPr>
-            </a:lvl5pPr>
-            <a:lvl6pPr marL="2286000" indent="0" algn="ctr" defTabSz="914400" rtl="0" eaLnBrk="1" latinLnBrk="0" hangingPunct="1">
-              <a:lnSpc>
-                <a:spcPct val="90000"/>
-              </a:lnSpc>
-              <a:spcBef>
-                <a:spcPts val="500"/>
-              </a:spcBef>
-              <a:buFont typeface="Arial" panose="020B0604020202020204" pitchFamily="34" charset="0"/>
-              <a:buNone/>
-              <a:defRPr sz="1600" kern="1200">
-                <a:solidFill>
-                  <a:schemeClr val="tx1"/>
-                </a:solidFill>
-                <a:latin typeface="+mn-lt"/>
-                <a:ea typeface="+mn-ea"/>
-                <a:cs typeface="+mn-cs"/>
-              </a:defRPr>
-            </a:lvl6pPr>
-            <a:lvl7pPr marL="2743200" indent="0" algn="ctr" defTabSz="914400" rtl="0" eaLnBrk="1" latinLnBrk="0" hangingPunct="1">
-              <a:lnSpc>
-                <a:spcPct val="90000"/>
-              </a:lnSpc>
-              <a:spcBef>
-                <a:spcPts val="500"/>
-              </a:spcBef>
-              <a:buFont typeface="Arial" panose="020B0604020202020204" pitchFamily="34" charset="0"/>
-              <a:buNone/>
-              <a:defRPr sz="1600" kern="1200">
-                <a:solidFill>
-                  <a:schemeClr val="tx1"/>
-                </a:solidFill>
-                <a:latin typeface="+mn-lt"/>
-                <a:ea typeface="+mn-ea"/>
-                <a:cs typeface="+mn-cs"/>
-              </a:defRPr>
-            </a:lvl7pPr>
-            <a:lvl8pPr marL="3200400" indent="0" algn="ctr" defTabSz="914400" rtl="0" eaLnBrk="1" latinLnBrk="0" hangingPunct="1">
-              <a:lnSpc>
-                <a:spcPct val="90000"/>
-              </a:lnSpc>
-              <a:spcBef>
-                <a:spcPts val="500"/>
-              </a:spcBef>
-              <a:buFont typeface="Arial" panose="020B0604020202020204" pitchFamily="34" charset="0"/>
-              <a:buNone/>
-              <a:defRPr sz="1600" kern="1200">
-                <a:solidFill>
-                  <a:schemeClr val="tx1"/>
-                </a:solidFill>
-                <a:latin typeface="+mn-lt"/>
-                <a:ea typeface="+mn-ea"/>
-                <a:cs typeface="+mn-cs"/>
-              </a:defRPr>
-            </a:lvl8pPr>
-            <a:lvl9pPr marL="3657600" indent="0" algn="ctr" defTabSz="914400" rtl="0" eaLnBrk="1" latinLnBrk="0" hangingPunct="1">
-              <a:lnSpc>
-                <a:spcPct val="90000"/>
-              </a:lnSpc>
-              <a:spcBef>
-                <a:spcPts val="500"/>
-              </a:spcBef>
-              <a:buFont typeface="Arial" panose="020B0604020202020204" pitchFamily="34" charset="0"/>
-              <a:buNone/>
-              <a:defRPr sz="1600" kern="1200">
-                <a:solidFill>
-                  <a:schemeClr val="tx1"/>
-                </a:solidFill>
-                <a:latin typeface="+mn-lt"/>
-                <a:ea typeface="+mn-ea"/>
-                <a:cs typeface="+mn-cs"/>
-              </a:defRPr>
-            </a:lvl9pPr>
-          </a:lstStyle>
-          <a:p>
-            <a:r>
-              <a:rPr lang="en-US" dirty="0"/>
-              <a:t>Grant Vagle, Jeremiah </a:t>
-            </a:r>
-            <a:r>
-              <a:rPr lang="en-US" dirty="0" err="1"/>
-              <a:t>Shrovnal</a:t>
-            </a:r>
-            <a:r>
-              <a:rPr lang="en-US" dirty="0"/>
-              <a:t>, Lynn Waterhouse</a:t>
-            </a:r>
-          </a:p>
-        </p:txBody>
-      </p:sp>
-    </p:spTree>
-    <p:extLst>
-      <p:ext uri="{BB962C8B-B14F-4D97-AF65-F5344CB8AC3E}">
-        <p14:creationId xmlns:p14="http://schemas.microsoft.com/office/powerpoint/2010/main" val="973311027"/>
-      </p:ext>
-    </p:extLst>
-  </p:cSld>
-  <p:clrMapOvr>
-    <a:masterClrMapping/>
-  </p:clrMapOvr>
-</p:sld>
-</file>
-
-<file path=ppt/slides/slide20.xml><?xml version="1.0" encoding="utf-8"?>
+<file path=ppt/slides/slide21.xml><?xml version="1.0" encoding="utf-8"?>
 <p:sld xmlns:a="http://schemas.openxmlformats.org/drawingml/2006/main" xmlns:r="http://schemas.openxmlformats.org/officeDocument/2006/relationships" xmlns:p="http://schemas.openxmlformats.org/presentationml/2006/main">
   <p:cSld>
     <p:spTree>
@@ -9811,7 +9730,7 @@
 </p:sld>
 </file>
 
-<file path=ppt/slides/slide21.xml><?xml version="1.0" encoding="utf-8"?>
+<file path=ppt/slides/slide22.xml><?xml version="1.0" encoding="utf-8"?>
 <p:sld xmlns:a="http://schemas.openxmlformats.org/drawingml/2006/main" xmlns:r="http://schemas.openxmlformats.org/officeDocument/2006/relationships" xmlns:p="http://schemas.openxmlformats.org/presentationml/2006/main">
   <p:cSld>
     <p:spTree>
@@ -9968,7 +9887,7 @@
         </p:spPr>
         <p:txBody>
           <a:bodyPr vert="horz" lIns="91440" tIns="45720" rIns="91440" bIns="45720" rtlCol="0">
-            <a:normAutofit lnSpcReduction="10000"/>
+            <a:normAutofit fontScale="92500"/>
           </a:bodyPr>
           <a:lstStyle>
             <a:lvl1pPr marL="228600" indent="-228600" algn="l" defTabSz="914400" rtl="0" eaLnBrk="1" latinLnBrk="0" hangingPunct="1">
@@ -10177,6 +10096,12 @@
           <a:p>
             <a:r>
               <a:rPr lang="en-US" dirty="0"/>
+              <a:t>Bayesian Additive Regression Trees</a:t>
+            </a:r>
+          </a:p>
+          <a:p>
+            <a:r>
+              <a:rPr lang="en-US" dirty="0"/>
               <a:t>All the possible interpretation methods</a:t>
             </a:r>
           </a:p>
@@ -10195,7 +10120,7 @@
 </p:sld>
 </file>
 
-<file path=ppt/slides/slide22.xml><?xml version="1.0" encoding="utf-8"?>
+<file path=ppt/slides/slide23.xml><?xml version="1.0" encoding="utf-8"?>
 <p:sld xmlns:a="http://schemas.openxmlformats.org/drawingml/2006/main" xmlns:r="http://schemas.openxmlformats.org/officeDocument/2006/relationships" xmlns:p="http://schemas.openxmlformats.org/presentationml/2006/main">
   <p:cSld>
     <p:spTree>
@@ -10408,6 +10333,304 @@
           <p:cNvPr id="2" name="Title 1">
             <a:extLst>
               <a:ext uri="{FF2B5EF4-FFF2-40B4-BE49-F238E27FC236}">
+                <a16:creationId xmlns:a16="http://schemas.microsoft.com/office/drawing/2014/main" id="{47CF43D2-AABB-3923-A21F-941815B0A9E9}"/>
+              </a:ext>
+            </a:extLst>
+          </p:cNvPr>
+          <p:cNvSpPr>
+            <a:spLocks noGrp="1"/>
+          </p:cNvSpPr>
+          <p:nvPr>
+            <p:ph type="ctrTitle"/>
+          </p:nvPr>
+        </p:nvSpPr>
+        <p:spPr/>
+        <p:txBody>
+          <a:bodyPr/>
+          <a:lstStyle/>
+          <a:p>
+            <a:r>
+              <a:rPr lang="en-US" dirty="0"/>
+              <a:t>What is machine learning?</a:t>
+            </a:r>
+          </a:p>
+        </p:txBody>
+      </p:sp>
+      <p:sp>
+        <p:nvSpPr>
+          <p:cNvPr id="3" name="Subtitle 2">
+            <a:extLst>
+              <a:ext uri="{FF2B5EF4-FFF2-40B4-BE49-F238E27FC236}">
+                <a16:creationId xmlns:a16="http://schemas.microsoft.com/office/drawing/2014/main" id="{9E839DD3-C76D-C5AD-AC5D-13F2B28B5729}"/>
+              </a:ext>
+            </a:extLst>
+          </p:cNvPr>
+          <p:cNvSpPr>
+            <a:spLocks noGrp="1"/>
+          </p:cNvSpPr>
+          <p:nvPr>
+            <p:ph type="subTitle" idx="1"/>
+          </p:nvPr>
+        </p:nvSpPr>
+        <p:spPr>
+          <a:xfrm>
+            <a:off x="1524000" y="3602038"/>
+            <a:ext cx="9144000" cy="472251"/>
+          </a:xfrm>
+        </p:spPr>
+        <p:txBody>
+          <a:bodyPr/>
+          <a:lstStyle/>
+          <a:p>
+            <a:r>
+              <a:rPr lang="en-US" dirty="0"/>
+              <a:t>And why is it useful (for science)?</a:t>
+            </a:r>
+          </a:p>
+        </p:txBody>
+      </p:sp>
+      <p:sp>
+        <p:nvSpPr>
+          <p:cNvPr id="4" name="Subtitle 2">
+            <a:extLst>
+              <a:ext uri="{FF2B5EF4-FFF2-40B4-BE49-F238E27FC236}">
+                <a16:creationId xmlns:a16="http://schemas.microsoft.com/office/drawing/2014/main" id="{7A84C9FD-C48D-1312-800B-AD902ED34D44}"/>
+              </a:ext>
+            </a:extLst>
+          </p:cNvPr>
+          <p:cNvSpPr txBox="1">
+            <a:spLocks/>
+          </p:cNvSpPr>
+          <p:nvPr/>
+        </p:nvSpPr>
+        <p:spPr>
+          <a:xfrm>
+            <a:off x="1524000" y="4310023"/>
+            <a:ext cx="9144000" cy="472251"/>
+          </a:xfrm>
+          <a:prstGeom prst="rect">
+            <a:avLst/>
+          </a:prstGeom>
+        </p:spPr>
+        <p:txBody>
+          <a:bodyPr vert="horz" lIns="91440" tIns="45720" rIns="91440" bIns="45720" rtlCol="0">
+            <a:normAutofit/>
+          </a:bodyPr>
+          <a:lstStyle>
+            <a:lvl1pPr marL="0" indent="0" algn="ctr" defTabSz="914400" rtl="0" eaLnBrk="1" latinLnBrk="0" hangingPunct="1">
+              <a:lnSpc>
+                <a:spcPct val="90000"/>
+              </a:lnSpc>
+              <a:spcBef>
+                <a:spcPts val="1000"/>
+              </a:spcBef>
+              <a:buFont typeface="Arial" panose="020B0604020202020204" pitchFamily="34" charset="0"/>
+              <a:buNone/>
+              <a:defRPr sz="2400" kern="1200">
+                <a:solidFill>
+                  <a:schemeClr val="tx1"/>
+                </a:solidFill>
+                <a:latin typeface="+mn-lt"/>
+                <a:ea typeface="+mn-ea"/>
+                <a:cs typeface="+mn-cs"/>
+              </a:defRPr>
+            </a:lvl1pPr>
+            <a:lvl2pPr marL="457200" indent="0" algn="ctr" defTabSz="914400" rtl="0" eaLnBrk="1" latinLnBrk="0" hangingPunct="1">
+              <a:lnSpc>
+                <a:spcPct val="90000"/>
+              </a:lnSpc>
+              <a:spcBef>
+                <a:spcPts val="500"/>
+              </a:spcBef>
+              <a:buFont typeface="Arial" panose="020B0604020202020204" pitchFamily="34" charset="0"/>
+              <a:buNone/>
+              <a:defRPr sz="2000" kern="1200">
+                <a:solidFill>
+                  <a:schemeClr val="tx1"/>
+                </a:solidFill>
+                <a:latin typeface="+mn-lt"/>
+                <a:ea typeface="+mn-ea"/>
+                <a:cs typeface="+mn-cs"/>
+              </a:defRPr>
+            </a:lvl2pPr>
+            <a:lvl3pPr marL="914400" indent="0" algn="ctr" defTabSz="914400" rtl="0" eaLnBrk="1" latinLnBrk="0" hangingPunct="1">
+              <a:lnSpc>
+                <a:spcPct val="90000"/>
+              </a:lnSpc>
+              <a:spcBef>
+                <a:spcPts val="500"/>
+              </a:spcBef>
+              <a:buFont typeface="Arial" panose="020B0604020202020204" pitchFamily="34" charset="0"/>
+              <a:buNone/>
+              <a:defRPr sz="1800" kern="1200">
+                <a:solidFill>
+                  <a:schemeClr val="tx1"/>
+                </a:solidFill>
+                <a:latin typeface="+mn-lt"/>
+                <a:ea typeface="+mn-ea"/>
+                <a:cs typeface="+mn-cs"/>
+              </a:defRPr>
+            </a:lvl3pPr>
+            <a:lvl4pPr marL="1371600" indent="0" algn="ctr" defTabSz="914400" rtl="0" eaLnBrk="1" latinLnBrk="0" hangingPunct="1">
+              <a:lnSpc>
+                <a:spcPct val="90000"/>
+              </a:lnSpc>
+              <a:spcBef>
+                <a:spcPts val="500"/>
+              </a:spcBef>
+              <a:buFont typeface="Arial" panose="020B0604020202020204" pitchFamily="34" charset="0"/>
+              <a:buNone/>
+              <a:defRPr sz="1600" kern="1200">
+                <a:solidFill>
+                  <a:schemeClr val="tx1"/>
+                </a:solidFill>
+                <a:latin typeface="+mn-lt"/>
+                <a:ea typeface="+mn-ea"/>
+                <a:cs typeface="+mn-cs"/>
+              </a:defRPr>
+            </a:lvl4pPr>
+            <a:lvl5pPr marL="1828800" indent="0" algn="ctr" defTabSz="914400" rtl="0" eaLnBrk="1" latinLnBrk="0" hangingPunct="1">
+              <a:lnSpc>
+                <a:spcPct val="90000"/>
+              </a:lnSpc>
+              <a:spcBef>
+                <a:spcPts val="500"/>
+              </a:spcBef>
+              <a:buFont typeface="Arial" panose="020B0604020202020204" pitchFamily="34" charset="0"/>
+              <a:buNone/>
+              <a:defRPr sz="1600" kern="1200">
+                <a:solidFill>
+                  <a:schemeClr val="tx1"/>
+                </a:solidFill>
+                <a:latin typeface="+mn-lt"/>
+                <a:ea typeface="+mn-ea"/>
+                <a:cs typeface="+mn-cs"/>
+              </a:defRPr>
+            </a:lvl5pPr>
+            <a:lvl6pPr marL="2286000" indent="0" algn="ctr" defTabSz="914400" rtl="0" eaLnBrk="1" latinLnBrk="0" hangingPunct="1">
+              <a:lnSpc>
+                <a:spcPct val="90000"/>
+              </a:lnSpc>
+              <a:spcBef>
+                <a:spcPts val="500"/>
+              </a:spcBef>
+              <a:buFont typeface="Arial" panose="020B0604020202020204" pitchFamily="34" charset="0"/>
+              <a:buNone/>
+              <a:defRPr sz="1600" kern="1200">
+                <a:solidFill>
+                  <a:schemeClr val="tx1"/>
+                </a:solidFill>
+                <a:latin typeface="+mn-lt"/>
+                <a:ea typeface="+mn-ea"/>
+                <a:cs typeface="+mn-cs"/>
+              </a:defRPr>
+            </a:lvl6pPr>
+            <a:lvl7pPr marL="2743200" indent="0" algn="ctr" defTabSz="914400" rtl="0" eaLnBrk="1" latinLnBrk="0" hangingPunct="1">
+              <a:lnSpc>
+                <a:spcPct val="90000"/>
+              </a:lnSpc>
+              <a:spcBef>
+                <a:spcPts val="500"/>
+              </a:spcBef>
+              <a:buFont typeface="Arial" panose="020B0604020202020204" pitchFamily="34" charset="0"/>
+              <a:buNone/>
+              <a:defRPr sz="1600" kern="1200">
+                <a:solidFill>
+                  <a:schemeClr val="tx1"/>
+                </a:solidFill>
+                <a:latin typeface="+mn-lt"/>
+                <a:ea typeface="+mn-ea"/>
+                <a:cs typeface="+mn-cs"/>
+              </a:defRPr>
+            </a:lvl7pPr>
+            <a:lvl8pPr marL="3200400" indent="0" algn="ctr" defTabSz="914400" rtl="0" eaLnBrk="1" latinLnBrk="0" hangingPunct="1">
+              <a:lnSpc>
+                <a:spcPct val="90000"/>
+              </a:lnSpc>
+              <a:spcBef>
+                <a:spcPts val="500"/>
+              </a:spcBef>
+              <a:buFont typeface="Arial" panose="020B0604020202020204" pitchFamily="34" charset="0"/>
+              <a:buNone/>
+              <a:defRPr sz="1600" kern="1200">
+                <a:solidFill>
+                  <a:schemeClr val="tx1"/>
+                </a:solidFill>
+                <a:latin typeface="+mn-lt"/>
+                <a:ea typeface="+mn-ea"/>
+                <a:cs typeface="+mn-cs"/>
+              </a:defRPr>
+            </a:lvl8pPr>
+            <a:lvl9pPr marL="3657600" indent="0" algn="ctr" defTabSz="914400" rtl="0" eaLnBrk="1" latinLnBrk="0" hangingPunct="1">
+              <a:lnSpc>
+                <a:spcPct val="90000"/>
+              </a:lnSpc>
+              <a:spcBef>
+                <a:spcPts val="500"/>
+              </a:spcBef>
+              <a:buFont typeface="Arial" panose="020B0604020202020204" pitchFamily="34" charset="0"/>
+              <a:buNone/>
+              <a:defRPr sz="1600" kern="1200">
+                <a:solidFill>
+                  <a:schemeClr val="tx1"/>
+                </a:solidFill>
+                <a:latin typeface="+mn-lt"/>
+                <a:ea typeface="+mn-ea"/>
+                <a:cs typeface="+mn-cs"/>
+              </a:defRPr>
+            </a:lvl9pPr>
+          </a:lstStyle>
+          <a:p>
+            <a:r>
+              <a:rPr lang="en-US" dirty="0"/>
+              <a:t>Grant Vagle, Jeremiah </a:t>
+            </a:r>
+            <a:r>
+              <a:rPr lang="en-US" dirty="0" err="1"/>
+              <a:t>Shrovnal</a:t>
+            </a:r>
+            <a:r>
+              <a:rPr lang="en-US" dirty="0"/>
+              <a:t>, Lynn Waterhouse</a:t>
+            </a:r>
+          </a:p>
+        </p:txBody>
+      </p:sp>
+    </p:spTree>
+    <p:extLst>
+      <p:ext uri="{BB962C8B-B14F-4D97-AF65-F5344CB8AC3E}">
+        <p14:creationId xmlns:p14="http://schemas.microsoft.com/office/powerpoint/2010/main" val="973311027"/>
+      </p:ext>
+    </p:extLst>
+  </p:cSld>
+  <p:clrMapOvr>
+    <a:masterClrMapping/>
+  </p:clrMapOvr>
+</p:sld>
+</file>
+
+<file path=ppt/slides/slide4.xml><?xml version="1.0" encoding="utf-8"?>
+<p:sld xmlns:a="http://schemas.openxmlformats.org/drawingml/2006/main" xmlns:r="http://schemas.openxmlformats.org/officeDocument/2006/relationships" xmlns:p="http://schemas.openxmlformats.org/presentationml/2006/main">
+  <p:cSld>
+    <p:spTree>
+      <p:nvGrpSpPr>
+        <p:cNvPr id="1" name=""/>
+        <p:cNvGrpSpPr/>
+        <p:nvPr/>
+      </p:nvGrpSpPr>
+      <p:grpSpPr>
+        <a:xfrm>
+          <a:off x="0" y="0"/>
+          <a:ext cx="0" cy="0"/>
+          <a:chOff x="0" y="0"/>
+          <a:chExt cx="0" cy="0"/>
+        </a:xfrm>
+      </p:grpSpPr>
+      <p:sp>
+        <p:nvSpPr>
+          <p:cNvPr id="2" name="Title 1">
+            <a:extLst>
+              <a:ext uri="{FF2B5EF4-FFF2-40B4-BE49-F238E27FC236}">
                 <a16:creationId xmlns:a16="http://schemas.microsoft.com/office/drawing/2014/main" id="{720C2576-357D-876A-70BB-664D14B59537}"/>
               </a:ext>
             </a:extLst>
@@ -10513,7 +10736,7 @@
 </p:sld>
 </file>
 
-<file path=ppt/slides/slide4.xml><?xml version="1.0" encoding="utf-8"?>
+<file path=ppt/slides/slide5.xml><?xml version="1.0" encoding="utf-8"?>
 <p:sld xmlns:a="http://schemas.openxmlformats.org/drawingml/2006/main" xmlns:r="http://schemas.openxmlformats.org/officeDocument/2006/relationships" xmlns:p="http://schemas.openxmlformats.org/presentationml/2006/main">
   <p:cSld>
     <p:spTree>
@@ -10654,7 +10877,7 @@
 </p:sld>
 </file>
 
-<file path=ppt/slides/slide5.xml><?xml version="1.0" encoding="utf-8"?>
+<file path=ppt/slides/slide6.xml><?xml version="1.0" encoding="utf-8"?>
 <p:sld xmlns:a="http://schemas.openxmlformats.org/drawingml/2006/main" xmlns:r="http://schemas.openxmlformats.org/officeDocument/2006/relationships" xmlns:p="http://schemas.openxmlformats.org/presentationml/2006/main">
   <p:cSld>
     <p:spTree>
@@ -10787,7 +11010,7 @@
 </p:sld>
 </file>
 
-<file path=ppt/slides/slide6.xml><?xml version="1.0" encoding="utf-8"?>
+<file path=ppt/slides/slide7.xml><?xml version="1.0" encoding="utf-8"?>
 <p:sld xmlns:a="http://schemas.openxmlformats.org/drawingml/2006/main" xmlns:r="http://schemas.openxmlformats.org/officeDocument/2006/relationships" xmlns:p="http://schemas.openxmlformats.org/presentationml/2006/main">
   <p:cSld>
     <p:spTree>
@@ -10920,7 +11143,7 @@
 </p:sld>
 </file>
 
-<file path=ppt/slides/slide7.xml><?xml version="1.0" encoding="utf-8"?>
+<file path=ppt/slides/slide8.xml><?xml version="1.0" encoding="utf-8"?>
 <p:sld xmlns:a="http://schemas.openxmlformats.org/drawingml/2006/main" xmlns:r="http://schemas.openxmlformats.org/officeDocument/2006/relationships" xmlns:p="http://schemas.openxmlformats.org/presentationml/2006/main">
   <p:cSld>
     <p:spTree>
@@ -11320,7 +11543,7 @@
 </p:sld>
 </file>
 
-<file path=ppt/slides/slide8.xml><?xml version="1.0" encoding="utf-8"?>
+<file path=ppt/slides/slide9.xml><?xml version="1.0" encoding="utf-8"?>
 <p:sld xmlns:a="http://schemas.openxmlformats.org/drawingml/2006/main" xmlns:r="http://schemas.openxmlformats.org/officeDocument/2006/relationships" xmlns:p="http://schemas.openxmlformats.org/presentationml/2006/main">
   <p:cSld>
     <p:spTree>
@@ -12029,139 +12252,6 @@
     <p:extLst>
       <p:ext uri="{BB962C8B-B14F-4D97-AF65-F5344CB8AC3E}">
         <p14:creationId xmlns:p14="http://schemas.microsoft.com/office/powerpoint/2010/main" val="2255730433"/>
-      </p:ext>
-    </p:extLst>
-  </p:cSld>
-  <p:clrMapOvr>
-    <a:masterClrMapping/>
-  </p:clrMapOvr>
-</p:sld>
-</file>
-
-<file path=ppt/slides/slide9.xml><?xml version="1.0" encoding="utf-8"?>
-<p:sld xmlns:a="http://schemas.openxmlformats.org/drawingml/2006/main" xmlns:r="http://schemas.openxmlformats.org/officeDocument/2006/relationships" xmlns:p="http://schemas.openxmlformats.org/presentationml/2006/main">
-  <p:cSld>
-    <p:spTree>
-      <p:nvGrpSpPr>
-        <p:cNvPr id="1" name="">
-          <a:extLst>
-            <a:ext uri="{FF2B5EF4-FFF2-40B4-BE49-F238E27FC236}">
-              <a16:creationId xmlns:a16="http://schemas.microsoft.com/office/drawing/2014/main" id="{F9812241-244B-055D-95DA-987DF4EAA2D5}"/>
-            </a:ext>
-          </a:extLst>
-        </p:cNvPr>
-        <p:cNvGrpSpPr/>
-        <p:nvPr/>
-      </p:nvGrpSpPr>
-      <p:grpSpPr>
-        <a:xfrm>
-          <a:off x="0" y="0"/>
-          <a:ext cx="0" cy="0"/>
-          <a:chOff x="0" y="0"/>
-          <a:chExt cx="0" cy="0"/>
-        </a:xfrm>
-      </p:grpSpPr>
-      <p:sp>
-        <p:nvSpPr>
-          <p:cNvPr id="2" name="Title 1">
-            <a:extLst>
-              <a:ext uri="{FF2B5EF4-FFF2-40B4-BE49-F238E27FC236}">
-                <a16:creationId xmlns:a16="http://schemas.microsoft.com/office/drawing/2014/main" id="{75FE6AA7-F871-9867-601A-1AAE31E9774B}"/>
-              </a:ext>
-            </a:extLst>
-          </p:cNvPr>
-          <p:cNvSpPr>
-            <a:spLocks noGrp="1"/>
-          </p:cNvSpPr>
-          <p:nvPr>
-            <p:ph type="title"/>
-          </p:nvPr>
-        </p:nvSpPr>
-        <p:spPr/>
-        <p:txBody>
-          <a:bodyPr/>
-          <a:lstStyle/>
-          <a:p>
-            <a:r>
-              <a:rPr lang="en-US" dirty="0"/>
-              <a:t>Modeling mindsets:</a:t>
-            </a:r>
-          </a:p>
-        </p:txBody>
-      </p:sp>
-      <p:sp>
-        <p:nvSpPr>
-          <p:cNvPr id="5" name="TextBox 4">
-            <a:extLst>
-              <a:ext uri="{FF2B5EF4-FFF2-40B4-BE49-F238E27FC236}">
-                <a16:creationId xmlns:a16="http://schemas.microsoft.com/office/drawing/2014/main" id="{0B1164BB-72D5-4A22-DFB6-60343F96D0CA}"/>
-              </a:ext>
-            </a:extLst>
-          </p:cNvPr>
-          <p:cNvSpPr txBox="1"/>
-          <p:nvPr/>
-        </p:nvSpPr>
-        <p:spPr>
-          <a:xfrm>
-            <a:off x="4537276" y="6488668"/>
-            <a:ext cx="8191983" cy="369332"/>
-          </a:xfrm>
-          <a:prstGeom prst="rect">
-            <a:avLst/>
-          </a:prstGeom>
-          <a:noFill/>
-        </p:spPr>
-        <p:txBody>
-          <a:bodyPr wrap="square">
-            <a:spAutoFit/>
-          </a:bodyPr>
-          <a:lstStyle/>
-          <a:p>
-            <a:r>
-              <a:rPr lang="en-US" dirty="0">
-                <a:hlinkClick r:id="rId3"/>
-              </a:rPr>
-              <a:t>Molnar, C. 2023. Modeling mindsets: the many cultures of learning from data.</a:t>
-            </a:r>
-            <a:endParaRPr lang="en-US" dirty="0"/>
-          </a:p>
-        </p:txBody>
-      </p:sp>
-      <p:pic>
-        <p:nvPicPr>
-          <p:cNvPr id="4" name="Picture 3">
-            <a:extLst>
-              <a:ext uri="{FF2B5EF4-FFF2-40B4-BE49-F238E27FC236}">
-                <a16:creationId xmlns:a16="http://schemas.microsoft.com/office/drawing/2014/main" id="{6F15411E-D06D-FD4C-7FF2-987BD7935E9A}"/>
-              </a:ext>
-            </a:extLst>
-          </p:cNvPr>
-          <p:cNvPicPr>
-            <a:picLocks noChangeAspect="1"/>
-          </p:cNvPicPr>
-          <p:nvPr/>
-        </p:nvPicPr>
-        <p:blipFill>
-          <a:blip r:embed="rId4"/>
-          <a:srcRect l="-14" r="105" b="11454"/>
-          <a:stretch>
-            <a:fillRect/>
-          </a:stretch>
-        </p:blipFill>
-        <p:spPr>
-          <a:xfrm>
-            <a:off x="2208628" y="1806292"/>
-            <a:ext cx="7765366" cy="3830580"/>
-          </a:xfrm>
-          <a:prstGeom prst="rect">
-            <a:avLst/>
-          </a:prstGeom>
-        </p:spPr>
-      </p:pic>
-    </p:spTree>
-    <p:extLst>
-      <p:ext uri="{BB962C8B-B14F-4D97-AF65-F5344CB8AC3E}">
-        <p14:creationId xmlns:p14="http://schemas.microsoft.com/office/powerpoint/2010/main" val="3401170566"/>
       </p:ext>
     </p:extLst>
   </p:cSld>

--- a/slides/01_what_is_ml.pptx
+++ b/slides/01_what_is_ml.pptx
@@ -5,32 +5,29 @@
     <p:sldMasterId id="2147483648" r:id="rId1"/>
   </p:sldMasterIdLst>
   <p:notesMasterIdLst>
-    <p:notesMasterId r:id="rId25"/>
+    <p:notesMasterId r:id="rId22"/>
   </p:notesMasterIdLst>
   <p:sldIdLst>
-    <p:sldId id="262" r:id="rId2"/>
-    <p:sldId id="283" r:id="rId3"/>
-    <p:sldId id="256" r:id="rId4"/>
-    <p:sldId id="257" r:id="rId5"/>
-    <p:sldId id="266" r:id="rId6"/>
-    <p:sldId id="271" r:id="rId7"/>
-    <p:sldId id="267" r:id="rId8"/>
-    <p:sldId id="272" r:id="rId9"/>
-    <p:sldId id="273" r:id="rId10"/>
-    <p:sldId id="268" r:id="rId11"/>
-    <p:sldId id="269" r:id="rId12"/>
-    <p:sldId id="274" r:id="rId13"/>
-    <p:sldId id="275" r:id="rId14"/>
-    <p:sldId id="278" r:id="rId15"/>
-    <p:sldId id="277" r:id="rId16"/>
-    <p:sldId id="279" r:id="rId17"/>
-    <p:sldId id="270" r:id="rId18"/>
-    <p:sldId id="259" r:id="rId19"/>
-    <p:sldId id="281" r:id="rId20"/>
-    <p:sldId id="282" r:id="rId21"/>
-    <p:sldId id="280" r:id="rId22"/>
-    <p:sldId id="261" r:id="rId23"/>
-    <p:sldId id="263" r:id="rId24"/>
+    <p:sldId id="256" r:id="rId2"/>
+    <p:sldId id="257" r:id="rId3"/>
+    <p:sldId id="266" r:id="rId4"/>
+    <p:sldId id="271" r:id="rId5"/>
+    <p:sldId id="267" r:id="rId6"/>
+    <p:sldId id="272" r:id="rId7"/>
+    <p:sldId id="273" r:id="rId8"/>
+    <p:sldId id="268" r:id="rId9"/>
+    <p:sldId id="269" r:id="rId10"/>
+    <p:sldId id="274" r:id="rId11"/>
+    <p:sldId id="275" r:id="rId12"/>
+    <p:sldId id="278" r:id="rId13"/>
+    <p:sldId id="277" r:id="rId14"/>
+    <p:sldId id="279" r:id="rId15"/>
+    <p:sldId id="270" r:id="rId16"/>
+    <p:sldId id="259" r:id="rId17"/>
+    <p:sldId id="281" r:id="rId18"/>
+    <p:sldId id="282" r:id="rId19"/>
+    <p:sldId id="280" r:id="rId20"/>
+    <p:sldId id="261" r:id="rId21"/>
   </p:sldIdLst>
   <p:sldSz cx="12192000" cy="6858000"/>
   <p:notesSz cx="6858000" cy="9144000"/>
@@ -219,7 +216,7 @@
           <a:p>
             <a:fld id="{DA3B5F47-542D-2F4A-A589-8990110BEF85}" type="datetimeFigureOut">
               <a:rPr lang="en-US" smtClean="0"/>
-              <a:t>4/15/26</a:t>
+              <a:t>5/4/26</a:t>
             </a:fld>
             <a:endParaRPr lang="en-US"/>
           </a:p>
@@ -530,18 +527,7 @@
           <a:bodyPr/>
           <a:lstStyle/>
           <a:p>
-            <a:r>
-              <a:rPr lang="en-US" dirty="0"/>
-              <a:t>Intros for </a:t>
-            </a:r>
-            <a:r>
-              <a:rPr lang="en-US"/>
-              <a:t>facilitators, restroom </a:t>
-            </a:r>
-            <a:r>
-              <a:rPr lang="en-US" dirty="0"/>
-              <a:t>locations, food/coffee locations, water location, people to ask questions, outlets/cords.</a:t>
-            </a:r>
+            <a:endParaRPr lang="en-US" dirty="0"/>
           </a:p>
         </p:txBody>
       </p:sp>
@@ -562,7 +548,7 @@
           <a:p>
             <a:fld id="{51D417A5-630B-DE42-860C-96747A2C59DE}" type="slidenum">
               <a:rPr lang="en-US" smtClean="0"/>
-              <a:t>1</a:t>
+              <a:t>2</a:t>
             </a:fld>
             <a:endParaRPr lang="en-US"/>
           </a:p>
@@ -571,7 +557,7 @@
     </p:spTree>
     <p:extLst>
       <p:ext uri="{BB962C8B-B14F-4D97-AF65-F5344CB8AC3E}">
-        <p14:creationId xmlns:p14="http://schemas.microsoft.com/office/powerpoint/2010/main" val="1967135812"/>
+        <p14:creationId xmlns:p14="http://schemas.microsoft.com/office/powerpoint/2010/main" val="434144401"/>
       </p:ext>
     </p:extLst>
   </p:cSld>
@@ -582,6 +568,1194 @@
 </file>
 
 <file path=ppt/notesSlides/notesSlide10.xml><?xml version="1.0" encoding="utf-8"?>
+<p:notes xmlns:a="http://schemas.openxmlformats.org/drawingml/2006/main" xmlns:r="http://schemas.openxmlformats.org/officeDocument/2006/relationships" xmlns:p="http://schemas.openxmlformats.org/presentationml/2006/main">
+  <p:cSld>
+    <p:spTree>
+      <p:nvGrpSpPr>
+        <p:cNvPr id="1" name="">
+          <a:extLst>
+            <a:ext uri="{FF2B5EF4-FFF2-40B4-BE49-F238E27FC236}">
+              <a16:creationId xmlns:a16="http://schemas.microsoft.com/office/drawing/2014/main" id="{6043E99F-4DF0-E990-9FA6-F93BB5C1C737}"/>
+            </a:ext>
+          </a:extLst>
+        </p:cNvPr>
+        <p:cNvGrpSpPr/>
+        <p:nvPr/>
+      </p:nvGrpSpPr>
+      <p:grpSpPr>
+        <a:xfrm>
+          <a:off x="0" y="0"/>
+          <a:ext cx="0" cy="0"/>
+          <a:chOff x="0" y="0"/>
+          <a:chExt cx="0" cy="0"/>
+        </a:xfrm>
+      </p:grpSpPr>
+      <p:sp>
+        <p:nvSpPr>
+          <p:cNvPr id="2" name="Slide Image Placeholder 1">
+            <a:extLst>
+              <a:ext uri="{FF2B5EF4-FFF2-40B4-BE49-F238E27FC236}">
+                <a16:creationId xmlns:a16="http://schemas.microsoft.com/office/drawing/2014/main" id="{B928A67A-9F1C-4642-0721-4CB4B1F313C0}"/>
+              </a:ext>
+            </a:extLst>
+          </p:cNvPr>
+          <p:cNvSpPr>
+            <a:spLocks noGrp="1" noRot="1" noChangeAspect="1"/>
+          </p:cNvSpPr>
+          <p:nvPr>
+            <p:ph type="sldImg"/>
+          </p:nvPr>
+        </p:nvSpPr>
+        <p:spPr/>
+      </p:sp>
+      <p:sp>
+        <p:nvSpPr>
+          <p:cNvPr id="3" name="Notes Placeholder 2">
+            <a:extLst>
+              <a:ext uri="{FF2B5EF4-FFF2-40B4-BE49-F238E27FC236}">
+                <a16:creationId xmlns:a16="http://schemas.microsoft.com/office/drawing/2014/main" id="{EEDA3326-3BC8-9786-CD72-0BBAEFD88A9C}"/>
+              </a:ext>
+            </a:extLst>
+          </p:cNvPr>
+          <p:cNvSpPr>
+            <a:spLocks noGrp="1"/>
+          </p:cNvSpPr>
+          <p:nvPr>
+            <p:ph type="body" idx="1"/>
+          </p:nvPr>
+        </p:nvSpPr>
+        <p:spPr/>
+        <p:txBody>
+          <a:bodyPr/>
+          <a:lstStyle/>
+          <a:p>
+            <a:endParaRPr lang="en-US" dirty="0"/>
+          </a:p>
+        </p:txBody>
+      </p:sp>
+      <p:sp>
+        <p:nvSpPr>
+          <p:cNvPr id="4" name="Slide Number Placeholder 3">
+            <a:extLst>
+              <a:ext uri="{FF2B5EF4-FFF2-40B4-BE49-F238E27FC236}">
+                <a16:creationId xmlns:a16="http://schemas.microsoft.com/office/drawing/2014/main" id="{7109EC6F-200C-0B7A-AAA9-88DCA0BB8DDC}"/>
+              </a:ext>
+            </a:extLst>
+          </p:cNvPr>
+          <p:cNvSpPr>
+            <a:spLocks noGrp="1"/>
+          </p:cNvSpPr>
+          <p:nvPr>
+            <p:ph type="sldNum" sz="quarter" idx="5"/>
+          </p:nvPr>
+        </p:nvSpPr>
+        <p:spPr/>
+        <p:txBody>
+          <a:bodyPr/>
+          <a:lstStyle/>
+          <a:p>
+            <a:fld id="{51D417A5-630B-DE42-860C-96747A2C59DE}" type="slidenum">
+              <a:rPr lang="en-US" smtClean="0"/>
+              <a:t>12</a:t>
+            </a:fld>
+            <a:endParaRPr lang="en-US"/>
+          </a:p>
+        </p:txBody>
+      </p:sp>
+    </p:spTree>
+    <p:extLst>
+      <p:ext uri="{BB962C8B-B14F-4D97-AF65-F5344CB8AC3E}">
+        <p14:creationId xmlns:p14="http://schemas.microsoft.com/office/powerpoint/2010/main" val="2055235757"/>
+      </p:ext>
+    </p:extLst>
+  </p:cSld>
+  <p:clrMapOvr>
+    <a:masterClrMapping/>
+  </p:clrMapOvr>
+</p:notes>
+</file>
+
+<file path=ppt/notesSlides/notesSlide11.xml><?xml version="1.0" encoding="utf-8"?>
+<p:notes xmlns:a="http://schemas.openxmlformats.org/drawingml/2006/main" xmlns:r="http://schemas.openxmlformats.org/officeDocument/2006/relationships" xmlns:p="http://schemas.openxmlformats.org/presentationml/2006/main">
+  <p:cSld>
+    <p:spTree>
+      <p:nvGrpSpPr>
+        <p:cNvPr id="1" name="">
+          <a:extLst>
+            <a:ext uri="{FF2B5EF4-FFF2-40B4-BE49-F238E27FC236}">
+              <a16:creationId xmlns:a16="http://schemas.microsoft.com/office/drawing/2014/main" id="{DB3452C9-8F93-24CF-1BBE-0F33ED898497}"/>
+            </a:ext>
+          </a:extLst>
+        </p:cNvPr>
+        <p:cNvGrpSpPr/>
+        <p:nvPr/>
+      </p:nvGrpSpPr>
+      <p:grpSpPr>
+        <a:xfrm>
+          <a:off x="0" y="0"/>
+          <a:ext cx="0" cy="0"/>
+          <a:chOff x="0" y="0"/>
+          <a:chExt cx="0" cy="0"/>
+        </a:xfrm>
+      </p:grpSpPr>
+      <p:sp>
+        <p:nvSpPr>
+          <p:cNvPr id="2" name="Slide Image Placeholder 1">
+            <a:extLst>
+              <a:ext uri="{FF2B5EF4-FFF2-40B4-BE49-F238E27FC236}">
+                <a16:creationId xmlns:a16="http://schemas.microsoft.com/office/drawing/2014/main" id="{A68A99A1-D644-E79F-313E-059C657FD2E5}"/>
+              </a:ext>
+            </a:extLst>
+          </p:cNvPr>
+          <p:cNvSpPr>
+            <a:spLocks noGrp="1" noRot="1" noChangeAspect="1"/>
+          </p:cNvSpPr>
+          <p:nvPr>
+            <p:ph type="sldImg"/>
+          </p:nvPr>
+        </p:nvSpPr>
+        <p:spPr/>
+      </p:sp>
+      <p:sp>
+        <p:nvSpPr>
+          <p:cNvPr id="3" name="Notes Placeholder 2">
+            <a:extLst>
+              <a:ext uri="{FF2B5EF4-FFF2-40B4-BE49-F238E27FC236}">
+                <a16:creationId xmlns:a16="http://schemas.microsoft.com/office/drawing/2014/main" id="{1C4341E3-87D6-485B-42B3-0E44146FD264}"/>
+              </a:ext>
+            </a:extLst>
+          </p:cNvPr>
+          <p:cNvSpPr>
+            <a:spLocks noGrp="1"/>
+          </p:cNvSpPr>
+          <p:nvPr>
+            <p:ph type="body" idx="1"/>
+          </p:nvPr>
+        </p:nvSpPr>
+        <p:spPr/>
+        <p:txBody>
+          <a:bodyPr/>
+          <a:lstStyle/>
+          <a:p>
+            <a:endParaRPr lang="en-US" dirty="0"/>
+          </a:p>
+        </p:txBody>
+      </p:sp>
+      <p:sp>
+        <p:nvSpPr>
+          <p:cNvPr id="4" name="Slide Number Placeholder 3">
+            <a:extLst>
+              <a:ext uri="{FF2B5EF4-FFF2-40B4-BE49-F238E27FC236}">
+                <a16:creationId xmlns:a16="http://schemas.microsoft.com/office/drawing/2014/main" id="{5BCFE3DE-FDBD-CF60-2BFB-56B9AA0EA053}"/>
+              </a:ext>
+            </a:extLst>
+          </p:cNvPr>
+          <p:cNvSpPr>
+            <a:spLocks noGrp="1"/>
+          </p:cNvSpPr>
+          <p:nvPr>
+            <p:ph type="sldNum" sz="quarter" idx="5"/>
+          </p:nvPr>
+        </p:nvSpPr>
+        <p:spPr/>
+        <p:txBody>
+          <a:bodyPr/>
+          <a:lstStyle/>
+          <a:p>
+            <a:fld id="{51D417A5-630B-DE42-860C-96747A2C59DE}" type="slidenum">
+              <a:rPr lang="en-US" smtClean="0"/>
+              <a:t>13</a:t>
+            </a:fld>
+            <a:endParaRPr lang="en-US"/>
+          </a:p>
+        </p:txBody>
+      </p:sp>
+    </p:spTree>
+    <p:extLst>
+      <p:ext uri="{BB962C8B-B14F-4D97-AF65-F5344CB8AC3E}">
+        <p14:creationId xmlns:p14="http://schemas.microsoft.com/office/powerpoint/2010/main" val="2099728309"/>
+      </p:ext>
+    </p:extLst>
+  </p:cSld>
+  <p:clrMapOvr>
+    <a:masterClrMapping/>
+  </p:clrMapOvr>
+</p:notes>
+</file>
+
+<file path=ppt/notesSlides/notesSlide12.xml><?xml version="1.0" encoding="utf-8"?>
+<p:notes xmlns:a="http://schemas.openxmlformats.org/drawingml/2006/main" xmlns:r="http://schemas.openxmlformats.org/officeDocument/2006/relationships" xmlns:p="http://schemas.openxmlformats.org/presentationml/2006/main">
+  <p:cSld>
+    <p:spTree>
+      <p:nvGrpSpPr>
+        <p:cNvPr id="1" name="">
+          <a:extLst>
+            <a:ext uri="{FF2B5EF4-FFF2-40B4-BE49-F238E27FC236}">
+              <a16:creationId xmlns:a16="http://schemas.microsoft.com/office/drawing/2014/main" id="{8893DE68-F2F1-E8B1-58F0-21E432825A22}"/>
+            </a:ext>
+          </a:extLst>
+        </p:cNvPr>
+        <p:cNvGrpSpPr/>
+        <p:nvPr/>
+      </p:nvGrpSpPr>
+      <p:grpSpPr>
+        <a:xfrm>
+          <a:off x="0" y="0"/>
+          <a:ext cx="0" cy="0"/>
+          <a:chOff x="0" y="0"/>
+          <a:chExt cx="0" cy="0"/>
+        </a:xfrm>
+      </p:grpSpPr>
+      <p:sp>
+        <p:nvSpPr>
+          <p:cNvPr id="2" name="Slide Image Placeholder 1">
+            <a:extLst>
+              <a:ext uri="{FF2B5EF4-FFF2-40B4-BE49-F238E27FC236}">
+                <a16:creationId xmlns:a16="http://schemas.microsoft.com/office/drawing/2014/main" id="{2B87E953-7678-DAA3-6496-5AF70A78FA17}"/>
+              </a:ext>
+            </a:extLst>
+          </p:cNvPr>
+          <p:cNvSpPr>
+            <a:spLocks noGrp="1" noRot="1" noChangeAspect="1"/>
+          </p:cNvSpPr>
+          <p:nvPr>
+            <p:ph type="sldImg"/>
+          </p:nvPr>
+        </p:nvSpPr>
+        <p:spPr/>
+      </p:sp>
+      <p:sp>
+        <p:nvSpPr>
+          <p:cNvPr id="3" name="Notes Placeholder 2">
+            <a:extLst>
+              <a:ext uri="{FF2B5EF4-FFF2-40B4-BE49-F238E27FC236}">
+                <a16:creationId xmlns:a16="http://schemas.microsoft.com/office/drawing/2014/main" id="{1A0A6E52-7687-CA2C-1E7F-1ABCEA373F8A}"/>
+              </a:ext>
+            </a:extLst>
+          </p:cNvPr>
+          <p:cNvSpPr>
+            <a:spLocks noGrp="1"/>
+          </p:cNvSpPr>
+          <p:nvPr>
+            <p:ph type="body" idx="1"/>
+          </p:nvPr>
+        </p:nvSpPr>
+        <p:spPr/>
+        <p:txBody>
+          <a:bodyPr/>
+          <a:lstStyle/>
+          <a:p>
+            <a:endParaRPr lang="en-US" dirty="0"/>
+          </a:p>
+        </p:txBody>
+      </p:sp>
+      <p:sp>
+        <p:nvSpPr>
+          <p:cNvPr id="4" name="Slide Number Placeholder 3">
+            <a:extLst>
+              <a:ext uri="{FF2B5EF4-FFF2-40B4-BE49-F238E27FC236}">
+                <a16:creationId xmlns:a16="http://schemas.microsoft.com/office/drawing/2014/main" id="{9640B730-52ED-48F7-FF8E-2E66EC842E92}"/>
+              </a:ext>
+            </a:extLst>
+          </p:cNvPr>
+          <p:cNvSpPr>
+            <a:spLocks noGrp="1"/>
+          </p:cNvSpPr>
+          <p:nvPr>
+            <p:ph type="sldNum" sz="quarter" idx="5"/>
+          </p:nvPr>
+        </p:nvSpPr>
+        <p:spPr/>
+        <p:txBody>
+          <a:bodyPr/>
+          <a:lstStyle/>
+          <a:p>
+            <a:fld id="{51D417A5-630B-DE42-860C-96747A2C59DE}" type="slidenum">
+              <a:rPr lang="en-US" smtClean="0"/>
+              <a:t>14</a:t>
+            </a:fld>
+            <a:endParaRPr lang="en-US"/>
+          </a:p>
+        </p:txBody>
+      </p:sp>
+    </p:spTree>
+    <p:extLst>
+      <p:ext uri="{BB962C8B-B14F-4D97-AF65-F5344CB8AC3E}">
+        <p14:creationId xmlns:p14="http://schemas.microsoft.com/office/powerpoint/2010/main" val="3949548667"/>
+      </p:ext>
+    </p:extLst>
+  </p:cSld>
+  <p:clrMapOvr>
+    <a:masterClrMapping/>
+  </p:clrMapOvr>
+</p:notes>
+</file>
+
+<file path=ppt/notesSlides/notesSlide13.xml><?xml version="1.0" encoding="utf-8"?>
+<p:notes xmlns:a="http://schemas.openxmlformats.org/drawingml/2006/main" xmlns:r="http://schemas.openxmlformats.org/officeDocument/2006/relationships" xmlns:p="http://schemas.openxmlformats.org/presentationml/2006/main">
+  <p:cSld>
+    <p:spTree>
+      <p:nvGrpSpPr>
+        <p:cNvPr id="1" name="">
+          <a:extLst>
+            <a:ext uri="{FF2B5EF4-FFF2-40B4-BE49-F238E27FC236}">
+              <a16:creationId xmlns:a16="http://schemas.microsoft.com/office/drawing/2014/main" id="{35F16DBE-CCD3-587A-BBCE-CDBAF3669FA6}"/>
+            </a:ext>
+          </a:extLst>
+        </p:cNvPr>
+        <p:cNvGrpSpPr/>
+        <p:nvPr/>
+      </p:nvGrpSpPr>
+      <p:grpSpPr>
+        <a:xfrm>
+          <a:off x="0" y="0"/>
+          <a:ext cx="0" cy="0"/>
+          <a:chOff x="0" y="0"/>
+          <a:chExt cx="0" cy="0"/>
+        </a:xfrm>
+      </p:grpSpPr>
+      <p:sp>
+        <p:nvSpPr>
+          <p:cNvPr id="2" name="Slide Image Placeholder 1">
+            <a:extLst>
+              <a:ext uri="{FF2B5EF4-FFF2-40B4-BE49-F238E27FC236}">
+                <a16:creationId xmlns:a16="http://schemas.microsoft.com/office/drawing/2014/main" id="{1819806D-2299-3599-9EC9-F5E6718AEADF}"/>
+              </a:ext>
+            </a:extLst>
+          </p:cNvPr>
+          <p:cNvSpPr>
+            <a:spLocks noGrp="1" noRot="1" noChangeAspect="1"/>
+          </p:cNvSpPr>
+          <p:nvPr>
+            <p:ph type="sldImg"/>
+          </p:nvPr>
+        </p:nvSpPr>
+        <p:spPr/>
+      </p:sp>
+      <p:sp>
+        <p:nvSpPr>
+          <p:cNvPr id="3" name="Notes Placeholder 2">
+            <a:extLst>
+              <a:ext uri="{FF2B5EF4-FFF2-40B4-BE49-F238E27FC236}">
+                <a16:creationId xmlns:a16="http://schemas.microsoft.com/office/drawing/2014/main" id="{4766297C-87C7-60EB-C3E0-0ECEB22BF52D}"/>
+              </a:ext>
+            </a:extLst>
+          </p:cNvPr>
+          <p:cNvSpPr>
+            <a:spLocks noGrp="1"/>
+          </p:cNvSpPr>
+          <p:nvPr>
+            <p:ph type="body" idx="1"/>
+          </p:nvPr>
+        </p:nvSpPr>
+        <p:spPr/>
+        <p:txBody>
+          <a:bodyPr/>
+          <a:lstStyle/>
+          <a:p>
+            <a:endParaRPr lang="en-US" dirty="0"/>
+          </a:p>
+        </p:txBody>
+      </p:sp>
+      <p:sp>
+        <p:nvSpPr>
+          <p:cNvPr id="4" name="Slide Number Placeholder 3">
+            <a:extLst>
+              <a:ext uri="{FF2B5EF4-FFF2-40B4-BE49-F238E27FC236}">
+                <a16:creationId xmlns:a16="http://schemas.microsoft.com/office/drawing/2014/main" id="{6B86D830-C492-B348-07A8-1F045E18B36B}"/>
+              </a:ext>
+            </a:extLst>
+          </p:cNvPr>
+          <p:cNvSpPr>
+            <a:spLocks noGrp="1"/>
+          </p:cNvSpPr>
+          <p:nvPr>
+            <p:ph type="sldNum" sz="quarter" idx="5"/>
+          </p:nvPr>
+        </p:nvSpPr>
+        <p:spPr/>
+        <p:txBody>
+          <a:bodyPr/>
+          <a:lstStyle/>
+          <a:p>
+            <a:fld id="{51D417A5-630B-DE42-860C-96747A2C59DE}" type="slidenum">
+              <a:rPr lang="en-US" smtClean="0"/>
+              <a:t>15</a:t>
+            </a:fld>
+            <a:endParaRPr lang="en-US"/>
+          </a:p>
+        </p:txBody>
+      </p:sp>
+    </p:spTree>
+    <p:extLst>
+      <p:ext uri="{BB962C8B-B14F-4D97-AF65-F5344CB8AC3E}">
+        <p14:creationId xmlns:p14="http://schemas.microsoft.com/office/powerpoint/2010/main" val="2382155648"/>
+      </p:ext>
+    </p:extLst>
+  </p:cSld>
+  <p:clrMapOvr>
+    <a:masterClrMapping/>
+  </p:clrMapOvr>
+</p:notes>
+</file>
+
+<file path=ppt/notesSlides/notesSlide2.xml><?xml version="1.0" encoding="utf-8"?>
+<p:notes xmlns:a="http://schemas.openxmlformats.org/drawingml/2006/main" xmlns:r="http://schemas.openxmlformats.org/officeDocument/2006/relationships" xmlns:p="http://schemas.openxmlformats.org/presentationml/2006/main">
+  <p:cSld>
+    <p:spTree>
+      <p:nvGrpSpPr>
+        <p:cNvPr id="1" name="">
+          <a:extLst>
+            <a:ext uri="{FF2B5EF4-FFF2-40B4-BE49-F238E27FC236}">
+              <a16:creationId xmlns:a16="http://schemas.microsoft.com/office/drawing/2014/main" id="{2212B104-8D53-E65A-A380-4557BF42159C}"/>
+            </a:ext>
+          </a:extLst>
+        </p:cNvPr>
+        <p:cNvGrpSpPr/>
+        <p:nvPr/>
+      </p:nvGrpSpPr>
+      <p:grpSpPr>
+        <a:xfrm>
+          <a:off x="0" y="0"/>
+          <a:ext cx="0" cy="0"/>
+          <a:chOff x="0" y="0"/>
+          <a:chExt cx="0" cy="0"/>
+        </a:xfrm>
+      </p:grpSpPr>
+      <p:sp>
+        <p:nvSpPr>
+          <p:cNvPr id="2" name="Slide Image Placeholder 1">
+            <a:extLst>
+              <a:ext uri="{FF2B5EF4-FFF2-40B4-BE49-F238E27FC236}">
+                <a16:creationId xmlns:a16="http://schemas.microsoft.com/office/drawing/2014/main" id="{5798AE75-9667-9E63-ED68-55A2AFB8B262}"/>
+              </a:ext>
+            </a:extLst>
+          </p:cNvPr>
+          <p:cNvSpPr>
+            <a:spLocks noGrp="1" noRot="1" noChangeAspect="1"/>
+          </p:cNvSpPr>
+          <p:nvPr>
+            <p:ph type="sldImg"/>
+          </p:nvPr>
+        </p:nvSpPr>
+        <p:spPr/>
+      </p:sp>
+      <p:sp>
+        <p:nvSpPr>
+          <p:cNvPr id="3" name="Notes Placeholder 2">
+            <a:extLst>
+              <a:ext uri="{FF2B5EF4-FFF2-40B4-BE49-F238E27FC236}">
+                <a16:creationId xmlns:a16="http://schemas.microsoft.com/office/drawing/2014/main" id="{E90569F5-33C7-013E-73EB-1CC7B992F96B}"/>
+              </a:ext>
+            </a:extLst>
+          </p:cNvPr>
+          <p:cNvSpPr>
+            <a:spLocks noGrp="1"/>
+          </p:cNvSpPr>
+          <p:nvPr>
+            <p:ph type="body" idx="1"/>
+          </p:nvPr>
+        </p:nvSpPr>
+        <p:spPr/>
+        <p:txBody>
+          <a:bodyPr/>
+          <a:lstStyle/>
+          <a:p>
+            <a:endParaRPr lang="en-US" dirty="0"/>
+          </a:p>
+        </p:txBody>
+      </p:sp>
+      <p:sp>
+        <p:nvSpPr>
+          <p:cNvPr id="4" name="Slide Number Placeholder 3">
+            <a:extLst>
+              <a:ext uri="{FF2B5EF4-FFF2-40B4-BE49-F238E27FC236}">
+                <a16:creationId xmlns:a16="http://schemas.microsoft.com/office/drawing/2014/main" id="{4AD7F396-7F67-A424-7B88-5D45EB3CFF41}"/>
+              </a:ext>
+            </a:extLst>
+          </p:cNvPr>
+          <p:cNvSpPr>
+            <a:spLocks noGrp="1"/>
+          </p:cNvSpPr>
+          <p:nvPr>
+            <p:ph type="sldNum" sz="quarter" idx="5"/>
+          </p:nvPr>
+        </p:nvSpPr>
+        <p:spPr/>
+        <p:txBody>
+          <a:bodyPr/>
+          <a:lstStyle/>
+          <a:p>
+            <a:fld id="{51D417A5-630B-DE42-860C-96747A2C59DE}" type="slidenum">
+              <a:rPr lang="en-US" smtClean="0"/>
+              <a:t>4</a:t>
+            </a:fld>
+            <a:endParaRPr lang="en-US"/>
+          </a:p>
+        </p:txBody>
+      </p:sp>
+    </p:spTree>
+    <p:extLst>
+      <p:ext uri="{BB962C8B-B14F-4D97-AF65-F5344CB8AC3E}">
+        <p14:creationId xmlns:p14="http://schemas.microsoft.com/office/powerpoint/2010/main" val="3313573905"/>
+      </p:ext>
+    </p:extLst>
+  </p:cSld>
+  <p:clrMapOvr>
+    <a:masterClrMapping/>
+  </p:clrMapOvr>
+</p:notes>
+</file>
+
+<file path=ppt/notesSlides/notesSlide3.xml><?xml version="1.0" encoding="utf-8"?>
+<p:notes xmlns:a="http://schemas.openxmlformats.org/drawingml/2006/main" xmlns:r="http://schemas.openxmlformats.org/officeDocument/2006/relationships" xmlns:p="http://schemas.openxmlformats.org/presentationml/2006/main">
+  <p:cSld>
+    <p:spTree>
+      <p:nvGrpSpPr>
+        <p:cNvPr id="1" name="">
+          <a:extLst>
+            <a:ext uri="{FF2B5EF4-FFF2-40B4-BE49-F238E27FC236}">
+              <a16:creationId xmlns:a16="http://schemas.microsoft.com/office/drawing/2014/main" id="{3248EFDA-073C-9FE8-85D0-152C0591F760}"/>
+            </a:ext>
+          </a:extLst>
+        </p:cNvPr>
+        <p:cNvGrpSpPr/>
+        <p:nvPr/>
+      </p:nvGrpSpPr>
+      <p:grpSpPr>
+        <a:xfrm>
+          <a:off x="0" y="0"/>
+          <a:ext cx="0" cy="0"/>
+          <a:chOff x="0" y="0"/>
+          <a:chExt cx="0" cy="0"/>
+        </a:xfrm>
+      </p:grpSpPr>
+      <p:sp>
+        <p:nvSpPr>
+          <p:cNvPr id="2" name="Slide Image Placeholder 1">
+            <a:extLst>
+              <a:ext uri="{FF2B5EF4-FFF2-40B4-BE49-F238E27FC236}">
+                <a16:creationId xmlns:a16="http://schemas.microsoft.com/office/drawing/2014/main" id="{891C7ABA-6396-A042-37CA-2E5276908825}"/>
+              </a:ext>
+            </a:extLst>
+          </p:cNvPr>
+          <p:cNvSpPr>
+            <a:spLocks noGrp="1" noRot="1" noChangeAspect="1"/>
+          </p:cNvSpPr>
+          <p:nvPr>
+            <p:ph type="sldImg"/>
+          </p:nvPr>
+        </p:nvSpPr>
+        <p:spPr/>
+      </p:sp>
+      <p:sp>
+        <p:nvSpPr>
+          <p:cNvPr id="3" name="Notes Placeholder 2">
+            <a:extLst>
+              <a:ext uri="{FF2B5EF4-FFF2-40B4-BE49-F238E27FC236}">
+                <a16:creationId xmlns:a16="http://schemas.microsoft.com/office/drawing/2014/main" id="{B3C8AD3D-2C07-BBB9-7BD5-FB307570C0E3}"/>
+              </a:ext>
+            </a:extLst>
+          </p:cNvPr>
+          <p:cNvSpPr>
+            <a:spLocks noGrp="1"/>
+          </p:cNvSpPr>
+          <p:nvPr>
+            <p:ph type="body" idx="1"/>
+          </p:nvPr>
+        </p:nvSpPr>
+        <p:spPr/>
+        <p:txBody>
+          <a:bodyPr/>
+          <a:lstStyle/>
+          <a:p>
+            <a:endParaRPr lang="en-US" dirty="0"/>
+          </a:p>
+        </p:txBody>
+      </p:sp>
+      <p:sp>
+        <p:nvSpPr>
+          <p:cNvPr id="4" name="Slide Number Placeholder 3">
+            <a:extLst>
+              <a:ext uri="{FF2B5EF4-FFF2-40B4-BE49-F238E27FC236}">
+                <a16:creationId xmlns:a16="http://schemas.microsoft.com/office/drawing/2014/main" id="{240C5B2D-47B3-2186-3C91-A851B8A7B631}"/>
+              </a:ext>
+            </a:extLst>
+          </p:cNvPr>
+          <p:cNvSpPr>
+            <a:spLocks noGrp="1"/>
+          </p:cNvSpPr>
+          <p:nvPr>
+            <p:ph type="sldNum" sz="quarter" idx="5"/>
+          </p:nvPr>
+        </p:nvSpPr>
+        <p:spPr/>
+        <p:txBody>
+          <a:bodyPr/>
+          <a:lstStyle/>
+          <a:p>
+            <a:fld id="{51D417A5-630B-DE42-860C-96747A2C59DE}" type="slidenum">
+              <a:rPr lang="en-US" smtClean="0"/>
+              <a:t>5</a:t>
+            </a:fld>
+            <a:endParaRPr lang="en-US"/>
+          </a:p>
+        </p:txBody>
+      </p:sp>
+    </p:spTree>
+    <p:extLst>
+      <p:ext uri="{BB962C8B-B14F-4D97-AF65-F5344CB8AC3E}">
+        <p14:creationId xmlns:p14="http://schemas.microsoft.com/office/powerpoint/2010/main" val="115186155"/>
+      </p:ext>
+    </p:extLst>
+  </p:cSld>
+  <p:clrMapOvr>
+    <a:masterClrMapping/>
+  </p:clrMapOvr>
+</p:notes>
+</file>
+
+<file path=ppt/notesSlides/notesSlide4.xml><?xml version="1.0" encoding="utf-8"?>
+<p:notes xmlns:a="http://schemas.openxmlformats.org/drawingml/2006/main" xmlns:r="http://schemas.openxmlformats.org/officeDocument/2006/relationships" xmlns:p="http://schemas.openxmlformats.org/presentationml/2006/main">
+  <p:cSld>
+    <p:spTree>
+      <p:nvGrpSpPr>
+        <p:cNvPr id="1" name="">
+          <a:extLst>
+            <a:ext uri="{FF2B5EF4-FFF2-40B4-BE49-F238E27FC236}">
+              <a16:creationId xmlns:a16="http://schemas.microsoft.com/office/drawing/2014/main" id="{2B20820B-2997-A955-3172-362DB909C29C}"/>
+            </a:ext>
+          </a:extLst>
+        </p:cNvPr>
+        <p:cNvGrpSpPr/>
+        <p:nvPr/>
+      </p:nvGrpSpPr>
+      <p:grpSpPr>
+        <a:xfrm>
+          <a:off x="0" y="0"/>
+          <a:ext cx="0" cy="0"/>
+          <a:chOff x="0" y="0"/>
+          <a:chExt cx="0" cy="0"/>
+        </a:xfrm>
+      </p:grpSpPr>
+      <p:sp>
+        <p:nvSpPr>
+          <p:cNvPr id="2" name="Slide Image Placeholder 1">
+            <a:extLst>
+              <a:ext uri="{FF2B5EF4-FFF2-40B4-BE49-F238E27FC236}">
+                <a16:creationId xmlns:a16="http://schemas.microsoft.com/office/drawing/2014/main" id="{A18DFA00-E0D1-6143-1B3D-465B73AA0FBD}"/>
+              </a:ext>
+            </a:extLst>
+          </p:cNvPr>
+          <p:cNvSpPr>
+            <a:spLocks noGrp="1" noRot="1" noChangeAspect="1"/>
+          </p:cNvSpPr>
+          <p:nvPr>
+            <p:ph type="sldImg"/>
+          </p:nvPr>
+        </p:nvSpPr>
+        <p:spPr/>
+      </p:sp>
+      <p:sp>
+        <p:nvSpPr>
+          <p:cNvPr id="3" name="Notes Placeholder 2">
+            <a:extLst>
+              <a:ext uri="{FF2B5EF4-FFF2-40B4-BE49-F238E27FC236}">
+                <a16:creationId xmlns:a16="http://schemas.microsoft.com/office/drawing/2014/main" id="{66040391-C351-AF47-DCAE-9EB4BD63A84C}"/>
+              </a:ext>
+            </a:extLst>
+          </p:cNvPr>
+          <p:cNvSpPr>
+            <a:spLocks noGrp="1"/>
+          </p:cNvSpPr>
+          <p:nvPr>
+            <p:ph type="body" idx="1"/>
+          </p:nvPr>
+        </p:nvSpPr>
+        <p:spPr/>
+        <p:txBody>
+          <a:bodyPr/>
+          <a:lstStyle/>
+          <a:p>
+            <a:endParaRPr lang="en-US" dirty="0"/>
+          </a:p>
+        </p:txBody>
+      </p:sp>
+      <p:sp>
+        <p:nvSpPr>
+          <p:cNvPr id="4" name="Slide Number Placeholder 3">
+            <a:extLst>
+              <a:ext uri="{FF2B5EF4-FFF2-40B4-BE49-F238E27FC236}">
+                <a16:creationId xmlns:a16="http://schemas.microsoft.com/office/drawing/2014/main" id="{BE4880CD-FDA7-C930-6DD1-446363D89923}"/>
+              </a:ext>
+            </a:extLst>
+          </p:cNvPr>
+          <p:cNvSpPr>
+            <a:spLocks noGrp="1"/>
+          </p:cNvSpPr>
+          <p:nvPr>
+            <p:ph type="sldNum" sz="quarter" idx="5"/>
+          </p:nvPr>
+        </p:nvSpPr>
+        <p:spPr/>
+        <p:txBody>
+          <a:bodyPr/>
+          <a:lstStyle/>
+          <a:p>
+            <a:fld id="{51D417A5-630B-DE42-860C-96747A2C59DE}" type="slidenum">
+              <a:rPr lang="en-US" smtClean="0"/>
+              <a:t>6</a:t>
+            </a:fld>
+            <a:endParaRPr lang="en-US"/>
+          </a:p>
+        </p:txBody>
+      </p:sp>
+    </p:spTree>
+    <p:extLst>
+      <p:ext uri="{BB962C8B-B14F-4D97-AF65-F5344CB8AC3E}">
+        <p14:creationId xmlns:p14="http://schemas.microsoft.com/office/powerpoint/2010/main" val="2304698872"/>
+      </p:ext>
+    </p:extLst>
+  </p:cSld>
+  <p:clrMapOvr>
+    <a:masterClrMapping/>
+  </p:clrMapOvr>
+</p:notes>
+</file>
+
+<file path=ppt/notesSlides/notesSlide5.xml><?xml version="1.0" encoding="utf-8"?>
+<p:notes xmlns:a="http://schemas.openxmlformats.org/drawingml/2006/main" xmlns:r="http://schemas.openxmlformats.org/officeDocument/2006/relationships" xmlns:p="http://schemas.openxmlformats.org/presentationml/2006/main">
+  <p:cSld>
+    <p:spTree>
+      <p:nvGrpSpPr>
+        <p:cNvPr id="1" name="">
+          <a:extLst>
+            <a:ext uri="{FF2B5EF4-FFF2-40B4-BE49-F238E27FC236}">
+              <a16:creationId xmlns:a16="http://schemas.microsoft.com/office/drawing/2014/main" id="{23EB57D9-363C-10C9-46F0-93DABE83AB8C}"/>
+            </a:ext>
+          </a:extLst>
+        </p:cNvPr>
+        <p:cNvGrpSpPr/>
+        <p:nvPr/>
+      </p:nvGrpSpPr>
+      <p:grpSpPr>
+        <a:xfrm>
+          <a:off x="0" y="0"/>
+          <a:ext cx="0" cy="0"/>
+          <a:chOff x="0" y="0"/>
+          <a:chExt cx="0" cy="0"/>
+        </a:xfrm>
+      </p:grpSpPr>
+      <p:sp>
+        <p:nvSpPr>
+          <p:cNvPr id="2" name="Slide Image Placeholder 1">
+            <a:extLst>
+              <a:ext uri="{FF2B5EF4-FFF2-40B4-BE49-F238E27FC236}">
+                <a16:creationId xmlns:a16="http://schemas.microsoft.com/office/drawing/2014/main" id="{06F9CD82-347B-8F74-C0B9-FB19B4680BEF}"/>
+              </a:ext>
+            </a:extLst>
+          </p:cNvPr>
+          <p:cNvSpPr>
+            <a:spLocks noGrp="1" noRot="1" noChangeAspect="1"/>
+          </p:cNvSpPr>
+          <p:nvPr>
+            <p:ph type="sldImg"/>
+          </p:nvPr>
+        </p:nvSpPr>
+        <p:spPr/>
+      </p:sp>
+      <p:sp>
+        <p:nvSpPr>
+          <p:cNvPr id="3" name="Notes Placeholder 2">
+            <a:extLst>
+              <a:ext uri="{FF2B5EF4-FFF2-40B4-BE49-F238E27FC236}">
+                <a16:creationId xmlns:a16="http://schemas.microsoft.com/office/drawing/2014/main" id="{FD45EE80-34E8-60D0-6644-FA46BD02A93E}"/>
+              </a:ext>
+            </a:extLst>
+          </p:cNvPr>
+          <p:cNvSpPr>
+            <a:spLocks noGrp="1"/>
+          </p:cNvSpPr>
+          <p:nvPr>
+            <p:ph type="body" idx="1"/>
+          </p:nvPr>
+        </p:nvSpPr>
+        <p:spPr/>
+        <p:txBody>
+          <a:bodyPr/>
+          <a:lstStyle/>
+          <a:p>
+            <a:endParaRPr lang="en-US" dirty="0"/>
+          </a:p>
+        </p:txBody>
+      </p:sp>
+      <p:sp>
+        <p:nvSpPr>
+          <p:cNvPr id="4" name="Slide Number Placeholder 3">
+            <a:extLst>
+              <a:ext uri="{FF2B5EF4-FFF2-40B4-BE49-F238E27FC236}">
+                <a16:creationId xmlns:a16="http://schemas.microsoft.com/office/drawing/2014/main" id="{0465D4F8-122A-024C-6EBF-6ED21F31D3AF}"/>
+              </a:ext>
+            </a:extLst>
+          </p:cNvPr>
+          <p:cNvSpPr>
+            <a:spLocks noGrp="1"/>
+          </p:cNvSpPr>
+          <p:nvPr>
+            <p:ph type="sldNum" sz="quarter" idx="5"/>
+          </p:nvPr>
+        </p:nvSpPr>
+        <p:spPr/>
+        <p:txBody>
+          <a:bodyPr/>
+          <a:lstStyle/>
+          <a:p>
+            <a:fld id="{51D417A5-630B-DE42-860C-96747A2C59DE}" type="slidenum">
+              <a:rPr lang="en-US" smtClean="0"/>
+              <a:t>7</a:t>
+            </a:fld>
+            <a:endParaRPr lang="en-US"/>
+          </a:p>
+        </p:txBody>
+      </p:sp>
+    </p:spTree>
+    <p:extLst>
+      <p:ext uri="{BB962C8B-B14F-4D97-AF65-F5344CB8AC3E}">
+        <p14:creationId xmlns:p14="http://schemas.microsoft.com/office/powerpoint/2010/main" val="1594232496"/>
+      </p:ext>
+    </p:extLst>
+  </p:cSld>
+  <p:clrMapOvr>
+    <a:masterClrMapping/>
+  </p:clrMapOvr>
+</p:notes>
+</file>
+
+<file path=ppt/notesSlides/notesSlide6.xml><?xml version="1.0" encoding="utf-8"?>
+<p:notes xmlns:a="http://schemas.openxmlformats.org/drawingml/2006/main" xmlns:r="http://schemas.openxmlformats.org/officeDocument/2006/relationships" xmlns:p="http://schemas.openxmlformats.org/presentationml/2006/main">
+  <p:cSld>
+    <p:spTree>
+      <p:nvGrpSpPr>
+        <p:cNvPr id="1" name="">
+          <a:extLst>
+            <a:ext uri="{FF2B5EF4-FFF2-40B4-BE49-F238E27FC236}">
+              <a16:creationId xmlns:a16="http://schemas.microsoft.com/office/drawing/2014/main" id="{776572F8-C5CA-015A-A061-04B4364C2582}"/>
+            </a:ext>
+          </a:extLst>
+        </p:cNvPr>
+        <p:cNvGrpSpPr/>
+        <p:nvPr/>
+      </p:nvGrpSpPr>
+      <p:grpSpPr>
+        <a:xfrm>
+          <a:off x="0" y="0"/>
+          <a:ext cx="0" cy="0"/>
+          <a:chOff x="0" y="0"/>
+          <a:chExt cx="0" cy="0"/>
+        </a:xfrm>
+      </p:grpSpPr>
+      <p:sp>
+        <p:nvSpPr>
+          <p:cNvPr id="2" name="Slide Image Placeholder 1">
+            <a:extLst>
+              <a:ext uri="{FF2B5EF4-FFF2-40B4-BE49-F238E27FC236}">
+                <a16:creationId xmlns:a16="http://schemas.microsoft.com/office/drawing/2014/main" id="{A69A2D84-9578-995E-271D-76101CDBE94E}"/>
+              </a:ext>
+            </a:extLst>
+          </p:cNvPr>
+          <p:cNvSpPr>
+            <a:spLocks noGrp="1" noRot="1" noChangeAspect="1"/>
+          </p:cNvSpPr>
+          <p:nvPr>
+            <p:ph type="sldImg"/>
+          </p:nvPr>
+        </p:nvSpPr>
+        <p:spPr/>
+      </p:sp>
+      <p:sp>
+        <p:nvSpPr>
+          <p:cNvPr id="3" name="Notes Placeholder 2">
+            <a:extLst>
+              <a:ext uri="{FF2B5EF4-FFF2-40B4-BE49-F238E27FC236}">
+                <a16:creationId xmlns:a16="http://schemas.microsoft.com/office/drawing/2014/main" id="{B8E5F1B4-54E0-3175-A49E-EE10D561CA85}"/>
+              </a:ext>
+            </a:extLst>
+          </p:cNvPr>
+          <p:cNvSpPr>
+            <a:spLocks noGrp="1"/>
+          </p:cNvSpPr>
+          <p:nvPr>
+            <p:ph type="body" idx="1"/>
+          </p:nvPr>
+        </p:nvSpPr>
+        <p:spPr/>
+        <p:txBody>
+          <a:bodyPr/>
+          <a:lstStyle/>
+          <a:p>
+            <a:endParaRPr lang="en-US" dirty="0"/>
+          </a:p>
+        </p:txBody>
+      </p:sp>
+      <p:sp>
+        <p:nvSpPr>
+          <p:cNvPr id="4" name="Slide Number Placeholder 3">
+            <a:extLst>
+              <a:ext uri="{FF2B5EF4-FFF2-40B4-BE49-F238E27FC236}">
+                <a16:creationId xmlns:a16="http://schemas.microsoft.com/office/drawing/2014/main" id="{47114645-5A4B-85D5-0FC2-9189F221117F}"/>
+              </a:ext>
+            </a:extLst>
+          </p:cNvPr>
+          <p:cNvSpPr>
+            <a:spLocks noGrp="1"/>
+          </p:cNvSpPr>
+          <p:nvPr>
+            <p:ph type="sldNum" sz="quarter" idx="5"/>
+          </p:nvPr>
+        </p:nvSpPr>
+        <p:spPr/>
+        <p:txBody>
+          <a:bodyPr/>
+          <a:lstStyle/>
+          <a:p>
+            <a:fld id="{51D417A5-630B-DE42-860C-96747A2C59DE}" type="slidenum">
+              <a:rPr lang="en-US" smtClean="0"/>
+              <a:t>8</a:t>
+            </a:fld>
+            <a:endParaRPr lang="en-US"/>
+          </a:p>
+        </p:txBody>
+      </p:sp>
+    </p:spTree>
+    <p:extLst>
+      <p:ext uri="{BB962C8B-B14F-4D97-AF65-F5344CB8AC3E}">
+        <p14:creationId xmlns:p14="http://schemas.microsoft.com/office/powerpoint/2010/main" val="876222244"/>
+      </p:ext>
+    </p:extLst>
+  </p:cSld>
+  <p:clrMapOvr>
+    <a:masterClrMapping/>
+  </p:clrMapOvr>
+</p:notes>
+</file>
+
+<file path=ppt/notesSlides/notesSlide7.xml><?xml version="1.0" encoding="utf-8"?>
+<p:notes xmlns:a="http://schemas.openxmlformats.org/drawingml/2006/main" xmlns:r="http://schemas.openxmlformats.org/officeDocument/2006/relationships" xmlns:p="http://schemas.openxmlformats.org/presentationml/2006/main">
+  <p:cSld>
+    <p:spTree>
+      <p:nvGrpSpPr>
+        <p:cNvPr id="1" name="">
+          <a:extLst>
+            <a:ext uri="{FF2B5EF4-FFF2-40B4-BE49-F238E27FC236}">
+              <a16:creationId xmlns:a16="http://schemas.microsoft.com/office/drawing/2014/main" id="{FABD452F-64BF-74F2-F487-BD98F98B1C7C}"/>
+            </a:ext>
+          </a:extLst>
+        </p:cNvPr>
+        <p:cNvGrpSpPr/>
+        <p:nvPr/>
+      </p:nvGrpSpPr>
+      <p:grpSpPr>
+        <a:xfrm>
+          <a:off x="0" y="0"/>
+          <a:ext cx="0" cy="0"/>
+          <a:chOff x="0" y="0"/>
+          <a:chExt cx="0" cy="0"/>
+        </a:xfrm>
+      </p:grpSpPr>
+      <p:sp>
+        <p:nvSpPr>
+          <p:cNvPr id="2" name="Slide Image Placeholder 1">
+            <a:extLst>
+              <a:ext uri="{FF2B5EF4-FFF2-40B4-BE49-F238E27FC236}">
+                <a16:creationId xmlns:a16="http://schemas.microsoft.com/office/drawing/2014/main" id="{C19C6FF9-96D7-6418-8D07-A6DAF6C4DB77}"/>
+              </a:ext>
+            </a:extLst>
+          </p:cNvPr>
+          <p:cNvSpPr>
+            <a:spLocks noGrp="1" noRot="1" noChangeAspect="1"/>
+          </p:cNvSpPr>
+          <p:nvPr>
+            <p:ph type="sldImg"/>
+          </p:nvPr>
+        </p:nvSpPr>
+        <p:spPr/>
+      </p:sp>
+      <p:sp>
+        <p:nvSpPr>
+          <p:cNvPr id="3" name="Notes Placeholder 2">
+            <a:extLst>
+              <a:ext uri="{FF2B5EF4-FFF2-40B4-BE49-F238E27FC236}">
+                <a16:creationId xmlns:a16="http://schemas.microsoft.com/office/drawing/2014/main" id="{F1B833FE-56CE-DD1D-7A26-191905EF5E98}"/>
+              </a:ext>
+            </a:extLst>
+          </p:cNvPr>
+          <p:cNvSpPr>
+            <a:spLocks noGrp="1"/>
+          </p:cNvSpPr>
+          <p:nvPr>
+            <p:ph type="body" idx="1"/>
+          </p:nvPr>
+        </p:nvSpPr>
+        <p:spPr/>
+        <p:txBody>
+          <a:bodyPr/>
+          <a:lstStyle/>
+          <a:p>
+            <a:endParaRPr lang="en-US" dirty="0"/>
+          </a:p>
+        </p:txBody>
+      </p:sp>
+      <p:sp>
+        <p:nvSpPr>
+          <p:cNvPr id="4" name="Slide Number Placeholder 3">
+            <a:extLst>
+              <a:ext uri="{FF2B5EF4-FFF2-40B4-BE49-F238E27FC236}">
+                <a16:creationId xmlns:a16="http://schemas.microsoft.com/office/drawing/2014/main" id="{A1C9C558-2009-7E02-742F-C2DA6FF1C69B}"/>
+              </a:ext>
+            </a:extLst>
+          </p:cNvPr>
+          <p:cNvSpPr>
+            <a:spLocks noGrp="1"/>
+          </p:cNvSpPr>
+          <p:nvPr>
+            <p:ph type="sldNum" sz="quarter" idx="5"/>
+          </p:nvPr>
+        </p:nvSpPr>
+        <p:spPr/>
+        <p:txBody>
+          <a:bodyPr/>
+          <a:lstStyle/>
+          <a:p>
+            <a:fld id="{51D417A5-630B-DE42-860C-96747A2C59DE}" type="slidenum">
+              <a:rPr lang="en-US" smtClean="0"/>
+              <a:t>9</a:t>
+            </a:fld>
+            <a:endParaRPr lang="en-US"/>
+          </a:p>
+        </p:txBody>
+      </p:sp>
+    </p:spTree>
+    <p:extLst>
+      <p:ext uri="{BB962C8B-B14F-4D97-AF65-F5344CB8AC3E}">
+        <p14:creationId xmlns:p14="http://schemas.microsoft.com/office/powerpoint/2010/main" val="2741859464"/>
+      </p:ext>
+    </p:extLst>
+  </p:cSld>
+  <p:clrMapOvr>
+    <a:masterClrMapping/>
+  </p:clrMapOvr>
+</p:notes>
+</file>
+
+<file path=ppt/notesSlides/notesSlide8.xml><?xml version="1.0" encoding="utf-8"?>
+<p:notes xmlns:a="http://schemas.openxmlformats.org/drawingml/2006/main" xmlns:r="http://schemas.openxmlformats.org/officeDocument/2006/relationships" xmlns:p="http://schemas.openxmlformats.org/presentationml/2006/main">
+  <p:cSld>
+    <p:spTree>
+      <p:nvGrpSpPr>
+        <p:cNvPr id="1" name="">
+          <a:extLst>
+            <a:ext uri="{FF2B5EF4-FFF2-40B4-BE49-F238E27FC236}">
+              <a16:creationId xmlns:a16="http://schemas.microsoft.com/office/drawing/2014/main" id="{0D034D46-8245-4F76-5529-027E0C11671C}"/>
+            </a:ext>
+          </a:extLst>
+        </p:cNvPr>
+        <p:cNvGrpSpPr/>
+        <p:nvPr/>
+      </p:nvGrpSpPr>
+      <p:grpSpPr>
+        <a:xfrm>
+          <a:off x="0" y="0"/>
+          <a:ext cx="0" cy="0"/>
+          <a:chOff x="0" y="0"/>
+          <a:chExt cx="0" cy="0"/>
+        </a:xfrm>
+      </p:grpSpPr>
+      <p:sp>
+        <p:nvSpPr>
+          <p:cNvPr id="2" name="Slide Image Placeholder 1">
+            <a:extLst>
+              <a:ext uri="{FF2B5EF4-FFF2-40B4-BE49-F238E27FC236}">
+                <a16:creationId xmlns:a16="http://schemas.microsoft.com/office/drawing/2014/main" id="{1B870BF3-80F8-D295-DD8A-98407B111B8A}"/>
+              </a:ext>
+            </a:extLst>
+          </p:cNvPr>
+          <p:cNvSpPr>
+            <a:spLocks noGrp="1" noRot="1" noChangeAspect="1"/>
+          </p:cNvSpPr>
+          <p:nvPr>
+            <p:ph type="sldImg"/>
+          </p:nvPr>
+        </p:nvSpPr>
+        <p:spPr/>
+      </p:sp>
+      <p:sp>
+        <p:nvSpPr>
+          <p:cNvPr id="3" name="Notes Placeholder 2">
+            <a:extLst>
+              <a:ext uri="{FF2B5EF4-FFF2-40B4-BE49-F238E27FC236}">
+                <a16:creationId xmlns:a16="http://schemas.microsoft.com/office/drawing/2014/main" id="{6EFD3070-0A3C-41B0-0401-6C516CB8A2D9}"/>
+              </a:ext>
+            </a:extLst>
+          </p:cNvPr>
+          <p:cNvSpPr>
+            <a:spLocks noGrp="1"/>
+          </p:cNvSpPr>
+          <p:nvPr>
+            <p:ph type="body" idx="1"/>
+          </p:nvPr>
+        </p:nvSpPr>
+        <p:spPr/>
+        <p:txBody>
+          <a:bodyPr/>
+          <a:lstStyle/>
+          <a:p>
+            <a:endParaRPr lang="en-US" dirty="0"/>
+          </a:p>
+        </p:txBody>
+      </p:sp>
+      <p:sp>
+        <p:nvSpPr>
+          <p:cNvPr id="4" name="Slide Number Placeholder 3">
+            <a:extLst>
+              <a:ext uri="{FF2B5EF4-FFF2-40B4-BE49-F238E27FC236}">
+                <a16:creationId xmlns:a16="http://schemas.microsoft.com/office/drawing/2014/main" id="{28DEDB4D-B31C-2CF3-C36A-16CB9195DDED}"/>
+              </a:ext>
+            </a:extLst>
+          </p:cNvPr>
+          <p:cNvSpPr>
+            <a:spLocks noGrp="1"/>
+          </p:cNvSpPr>
+          <p:nvPr>
+            <p:ph type="sldNum" sz="quarter" idx="5"/>
+          </p:nvPr>
+        </p:nvSpPr>
+        <p:spPr/>
+        <p:txBody>
+          <a:bodyPr/>
+          <a:lstStyle/>
+          <a:p>
+            <a:fld id="{51D417A5-630B-DE42-860C-96747A2C59DE}" type="slidenum">
+              <a:rPr lang="en-US" smtClean="0"/>
+              <a:t>10</a:t>
+            </a:fld>
+            <a:endParaRPr lang="en-US"/>
+          </a:p>
+        </p:txBody>
+      </p:sp>
+    </p:spTree>
+    <p:extLst>
+      <p:ext uri="{BB962C8B-B14F-4D97-AF65-F5344CB8AC3E}">
+        <p14:creationId xmlns:p14="http://schemas.microsoft.com/office/powerpoint/2010/main" val="1354125370"/>
+      </p:ext>
+    </p:extLst>
+  </p:cSld>
+  <p:clrMapOvr>
+    <a:masterClrMapping/>
+  </p:clrMapOvr>
+</p:notes>
+</file>
+
+<file path=ppt/notesSlides/notesSlide9.xml><?xml version="1.0" encoding="utf-8"?>
 <p:notes xmlns:a="http://schemas.openxmlformats.org/drawingml/2006/main" xmlns:r="http://schemas.openxmlformats.org/officeDocument/2006/relationships" xmlns:p="http://schemas.openxmlformats.org/presentationml/2006/main">
   <p:cSld>
     <p:spTree>
@@ -670,7 +1844,7 @@
           <a:p>
             <a:fld id="{51D417A5-630B-DE42-860C-96747A2C59DE}" type="slidenum">
               <a:rPr lang="en-US" smtClean="0"/>
-              <a:t>13</a:t>
+              <a:t>11</a:t>
             </a:fld>
             <a:endParaRPr lang="en-US"/>
           </a:p>
@@ -680,1278 +1854,6 @@
     <p:extLst>
       <p:ext uri="{BB962C8B-B14F-4D97-AF65-F5344CB8AC3E}">
         <p14:creationId xmlns:p14="http://schemas.microsoft.com/office/powerpoint/2010/main" val="2848449098"/>
-      </p:ext>
-    </p:extLst>
-  </p:cSld>
-  <p:clrMapOvr>
-    <a:masterClrMapping/>
-  </p:clrMapOvr>
-</p:notes>
-</file>
-
-<file path=ppt/notesSlides/notesSlide11.xml><?xml version="1.0" encoding="utf-8"?>
-<p:notes xmlns:a="http://schemas.openxmlformats.org/drawingml/2006/main" xmlns:r="http://schemas.openxmlformats.org/officeDocument/2006/relationships" xmlns:p="http://schemas.openxmlformats.org/presentationml/2006/main">
-  <p:cSld>
-    <p:spTree>
-      <p:nvGrpSpPr>
-        <p:cNvPr id="1" name="">
-          <a:extLst>
-            <a:ext uri="{FF2B5EF4-FFF2-40B4-BE49-F238E27FC236}">
-              <a16:creationId xmlns:a16="http://schemas.microsoft.com/office/drawing/2014/main" id="{6043E99F-4DF0-E990-9FA6-F93BB5C1C737}"/>
-            </a:ext>
-          </a:extLst>
-        </p:cNvPr>
-        <p:cNvGrpSpPr/>
-        <p:nvPr/>
-      </p:nvGrpSpPr>
-      <p:grpSpPr>
-        <a:xfrm>
-          <a:off x="0" y="0"/>
-          <a:ext cx="0" cy="0"/>
-          <a:chOff x="0" y="0"/>
-          <a:chExt cx="0" cy="0"/>
-        </a:xfrm>
-      </p:grpSpPr>
-      <p:sp>
-        <p:nvSpPr>
-          <p:cNvPr id="2" name="Slide Image Placeholder 1">
-            <a:extLst>
-              <a:ext uri="{FF2B5EF4-FFF2-40B4-BE49-F238E27FC236}">
-                <a16:creationId xmlns:a16="http://schemas.microsoft.com/office/drawing/2014/main" id="{B928A67A-9F1C-4642-0721-4CB4B1F313C0}"/>
-              </a:ext>
-            </a:extLst>
-          </p:cNvPr>
-          <p:cNvSpPr>
-            <a:spLocks noGrp="1" noRot="1" noChangeAspect="1"/>
-          </p:cNvSpPr>
-          <p:nvPr>
-            <p:ph type="sldImg"/>
-          </p:nvPr>
-        </p:nvSpPr>
-        <p:spPr/>
-      </p:sp>
-      <p:sp>
-        <p:nvSpPr>
-          <p:cNvPr id="3" name="Notes Placeholder 2">
-            <a:extLst>
-              <a:ext uri="{FF2B5EF4-FFF2-40B4-BE49-F238E27FC236}">
-                <a16:creationId xmlns:a16="http://schemas.microsoft.com/office/drawing/2014/main" id="{EEDA3326-3BC8-9786-CD72-0BBAEFD88A9C}"/>
-              </a:ext>
-            </a:extLst>
-          </p:cNvPr>
-          <p:cNvSpPr>
-            <a:spLocks noGrp="1"/>
-          </p:cNvSpPr>
-          <p:nvPr>
-            <p:ph type="body" idx="1"/>
-          </p:nvPr>
-        </p:nvSpPr>
-        <p:spPr/>
-        <p:txBody>
-          <a:bodyPr/>
-          <a:lstStyle/>
-          <a:p>
-            <a:endParaRPr lang="en-US" dirty="0"/>
-          </a:p>
-        </p:txBody>
-      </p:sp>
-      <p:sp>
-        <p:nvSpPr>
-          <p:cNvPr id="4" name="Slide Number Placeholder 3">
-            <a:extLst>
-              <a:ext uri="{FF2B5EF4-FFF2-40B4-BE49-F238E27FC236}">
-                <a16:creationId xmlns:a16="http://schemas.microsoft.com/office/drawing/2014/main" id="{7109EC6F-200C-0B7A-AAA9-88DCA0BB8DDC}"/>
-              </a:ext>
-            </a:extLst>
-          </p:cNvPr>
-          <p:cNvSpPr>
-            <a:spLocks noGrp="1"/>
-          </p:cNvSpPr>
-          <p:nvPr>
-            <p:ph type="sldNum" sz="quarter" idx="5"/>
-          </p:nvPr>
-        </p:nvSpPr>
-        <p:spPr/>
-        <p:txBody>
-          <a:bodyPr/>
-          <a:lstStyle/>
-          <a:p>
-            <a:fld id="{51D417A5-630B-DE42-860C-96747A2C59DE}" type="slidenum">
-              <a:rPr lang="en-US" smtClean="0"/>
-              <a:t>14</a:t>
-            </a:fld>
-            <a:endParaRPr lang="en-US"/>
-          </a:p>
-        </p:txBody>
-      </p:sp>
-    </p:spTree>
-    <p:extLst>
-      <p:ext uri="{BB962C8B-B14F-4D97-AF65-F5344CB8AC3E}">
-        <p14:creationId xmlns:p14="http://schemas.microsoft.com/office/powerpoint/2010/main" val="2055235757"/>
-      </p:ext>
-    </p:extLst>
-  </p:cSld>
-  <p:clrMapOvr>
-    <a:masterClrMapping/>
-  </p:clrMapOvr>
-</p:notes>
-</file>
-
-<file path=ppt/notesSlides/notesSlide12.xml><?xml version="1.0" encoding="utf-8"?>
-<p:notes xmlns:a="http://schemas.openxmlformats.org/drawingml/2006/main" xmlns:r="http://schemas.openxmlformats.org/officeDocument/2006/relationships" xmlns:p="http://schemas.openxmlformats.org/presentationml/2006/main">
-  <p:cSld>
-    <p:spTree>
-      <p:nvGrpSpPr>
-        <p:cNvPr id="1" name="">
-          <a:extLst>
-            <a:ext uri="{FF2B5EF4-FFF2-40B4-BE49-F238E27FC236}">
-              <a16:creationId xmlns:a16="http://schemas.microsoft.com/office/drawing/2014/main" id="{DB3452C9-8F93-24CF-1BBE-0F33ED898497}"/>
-            </a:ext>
-          </a:extLst>
-        </p:cNvPr>
-        <p:cNvGrpSpPr/>
-        <p:nvPr/>
-      </p:nvGrpSpPr>
-      <p:grpSpPr>
-        <a:xfrm>
-          <a:off x="0" y="0"/>
-          <a:ext cx="0" cy="0"/>
-          <a:chOff x="0" y="0"/>
-          <a:chExt cx="0" cy="0"/>
-        </a:xfrm>
-      </p:grpSpPr>
-      <p:sp>
-        <p:nvSpPr>
-          <p:cNvPr id="2" name="Slide Image Placeholder 1">
-            <a:extLst>
-              <a:ext uri="{FF2B5EF4-FFF2-40B4-BE49-F238E27FC236}">
-                <a16:creationId xmlns:a16="http://schemas.microsoft.com/office/drawing/2014/main" id="{A68A99A1-D644-E79F-313E-059C657FD2E5}"/>
-              </a:ext>
-            </a:extLst>
-          </p:cNvPr>
-          <p:cNvSpPr>
-            <a:spLocks noGrp="1" noRot="1" noChangeAspect="1"/>
-          </p:cNvSpPr>
-          <p:nvPr>
-            <p:ph type="sldImg"/>
-          </p:nvPr>
-        </p:nvSpPr>
-        <p:spPr/>
-      </p:sp>
-      <p:sp>
-        <p:nvSpPr>
-          <p:cNvPr id="3" name="Notes Placeholder 2">
-            <a:extLst>
-              <a:ext uri="{FF2B5EF4-FFF2-40B4-BE49-F238E27FC236}">
-                <a16:creationId xmlns:a16="http://schemas.microsoft.com/office/drawing/2014/main" id="{1C4341E3-87D6-485B-42B3-0E44146FD264}"/>
-              </a:ext>
-            </a:extLst>
-          </p:cNvPr>
-          <p:cNvSpPr>
-            <a:spLocks noGrp="1"/>
-          </p:cNvSpPr>
-          <p:nvPr>
-            <p:ph type="body" idx="1"/>
-          </p:nvPr>
-        </p:nvSpPr>
-        <p:spPr/>
-        <p:txBody>
-          <a:bodyPr/>
-          <a:lstStyle/>
-          <a:p>
-            <a:endParaRPr lang="en-US" dirty="0"/>
-          </a:p>
-        </p:txBody>
-      </p:sp>
-      <p:sp>
-        <p:nvSpPr>
-          <p:cNvPr id="4" name="Slide Number Placeholder 3">
-            <a:extLst>
-              <a:ext uri="{FF2B5EF4-FFF2-40B4-BE49-F238E27FC236}">
-                <a16:creationId xmlns:a16="http://schemas.microsoft.com/office/drawing/2014/main" id="{5BCFE3DE-FDBD-CF60-2BFB-56B9AA0EA053}"/>
-              </a:ext>
-            </a:extLst>
-          </p:cNvPr>
-          <p:cNvSpPr>
-            <a:spLocks noGrp="1"/>
-          </p:cNvSpPr>
-          <p:nvPr>
-            <p:ph type="sldNum" sz="quarter" idx="5"/>
-          </p:nvPr>
-        </p:nvSpPr>
-        <p:spPr/>
-        <p:txBody>
-          <a:bodyPr/>
-          <a:lstStyle/>
-          <a:p>
-            <a:fld id="{51D417A5-630B-DE42-860C-96747A2C59DE}" type="slidenum">
-              <a:rPr lang="en-US" smtClean="0"/>
-              <a:t>15</a:t>
-            </a:fld>
-            <a:endParaRPr lang="en-US"/>
-          </a:p>
-        </p:txBody>
-      </p:sp>
-    </p:spTree>
-    <p:extLst>
-      <p:ext uri="{BB962C8B-B14F-4D97-AF65-F5344CB8AC3E}">
-        <p14:creationId xmlns:p14="http://schemas.microsoft.com/office/powerpoint/2010/main" val="2099728309"/>
-      </p:ext>
-    </p:extLst>
-  </p:cSld>
-  <p:clrMapOvr>
-    <a:masterClrMapping/>
-  </p:clrMapOvr>
-</p:notes>
-</file>
-
-<file path=ppt/notesSlides/notesSlide13.xml><?xml version="1.0" encoding="utf-8"?>
-<p:notes xmlns:a="http://schemas.openxmlformats.org/drawingml/2006/main" xmlns:r="http://schemas.openxmlformats.org/officeDocument/2006/relationships" xmlns:p="http://schemas.openxmlformats.org/presentationml/2006/main">
-  <p:cSld>
-    <p:spTree>
-      <p:nvGrpSpPr>
-        <p:cNvPr id="1" name="">
-          <a:extLst>
-            <a:ext uri="{FF2B5EF4-FFF2-40B4-BE49-F238E27FC236}">
-              <a16:creationId xmlns:a16="http://schemas.microsoft.com/office/drawing/2014/main" id="{8893DE68-F2F1-E8B1-58F0-21E432825A22}"/>
-            </a:ext>
-          </a:extLst>
-        </p:cNvPr>
-        <p:cNvGrpSpPr/>
-        <p:nvPr/>
-      </p:nvGrpSpPr>
-      <p:grpSpPr>
-        <a:xfrm>
-          <a:off x="0" y="0"/>
-          <a:ext cx="0" cy="0"/>
-          <a:chOff x="0" y="0"/>
-          <a:chExt cx="0" cy="0"/>
-        </a:xfrm>
-      </p:grpSpPr>
-      <p:sp>
-        <p:nvSpPr>
-          <p:cNvPr id="2" name="Slide Image Placeholder 1">
-            <a:extLst>
-              <a:ext uri="{FF2B5EF4-FFF2-40B4-BE49-F238E27FC236}">
-                <a16:creationId xmlns:a16="http://schemas.microsoft.com/office/drawing/2014/main" id="{2B87E953-7678-DAA3-6496-5AF70A78FA17}"/>
-              </a:ext>
-            </a:extLst>
-          </p:cNvPr>
-          <p:cNvSpPr>
-            <a:spLocks noGrp="1" noRot="1" noChangeAspect="1"/>
-          </p:cNvSpPr>
-          <p:nvPr>
-            <p:ph type="sldImg"/>
-          </p:nvPr>
-        </p:nvSpPr>
-        <p:spPr/>
-      </p:sp>
-      <p:sp>
-        <p:nvSpPr>
-          <p:cNvPr id="3" name="Notes Placeholder 2">
-            <a:extLst>
-              <a:ext uri="{FF2B5EF4-FFF2-40B4-BE49-F238E27FC236}">
-                <a16:creationId xmlns:a16="http://schemas.microsoft.com/office/drawing/2014/main" id="{1A0A6E52-7687-CA2C-1E7F-1ABCEA373F8A}"/>
-              </a:ext>
-            </a:extLst>
-          </p:cNvPr>
-          <p:cNvSpPr>
-            <a:spLocks noGrp="1"/>
-          </p:cNvSpPr>
-          <p:nvPr>
-            <p:ph type="body" idx="1"/>
-          </p:nvPr>
-        </p:nvSpPr>
-        <p:spPr/>
-        <p:txBody>
-          <a:bodyPr/>
-          <a:lstStyle/>
-          <a:p>
-            <a:endParaRPr lang="en-US" dirty="0"/>
-          </a:p>
-        </p:txBody>
-      </p:sp>
-      <p:sp>
-        <p:nvSpPr>
-          <p:cNvPr id="4" name="Slide Number Placeholder 3">
-            <a:extLst>
-              <a:ext uri="{FF2B5EF4-FFF2-40B4-BE49-F238E27FC236}">
-                <a16:creationId xmlns:a16="http://schemas.microsoft.com/office/drawing/2014/main" id="{9640B730-52ED-48F7-FF8E-2E66EC842E92}"/>
-              </a:ext>
-            </a:extLst>
-          </p:cNvPr>
-          <p:cNvSpPr>
-            <a:spLocks noGrp="1"/>
-          </p:cNvSpPr>
-          <p:nvPr>
-            <p:ph type="sldNum" sz="quarter" idx="5"/>
-          </p:nvPr>
-        </p:nvSpPr>
-        <p:spPr/>
-        <p:txBody>
-          <a:bodyPr/>
-          <a:lstStyle/>
-          <a:p>
-            <a:fld id="{51D417A5-630B-DE42-860C-96747A2C59DE}" type="slidenum">
-              <a:rPr lang="en-US" smtClean="0"/>
-              <a:t>16</a:t>
-            </a:fld>
-            <a:endParaRPr lang="en-US"/>
-          </a:p>
-        </p:txBody>
-      </p:sp>
-    </p:spTree>
-    <p:extLst>
-      <p:ext uri="{BB962C8B-B14F-4D97-AF65-F5344CB8AC3E}">
-        <p14:creationId xmlns:p14="http://schemas.microsoft.com/office/powerpoint/2010/main" val="3949548667"/>
-      </p:ext>
-    </p:extLst>
-  </p:cSld>
-  <p:clrMapOvr>
-    <a:masterClrMapping/>
-  </p:clrMapOvr>
-</p:notes>
-</file>
-
-<file path=ppt/notesSlides/notesSlide14.xml><?xml version="1.0" encoding="utf-8"?>
-<p:notes xmlns:a="http://schemas.openxmlformats.org/drawingml/2006/main" xmlns:r="http://schemas.openxmlformats.org/officeDocument/2006/relationships" xmlns:p="http://schemas.openxmlformats.org/presentationml/2006/main">
-  <p:cSld>
-    <p:spTree>
-      <p:nvGrpSpPr>
-        <p:cNvPr id="1" name="">
-          <a:extLst>
-            <a:ext uri="{FF2B5EF4-FFF2-40B4-BE49-F238E27FC236}">
-              <a16:creationId xmlns:a16="http://schemas.microsoft.com/office/drawing/2014/main" id="{35F16DBE-CCD3-587A-BBCE-CDBAF3669FA6}"/>
-            </a:ext>
-          </a:extLst>
-        </p:cNvPr>
-        <p:cNvGrpSpPr/>
-        <p:nvPr/>
-      </p:nvGrpSpPr>
-      <p:grpSpPr>
-        <a:xfrm>
-          <a:off x="0" y="0"/>
-          <a:ext cx="0" cy="0"/>
-          <a:chOff x="0" y="0"/>
-          <a:chExt cx="0" cy="0"/>
-        </a:xfrm>
-      </p:grpSpPr>
-      <p:sp>
-        <p:nvSpPr>
-          <p:cNvPr id="2" name="Slide Image Placeholder 1">
-            <a:extLst>
-              <a:ext uri="{FF2B5EF4-FFF2-40B4-BE49-F238E27FC236}">
-                <a16:creationId xmlns:a16="http://schemas.microsoft.com/office/drawing/2014/main" id="{1819806D-2299-3599-9EC9-F5E6718AEADF}"/>
-              </a:ext>
-            </a:extLst>
-          </p:cNvPr>
-          <p:cNvSpPr>
-            <a:spLocks noGrp="1" noRot="1" noChangeAspect="1"/>
-          </p:cNvSpPr>
-          <p:nvPr>
-            <p:ph type="sldImg"/>
-          </p:nvPr>
-        </p:nvSpPr>
-        <p:spPr/>
-      </p:sp>
-      <p:sp>
-        <p:nvSpPr>
-          <p:cNvPr id="3" name="Notes Placeholder 2">
-            <a:extLst>
-              <a:ext uri="{FF2B5EF4-FFF2-40B4-BE49-F238E27FC236}">
-                <a16:creationId xmlns:a16="http://schemas.microsoft.com/office/drawing/2014/main" id="{4766297C-87C7-60EB-C3E0-0ECEB22BF52D}"/>
-              </a:ext>
-            </a:extLst>
-          </p:cNvPr>
-          <p:cNvSpPr>
-            <a:spLocks noGrp="1"/>
-          </p:cNvSpPr>
-          <p:nvPr>
-            <p:ph type="body" idx="1"/>
-          </p:nvPr>
-        </p:nvSpPr>
-        <p:spPr/>
-        <p:txBody>
-          <a:bodyPr/>
-          <a:lstStyle/>
-          <a:p>
-            <a:endParaRPr lang="en-US" dirty="0"/>
-          </a:p>
-        </p:txBody>
-      </p:sp>
-      <p:sp>
-        <p:nvSpPr>
-          <p:cNvPr id="4" name="Slide Number Placeholder 3">
-            <a:extLst>
-              <a:ext uri="{FF2B5EF4-FFF2-40B4-BE49-F238E27FC236}">
-                <a16:creationId xmlns:a16="http://schemas.microsoft.com/office/drawing/2014/main" id="{6B86D830-C492-B348-07A8-1F045E18B36B}"/>
-              </a:ext>
-            </a:extLst>
-          </p:cNvPr>
-          <p:cNvSpPr>
-            <a:spLocks noGrp="1"/>
-          </p:cNvSpPr>
-          <p:nvPr>
-            <p:ph type="sldNum" sz="quarter" idx="5"/>
-          </p:nvPr>
-        </p:nvSpPr>
-        <p:spPr/>
-        <p:txBody>
-          <a:bodyPr/>
-          <a:lstStyle/>
-          <a:p>
-            <a:fld id="{51D417A5-630B-DE42-860C-96747A2C59DE}" type="slidenum">
-              <a:rPr lang="en-US" smtClean="0"/>
-              <a:t>17</a:t>
-            </a:fld>
-            <a:endParaRPr lang="en-US"/>
-          </a:p>
-        </p:txBody>
-      </p:sp>
-    </p:spTree>
-    <p:extLst>
-      <p:ext uri="{BB962C8B-B14F-4D97-AF65-F5344CB8AC3E}">
-        <p14:creationId xmlns:p14="http://schemas.microsoft.com/office/powerpoint/2010/main" val="2382155648"/>
-      </p:ext>
-    </p:extLst>
-  </p:cSld>
-  <p:clrMapOvr>
-    <a:masterClrMapping/>
-  </p:clrMapOvr>
-</p:notes>
-</file>
-
-<file path=ppt/notesSlides/notesSlide2.xml><?xml version="1.0" encoding="utf-8"?>
-<p:notes xmlns:a="http://schemas.openxmlformats.org/drawingml/2006/main" xmlns:r="http://schemas.openxmlformats.org/officeDocument/2006/relationships" xmlns:p="http://schemas.openxmlformats.org/presentationml/2006/main">
-  <p:cSld>
-    <p:spTree>
-      <p:nvGrpSpPr>
-        <p:cNvPr id="1" name=""/>
-        <p:cNvGrpSpPr/>
-        <p:nvPr/>
-      </p:nvGrpSpPr>
-      <p:grpSpPr>
-        <a:xfrm>
-          <a:off x="0" y="0"/>
-          <a:ext cx="0" cy="0"/>
-          <a:chOff x="0" y="0"/>
-          <a:chExt cx="0" cy="0"/>
-        </a:xfrm>
-      </p:grpSpPr>
-      <p:sp>
-        <p:nvSpPr>
-          <p:cNvPr id="2" name="Slide Image Placeholder 1"/>
-          <p:cNvSpPr>
-            <a:spLocks noGrp="1" noRot="1" noChangeAspect="1"/>
-          </p:cNvSpPr>
-          <p:nvPr>
-            <p:ph type="sldImg"/>
-          </p:nvPr>
-        </p:nvSpPr>
-        <p:spPr/>
-      </p:sp>
-      <p:sp>
-        <p:nvSpPr>
-          <p:cNvPr id="3" name="Notes Placeholder 2"/>
-          <p:cNvSpPr>
-            <a:spLocks noGrp="1"/>
-          </p:cNvSpPr>
-          <p:nvPr>
-            <p:ph type="body" idx="1"/>
-          </p:nvPr>
-        </p:nvSpPr>
-        <p:spPr/>
-        <p:txBody>
-          <a:bodyPr/>
-          <a:lstStyle/>
-          <a:p>
-            <a:endParaRPr lang="en-US" dirty="0"/>
-          </a:p>
-        </p:txBody>
-      </p:sp>
-      <p:sp>
-        <p:nvSpPr>
-          <p:cNvPr id="4" name="Slide Number Placeholder 3"/>
-          <p:cNvSpPr>
-            <a:spLocks noGrp="1"/>
-          </p:cNvSpPr>
-          <p:nvPr>
-            <p:ph type="sldNum" sz="quarter" idx="5"/>
-          </p:nvPr>
-        </p:nvSpPr>
-        <p:spPr/>
-        <p:txBody>
-          <a:bodyPr/>
-          <a:lstStyle/>
-          <a:p>
-            <a:fld id="{51D417A5-630B-DE42-860C-96747A2C59DE}" type="slidenum">
-              <a:rPr lang="en-US" smtClean="0"/>
-              <a:t>4</a:t>
-            </a:fld>
-            <a:endParaRPr lang="en-US"/>
-          </a:p>
-        </p:txBody>
-      </p:sp>
-    </p:spTree>
-    <p:extLst>
-      <p:ext uri="{BB962C8B-B14F-4D97-AF65-F5344CB8AC3E}">
-        <p14:creationId xmlns:p14="http://schemas.microsoft.com/office/powerpoint/2010/main" val="434144401"/>
-      </p:ext>
-    </p:extLst>
-  </p:cSld>
-  <p:clrMapOvr>
-    <a:masterClrMapping/>
-  </p:clrMapOvr>
-</p:notes>
-</file>
-
-<file path=ppt/notesSlides/notesSlide3.xml><?xml version="1.0" encoding="utf-8"?>
-<p:notes xmlns:a="http://schemas.openxmlformats.org/drawingml/2006/main" xmlns:r="http://schemas.openxmlformats.org/officeDocument/2006/relationships" xmlns:p="http://schemas.openxmlformats.org/presentationml/2006/main">
-  <p:cSld>
-    <p:spTree>
-      <p:nvGrpSpPr>
-        <p:cNvPr id="1" name="">
-          <a:extLst>
-            <a:ext uri="{FF2B5EF4-FFF2-40B4-BE49-F238E27FC236}">
-              <a16:creationId xmlns:a16="http://schemas.microsoft.com/office/drawing/2014/main" id="{2212B104-8D53-E65A-A380-4557BF42159C}"/>
-            </a:ext>
-          </a:extLst>
-        </p:cNvPr>
-        <p:cNvGrpSpPr/>
-        <p:nvPr/>
-      </p:nvGrpSpPr>
-      <p:grpSpPr>
-        <a:xfrm>
-          <a:off x="0" y="0"/>
-          <a:ext cx="0" cy="0"/>
-          <a:chOff x="0" y="0"/>
-          <a:chExt cx="0" cy="0"/>
-        </a:xfrm>
-      </p:grpSpPr>
-      <p:sp>
-        <p:nvSpPr>
-          <p:cNvPr id="2" name="Slide Image Placeholder 1">
-            <a:extLst>
-              <a:ext uri="{FF2B5EF4-FFF2-40B4-BE49-F238E27FC236}">
-                <a16:creationId xmlns:a16="http://schemas.microsoft.com/office/drawing/2014/main" id="{5798AE75-9667-9E63-ED68-55A2AFB8B262}"/>
-              </a:ext>
-            </a:extLst>
-          </p:cNvPr>
-          <p:cNvSpPr>
-            <a:spLocks noGrp="1" noRot="1" noChangeAspect="1"/>
-          </p:cNvSpPr>
-          <p:nvPr>
-            <p:ph type="sldImg"/>
-          </p:nvPr>
-        </p:nvSpPr>
-        <p:spPr/>
-      </p:sp>
-      <p:sp>
-        <p:nvSpPr>
-          <p:cNvPr id="3" name="Notes Placeholder 2">
-            <a:extLst>
-              <a:ext uri="{FF2B5EF4-FFF2-40B4-BE49-F238E27FC236}">
-                <a16:creationId xmlns:a16="http://schemas.microsoft.com/office/drawing/2014/main" id="{E90569F5-33C7-013E-73EB-1CC7B992F96B}"/>
-              </a:ext>
-            </a:extLst>
-          </p:cNvPr>
-          <p:cNvSpPr>
-            <a:spLocks noGrp="1"/>
-          </p:cNvSpPr>
-          <p:nvPr>
-            <p:ph type="body" idx="1"/>
-          </p:nvPr>
-        </p:nvSpPr>
-        <p:spPr/>
-        <p:txBody>
-          <a:bodyPr/>
-          <a:lstStyle/>
-          <a:p>
-            <a:endParaRPr lang="en-US" dirty="0"/>
-          </a:p>
-        </p:txBody>
-      </p:sp>
-      <p:sp>
-        <p:nvSpPr>
-          <p:cNvPr id="4" name="Slide Number Placeholder 3">
-            <a:extLst>
-              <a:ext uri="{FF2B5EF4-FFF2-40B4-BE49-F238E27FC236}">
-                <a16:creationId xmlns:a16="http://schemas.microsoft.com/office/drawing/2014/main" id="{4AD7F396-7F67-A424-7B88-5D45EB3CFF41}"/>
-              </a:ext>
-            </a:extLst>
-          </p:cNvPr>
-          <p:cNvSpPr>
-            <a:spLocks noGrp="1"/>
-          </p:cNvSpPr>
-          <p:nvPr>
-            <p:ph type="sldNum" sz="quarter" idx="5"/>
-          </p:nvPr>
-        </p:nvSpPr>
-        <p:spPr/>
-        <p:txBody>
-          <a:bodyPr/>
-          <a:lstStyle/>
-          <a:p>
-            <a:fld id="{51D417A5-630B-DE42-860C-96747A2C59DE}" type="slidenum">
-              <a:rPr lang="en-US" smtClean="0"/>
-              <a:t>6</a:t>
-            </a:fld>
-            <a:endParaRPr lang="en-US"/>
-          </a:p>
-        </p:txBody>
-      </p:sp>
-    </p:spTree>
-    <p:extLst>
-      <p:ext uri="{BB962C8B-B14F-4D97-AF65-F5344CB8AC3E}">
-        <p14:creationId xmlns:p14="http://schemas.microsoft.com/office/powerpoint/2010/main" val="3313573905"/>
-      </p:ext>
-    </p:extLst>
-  </p:cSld>
-  <p:clrMapOvr>
-    <a:masterClrMapping/>
-  </p:clrMapOvr>
-</p:notes>
-</file>
-
-<file path=ppt/notesSlides/notesSlide4.xml><?xml version="1.0" encoding="utf-8"?>
-<p:notes xmlns:a="http://schemas.openxmlformats.org/drawingml/2006/main" xmlns:r="http://schemas.openxmlformats.org/officeDocument/2006/relationships" xmlns:p="http://schemas.openxmlformats.org/presentationml/2006/main">
-  <p:cSld>
-    <p:spTree>
-      <p:nvGrpSpPr>
-        <p:cNvPr id="1" name="">
-          <a:extLst>
-            <a:ext uri="{FF2B5EF4-FFF2-40B4-BE49-F238E27FC236}">
-              <a16:creationId xmlns:a16="http://schemas.microsoft.com/office/drawing/2014/main" id="{3248EFDA-073C-9FE8-85D0-152C0591F760}"/>
-            </a:ext>
-          </a:extLst>
-        </p:cNvPr>
-        <p:cNvGrpSpPr/>
-        <p:nvPr/>
-      </p:nvGrpSpPr>
-      <p:grpSpPr>
-        <a:xfrm>
-          <a:off x="0" y="0"/>
-          <a:ext cx="0" cy="0"/>
-          <a:chOff x="0" y="0"/>
-          <a:chExt cx="0" cy="0"/>
-        </a:xfrm>
-      </p:grpSpPr>
-      <p:sp>
-        <p:nvSpPr>
-          <p:cNvPr id="2" name="Slide Image Placeholder 1">
-            <a:extLst>
-              <a:ext uri="{FF2B5EF4-FFF2-40B4-BE49-F238E27FC236}">
-                <a16:creationId xmlns:a16="http://schemas.microsoft.com/office/drawing/2014/main" id="{891C7ABA-6396-A042-37CA-2E5276908825}"/>
-              </a:ext>
-            </a:extLst>
-          </p:cNvPr>
-          <p:cNvSpPr>
-            <a:spLocks noGrp="1" noRot="1" noChangeAspect="1"/>
-          </p:cNvSpPr>
-          <p:nvPr>
-            <p:ph type="sldImg"/>
-          </p:nvPr>
-        </p:nvSpPr>
-        <p:spPr/>
-      </p:sp>
-      <p:sp>
-        <p:nvSpPr>
-          <p:cNvPr id="3" name="Notes Placeholder 2">
-            <a:extLst>
-              <a:ext uri="{FF2B5EF4-FFF2-40B4-BE49-F238E27FC236}">
-                <a16:creationId xmlns:a16="http://schemas.microsoft.com/office/drawing/2014/main" id="{B3C8AD3D-2C07-BBB9-7BD5-FB307570C0E3}"/>
-              </a:ext>
-            </a:extLst>
-          </p:cNvPr>
-          <p:cNvSpPr>
-            <a:spLocks noGrp="1"/>
-          </p:cNvSpPr>
-          <p:nvPr>
-            <p:ph type="body" idx="1"/>
-          </p:nvPr>
-        </p:nvSpPr>
-        <p:spPr/>
-        <p:txBody>
-          <a:bodyPr/>
-          <a:lstStyle/>
-          <a:p>
-            <a:endParaRPr lang="en-US" dirty="0"/>
-          </a:p>
-        </p:txBody>
-      </p:sp>
-      <p:sp>
-        <p:nvSpPr>
-          <p:cNvPr id="4" name="Slide Number Placeholder 3">
-            <a:extLst>
-              <a:ext uri="{FF2B5EF4-FFF2-40B4-BE49-F238E27FC236}">
-                <a16:creationId xmlns:a16="http://schemas.microsoft.com/office/drawing/2014/main" id="{240C5B2D-47B3-2186-3C91-A851B8A7B631}"/>
-              </a:ext>
-            </a:extLst>
-          </p:cNvPr>
-          <p:cNvSpPr>
-            <a:spLocks noGrp="1"/>
-          </p:cNvSpPr>
-          <p:nvPr>
-            <p:ph type="sldNum" sz="quarter" idx="5"/>
-          </p:nvPr>
-        </p:nvSpPr>
-        <p:spPr/>
-        <p:txBody>
-          <a:bodyPr/>
-          <a:lstStyle/>
-          <a:p>
-            <a:fld id="{51D417A5-630B-DE42-860C-96747A2C59DE}" type="slidenum">
-              <a:rPr lang="en-US" smtClean="0"/>
-              <a:t>7</a:t>
-            </a:fld>
-            <a:endParaRPr lang="en-US"/>
-          </a:p>
-        </p:txBody>
-      </p:sp>
-    </p:spTree>
-    <p:extLst>
-      <p:ext uri="{BB962C8B-B14F-4D97-AF65-F5344CB8AC3E}">
-        <p14:creationId xmlns:p14="http://schemas.microsoft.com/office/powerpoint/2010/main" val="115186155"/>
-      </p:ext>
-    </p:extLst>
-  </p:cSld>
-  <p:clrMapOvr>
-    <a:masterClrMapping/>
-  </p:clrMapOvr>
-</p:notes>
-</file>
-
-<file path=ppt/notesSlides/notesSlide5.xml><?xml version="1.0" encoding="utf-8"?>
-<p:notes xmlns:a="http://schemas.openxmlformats.org/drawingml/2006/main" xmlns:r="http://schemas.openxmlformats.org/officeDocument/2006/relationships" xmlns:p="http://schemas.openxmlformats.org/presentationml/2006/main">
-  <p:cSld>
-    <p:spTree>
-      <p:nvGrpSpPr>
-        <p:cNvPr id="1" name="">
-          <a:extLst>
-            <a:ext uri="{FF2B5EF4-FFF2-40B4-BE49-F238E27FC236}">
-              <a16:creationId xmlns:a16="http://schemas.microsoft.com/office/drawing/2014/main" id="{2B20820B-2997-A955-3172-362DB909C29C}"/>
-            </a:ext>
-          </a:extLst>
-        </p:cNvPr>
-        <p:cNvGrpSpPr/>
-        <p:nvPr/>
-      </p:nvGrpSpPr>
-      <p:grpSpPr>
-        <a:xfrm>
-          <a:off x="0" y="0"/>
-          <a:ext cx="0" cy="0"/>
-          <a:chOff x="0" y="0"/>
-          <a:chExt cx="0" cy="0"/>
-        </a:xfrm>
-      </p:grpSpPr>
-      <p:sp>
-        <p:nvSpPr>
-          <p:cNvPr id="2" name="Slide Image Placeholder 1">
-            <a:extLst>
-              <a:ext uri="{FF2B5EF4-FFF2-40B4-BE49-F238E27FC236}">
-                <a16:creationId xmlns:a16="http://schemas.microsoft.com/office/drawing/2014/main" id="{A18DFA00-E0D1-6143-1B3D-465B73AA0FBD}"/>
-              </a:ext>
-            </a:extLst>
-          </p:cNvPr>
-          <p:cNvSpPr>
-            <a:spLocks noGrp="1" noRot="1" noChangeAspect="1"/>
-          </p:cNvSpPr>
-          <p:nvPr>
-            <p:ph type="sldImg"/>
-          </p:nvPr>
-        </p:nvSpPr>
-        <p:spPr/>
-      </p:sp>
-      <p:sp>
-        <p:nvSpPr>
-          <p:cNvPr id="3" name="Notes Placeholder 2">
-            <a:extLst>
-              <a:ext uri="{FF2B5EF4-FFF2-40B4-BE49-F238E27FC236}">
-                <a16:creationId xmlns:a16="http://schemas.microsoft.com/office/drawing/2014/main" id="{66040391-C351-AF47-DCAE-9EB4BD63A84C}"/>
-              </a:ext>
-            </a:extLst>
-          </p:cNvPr>
-          <p:cNvSpPr>
-            <a:spLocks noGrp="1"/>
-          </p:cNvSpPr>
-          <p:nvPr>
-            <p:ph type="body" idx="1"/>
-          </p:nvPr>
-        </p:nvSpPr>
-        <p:spPr/>
-        <p:txBody>
-          <a:bodyPr/>
-          <a:lstStyle/>
-          <a:p>
-            <a:endParaRPr lang="en-US" dirty="0"/>
-          </a:p>
-        </p:txBody>
-      </p:sp>
-      <p:sp>
-        <p:nvSpPr>
-          <p:cNvPr id="4" name="Slide Number Placeholder 3">
-            <a:extLst>
-              <a:ext uri="{FF2B5EF4-FFF2-40B4-BE49-F238E27FC236}">
-                <a16:creationId xmlns:a16="http://schemas.microsoft.com/office/drawing/2014/main" id="{BE4880CD-FDA7-C930-6DD1-446363D89923}"/>
-              </a:ext>
-            </a:extLst>
-          </p:cNvPr>
-          <p:cNvSpPr>
-            <a:spLocks noGrp="1"/>
-          </p:cNvSpPr>
-          <p:nvPr>
-            <p:ph type="sldNum" sz="quarter" idx="5"/>
-          </p:nvPr>
-        </p:nvSpPr>
-        <p:spPr/>
-        <p:txBody>
-          <a:bodyPr/>
-          <a:lstStyle/>
-          <a:p>
-            <a:fld id="{51D417A5-630B-DE42-860C-96747A2C59DE}" type="slidenum">
-              <a:rPr lang="en-US" smtClean="0"/>
-              <a:t>8</a:t>
-            </a:fld>
-            <a:endParaRPr lang="en-US"/>
-          </a:p>
-        </p:txBody>
-      </p:sp>
-    </p:spTree>
-    <p:extLst>
-      <p:ext uri="{BB962C8B-B14F-4D97-AF65-F5344CB8AC3E}">
-        <p14:creationId xmlns:p14="http://schemas.microsoft.com/office/powerpoint/2010/main" val="2304698872"/>
-      </p:ext>
-    </p:extLst>
-  </p:cSld>
-  <p:clrMapOvr>
-    <a:masterClrMapping/>
-  </p:clrMapOvr>
-</p:notes>
-</file>
-
-<file path=ppt/notesSlides/notesSlide6.xml><?xml version="1.0" encoding="utf-8"?>
-<p:notes xmlns:a="http://schemas.openxmlformats.org/drawingml/2006/main" xmlns:r="http://schemas.openxmlformats.org/officeDocument/2006/relationships" xmlns:p="http://schemas.openxmlformats.org/presentationml/2006/main">
-  <p:cSld>
-    <p:spTree>
-      <p:nvGrpSpPr>
-        <p:cNvPr id="1" name="">
-          <a:extLst>
-            <a:ext uri="{FF2B5EF4-FFF2-40B4-BE49-F238E27FC236}">
-              <a16:creationId xmlns:a16="http://schemas.microsoft.com/office/drawing/2014/main" id="{23EB57D9-363C-10C9-46F0-93DABE83AB8C}"/>
-            </a:ext>
-          </a:extLst>
-        </p:cNvPr>
-        <p:cNvGrpSpPr/>
-        <p:nvPr/>
-      </p:nvGrpSpPr>
-      <p:grpSpPr>
-        <a:xfrm>
-          <a:off x="0" y="0"/>
-          <a:ext cx="0" cy="0"/>
-          <a:chOff x="0" y="0"/>
-          <a:chExt cx="0" cy="0"/>
-        </a:xfrm>
-      </p:grpSpPr>
-      <p:sp>
-        <p:nvSpPr>
-          <p:cNvPr id="2" name="Slide Image Placeholder 1">
-            <a:extLst>
-              <a:ext uri="{FF2B5EF4-FFF2-40B4-BE49-F238E27FC236}">
-                <a16:creationId xmlns:a16="http://schemas.microsoft.com/office/drawing/2014/main" id="{06F9CD82-347B-8F74-C0B9-FB19B4680BEF}"/>
-              </a:ext>
-            </a:extLst>
-          </p:cNvPr>
-          <p:cNvSpPr>
-            <a:spLocks noGrp="1" noRot="1" noChangeAspect="1"/>
-          </p:cNvSpPr>
-          <p:nvPr>
-            <p:ph type="sldImg"/>
-          </p:nvPr>
-        </p:nvSpPr>
-        <p:spPr/>
-      </p:sp>
-      <p:sp>
-        <p:nvSpPr>
-          <p:cNvPr id="3" name="Notes Placeholder 2">
-            <a:extLst>
-              <a:ext uri="{FF2B5EF4-FFF2-40B4-BE49-F238E27FC236}">
-                <a16:creationId xmlns:a16="http://schemas.microsoft.com/office/drawing/2014/main" id="{FD45EE80-34E8-60D0-6644-FA46BD02A93E}"/>
-              </a:ext>
-            </a:extLst>
-          </p:cNvPr>
-          <p:cNvSpPr>
-            <a:spLocks noGrp="1"/>
-          </p:cNvSpPr>
-          <p:nvPr>
-            <p:ph type="body" idx="1"/>
-          </p:nvPr>
-        </p:nvSpPr>
-        <p:spPr/>
-        <p:txBody>
-          <a:bodyPr/>
-          <a:lstStyle/>
-          <a:p>
-            <a:endParaRPr lang="en-US" dirty="0"/>
-          </a:p>
-        </p:txBody>
-      </p:sp>
-      <p:sp>
-        <p:nvSpPr>
-          <p:cNvPr id="4" name="Slide Number Placeholder 3">
-            <a:extLst>
-              <a:ext uri="{FF2B5EF4-FFF2-40B4-BE49-F238E27FC236}">
-                <a16:creationId xmlns:a16="http://schemas.microsoft.com/office/drawing/2014/main" id="{0465D4F8-122A-024C-6EBF-6ED21F31D3AF}"/>
-              </a:ext>
-            </a:extLst>
-          </p:cNvPr>
-          <p:cNvSpPr>
-            <a:spLocks noGrp="1"/>
-          </p:cNvSpPr>
-          <p:nvPr>
-            <p:ph type="sldNum" sz="quarter" idx="5"/>
-          </p:nvPr>
-        </p:nvSpPr>
-        <p:spPr/>
-        <p:txBody>
-          <a:bodyPr/>
-          <a:lstStyle/>
-          <a:p>
-            <a:fld id="{51D417A5-630B-DE42-860C-96747A2C59DE}" type="slidenum">
-              <a:rPr lang="en-US" smtClean="0"/>
-              <a:t>9</a:t>
-            </a:fld>
-            <a:endParaRPr lang="en-US"/>
-          </a:p>
-        </p:txBody>
-      </p:sp>
-    </p:spTree>
-    <p:extLst>
-      <p:ext uri="{BB962C8B-B14F-4D97-AF65-F5344CB8AC3E}">
-        <p14:creationId xmlns:p14="http://schemas.microsoft.com/office/powerpoint/2010/main" val="1594232496"/>
-      </p:ext>
-    </p:extLst>
-  </p:cSld>
-  <p:clrMapOvr>
-    <a:masterClrMapping/>
-  </p:clrMapOvr>
-</p:notes>
-</file>
-
-<file path=ppt/notesSlides/notesSlide7.xml><?xml version="1.0" encoding="utf-8"?>
-<p:notes xmlns:a="http://schemas.openxmlformats.org/drawingml/2006/main" xmlns:r="http://schemas.openxmlformats.org/officeDocument/2006/relationships" xmlns:p="http://schemas.openxmlformats.org/presentationml/2006/main">
-  <p:cSld>
-    <p:spTree>
-      <p:nvGrpSpPr>
-        <p:cNvPr id="1" name="">
-          <a:extLst>
-            <a:ext uri="{FF2B5EF4-FFF2-40B4-BE49-F238E27FC236}">
-              <a16:creationId xmlns:a16="http://schemas.microsoft.com/office/drawing/2014/main" id="{776572F8-C5CA-015A-A061-04B4364C2582}"/>
-            </a:ext>
-          </a:extLst>
-        </p:cNvPr>
-        <p:cNvGrpSpPr/>
-        <p:nvPr/>
-      </p:nvGrpSpPr>
-      <p:grpSpPr>
-        <a:xfrm>
-          <a:off x="0" y="0"/>
-          <a:ext cx="0" cy="0"/>
-          <a:chOff x="0" y="0"/>
-          <a:chExt cx="0" cy="0"/>
-        </a:xfrm>
-      </p:grpSpPr>
-      <p:sp>
-        <p:nvSpPr>
-          <p:cNvPr id="2" name="Slide Image Placeholder 1">
-            <a:extLst>
-              <a:ext uri="{FF2B5EF4-FFF2-40B4-BE49-F238E27FC236}">
-                <a16:creationId xmlns:a16="http://schemas.microsoft.com/office/drawing/2014/main" id="{A69A2D84-9578-995E-271D-76101CDBE94E}"/>
-              </a:ext>
-            </a:extLst>
-          </p:cNvPr>
-          <p:cNvSpPr>
-            <a:spLocks noGrp="1" noRot="1" noChangeAspect="1"/>
-          </p:cNvSpPr>
-          <p:nvPr>
-            <p:ph type="sldImg"/>
-          </p:nvPr>
-        </p:nvSpPr>
-        <p:spPr/>
-      </p:sp>
-      <p:sp>
-        <p:nvSpPr>
-          <p:cNvPr id="3" name="Notes Placeholder 2">
-            <a:extLst>
-              <a:ext uri="{FF2B5EF4-FFF2-40B4-BE49-F238E27FC236}">
-                <a16:creationId xmlns:a16="http://schemas.microsoft.com/office/drawing/2014/main" id="{B8E5F1B4-54E0-3175-A49E-EE10D561CA85}"/>
-              </a:ext>
-            </a:extLst>
-          </p:cNvPr>
-          <p:cNvSpPr>
-            <a:spLocks noGrp="1"/>
-          </p:cNvSpPr>
-          <p:nvPr>
-            <p:ph type="body" idx="1"/>
-          </p:nvPr>
-        </p:nvSpPr>
-        <p:spPr/>
-        <p:txBody>
-          <a:bodyPr/>
-          <a:lstStyle/>
-          <a:p>
-            <a:endParaRPr lang="en-US" dirty="0"/>
-          </a:p>
-        </p:txBody>
-      </p:sp>
-      <p:sp>
-        <p:nvSpPr>
-          <p:cNvPr id="4" name="Slide Number Placeholder 3">
-            <a:extLst>
-              <a:ext uri="{FF2B5EF4-FFF2-40B4-BE49-F238E27FC236}">
-                <a16:creationId xmlns:a16="http://schemas.microsoft.com/office/drawing/2014/main" id="{47114645-5A4B-85D5-0FC2-9189F221117F}"/>
-              </a:ext>
-            </a:extLst>
-          </p:cNvPr>
-          <p:cNvSpPr>
-            <a:spLocks noGrp="1"/>
-          </p:cNvSpPr>
-          <p:nvPr>
-            <p:ph type="sldNum" sz="quarter" idx="5"/>
-          </p:nvPr>
-        </p:nvSpPr>
-        <p:spPr/>
-        <p:txBody>
-          <a:bodyPr/>
-          <a:lstStyle/>
-          <a:p>
-            <a:fld id="{51D417A5-630B-DE42-860C-96747A2C59DE}" type="slidenum">
-              <a:rPr lang="en-US" smtClean="0"/>
-              <a:t>10</a:t>
-            </a:fld>
-            <a:endParaRPr lang="en-US"/>
-          </a:p>
-        </p:txBody>
-      </p:sp>
-    </p:spTree>
-    <p:extLst>
-      <p:ext uri="{BB962C8B-B14F-4D97-AF65-F5344CB8AC3E}">
-        <p14:creationId xmlns:p14="http://schemas.microsoft.com/office/powerpoint/2010/main" val="876222244"/>
-      </p:ext>
-    </p:extLst>
-  </p:cSld>
-  <p:clrMapOvr>
-    <a:masterClrMapping/>
-  </p:clrMapOvr>
-</p:notes>
-</file>
-
-<file path=ppt/notesSlides/notesSlide8.xml><?xml version="1.0" encoding="utf-8"?>
-<p:notes xmlns:a="http://schemas.openxmlformats.org/drawingml/2006/main" xmlns:r="http://schemas.openxmlformats.org/officeDocument/2006/relationships" xmlns:p="http://schemas.openxmlformats.org/presentationml/2006/main">
-  <p:cSld>
-    <p:spTree>
-      <p:nvGrpSpPr>
-        <p:cNvPr id="1" name="">
-          <a:extLst>
-            <a:ext uri="{FF2B5EF4-FFF2-40B4-BE49-F238E27FC236}">
-              <a16:creationId xmlns:a16="http://schemas.microsoft.com/office/drawing/2014/main" id="{FABD452F-64BF-74F2-F487-BD98F98B1C7C}"/>
-            </a:ext>
-          </a:extLst>
-        </p:cNvPr>
-        <p:cNvGrpSpPr/>
-        <p:nvPr/>
-      </p:nvGrpSpPr>
-      <p:grpSpPr>
-        <a:xfrm>
-          <a:off x="0" y="0"/>
-          <a:ext cx="0" cy="0"/>
-          <a:chOff x="0" y="0"/>
-          <a:chExt cx="0" cy="0"/>
-        </a:xfrm>
-      </p:grpSpPr>
-      <p:sp>
-        <p:nvSpPr>
-          <p:cNvPr id="2" name="Slide Image Placeholder 1">
-            <a:extLst>
-              <a:ext uri="{FF2B5EF4-FFF2-40B4-BE49-F238E27FC236}">
-                <a16:creationId xmlns:a16="http://schemas.microsoft.com/office/drawing/2014/main" id="{C19C6FF9-96D7-6418-8D07-A6DAF6C4DB77}"/>
-              </a:ext>
-            </a:extLst>
-          </p:cNvPr>
-          <p:cNvSpPr>
-            <a:spLocks noGrp="1" noRot="1" noChangeAspect="1"/>
-          </p:cNvSpPr>
-          <p:nvPr>
-            <p:ph type="sldImg"/>
-          </p:nvPr>
-        </p:nvSpPr>
-        <p:spPr/>
-      </p:sp>
-      <p:sp>
-        <p:nvSpPr>
-          <p:cNvPr id="3" name="Notes Placeholder 2">
-            <a:extLst>
-              <a:ext uri="{FF2B5EF4-FFF2-40B4-BE49-F238E27FC236}">
-                <a16:creationId xmlns:a16="http://schemas.microsoft.com/office/drawing/2014/main" id="{F1B833FE-56CE-DD1D-7A26-191905EF5E98}"/>
-              </a:ext>
-            </a:extLst>
-          </p:cNvPr>
-          <p:cNvSpPr>
-            <a:spLocks noGrp="1"/>
-          </p:cNvSpPr>
-          <p:nvPr>
-            <p:ph type="body" idx="1"/>
-          </p:nvPr>
-        </p:nvSpPr>
-        <p:spPr/>
-        <p:txBody>
-          <a:bodyPr/>
-          <a:lstStyle/>
-          <a:p>
-            <a:endParaRPr lang="en-US" dirty="0"/>
-          </a:p>
-        </p:txBody>
-      </p:sp>
-      <p:sp>
-        <p:nvSpPr>
-          <p:cNvPr id="4" name="Slide Number Placeholder 3">
-            <a:extLst>
-              <a:ext uri="{FF2B5EF4-FFF2-40B4-BE49-F238E27FC236}">
-                <a16:creationId xmlns:a16="http://schemas.microsoft.com/office/drawing/2014/main" id="{A1C9C558-2009-7E02-742F-C2DA6FF1C69B}"/>
-              </a:ext>
-            </a:extLst>
-          </p:cNvPr>
-          <p:cNvSpPr>
-            <a:spLocks noGrp="1"/>
-          </p:cNvSpPr>
-          <p:nvPr>
-            <p:ph type="sldNum" sz="quarter" idx="5"/>
-          </p:nvPr>
-        </p:nvSpPr>
-        <p:spPr/>
-        <p:txBody>
-          <a:bodyPr/>
-          <a:lstStyle/>
-          <a:p>
-            <a:fld id="{51D417A5-630B-DE42-860C-96747A2C59DE}" type="slidenum">
-              <a:rPr lang="en-US" smtClean="0"/>
-              <a:t>11</a:t>
-            </a:fld>
-            <a:endParaRPr lang="en-US"/>
-          </a:p>
-        </p:txBody>
-      </p:sp>
-    </p:spTree>
-    <p:extLst>
-      <p:ext uri="{BB962C8B-B14F-4D97-AF65-F5344CB8AC3E}">
-        <p14:creationId xmlns:p14="http://schemas.microsoft.com/office/powerpoint/2010/main" val="2741859464"/>
-      </p:ext>
-    </p:extLst>
-  </p:cSld>
-  <p:clrMapOvr>
-    <a:masterClrMapping/>
-  </p:clrMapOvr>
-</p:notes>
-</file>
-
-<file path=ppt/notesSlides/notesSlide9.xml><?xml version="1.0" encoding="utf-8"?>
-<p:notes xmlns:a="http://schemas.openxmlformats.org/drawingml/2006/main" xmlns:r="http://schemas.openxmlformats.org/officeDocument/2006/relationships" xmlns:p="http://schemas.openxmlformats.org/presentationml/2006/main">
-  <p:cSld>
-    <p:spTree>
-      <p:nvGrpSpPr>
-        <p:cNvPr id="1" name="">
-          <a:extLst>
-            <a:ext uri="{FF2B5EF4-FFF2-40B4-BE49-F238E27FC236}">
-              <a16:creationId xmlns:a16="http://schemas.microsoft.com/office/drawing/2014/main" id="{0D034D46-8245-4F76-5529-027E0C11671C}"/>
-            </a:ext>
-          </a:extLst>
-        </p:cNvPr>
-        <p:cNvGrpSpPr/>
-        <p:nvPr/>
-      </p:nvGrpSpPr>
-      <p:grpSpPr>
-        <a:xfrm>
-          <a:off x="0" y="0"/>
-          <a:ext cx="0" cy="0"/>
-          <a:chOff x="0" y="0"/>
-          <a:chExt cx="0" cy="0"/>
-        </a:xfrm>
-      </p:grpSpPr>
-      <p:sp>
-        <p:nvSpPr>
-          <p:cNvPr id="2" name="Slide Image Placeholder 1">
-            <a:extLst>
-              <a:ext uri="{FF2B5EF4-FFF2-40B4-BE49-F238E27FC236}">
-                <a16:creationId xmlns:a16="http://schemas.microsoft.com/office/drawing/2014/main" id="{1B870BF3-80F8-D295-DD8A-98407B111B8A}"/>
-              </a:ext>
-            </a:extLst>
-          </p:cNvPr>
-          <p:cNvSpPr>
-            <a:spLocks noGrp="1" noRot="1" noChangeAspect="1"/>
-          </p:cNvSpPr>
-          <p:nvPr>
-            <p:ph type="sldImg"/>
-          </p:nvPr>
-        </p:nvSpPr>
-        <p:spPr/>
-      </p:sp>
-      <p:sp>
-        <p:nvSpPr>
-          <p:cNvPr id="3" name="Notes Placeholder 2">
-            <a:extLst>
-              <a:ext uri="{FF2B5EF4-FFF2-40B4-BE49-F238E27FC236}">
-                <a16:creationId xmlns:a16="http://schemas.microsoft.com/office/drawing/2014/main" id="{6EFD3070-0A3C-41B0-0401-6C516CB8A2D9}"/>
-              </a:ext>
-            </a:extLst>
-          </p:cNvPr>
-          <p:cNvSpPr>
-            <a:spLocks noGrp="1"/>
-          </p:cNvSpPr>
-          <p:nvPr>
-            <p:ph type="body" idx="1"/>
-          </p:nvPr>
-        </p:nvSpPr>
-        <p:spPr/>
-        <p:txBody>
-          <a:bodyPr/>
-          <a:lstStyle/>
-          <a:p>
-            <a:endParaRPr lang="en-US" dirty="0"/>
-          </a:p>
-        </p:txBody>
-      </p:sp>
-      <p:sp>
-        <p:nvSpPr>
-          <p:cNvPr id="4" name="Slide Number Placeholder 3">
-            <a:extLst>
-              <a:ext uri="{FF2B5EF4-FFF2-40B4-BE49-F238E27FC236}">
-                <a16:creationId xmlns:a16="http://schemas.microsoft.com/office/drawing/2014/main" id="{28DEDB4D-B31C-2CF3-C36A-16CB9195DDED}"/>
-              </a:ext>
-            </a:extLst>
-          </p:cNvPr>
-          <p:cNvSpPr>
-            <a:spLocks noGrp="1"/>
-          </p:cNvSpPr>
-          <p:nvPr>
-            <p:ph type="sldNum" sz="quarter" idx="5"/>
-          </p:nvPr>
-        </p:nvSpPr>
-        <p:spPr/>
-        <p:txBody>
-          <a:bodyPr/>
-          <a:lstStyle/>
-          <a:p>
-            <a:fld id="{51D417A5-630B-DE42-860C-96747A2C59DE}" type="slidenum">
-              <a:rPr lang="en-US" smtClean="0"/>
-              <a:t>12</a:t>
-            </a:fld>
-            <a:endParaRPr lang="en-US"/>
-          </a:p>
-        </p:txBody>
-      </p:sp>
-    </p:spTree>
-    <p:extLst>
-      <p:ext uri="{BB962C8B-B14F-4D97-AF65-F5344CB8AC3E}">
-        <p14:creationId xmlns:p14="http://schemas.microsoft.com/office/powerpoint/2010/main" val="1354125370"/>
       </p:ext>
     </p:extLst>
   </p:cSld>
@@ -2108,7 +2010,7 @@
           <a:p>
             <a:fld id="{19EC6F6F-998C-264C-A700-8215E11AE5BD}" type="datetimeFigureOut">
               <a:rPr lang="en-US" smtClean="0"/>
-              <a:t>4/15/26</a:t>
+              <a:t>5/4/26</a:t>
             </a:fld>
             <a:endParaRPr lang="en-US"/>
           </a:p>
@@ -2306,7 +2208,7 @@
           <a:p>
             <a:fld id="{19EC6F6F-998C-264C-A700-8215E11AE5BD}" type="datetimeFigureOut">
               <a:rPr lang="en-US" smtClean="0"/>
-              <a:t>4/15/26</a:t>
+              <a:t>5/4/26</a:t>
             </a:fld>
             <a:endParaRPr lang="en-US"/>
           </a:p>
@@ -2514,7 +2416,7 @@
           <a:p>
             <a:fld id="{19EC6F6F-998C-264C-A700-8215E11AE5BD}" type="datetimeFigureOut">
               <a:rPr lang="en-US" smtClean="0"/>
-              <a:t>4/15/26</a:t>
+              <a:t>5/4/26</a:t>
             </a:fld>
             <a:endParaRPr lang="en-US"/>
           </a:p>
@@ -2712,7 +2614,7 @@
           <a:p>
             <a:fld id="{19EC6F6F-998C-264C-A700-8215E11AE5BD}" type="datetimeFigureOut">
               <a:rPr lang="en-US" smtClean="0"/>
-              <a:t>4/15/26</a:t>
+              <a:t>5/4/26</a:t>
             </a:fld>
             <a:endParaRPr lang="en-US"/>
           </a:p>
@@ -2987,7 +2889,7 @@
           <a:p>
             <a:fld id="{19EC6F6F-998C-264C-A700-8215E11AE5BD}" type="datetimeFigureOut">
               <a:rPr lang="en-US" smtClean="0"/>
-              <a:t>4/15/26</a:t>
+              <a:t>5/4/26</a:t>
             </a:fld>
             <a:endParaRPr lang="en-US"/>
           </a:p>
@@ -3252,7 +3154,7 @@
           <a:p>
             <a:fld id="{19EC6F6F-998C-264C-A700-8215E11AE5BD}" type="datetimeFigureOut">
               <a:rPr lang="en-US" smtClean="0"/>
-              <a:t>4/15/26</a:t>
+              <a:t>5/4/26</a:t>
             </a:fld>
             <a:endParaRPr lang="en-US"/>
           </a:p>
@@ -3664,7 +3566,7 @@
           <a:p>
             <a:fld id="{19EC6F6F-998C-264C-A700-8215E11AE5BD}" type="datetimeFigureOut">
               <a:rPr lang="en-US" smtClean="0"/>
-              <a:t>4/15/26</a:t>
+              <a:t>5/4/26</a:t>
             </a:fld>
             <a:endParaRPr lang="en-US"/>
           </a:p>
@@ -3805,7 +3707,7 @@
           <a:p>
             <a:fld id="{19EC6F6F-998C-264C-A700-8215E11AE5BD}" type="datetimeFigureOut">
               <a:rPr lang="en-US" smtClean="0"/>
-              <a:t>4/15/26</a:t>
+              <a:t>5/4/26</a:t>
             </a:fld>
             <a:endParaRPr lang="en-US"/>
           </a:p>
@@ -3918,7 +3820,7 @@
           <a:p>
             <a:fld id="{19EC6F6F-998C-264C-A700-8215E11AE5BD}" type="datetimeFigureOut">
               <a:rPr lang="en-US" smtClean="0"/>
-              <a:t>4/15/26</a:t>
+              <a:t>5/4/26</a:t>
             </a:fld>
             <a:endParaRPr lang="en-US"/>
           </a:p>
@@ -4229,7 +4131,7 @@
           <a:p>
             <a:fld id="{19EC6F6F-998C-264C-A700-8215E11AE5BD}" type="datetimeFigureOut">
               <a:rPr lang="en-US" smtClean="0"/>
-              <a:t>4/15/26</a:t>
+              <a:t>5/4/26</a:t>
             </a:fld>
             <a:endParaRPr lang="en-US"/>
           </a:p>
@@ -4517,7 +4419,7 @@
           <a:p>
             <a:fld id="{19EC6F6F-998C-264C-A700-8215E11AE5BD}" type="datetimeFigureOut">
               <a:rPr lang="en-US" smtClean="0"/>
-              <a:t>4/15/26</a:t>
+              <a:t>5/4/26</a:t>
             </a:fld>
             <a:endParaRPr lang="en-US"/>
           </a:p>
@@ -4758,7 +4660,7 @@
           <a:p>
             <a:fld id="{19EC6F6F-998C-264C-A700-8215E11AE5BD}" type="datetimeFigureOut">
               <a:rPr lang="en-US" smtClean="0"/>
-              <a:t>4/15/26</a:t>
+              <a:t>5/4/26</a:t>
             </a:fld>
             <a:endParaRPr lang="en-US"/>
           </a:p>
@@ -5180,15 +5082,15 @@
           <p:cNvPr id="2" name="Title 1">
             <a:extLst>
               <a:ext uri="{FF2B5EF4-FFF2-40B4-BE49-F238E27FC236}">
-                <a16:creationId xmlns:a16="http://schemas.microsoft.com/office/drawing/2014/main" id="{153415BC-5788-8EC6-12AC-481C31DFB6A3}"/>
-              </a:ext>
-            </a:extLst>
-          </p:cNvPr>
-          <p:cNvSpPr>
-            <a:spLocks noGrp="1"/>
-          </p:cNvSpPr>
-          <p:nvPr>
-            <p:ph type="title"/>
+                <a16:creationId xmlns:a16="http://schemas.microsoft.com/office/drawing/2014/main" id="{47CF43D2-AABB-3923-A21F-941815B0A9E9}"/>
+              </a:ext>
+            </a:extLst>
+          </p:cNvPr>
+          <p:cNvSpPr>
+            <a:spLocks noGrp="1"/>
+          </p:cNvSpPr>
+          <p:nvPr>
+            <p:ph type="ctrTitle"/>
           </p:nvPr>
         </p:nvSpPr>
         <p:spPr/>
@@ -5198,560 +5100,48 @@
           <a:p>
             <a:r>
               <a:rPr lang="en-US" dirty="0"/>
-              <a:t>Welcome! Overview of the day</a:t>
-            </a:r>
-          </a:p>
-        </p:txBody>
-      </p:sp>
-      <p:sp>
-        <p:nvSpPr>
-          <p:cNvPr id="5" name="Rectangle 2">
-            <a:extLst>
-              <a:ext uri="{FF2B5EF4-FFF2-40B4-BE49-F238E27FC236}">
-                <a16:creationId xmlns:a16="http://schemas.microsoft.com/office/drawing/2014/main" id="{14D8FC64-1C09-D4A8-F07F-1CCA4249212D}"/>
-              </a:ext>
-            </a:extLst>
-          </p:cNvPr>
-          <p:cNvSpPr>
-            <a:spLocks noGrp="1" noChangeArrowheads="1"/>
-          </p:cNvSpPr>
-          <p:nvPr>
-            <p:ph idx="1"/>
-          </p:nvPr>
-        </p:nvSpPr>
-        <p:spPr bwMode="auto">
-          <a:xfrm>
-            <a:off x="838200" y="1840178"/>
-            <a:ext cx="4389343" cy="3416320"/>
-          </a:xfrm>
-          <a:prstGeom prst="rect">
-            <a:avLst/>
-          </a:prstGeom>
-          <a:noFill/>
-          <a:ln>
-            <a:noFill/>
-          </a:ln>
-          <a:effectLst/>
-          <a:extLst>
-            <a:ext uri="{909E8E84-426E-40DD-AFC4-6F175D3DCCD1}">
-              <a14:hiddenFill xmlns:a14="http://schemas.microsoft.com/office/drawing/2010/main">
-                <a:solidFill>
-                  <a:schemeClr val="accent1"/>
-                </a:solidFill>
-              </a14:hiddenFill>
-            </a:ext>
-            <a:ext uri="{91240B29-F687-4F45-9708-019B960494DF}">
-              <a14:hiddenLine xmlns:a14="http://schemas.microsoft.com/office/drawing/2010/main" w="9525">
-                <a:solidFill>
-                  <a:schemeClr val="tx1"/>
-                </a:solidFill>
-                <a:miter lim="800000"/>
-                <a:headEnd/>
-                <a:tailEnd/>
-              </a14:hiddenLine>
-            </a:ext>
-            <a:ext uri="{AF507438-7753-43E0-B8FC-AC1667EBCBE1}">
-              <a14:hiddenEffects xmlns:a14="http://schemas.microsoft.com/office/drawing/2010/main">
-                <a:effectLst>
-                  <a:outerShdw dist="35921" dir="2700000" algn="ctr" rotWithShape="0">
-                    <a:schemeClr val="bg2"/>
-                  </a:outerShdw>
-                </a:effectLst>
-              </a14:hiddenEffects>
-            </a:ext>
-          </a:extLst>
-        </p:spPr>
-        <p:txBody>
-          <a:bodyPr vert="horz" wrap="none" lIns="91440" tIns="45720" rIns="91440" bIns="45720" numCol="1" anchor="ctr" anchorCtr="0" compatLnSpc="1">
-            <a:prstTxWarp prst="textNoShape">
-              <a:avLst/>
-            </a:prstTxWarp>
-            <a:spAutoFit/>
-          </a:bodyPr>
-          <a:lstStyle/>
-          <a:p>
-            <a:pPr marL="0" marR="0" lvl="0" indent="0" algn="l" defTabSz="914400" rtl="0" eaLnBrk="0" fontAlgn="base" latinLnBrk="0" hangingPunct="0">
-              <a:lnSpc>
-                <a:spcPct val="100000"/>
-              </a:lnSpc>
-              <a:spcBef>
-                <a:spcPct val="0"/>
-              </a:spcBef>
-              <a:spcAft>
-                <a:spcPct val="0"/>
-              </a:spcAft>
-              <a:buClrTx/>
-              <a:buSzTx/>
-              <a:buFontTx/>
-              <a:buNone/>
-              <a:tabLst/>
-            </a:pPr>
-            <a:r>
-              <a:rPr kumimoji="0" lang="en-US" altLang="en-US" sz="2400" b="0" i="0" u="none" strike="noStrike" cap="none" normalizeH="0" baseline="0" dirty="0">
-                <a:ln>
-                  <a:noFill/>
-                </a:ln>
-                <a:solidFill>
-                  <a:srgbClr val="1F1F1F"/>
-                </a:solidFill>
-                <a:effectLst/>
-                <a:latin typeface="Google Sans"/>
-              </a:rPr>
-              <a:t>8:45-9 Check-in </a:t>
-            </a:r>
-          </a:p>
-          <a:p>
-            <a:pPr marL="0" marR="0" lvl="0" indent="0" algn="l" defTabSz="914400" rtl="0" eaLnBrk="0" fontAlgn="base" latinLnBrk="0" hangingPunct="0">
-              <a:lnSpc>
-                <a:spcPct val="100000"/>
-              </a:lnSpc>
-              <a:spcBef>
-                <a:spcPct val="0"/>
-              </a:spcBef>
-              <a:spcAft>
-                <a:spcPct val="0"/>
-              </a:spcAft>
-              <a:buClrTx/>
-              <a:buSzTx/>
-              <a:buFontTx/>
-              <a:buNone/>
-              <a:tabLst/>
-            </a:pPr>
-            <a:r>
-              <a:rPr kumimoji="0" lang="en-US" altLang="en-US" sz="2400" b="0" i="0" u="none" strike="noStrike" cap="none" normalizeH="0" baseline="0" dirty="0">
-                <a:ln>
-                  <a:noFill/>
-                </a:ln>
-                <a:solidFill>
-                  <a:srgbClr val="1F1F1F"/>
-                </a:solidFill>
-                <a:effectLst/>
-                <a:latin typeface="Google Sans"/>
-              </a:rPr>
-              <a:t>9-10:00 Session 1 </a:t>
-            </a:r>
-          </a:p>
-          <a:p>
-            <a:pPr marL="0" marR="0" lvl="0" indent="0" algn="l" defTabSz="914400" rtl="0" eaLnBrk="0" fontAlgn="base" latinLnBrk="0" hangingPunct="0">
-              <a:lnSpc>
-                <a:spcPct val="100000"/>
-              </a:lnSpc>
-              <a:spcBef>
-                <a:spcPct val="0"/>
-              </a:spcBef>
-              <a:spcAft>
-                <a:spcPct val="0"/>
-              </a:spcAft>
-              <a:buClrTx/>
-              <a:buSzTx/>
-              <a:buFontTx/>
-              <a:buNone/>
-              <a:tabLst/>
-            </a:pPr>
-            <a:r>
-              <a:rPr kumimoji="0" lang="en-US" altLang="en-US" sz="2400" b="0" i="0" u="none" strike="noStrike" cap="none" normalizeH="0" baseline="0" dirty="0">
-                <a:ln>
-                  <a:noFill/>
-                </a:ln>
-                <a:solidFill>
-                  <a:srgbClr val="1F1F1F"/>
-                </a:solidFill>
-                <a:effectLst/>
-                <a:latin typeface="Google Sans"/>
-              </a:rPr>
-              <a:t>10:00-10:15 Break </a:t>
-            </a:r>
-          </a:p>
-          <a:p>
-            <a:pPr marL="0" marR="0" lvl="0" indent="0" algn="l" defTabSz="914400" rtl="0" eaLnBrk="0" fontAlgn="base" latinLnBrk="0" hangingPunct="0">
-              <a:lnSpc>
-                <a:spcPct val="100000"/>
-              </a:lnSpc>
-              <a:spcBef>
-                <a:spcPct val="0"/>
-              </a:spcBef>
-              <a:spcAft>
-                <a:spcPct val="0"/>
-              </a:spcAft>
-              <a:buClrTx/>
-              <a:buSzTx/>
-              <a:buFontTx/>
-              <a:buNone/>
-              <a:tabLst/>
-            </a:pPr>
-            <a:r>
-              <a:rPr kumimoji="0" lang="en-US" altLang="en-US" sz="2400" b="0" i="0" u="none" strike="noStrike" cap="none" normalizeH="0" baseline="0" dirty="0">
-                <a:ln>
-                  <a:noFill/>
-                </a:ln>
-                <a:solidFill>
-                  <a:srgbClr val="1F1F1F"/>
-                </a:solidFill>
-                <a:effectLst/>
-                <a:latin typeface="Google Sans"/>
-              </a:rPr>
-              <a:t>10:15-11:30 Session 1 / Session 2 </a:t>
-            </a:r>
-          </a:p>
-          <a:p>
-            <a:pPr marL="0" marR="0" lvl="0" indent="0" algn="l" defTabSz="914400" rtl="0" eaLnBrk="0" fontAlgn="base" latinLnBrk="0" hangingPunct="0">
-              <a:lnSpc>
-                <a:spcPct val="100000"/>
-              </a:lnSpc>
-              <a:spcBef>
-                <a:spcPct val="0"/>
-              </a:spcBef>
-              <a:spcAft>
-                <a:spcPct val="0"/>
-              </a:spcAft>
-              <a:buClrTx/>
-              <a:buSzTx/>
-              <a:buFontTx/>
-              <a:buNone/>
-              <a:tabLst/>
-            </a:pPr>
-            <a:r>
-              <a:rPr kumimoji="0" lang="en-US" altLang="en-US" sz="2400" b="0" i="0" u="none" strike="noStrike" cap="none" normalizeH="0" baseline="0" dirty="0">
-                <a:ln>
-                  <a:noFill/>
-                </a:ln>
-                <a:solidFill>
-                  <a:srgbClr val="1F1F1F"/>
-                </a:solidFill>
-                <a:effectLst/>
-                <a:latin typeface="Google Sans"/>
-              </a:rPr>
-              <a:t>11:30-12:30 Lunch </a:t>
-            </a:r>
-          </a:p>
-          <a:p>
-            <a:pPr marL="0" marR="0" lvl="0" indent="0" algn="l" defTabSz="914400" rtl="0" eaLnBrk="0" fontAlgn="base" latinLnBrk="0" hangingPunct="0">
-              <a:lnSpc>
-                <a:spcPct val="100000"/>
-              </a:lnSpc>
-              <a:spcBef>
-                <a:spcPct val="0"/>
-              </a:spcBef>
-              <a:spcAft>
-                <a:spcPct val="0"/>
-              </a:spcAft>
-              <a:buClrTx/>
-              <a:buSzTx/>
-              <a:buFontTx/>
-              <a:buNone/>
-              <a:tabLst/>
-            </a:pPr>
-            <a:r>
-              <a:rPr kumimoji="0" lang="en-US" altLang="en-US" sz="2400" b="0" i="0" u="none" strike="noStrike" cap="none" normalizeH="0" baseline="0" dirty="0">
-                <a:ln>
-                  <a:noFill/>
-                </a:ln>
-                <a:solidFill>
-                  <a:srgbClr val="1F1F1F"/>
-                </a:solidFill>
-                <a:effectLst/>
-                <a:latin typeface="Google Sans"/>
-              </a:rPr>
-              <a:t>12:30-2:00 Session 2 </a:t>
-            </a:r>
-          </a:p>
-          <a:p>
-            <a:pPr marL="0" marR="0" lvl="0" indent="0" algn="l" defTabSz="914400" rtl="0" eaLnBrk="0" fontAlgn="base" latinLnBrk="0" hangingPunct="0">
-              <a:lnSpc>
-                <a:spcPct val="100000"/>
-              </a:lnSpc>
-              <a:spcBef>
-                <a:spcPct val="0"/>
-              </a:spcBef>
-              <a:spcAft>
-                <a:spcPct val="0"/>
-              </a:spcAft>
-              <a:buClrTx/>
-              <a:buSzTx/>
-              <a:buFontTx/>
-              <a:buNone/>
-              <a:tabLst/>
-            </a:pPr>
-            <a:r>
-              <a:rPr kumimoji="0" lang="en-US" altLang="en-US" sz="2400" b="0" i="0" u="none" strike="noStrike" cap="none" normalizeH="0" baseline="0" dirty="0">
-                <a:ln>
-                  <a:noFill/>
-                </a:ln>
-                <a:solidFill>
-                  <a:srgbClr val="1F1F1F"/>
-                </a:solidFill>
-                <a:effectLst/>
-                <a:latin typeface="Google Sans"/>
-              </a:rPr>
-              <a:t>2:00-2:15 Break </a:t>
-            </a:r>
-          </a:p>
-          <a:p>
-            <a:pPr marL="0" marR="0" lvl="0" indent="0" algn="l" defTabSz="914400" rtl="0" eaLnBrk="0" fontAlgn="base" latinLnBrk="0" hangingPunct="0">
-              <a:lnSpc>
-                <a:spcPct val="100000"/>
-              </a:lnSpc>
-              <a:spcBef>
-                <a:spcPct val="0"/>
-              </a:spcBef>
-              <a:spcAft>
-                <a:spcPct val="0"/>
-              </a:spcAft>
-              <a:buClrTx/>
-              <a:buSzTx/>
-              <a:buFontTx/>
-              <a:buNone/>
-              <a:tabLst/>
-            </a:pPr>
-            <a:r>
-              <a:rPr kumimoji="0" lang="en-US" altLang="en-US" sz="2400" b="0" i="0" u="none" strike="noStrike" cap="none" normalizeH="0" baseline="0" dirty="0">
-                <a:ln>
-                  <a:noFill/>
-                </a:ln>
-                <a:solidFill>
-                  <a:srgbClr val="1F1F1F"/>
-                </a:solidFill>
-                <a:effectLst/>
-                <a:latin typeface="Google Sans"/>
-              </a:rPr>
-              <a:t>2:15-4:00 Session 3 </a:t>
-            </a:r>
-          </a:p>
-          <a:p>
-            <a:pPr marL="0" marR="0" lvl="0" indent="0" algn="l" defTabSz="914400" rtl="0" eaLnBrk="0" fontAlgn="base" latinLnBrk="0" hangingPunct="0">
-              <a:lnSpc>
-                <a:spcPct val="100000"/>
-              </a:lnSpc>
-              <a:spcBef>
-                <a:spcPct val="0"/>
-              </a:spcBef>
-              <a:spcAft>
-                <a:spcPct val="0"/>
-              </a:spcAft>
-              <a:buClrTx/>
-              <a:buSzTx/>
-              <a:buFontTx/>
-              <a:buNone/>
-              <a:tabLst/>
-            </a:pPr>
-            <a:r>
-              <a:rPr kumimoji="0" lang="en-US" altLang="en-US" sz="2400" b="0" i="0" u="none" strike="noStrike" cap="none" normalizeH="0" baseline="0" dirty="0">
-                <a:ln>
-                  <a:noFill/>
-                </a:ln>
-                <a:solidFill>
-                  <a:srgbClr val="1F1F1F"/>
-                </a:solidFill>
-                <a:effectLst/>
-                <a:latin typeface="Google Sans"/>
-              </a:rPr>
-              <a:t>4:00ish Wrap up </a:t>
-            </a:r>
-          </a:p>
-        </p:txBody>
-      </p:sp>
-      <p:sp>
-        <p:nvSpPr>
-          <p:cNvPr id="6" name="TextBox 5">
-            <a:extLst>
-              <a:ext uri="{FF2B5EF4-FFF2-40B4-BE49-F238E27FC236}">
-                <a16:creationId xmlns:a16="http://schemas.microsoft.com/office/drawing/2014/main" id="{7852A3A4-B37A-F280-7B2A-7712ADD28C15}"/>
-              </a:ext>
-            </a:extLst>
-          </p:cNvPr>
-          <p:cNvSpPr txBox="1"/>
-          <p:nvPr/>
+              <a:t>What is machine learning?</a:t>
+            </a:r>
+          </a:p>
+        </p:txBody>
+      </p:sp>
+      <p:sp>
+        <p:nvSpPr>
+          <p:cNvPr id="3" name="Subtitle 2">
+            <a:extLst>
+              <a:ext uri="{FF2B5EF4-FFF2-40B4-BE49-F238E27FC236}">
+                <a16:creationId xmlns:a16="http://schemas.microsoft.com/office/drawing/2014/main" id="{9E839DD3-C76D-C5AD-AC5D-13F2B28B5729}"/>
+              </a:ext>
+            </a:extLst>
+          </p:cNvPr>
+          <p:cNvSpPr>
+            <a:spLocks noGrp="1"/>
+          </p:cNvSpPr>
+          <p:nvPr>
+            <p:ph type="subTitle" idx="1"/>
+          </p:nvPr>
         </p:nvSpPr>
         <p:spPr>
           <a:xfrm>
-            <a:off x="6749507" y="1690688"/>
-            <a:ext cx="4604293" cy="4062651"/>
+            <a:off x="1524000" y="3602038"/>
+            <a:ext cx="9144000" cy="472251"/>
           </a:xfrm>
-          <a:prstGeom prst="rect">
-            <a:avLst/>
-          </a:prstGeom>
-          <a:noFill/>
         </p:spPr>
         <p:txBody>
-          <a:bodyPr wrap="square" rtlCol="0">
-            <a:spAutoFit/>
-          </a:bodyPr>
-          <a:lstStyle/>
-          <a:p>
-            <a:pPr lvl="0" eaLnBrk="0" fontAlgn="base" hangingPunct="0">
-              <a:spcBef>
-                <a:spcPct val="0"/>
-              </a:spcBef>
-              <a:spcAft>
-                <a:spcPct val="0"/>
-              </a:spcAft>
-            </a:pPr>
-            <a:r>
-              <a:rPr lang="en-US" altLang="en-US" sz="2000" b="1" dirty="0">
-                <a:solidFill>
-                  <a:srgbClr val="1F1F1F"/>
-                </a:solidFill>
-                <a:latin typeface="Google Sans"/>
-              </a:rPr>
-              <a:t>Session 1</a:t>
-            </a:r>
-            <a:r>
-              <a:rPr lang="en-US" altLang="en-US" sz="2000" dirty="0">
-                <a:solidFill>
-                  <a:srgbClr val="1F1F1F"/>
-                </a:solidFill>
-                <a:latin typeface="Google Sans"/>
-              </a:rPr>
-              <a:t>: What is machine learning, classification and regression trees, and cross-validation methods  </a:t>
-            </a:r>
-          </a:p>
-          <a:p>
-            <a:pPr lvl="0" eaLnBrk="0" fontAlgn="base" hangingPunct="0">
-              <a:spcBef>
-                <a:spcPct val="0"/>
-              </a:spcBef>
-              <a:spcAft>
-                <a:spcPct val="0"/>
-              </a:spcAft>
-            </a:pPr>
-            <a:endParaRPr lang="en-US" altLang="en-US" sz="2000" dirty="0">
-              <a:solidFill>
-                <a:srgbClr val="1F1F1F"/>
-              </a:solidFill>
-              <a:latin typeface="Google Sans"/>
-            </a:endParaRPr>
-          </a:p>
-          <a:p>
-            <a:pPr lvl="0" eaLnBrk="0" fontAlgn="base" hangingPunct="0">
-              <a:spcBef>
-                <a:spcPct val="0"/>
-              </a:spcBef>
-              <a:spcAft>
-                <a:spcPct val="0"/>
-              </a:spcAft>
-            </a:pPr>
-            <a:r>
-              <a:rPr lang="en-US" altLang="en-US" sz="2000" b="1" dirty="0">
-                <a:solidFill>
-                  <a:srgbClr val="1F1F1F"/>
-                </a:solidFill>
-                <a:latin typeface="Google Sans"/>
-              </a:rPr>
-              <a:t>Session 2</a:t>
-            </a:r>
-            <a:r>
-              <a:rPr lang="en-US" altLang="en-US" sz="2000" dirty="0">
-                <a:solidFill>
-                  <a:srgbClr val="1F1F1F"/>
-                </a:solidFill>
-                <a:latin typeface="Google Sans"/>
-              </a:rPr>
-              <a:t>: Bagging, random forests, variable importance and partial dependence plots, and correlated variables </a:t>
-            </a:r>
-          </a:p>
-          <a:p>
-            <a:pPr lvl="0" eaLnBrk="0" fontAlgn="base" hangingPunct="0">
-              <a:spcBef>
-                <a:spcPct val="0"/>
-              </a:spcBef>
-              <a:spcAft>
-                <a:spcPct val="0"/>
-              </a:spcAft>
-            </a:pPr>
-            <a:endParaRPr lang="en-US" altLang="en-US" sz="2000" dirty="0">
-              <a:solidFill>
-                <a:srgbClr val="1F1F1F"/>
-              </a:solidFill>
-              <a:latin typeface="Google Sans"/>
-            </a:endParaRPr>
-          </a:p>
-          <a:p>
-            <a:pPr lvl="0" eaLnBrk="0" fontAlgn="base" hangingPunct="0">
-              <a:spcBef>
-                <a:spcPct val="0"/>
-              </a:spcBef>
-              <a:spcAft>
-                <a:spcPct val="0"/>
-              </a:spcAft>
-            </a:pPr>
-            <a:r>
-              <a:rPr lang="en-US" altLang="en-US" sz="2000" b="1" dirty="0">
-                <a:solidFill>
-                  <a:srgbClr val="1F1F1F"/>
-                </a:solidFill>
-                <a:latin typeface="Google Sans"/>
-              </a:rPr>
-              <a:t>Session 3</a:t>
-            </a:r>
-            <a:r>
-              <a:rPr lang="en-US" altLang="en-US" sz="2000" dirty="0">
-                <a:solidFill>
-                  <a:srgbClr val="1F1F1F"/>
-                </a:solidFill>
-                <a:latin typeface="Google Sans"/>
-              </a:rPr>
-              <a:t>: Boosting, boosted regression trees, model interpretation with SHAP values</a:t>
-            </a:r>
-            <a:endParaRPr lang="en-US" altLang="en-US" sz="4400" dirty="0">
-              <a:latin typeface="Arial" panose="020B0604020202020204" pitchFamily="34" charset="0"/>
-            </a:endParaRPr>
-          </a:p>
-          <a:p>
-            <a:endParaRPr lang="en-US" sz="2000" dirty="0"/>
-          </a:p>
-        </p:txBody>
-      </p:sp>
-      <p:pic>
-        <p:nvPicPr>
-          <p:cNvPr id="1026" name="Picture 2">
-            <a:extLst>
-              <a:ext uri="{FF2B5EF4-FFF2-40B4-BE49-F238E27FC236}">
-                <a16:creationId xmlns:a16="http://schemas.microsoft.com/office/drawing/2014/main" id="{B6A382C2-F87D-0EF6-3E73-2AA660B16486}"/>
-              </a:ext>
-            </a:extLst>
-          </p:cNvPr>
-          <p:cNvPicPr>
-            <a:picLocks noChangeAspect="1" noChangeArrowheads="1"/>
-          </p:cNvPicPr>
-          <p:nvPr/>
-        </p:nvPicPr>
-        <p:blipFill>
-          <a:blip r:embed="rId3">
-            <a:extLst>
-              <a:ext uri="{28A0092B-C50C-407E-A947-70E740481C1C}">
-                <a14:useLocalDpi xmlns:a14="http://schemas.microsoft.com/office/drawing/2010/main" val="0"/>
-              </a:ext>
-            </a:extLst>
-          </a:blip>
-          <a:srcRect/>
-          <a:stretch>
-            <a:fillRect/>
-          </a:stretch>
-        </p:blipFill>
-        <p:spPr bwMode="auto">
-          <a:xfrm>
-            <a:off x="10103358" y="5256498"/>
-            <a:ext cx="2070984" cy="1465703"/>
-          </a:xfrm>
-          <a:prstGeom prst="rect">
-            <a:avLst/>
-          </a:prstGeom>
-          <a:noFill/>
-          <a:extLst>
-            <a:ext uri="{909E8E84-426E-40DD-AFC4-6F175D3DCCD1}">
-              <a14:hiddenFill xmlns:a14="http://schemas.microsoft.com/office/drawing/2010/main">
-                <a:solidFill>
-                  <a:srgbClr val="FFFFFF"/>
-                </a:solidFill>
-              </a14:hiddenFill>
-            </a:ext>
-          </a:extLst>
-        </p:spPr>
-      </p:pic>
+          <a:bodyPr/>
+          <a:lstStyle/>
+          <a:p>
+            <a:r>
+              <a:rPr lang="en-US" dirty="0"/>
+              <a:t>And why is it useful (for science)?</a:t>
+            </a:r>
+          </a:p>
+        </p:txBody>
+      </p:sp>
     </p:spTree>
     <p:extLst>
       <p:ext uri="{BB962C8B-B14F-4D97-AF65-F5344CB8AC3E}">
-        <p14:creationId xmlns:p14="http://schemas.microsoft.com/office/powerpoint/2010/main" val="2376821870"/>
+        <p14:creationId xmlns:p14="http://schemas.microsoft.com/office/powerpoint/2010/main" val="973311027"/>
       </p:ext>
     </p:extLst>
   </p:cSld>
@@ -5769,7 +5159,7 @@
         <p:cNvPr id="1" name="">
           <a:extLst>
             <a:ext uri="{FF2B5EF4-FFF2-40B4-BE49-F238E27FC236}">
-              <a16:creationId xmlns:a16="http://schemas.microsoft.com/office/drawing/2014/main" id="{F9812241-244B-055D-95DA-987DF4EAA2D5}"/>
+              <a16:creationId xmlns:a16="http://schemas.microsoft.com/office/drawing/2014/main" id="{05D726B6-1EBD-11BD-B3CE-D97228E08DB6}"/>
             </a:ext>
           </a:extLst>
         </p:cNvPr>
@@ -5789,7 +5179,7 @@
           <p:cNvPr id="2" name="Title 1">
             <a:extLst>
               <a:ext uri="{FF2B5EF4-FFF2-40B4-BE49-F238E27FC236}">
-                <a16:creationId xmlns:a16="http://schemas.microsoft.com/office/drawing/2014/main" id="{75FE6AA7-F871-9867-601A-1AAE31E9774B}"/>
+                <a16:creationId xmlns:a16="http://schemas.microsoft.com/office/drawing/2014/main" id="{18672426-5E4D-1F59-3F62-A5EA72DE2EEF}"/>
               </a:ext>
             </a:extLst>
           </p:cNvPr>
@@ -5817,7 +5207,7 @@
           <p:cNvPr id="5" name="TextBox 4">
             <a:extLst>
               <a:ext uri="{FF2B5EF4-FFF2-40B4-BE49-F238E27FC236}">
-                <a16:creationId xmlns:a16="http://schemas.microsoft.com/office/drawing/2014/main" id="{0B1164BB-72D5-4A22-DFB6-60343F96D0CA}"/>
+                <a16:creationId xmlns:a16="http://schemas.microsoft.com/office/drawing/2014/main" id="{A034922E-346C-1E07-EE7A-114E009E0C79}"/>
               </a:ext>
             </a:extLst>
           </p:cNvPr>
@@ -5855,140 +5245,7 @@
           <p:cNvPr id="4" name="Picture 3">
             <a:extLst>
               <a:ext uri="{FF2B5EF4-FFF2-40B4-BE49-F238E27FC236}">
-                <a16:creationId xmlns:a16="http://schemas.microsoft.com/office/drawing/2014/main" id="{6F15411E-D06D-FD4C-7FF2-987BD7935E9A}"/>
-              </a:ext>
-            </a:extLst>
-          </p:cNvPr>
-          <p:cNvPicPr>
-            <a:picLocks noChangeAspect="1"/>
-          </p:cNvPicPr>
-          <p:nvPr/>
-        </p:nvPicPr>
-        <p:blipFill>
-          <a:blip r:embed="rId4"/>
-          <a:srcRect l="-14" r="105" b="11454"/>
-          <a:stretch>
-            <a:fillRect/>
-          </a:stretch>
-        </p:blipFill>
-        <p:spPr>
-          <a:xfrm>
-            <a:off x="2208628" y="1806292"/>
-            <a:ext cx="7765366" cy="3830580"/>
-          </a:xfrm>
-          <a:prstGeom prst="rect">
-            <a:avLst/>
-          </a:prstGeom>
-        </p:spPr>
-      </p:pic>
-    </p:spTree>
-    <p:extLst>
-      <p:ext uri="{BB962C8B-B14F-4D97-AF65-F5344CB8AC3E}">
-        <p14:creationId xmlns:p14="http://schemas.microsoft.com/office/powerpoint/2010/main" val="3401170566"/>
-      </p:ext>
-    </p:extLst>
-  </p:cSld>
-  <p:clrMapOvr>
-    <a:masterClrMapping/>
-  </p:clrMapOvr>
-</p:sld>
-</file>
-
-<file path=ppt/slides/slide11.xml><?xml version="1.0" encoding="utf-8"?>
-<p:sld xmlns:a="http://schemas.openxmlformats.org/drawingml/2006/main" xmlns:r="http://schemas.openxmlformats.org/officeDocument/2006/relationships" xmlns:p="http://schemas.openxmlformats.org/presentationml/2006/main">
-  <p:cSld>
-    <p:spTree>
-      <p:nvGrpSpPr>
-        <p:cNvPr id="1" name="">
-          <a:extLst>
-            <a:ext uri="{FF2B5EF4-FFF2-40B4-BE49-F238E27FC236}">
-              <a16:creationId xmlns:a16="http://schemas.microsoft.com/office/drawing/2014/main" id="{36C20D7A-E356-E09C-8D7C-C12B41C1C3E4}"/>
-            </a:ext>
-          </a:extLst>
-        </p:cNvPr>
-        <p:cNvGrpSpPr/>
-        <p:nvPr/>
-      </p:nvGrpSpPr>
-      <p:grpSpPr>
-        <a:xfrm>
-          <a:off x="0" y="0"/>
-          <a:ext cx="0" cy="0"/>
-          <a:chOff x="0" y="0"/>
-          <a:chExt cx="0" cy="0"/>
-        </a:xfrm>
-      </p:grpSpPr>
-      <p:sp>
-        <p:nvSpPr>
-          <p:cNvPr id="2" name="Title 1">
-            <a:extLst>
-              <a:ext uri="{FF2B5EF4-FFF2-40B4-BE49-F238E27FC236}">
-                <a16:creationId xmlns:a16="http://schemas.microsoft.com/office/drawing/2014/main" id="{BDE5916C-4F7D-7104-2E01-C51C9B8F3AF9}"/>
-              </a:ext>
-            </a:extLst>
-          </p:cNvPr>
-          <p:cNvSpPr>
-            <a:spLocks noGrp="1"/>
-          </p:cNvSpPr>
-          <p:nvPr>
-            <p:ph type="title"/>
-          </p:nvPr>
-        </p:nvSpPr>
-        <p:spPr/>
-        <p:txBody>
-          <a:bodyPr/>
-          <a:lstStyle/>
-          <a:p>
-            <a:r>
-              <a:rPr lang="en-US" dirty="0"/>
-              <a:t>Modeling mindsets:</a:t>
-            </a:r>
-          </a:p>
-        </p:txBody>
-      </p:sp>
-      <p:sp>
-        <p:nvSpPr>
-          <p:cNvPr id="5" name="TextBox 4">
-            <a:extLst>
-              <a:ext uri="{FF2B5EF4-FFF2-40B4-BE49-F238E27FC236}">
-                <a16:creationId xmlns:a16="http://schemas.microsoft.com/office/drawing/2014/main" id="{E9BBFA52-33A5-9A67-76AD-73E601494AD5}"/>
-              </a:ext>
-            </a:extLst>
-          </p:cNvPr>
-          <p:cNvSpPr txBox="1"/>
-          <p:nvPr/>
-        </p:nvSpPr>
-        <p:spPr>
-          <a:xfrm>
-            <a:off x="4537276" y="6488668"/>
-            <a:ext cx="8191983" cy="369332"/>
-          </a:xfrm>
-          <a:prstGeom prst="rect">
-            <a:avLst/>
-          </a:prstGeom>
-          <a:noFill/>
-        </p:spPr>
-        <p:txBody>
-          <a:bodyPr wrap="square">
-            <a:spAutoFit/>
-          </a:bodyPr>
-          <a:lstStyle/>
-          <a:p>
-            <a:r>
-              <a:rPr lang="en-US" dirty="0">
-                <a:hlinkClick r:id="rId3"/>
-              </a:rPr>
-              <a:t>Molnar, C. 2023. Modeling mindsets: the many cultures of learning from data.</a:t>
-            </a:r>
-            <a:endParaRPr lang="en-US" dirty="0"/>
-          </a:p>
-        </p:txBody>
-      </p:sp>
-      <p:pic>
-        <p:nvPicPr>
-          <p:cNvPr id="4" name="Picture 3">
-            <a:extLst>
-              <a:ext uri="{FF2B5EF4-FFF2-40B4-BE49-F238E27FC236}">
-                <a16:creationId xmlns:a16="http://schemas.microsoft.com/office/drawing/2014/main" id="{636E94A8-CD25-4464-C3DE-1303F99BC23D}"/>
+                <a16:creationId xmlns:a16="http://schemas.microsoft.com/office/drawing/2014/main" id="{3BF73455-CDFF-5FBF-6E98-120C69A443C6}"/>
               </a:ext>
             </a:extLst>
           </p:cNvPr>
@@ -6014,10 +5271,49 @@
           </a:prstGeom>
         </p:spPr>
       </p:pic>
+      <p:sp>
+        <p:nvSpPr>
+          <p:cNvPr id="16" name="TextBox 15">
+            <a:extLst>
+              <a:ext uri="{FF2B5EF4-FFF2-40B4-BE49-F238E27FC236}">
+                <a16:creationId xmlns:a16="http://schemas.microsoft.com/office/drawing/2014/main" id="{25C7E0D8-7272-1E8C-C7B5-5CA09CF5B2B9}"/>
+              </a:ext>
+            </a:extLst>
+          </p:cNvPr>
+          <p:cNvSpPr txBox="1"/>
+          <p:nvPr/>
+        </p:nvSpPr>
+        <p:spPr>
+          <a:xfrm>
+            <a:off x="396055" y="2161337"/>
+            <a:ext cx="4629778" cy="830997"/>
+          </a:xfrm>
+          <a:prstGeom prst="rect">
+            <a:avLst/>
+          </a:prstGeom>
+          <a:noFill/>
+        </p:spPr>
+        <p:txBody>
+          <a:bodyPr wrap="square" rtlCol="0">
+            <a:spAutoFit/>
+          </a:bodyPr>
+          <a:lstStyle/>
+          <a:p>
+            <a:r>
+              <a:rPr lang="en-US" sz="2400" b="1" dirty="0"/>
+              <a:t>Machine learning</a:t>
+            </a:r>
+            <a:r>
+              <a:rPr lang="en-US" sz="2400" dirty="0"/>
+              <a:t>: use algorithms to solve a task</a:t>
+            </a:r>
+          </a:p>
+        </p:txBody>
+      </p:sp>
     </p:spTree>
     <p:extLst>
       <p:ext uri="{BB962C8B-B14F-4D97-AF65-F5344CB8AC3E}">
-        <p14:creationId xmlns:p14="http://schemas.microsoft.com/office/powerpoint/2010/main" val="3466779110"/>
+        <p14:creationId xmlns:p14="http://schemas.microsoft.com/office/powerpoint/2010/main" val="2022334706"/>
       </p:ext>
     </p:extLst>
   </p:cSld>
@@ -6027,7 +5323,7 @@
 </p:sld>
 </file>
 
-<file path=ppt/slides/slide12.xml><?xml version="1.0" encoding="utf-8"?>
+<file path=ppt/slides/slide11.xml><?xml version="1.0" encoding="utf-8"?>
 <p:sld xmlns:a="http://schemas.openxmlformats.org/drawingml/2006/main" xmlns:r="http://schemas.openxmlformats.org/officeDocument/2006/relationships" xmlns:p="http://schemas.openxmlformats.org/presentationml/2006/main">
   <p:cSld>
     <p:spTree>
@@ -6035,7 +5331,7 @@
         <p:cNvPr id="1" name="">
           <a:extLst>
             <a:ext uri="{FF2B5EF4-FFF2-40B4-BE49-F238E27FC236}">
-              <a16:creationId xmlns:a16="http://schemas.microsoft.com/office/drawing/2014/main" id="{05D726B6-1EBD-11BD-B3CE-D97228E08DB6}"/>
+              <a16:creationId xmlns:a16="http://schemas.microsoft.com/office/drawing/2014/main" id="{18346388-3233-4589-3D0C-8F62CA692FAA}"/>
             </a:ext>
           </a:extLst>
         </p:cNvPr>
@@ -6055,7 +5351,7 @@
           <p:cNvPr id="2" name="Title 1">
             <a:extLst>
               <a:ext uri="{FF2B5EF4-FFF2-40B4-BE49-F238E27FC236}">
-                <a16:creationId xmlns:a16="http://schemas.microsoft.com/office/drawing/2014/main" id="{18672426-5E4D-1F59-3F62-A5EA72DE2EEF}"/>
+                <a16:creationId xmlns:a16="http://schemas.microsoft.com/office/drawing/2014/main" id="{BFD0C2E7-7C1C-79C6-8168-05DBF23EC46B}"/>
               </a:ext>
             </a:extLst>
           </p:cNvPr>
@@ -6083,7 +5379,7 @@
           <p:cNvPr id="5" name="TextBox 4">
             <a:extLst>
               <a:ext uri="{FF2B5EF4-FFF2-40B4-BE49-F238E27FC236}">
-                <a16:creationId xmlns:a16="http://schemas.microsoft.com/office/drawing/2014/main" id="{A034922E-346C-1E07-EE7A-114E009E0C79}"/>
+                <a16:creationId xmlns:a16="http://schemas.microsoft.com/office/drawing/2014/main" id="{FE73C8AD-5725-6CB8-7891-D57232AE9660}"/>
               </a:ext>
             </a:extLst>
           </p:cNvPr>
@@ -6121,7 +5417,7 @@
           <p:cNvPr id="4" name="Picture 3">
             <a:extLst>
               <a:ext uri="{FF2B5EF4-FFF2-40B4-BE49-F238E27FC236}">
-                <a16:creationId xmlns:a16="http://schemas.microsoft.com/office/drawing/2014/main" id="{3BF73455-CDFF-5FBF-6E98-120C69A443C6}"/>
+                <a16:creationId xmlns:a16="http://schemas.microsoft.com/office/drawing/2014/main" id="{74D71E5A-8D80-7F7B-8FF0-322EB79941A4}"/>
               </a:ext>
             </a:extLst>
           </p:cNvPr>
@@ -6152,7 +5448,7 @@
           <p:cNvPr id="16" name="TextBox 15">
             <a:extLst>
               <a:ext uri="{FF2B5EF4-FFF2-40B4-BE49-F238E27FC236}">
-                <a16:creationId xmlns:a16="http://schemas.microsoft.com/office/drawing/2014/main" id="{25C7E0D8-7272-1E8C-C7B5-5CA09CF5B2B9}"/>
+                <a16:creationId xmlns:a16="http://schemas.microsoft.com/office/drawing/2014/main" id="{DCBA6C73-1ACC-2146-44DC-7101F574A24F}"/>
               </a:ext>
             </a:extLst>
           </p:cNvPr>
@@ -6186,10 +5482,51 @@
           </a:p>
         </p:txBody>
       </p:sp>
+      <p:sp>
+        <p:nvSpPr>
+          <p:cNvPr id="3" name="TextBox 2">
+            <a:extLst>
+              <a:ext uri="{FF2B5EF4-FFF2-40B4-BE49-F238E27FC236}">
+                <a16:creationId xmlns:a16="http://schemas.microsoft.com/office/drawing/2014/main" id="{6D2D8404-57E1-C95D-EBC3-89824E57B0D7}"/>
+              </a:ext>
+            </a:extLst>
+          </p:cNvPr>
+          <p:cNvSpPr txBox="1"/>
+          <p:nvPr/>
+        </p:nvSpPr>
+        <p:spPr>
+          <a:xfrm>
+            <a:off x="9973993" y="1772369"/>
+            <a:ext cx="1786597" cy="1015663"/>
+          </a:xfrm>
+          <a:prstGeom prst="rect">
+            <a:avLst/>
+          </a:prstGeom>
+          <a:noFill/>
+        </p:spPr>
+        <p:txBody>
+          <a:bodyPr wrap="square" rtlCol="0">
+            <a:spAutoFit/>
+          </a:bodyPr>
+          <a:lstStyle/>
+          <a:p>
+            <a:r>
+              <a:rPr lang="en-US" sz="2000" dirty="0">
+                <a:solidFill>
+                  <a:schemeClr val="accent2">
+                    <a:lumMod val="75000"/>
+                  </a:schemeClr>
+                </a:solidFill>
+              </a:rPr>
+              <a:t>Make 6 groups based on these data</a:t>
+            </a:r>
+          </a:p>
+        </p:txBody>
+      </p:sp>
     </p:spTree>
     <p:extLst>
       <p:ext uri="{BB962C8B-B14F-4D97-AF65-F5344CB8AC3E}">
-        <p14:creationId xmlns:p14="http://schemas.microsoft.com/office/powerpoint/2010/main" val="2022334706"/>
+        <p14:creationId xmlns:p14="http://schemas.microsoft.com/office/powerpoint/2010/main" val="554990434"/>
       </p:ext>
     </p:extLst>
   </p:cSld>
@@ -6199,7 +5536,7 @@
 </p:sld>
 </file>
 
-<file path=ppt/slides/slide13.xml><?xml version="1.0" encoding="utf-8"?>
+<file path=ppt/slides/slide12.xml><?xml version="1.0" encoding="utf-8"?>
 <p:sld xmlns:a="http://schemas.openxmlformats.org/drawingml/2006/main" xmlns:r="http://schemas.openxmlformats.org/officeDocument/2006/relationships" xmlns:p="http://schemas.openxmlformats.org/presentationml/2006/main">
   <p:cSld>
     <p:spTree>
@@ -6207,7 +5544,7 @@
         <p:cNvPr id="1" name="">
           <a:extLst>
             <a:ext uri="{FF2B5EF4-FFF2-40B4-BE49-F238E27FC236}">
-              <a16:creationId xmlns:a16="http://schemas.microsoft.com/office/drawing/2014/main" id="{18346388-3233-4589-3D0C-8F62CA692FAA}"/>
+              <a16:creationId xmlns:a16="http://schemas.microsoft.com/office/drawing/2014/main" id="{76E789F1-1EBE-A2EF-AFA5-B5C7CF5E5498}"/>
             </a:ext>
           </a:extLst>
         </p:cNvPr>
@@ -6227,7 +5564,7 @@
           <p:cNvPr id="2" name="Title 1">
             <a:extLst>
               <a:ext uri="{FF2B5EF4-FFF2-40B4-BE49-F238E27FC236}">
-                <a16:creationId xmlns:a16="http://schemas.microsoft.com/office/drawing/2014/main" id="{BFD0C2E7-7C1C-79C6-8168-05DBF23EC46B}"/>
+                <a16:creationId xmlns:a16="http://schemas.microsoft.com/office/drawing/2014/main" id="{AE35D54D-7755-4656-46E1-46EDFC1364F0}"/>
               </a:ext>
             </a:extLst>
           </p:cNvPr>
@@ -6255,7 +5592,7 @@
           <p:cNvPr id="5" name="TextBox 4">
             <a:extLst>
               <a:ext uri="{FF2B5EF4-FFF2-40B4-BE49-F238E27FC236}">
-                <a16:creationId xmlns:a16="http://schemas.microsoft.com/office/drawing/2014/main" id="{FE73C8AD-5725-6CB8-7891-D57232AE9660}"/>
+                <a16:creationId xmlns:a16="http://schemas.microsoft.com/office/drawing/2014/main" id="{BA5CD8AF-C993-A242-E4CA-AEF11A2002C8}"/>
               </a:ext>
             </a:extLst>
           </p:cNvPr>
@@ -6293,7 +5630,7 @@
           <p:cNvPr id="4" name="Picture 3">
             <a:extLst>
               <a:ext uri="{FF2B5EF4-FFF2-40B4-BE49-F238E27FC236}">
-                <a16:creationId xmlns:a16="http://schemas.microsoft.com/office/drawing/2014/main" id="{74D71E5A-8D80-7F7B-8FF0-322EB79941A4}"/>
+                <a16:creationId xmlns:a16="http://schemas.microsoft.com/office/drawing/2014/main" id="{3BFF7966-A38B-4CA7-49BC-8134D7A4B98B}"/>
               </a:ext>
             </a:extLst>
           </p:cNvPr>
@@ -6324,7 +5661,7 @@
           <p:cNvPr id="16" name="TextBox 15">
             <a:extLst>
               <a:ext uri="{FF2B5EF4-FFF2-40B4-BE49-F238E27FC236}">
-                <a16:creationId xmlns:a16="http://schemas.microsoft.com/office/drawing/2014/main" id="{DCBA6C73-1ACC-2146-44DC-7101F574A24F}"/>
+                <a16:creationId xmlns:a16="http://schemas.microsoft.com/office/drawing/2014/main" id="{ED6C9061-0143-B9EB-58C1-72D7CB1BCD3A}"/>
               </a:ext>
             </a:extLst>
           </p:cNvPr>
@@ -6363,7 +5700,7 @@
           <p:cNvPr id="3" name="TextBox 2">
             <a:extLst>
               <a:ext uri="{FF2B5EF4-FFF2-40B4-BE49-F238E27FC236}">
-                <a16:creationId xmlns:a16="http://schemas.microsoft.com/office/drawing/2014/main" id="{6D2D8404-57E1-C95D-EBC3-89824E57B0D7}"/>
+                <a16:creationId xmlns:a16="http://schemas.microsoft.com/office/drawing/2014/main" id="{16E5BF2A-8730-B64B-3A40-BE49BE9B5200}"/>
               </a:ext>
             </a:extLst>
           </p:cNvPr>
@@ -6399,10 +5736,51 @@
           </a:p>
         </p:txBody>
       </p:sp>
+      <p:sp>
+        <p:nvSpPr>
+          <p:cNvPr id="6" name="TextBox 5">
+            <a:extLst>
+              <a:ext uri="{FF2B5EF4-FFF2-40B4-BE49-F238E27FC236}">
+                <a16:creationId xmlns:a16="http://schemas.microsoft.com/office/drawing/2014/main" id="{5502B0E2-F354-D4BA-2BCF-C70D99956F52}"/>
+              </a:ext>
+            </a:extLst>
+          </p:cNvPr>
+          <p:cNvSpPr txBox="1"/>
+          <p:nvPr/>
+        </p:nvSpPr>
+        <p:spPr>
+          <a:xfrm>
+            <a:off x="9973994" y="4679190"/>
+            <a:ext cx="1786597" cy="707886"/>
+          </a:xfrm>
+          <a:prstGeom prst="rect">
+            <a:avLst/>
+          </a:prstGeom>
+          <a:noFill/>
+        </p:spPr>
+        <p:txBody>
+          <a:bodyPr wrap="square" rtlCol="0">
+            <a:spAutoFit/>
+          </a:bodyPr>
+          <a:lstStyle/>
+          <a:p>
+            <a:r>
+              <a:rPr lang="en-US" sz="2000" dirty="0">
+                <a:solidFill>
+                  <a:schemeClr val="accent2">
+                    <a:lumMod val="75000"/>
+                  </a:schemeClr>
+                </a:solidFill>
+              </a:rPr>
+              <a:t>Get better at chess</a:t>
+            </a:r>
+          </a:p>
+        </p:txBody>
+      </p:sp>
     </p:spTree>
     <p:extLst>
       <p:ext uri="{BB962C8B-B14F-4D97-AF65-F5344CB8AC3E}">
-        <p14:creationId xmlns:p14="http://schemas.microsoft.com/office/powerpoint/2010/main" val="554990434"/>
+        <p14:creationId xmlns:p14="http://schemas.microsoft.com/office/powerpoint/2010/main" val="2946507804"/>
       </p:ext>
     </p:extLst>
   </p:cSld>
@@ -6412,7 +5790,7 @@
 </p:sld>
 </file>
 
-<file path=ppt/slides/slide14.xml><?xml version="1.0" encoding="utf-8"?>
+<file path=ppt/slides/slide13.xml><?xml version="1.0" encoding="utf-8"?>
 <p:sld xmlns:a="http://schemas.openxmlformats.org/drawingml/2006/main" xmlns:r="http://schemas.openxmlformats.org/officeDocument/2006/relationships" xmlns:p="http://schemas.openxmlformats.org/presentationml/2006/main">
   <p:cSld>
     <p:spTree>
@@ -6420,7 +5798,7 @@
         <p:cNvPr id="1" name="">
           <a:extLst>
             <a:ext uri="{FF2B5EF4-FFF2-40B4-BE49-F238E27FC236}">
-              <a16:creationId xmlns:a16="http://schemas.microsoft.com/office/drawing/2014/main" id="{76E789F1-1EBE-A2EF-AFA5-B5C7CF5E5498}"/>
+              <a16:creationId xmlns:a16="http://schemas.microsoft.com/office/drawing/2014/main" id="{4C855046-890A-CB6B-40A9-F04208ED6A1E}"/>
             </a:ext>
           </a:extLst>
         </p:cNvPr>
@@ -6440,7 +5818,7 @@
           <p:cNvPr id="2" name="Title 1">
             <a:extLst>
               <a:ext uri="{FF2B5EF4-FFF2-40B4-BE49-F238E27FC236}">
-                <a16:creationId xmlns:a16="http://schemas.microsoft.com/office/drawing/2014/main" id="{AE35D54D-7755-4656-46E1-46EDFC1364F0}"/>
+                <a16:creationId xmlns:a16="http://schemas.microsoft.com/office/drawing/2014/main" id="{ADAD31A4-A0B3-60EE-DD21-6D2B4058ACEA}"/>
               </a:ext>
             </a:extLst>
           </p:cNvPr>
@@ -6468,7 +5846,7 @@
           <p:cNvPr id="5" name="TextBox 4">
             <a:extLst>
               <a:ext uri="{FF2B5EF4-FFF2-40B4-BE49-F238E27FC236}">
-                <a16:creationId xmlns:a16="http://schemas.microsoft.com/office/drawing/2014/main" id="{BA5CD8AF-C993-A242-E4CA-AEF11A2002C8}"/>
+                <a16:creationId xmlns:a16="http://schemas.microsoft.com/office/drawing/2014/main" id="{48709867-9DDD-DD2E-FF63-85F80814B95C}"/>
               </a:ext>
             </a:extLst>
           </p:cNvPr>
@@ -6506,7 +5884,7 @@
           <p:cNvPr id="4" name="Picture 3">
             <a:extLst>
               <a:ext uri="{FF2B5EF4-FFF2-40B4-BE49-F238E27FC236}">
-                <a16:creationId xmlns:a16="http://schemas.microsoft.com/office/drawing/2014/main" id="{3BFF7966-A38B-4CA7-49BC-8134D7A4B98B}"/>
+                <a16:creationId xmlns:a16="http://schemas.microsoft.com/office/drawing/2014/main" id="{0F755251-75FB-D75A-C203-ECD833A7C2D4}"/>
               </a:ext>
             </a:extLst>
           </p:cNvPr>
@@ -6537,260 +5915,6 @@
           <p:cNvPr id="16" name="TextBox 15">
             <a:extLst>
               <a:ext uri="{FF2B5EF4-FFF2-40B4-BE49-F238E27FC236}">
-                <a16:creationId xmlns:a16="http://schemas.microsoft.com/office/drawing/2014/main" id="{ED6C9061-0143-B9EB-58C1-72D7CB1BCD3A}"/>
-              </a:ext>
-            </a:extLst>
-          </p:cNvPr>
-          <p:cNvSpPr txBox="1"/>
-          <p:nvPr/>
-        </p:nvSpPr>
-        <p:spPr>
-          <a:xfrm>
-            <a:off x="396055" y="2161337"/>
-            <a:ext cx="4629778" cy="830997"/>
-          </a:xfrm>
-          <a:prstGeom prst="rect">
-            <a:avLst/>
-          </a:prstGeom>
-          <a:noFill/>
-        </p:spPr>
-        <p:txBody>
-          <a:bodyPr wrap="square" rtlCol="0">
-            <a:spAutoFit/>
-          </a:bodyPr>
-          <a:lstStyle/>
-          <a:p>
-            <a:r>
-              <a:rPr lang="en-US" sz="2400" b="1" dirty="0"/>
-              <a:t>Machine learning</a:t>
-            </a:r>
-            <a:r>
-              <a:rPr lang="en-US" sz="2400" dirty="0"/>
-              <a:t>: use algorithms to solve a task</a:t>
-            </a:r>
-          </a:p>
-        </p:txBody>
-      </p:sp>
-      <p:sp>
-        <p:nvSpPr>
-          <p:cNvPr id="3" name="TextBox 2">
-            <a:extLst>
-              <a:ext uri="{FF2B5EF4-FFF2-40B4-BE49-F238E27FC236}">
-                <a16:creationId xmlns:a16="http://schemas.microsoft.com/office/drawing/2014/main" id="{16E5BF2A-8730-B64B-3A40-BE49BE9B5200}"/>
-              </a:ext>
-            </a:extLst>
-          </p:cNvPr>
-          <p:cNvSpPr txBox="1"/>
-          <p:nvPr/>
-        </p:nvSpPr>
-        <p:spPr>
-          <a:xfrm>
-            <a:off x="9973993" y="1772369"/>
-            <a:ext cx="1786597" cy="1015663"/>
-          </a:xfrm>
-          <a:prstGeom prst="rect">
-            <a:avLst/>
-          </a:prstGeom>
-          <a:noFill/>
-        </p:spPr>
-        <p:txBody>
-          <a:bodyPr wrap="square" rtlCol="0">
-            <a:spAutoFit/>
-          </a:bodyPr>
-          <a:lstStyle/>
-          <a:p>
-            <a:r>
-              <a:rPr lang="en-US" sz="2000" dirty="0">
-                <a:solidFill>
-                  <a:schemeClr val="accent2">
-                    <a:lumMod val="75000"/>
-                  </a:schemeClr>
-                </a:solidFill>
-              </a:rPr>
-              <a:t>Make 6 groups based on these data</a:t>
-            </a:r>
-          </a:p>
-        </p:txBody>
-      </p:sp>
-      <p:sp>
-        <p:nvSpPr>
-          <p:cNvPr id="6" name="TextBox 5">
-            <a:extLst>
-              <a:ext uri="{FF2B5EF4-FFF2-40B4-BE49-F238E27FC236}">
-                <a16:creationId xmlns:a16="http://schemas.microsoft.com/office/drawing/2014/main" id="{5502B0E2-F354-D4BA-2BCF-C70D99956F52}"/>
-              </a:ext>
-            </a:extLst>
-          </p:cNvPr>
-          <p:cNvSpPr txBox="1"/>
-          <p:nvPr/>
-        </p:nvSpPr>
-        <p:spPr>
-          <a:xfrm>
-            <a:off x="9973994" y="4679190"/>
-            <a:ext cx="1786597" cy="707886"/>
-          </a:xfrm>
-          <a:prstGeom prst="rect">
-            <a:avLst/>
-          </a:prstGeom>
-          <a:noFill/>
-        </p:spPr>
-        <p:txBody>
-          <a:bodyPr wrap="square" rtlCol="0">
-            <a:spAutoFit/>
-          </a:bodyPr>
-          <a:lstStyle/>
-          <a:p>
-            <a:r>
-              <a:rPr lang="en-US" sz="2000" dirty="0">
-                <a:solidFill>
-                  <a:schemeClr val="accent2">
-                    <a:lumMod val="75000"/>
-                  </a:schemeClr>
-                </a:solidFill>
-              </a:rPr>
-              <a:t>Get better at chess</a:t>
-            </a:r>
-          </a:p>
-        </p:txBody>
-      </p:sp>
-    </p:spTree>
-    <p:extLst>
-      <p:ext uri="{BB962C8B-B14F-4D97-AF65-F5344CB8AC3E}">
-        <p14:creationId xmlns:p14="http://schemas.microsoft.com/office/powerpoint/2010/main" val="2946507804"/>
-      </p:ext>
-    </p:extLst>
-  </p:cSld>
-  <p:clrMapOvr>
-    <a:masterClrMapping/>
-  </p:clrMapOvr>
-</p:sld>
-</file>
-
-<file path=ppt/slides/slide15.xml><?xml version="1.0" encoding="utf-8"?>
-<p:sld xmlns:a="http://schemas.openxmlformats.org/drawingml/2006/main" xmlns:r="http://schemas.openxmlformats.org/officeDocument/2006/relationships" xmlns:p="http://schemas.openxmlformats.org/presentationml/2006/main">
-  <p:cSld>
-    <p:spTree>
-      <p:nvGrpSpPr>
-        <p:cNvPr id="1" name="">
-          <a:extLst>
-            <a:ext uri="{FF2B5EF4-FFF2-40B4-BE49-F238E27FC236}">
-              <a16:creationId xmlns:a16="http://schemas.microsoft.com/office/drawing/2014/main" id="{4C855046-890A-CB6B-40A9-F04208ED6A1E}"/>
-            </a:ext>
-          </a:extLst>
-        </p:cNvPr>
-        <p:cNvGrpSpPr/>
-        <p:nvPr/>
-      </p:nvGrpSpPr>
-      <p:grpSpPr>
-        <a:xfrm>
-          <a:off x="0" y="0"/>
-          <a:ext cx="0" cy="0"/>
-          <a:chOff x="0" y="0"/>
-          <a:chExt cx="0" cy="0"/>
-        </a:xfrm>
-      </p:grpSpPr>
-      <p:sp>
-        <p:nvSpPr>
-          <p:cNvPr id="2" name="Title 1">
-            <a:extLst>
-              <a:ext uri="{FF2B5EF4-FFF2-40B4-BE49-F238E27FC236}">
-                <a16:creationId xmlns:a16="http://schemas.microsoft.com/office/drawing/2014/main" id="{ADAD31A4-A0B3-60EE-DD21-6D2B4058ACEA}"/>
-              </a:ext>
-            </a:extLst>
-          </p:cNvPr>
-          <p:cNvSpPr>
-            <a:spLocks noGrp="1"/>
-          </p:cNvSpPr>
-          <p:nvPr>
-            <p:ph type="title"/>
-          </p:nvPr>
-        </p:nvSpPr>
-        <p:spPr/>
-        <p:txBody>
-          <a:bodyPr/>
-          <a:lstStyle/>
-          <a:p>
-            <a:r>
-              <a:rPr lang="en-US" dirty="0"/>
-              <a:t>Modeling mindsets:</a:t>
-            </a:r>
-          </a:p>
-        </p:txBody>
-      </p:sp>
-      <p:sp>
-        <p:nvSpPr>
-          <p:cNvPr id="5" name="TextBox 4">
-            <a:extLst>
-              <a:ext uri="{FF2B5EF4-FFF2-40B4-BE49-F238E27FC236}">
-                <a16:creationId xmlns:a16="http://schemas.microsoft.com/office/drawing/2014/main" id="{48709867-9DDD-DD2E-FF63-85F80814B95C}"/>
-              </a:ext>
-            </a:extLst>
-          </p:cNvPr>
-          <p:cNvSpPr txBox="1"/>
-          <p:nvPr/>
-        </p:nvSpPr>
-        <p:spPr>
-          <a:xfrm>
-            <a:off x="4537276" y="6488668"/>
-            <a:ext cx="8191983" cy="369332"/>
-          </a:xfrm>
-          <a:prstGeom prst="rect">
-            <a:avLst/>
-          </a:prstGeom>
-          <a:noFill/>
-        </p:spPr>
-        <p:txBody>
-          <a:bodyPr wrap="square">
-            <a:spAutoFit/>
-          </a:bodyPr>
-          <a:lstStyle/>
-          <a:p>
-            <a:r>
-              <a:rPr lang="en-US" dirty="0">
-                <a:hlinkClick r:id="rId3"/>
-              </a:rPr>
-              <a:t>Molnar, C. 2023. Modeling mindsets: the many cultures of learning from data.</a:t>
-            </a:r>
-            <a:endParaRPr lang="en-US" dirty="0"/>
-          </a:p>
-        </p:txBody>
-      </p:sp>
-      <p:pic>
-        <p:nvPicPr>
-          <p:cNvPr id="4" name="Picture 3">
-            <a:extLst>
-              <a:ext uri="{FF2B5EF4-FFF2-40B4-BE49-F238E27FC236}">
-                <a16:creationId xmlns:a16="http://schemas.microsoft.com/office/drawing/2014/main" id="{0F755251-75FB-D75A-C203-ECD833A7C2D4}"/>
-              </a:ext>
-            </a:extLst>
-          </p:cNvPr>
-          <p:cNvPicPr>
-            <a:picLocks noChangeAspect="1"/>
-          </p:cNvPicPr>
-          <p:nvPr/>
-        </p:nvPicPr>
-        <p:blipFill>
-          <a:blip r:embed="rId4"/>
-          <a:srcRect l="50001" r="105" b="11454"/>
-          <a:stretch>
-            <a:fillRect/>
-          </a:stretch>
-        </p:blipFill>
-        <p:spPr>
-          <a:xfrm>
-            <a:off x="6096000" y="1806292"/>
-            <a:ext cx="3877994" cy="3830580"/>
-          </a:xfrm>
-          <a:prstGeom prst="rect">
-            <a:avLst/>
-          </a:prstGeom>
-        </p:spPr>
-      </p:pic>
-      <p:sp>
-        <p:nvSpPr>
-          <p:cNvPr id="16" name="TextBox 15">
-            <a:extLst>
-              <a:ext uri="{FF2B5EF4-FFF2-40B4-BE49-F238E27FC236}">
                 <a16:creationId xmlns:a16="http://schemas.microsoft.com/office/drawing/2014/main" id="{0F6339D3-529D-F49D-C6CF-5CA7CAF3E395}"/>
               </a:ext>
             </a:extLst>
@@ -6961,7 +6085,7 @@
 </p:sld>
 </file>
 
-<file path=ppt/slides/slide16.xml><?xml version="1.0" encoding="utf-8"?>
+<file path=ppt/slides/slide14.xml><?xml version="1.0" encoding="utf-8"?>
 <p:sld xmlns:a="http://schemas.openxmlformats.org/drawingml/2006/main" xmlns:r="http://schemas.openxmlformats.org/officeDocument/2006/relationships" xmlns:p="http://schemas.openxmlformats.org/presentationml/2006/main">
   <p:cSld>
     <p:spTree>
@@ -7190,7 +6314,7 @@
 </p:sld>
 </file>
 
-<file path=ppt/slides/slide17.xml><?xml version="1.0" encoding="utf-8"?>
+<file path=ppt/slides/slide15.xml><?xml version="1.0" encoding="utf-8"?>
 <p:sld xmlns:a="http://schemas.openxmlformats.org/drawingml/2006/main" xmlns:r="http://schemas.openxmlformats.org/officeDocument/2006/relationships" xmlns:p="http://schemas.openxmlformats.org/presentationml/2006/main">
   <p:cSld>
     <p:spTree>
@@ -8085,7 +7209,7 @@
 </p:sld>
 </file>
 
-<file path=ppt/slides/slide18.xml><?xml version="1.0" encoding="utf-8"?>
+<file path=ppt/slides/slide16.xml><?xml version="1.0" encoding="utf-8"?>
 <p:sld xmlns:a="http://schemas.openxmlformats.org/drawingml/2006/main" xmlns:r="http://schemas.openxmlformats.org/officeDocument/2006/relationships" xmlns:p="http://schemas.openxmlformats.org/presentationml/2006/main">
   <p:cSld>
     <p:spTree>
@@ -8205,7 +7329,7 @@
 </p:sld>
 </file>
 
-<file path=ppt/slides/slide19.xml><?xml version="1.0" encoding="utf-8"?>
+<file path=ppt/slides/slide17.xml><?xml version="1.0" encoding="utf-8"?>
 <p:sld xmlns:a="http://schemas.openxmlformats.org/drawingml/2006/main" xmlns:r="http://schemas.openxmlformats.org/officeDocument/2006/relationships" xmlns:p="http://schemas.openxmlformats.org/presentationml/2006/main">
   <p:cSld>
     <p:spTree>
@@ -8608,90 +7732,7 @@
 </p:sld>
 </file>
 
-<file path=ppt/slides/slide2.xml><?xml version="1.0" encoding="utf-8"?>
-<p:sld xmlns:a="http://schemas.openxmlformats.org/drawingml/2006/main" xmlns:r="http://schemas.openxmlformats.org/officeDocument/2006/relationships" xmlns:p="http://schemas.openxmlformats.org/presentationml/2006/main">
-  <p:cSld>
-    <p:spTree>
-      <p:nvGrpSpPr>
-        <p:cNvPr id="1" name=""/>
-        <p:cNvGrpSpPr/>
-        <p:nvPr/>
-      </p:nvGrpSpPr>
-      <p:grpSpPr>
-        <a:xfrm>
-          <a:off x="0" y="0"/>
-          <a:ext cx="0" cy="0"/>
-          <a:chOff x="0" y="0"/>
-          <a:chExt cx="0" cy="0"/>
-        </a:xfrm>
-      </p:grpSpPr>
-      <p:sp>
-        <p:nvSpPr>
-          <p:cNvPr id="2" name="Title 1">
-            <a:extLst>
-              <a:ext uri="{FF2B5EF4-FFF2-40B4-BE49-F238E27FC236}">
-                <a16:creationId xmlns:a16="http://schemas.microsoft.com/office/drawing/2014/main" id="{9BEB7C61-DC98-CC3C-8E5A-B2AF4CD8BBE2}"/>
-              </a:ext>
-            </a:extLst>
-          </p:cNvPr>
-          <p:cNvSpPr>
-            <a:spLocks noGrp="1"/>
-          </p:cNvSpPr>
-          <p:nvPr>
-            <p:ph type="title"/>
-          </p:nvPr>
-        </p:nvSpPr>
-        <p:spPr/>
-        <p:txBody>
-          <a:bodyPr/>
-          <a:lstStyle/>
-          <a:p>
-            <a:r>
-              <a:rPr lang="en-US"/>
-              <a:t>ADD INTROS	</a:t>
-            </a:r>
-          </a:p>
-        </p:txBody>
-      </p:sp>
-      <p:sp>
-        <p:nvSpPr>
-          <p:cNvPr id="3" name="Content Placeholder 2">
-            <a:extLst>
-              <a:ext uri="{FF2B5EF4-FFF2-40B4-BE49-F238E27FC236}">
-                <a16:creationId xmlns:a16="http://schemas.microsoft.com/office/drawing/2014/main" id="{F106FC64-C12D-7AF3-66EA-511A1D62010F}"/>
-              </a:ext>
-            </a:extLst>
-          </p:cNvPr>
-          <p:cNvSpPr>
-            <a:spLocks noGrp="1"/>
-          </p:cNvSpPr>
-          <p:nvPr>
-            <p:ph idx="1"/>
-          </p:nvPr>
-        </p:nvSpPr>
-        <p:spPr/>
-        <p:txBody>
-          <a:bodyPr/>
-          <a:lstStyle/>
-          <a:p>
-            <a:endParaRPr lang="en-US"/>
-          </a:p>
-        </p:txBody>
-      </p:sp>
-    </p:spTree>
-    <p:extLst>
-      <p:ext uri="{BB962C8B-B14F-4D97-AF65-F5344CB8AC3E}">
-        <p14:creationId xmlns:p14="http://schemas.microsoft.com/office/powerpoint/2010/main" val="3116746417"/>
-      </p:ext>
-    </p:extLst>
-  </p:cSld>
-  <p:clrMapOvr>
-    <a:masterClrMapping/>
-  </p:clrMapOvr>
-</p:sld>
-</file>
-
-<file path=ppt/slides/slide20.xml><?xml version="1.0" encoding="utf-8"?>
+<file path=ppt/slides/slide18.xml><?xml version="1.0" encoding="utf-8"?>
 <p:sld xmlns:a="http://schemas.openxmlformats.org/drawingml/2006/main" xmlns:r="http://schemas.openxmlformats.org/officeDocument/2006/relationships" xmlns:p="http://schemas.openxmlformats.org/presentationml/2006/main">
   <p:cSld>
     <p:spTree>
@@ -8895,7 +7936,7 @@
 </p:sld>
 </file>
 
-<file path=ppt/slides/slide21.xml><?xml version="1.0" encoding="utf-8"?>
+<file path=ppt/slides/slide19.xml><?xml version="1.0" encoding="utf-8"?>
 <p:sld xmlns:a="http://schemas.openxmlformats.org/drawingml/2006/main" xmlns:r="http://schemas.openxmlformats.org/officeDocument/2006/relationships" xmlns:p="http://schemas.openxmlformats.org/presentationml/2006/main">
   <p:cSld>
     <p:spTree>
@@ -9730,7 +8771,134 @@
 </p:sld>
 </file>
 
-<file path=ppt/slides/slide22.xml><?xml version="1.0" encoding="utf-8"?>
+<file path=ppt/slides/slide2.xml><?xml version="1.0" encoding="utf-8"?>
+<p:sld xmlns:a="http://schemas.openxmlformats.org/drawingml/2006/main" xmlns:r="http://schemas.openxmlformats.org/officeDocument/2006/relationships" xmlns:p="http://schemas.openxmlformats.org/presentationml/2006/main">
+  <p:cSld>
+    <p:spTree>
+      <p:nvGrpSpPr>
+        <p:cNvPr id="1" name=""/>
+        <p:cNvGrpSpPr/>
+        <p:nvPr/>
+      </p:nvGrpSpPr>
+      <p:grpSpPr>
+        <a:xfrm>
+          <a:off x="0" y="0"/>
+          <a:ext cx="0" cy="0"/>
+          <a:chOff x="0" y="0"/>
+          <a:chExt cx="0" cy="0"/>
+        </a:xfrm>
+      </p:grpSpPr>
+      <p:sp>
+        <p:nvSpPr>
+          <p:cNvPr id="2" name="Title 1">
+            <a:extLst>
+              <a:ext uri="{FF2B5EF4-FFF2-40B4-BE49-F238E27FC236}">
+                <a16:creationId xmlns:a16="http://schemas.microsoft.com/office/drawing/2014/main" id="{720C2576-357D-876A-70BB-664D14B59537}"/>
+              </a:ext>
+            </a:extLst>
+          </p:cNvPr>
+          <p:cNvSpPr>
+            <a:spLocks noGrp="1"/>
+          </p:cNvSpPr>
+          <p:nvPr>
+            <p:ph type="title"/>
+          </p:nvPr>
+        </p:nvSpPr>
+        <p:spPr/>
+        <p:txBody>
+          <a:bodyPr/>
+          <a:lstStyle/>
+          <a:p>
+            <a:r>
+              <a:rPr lang="en-US" dirty="0"/>
+              <a:t>Modeling mindsets:</a:t>
+            </a:r>
+          </a:p>
+        </p:txBody>
+      </p:sp>
+      <p:sp>
+        <p:nvSpPr>
+          <p:cNvPr id="5" name="TextBox 4">
+            <a:extLst>
+              <a:ext uri="{FF2B5EF4-FFF2-40B4-BE49-F238E27FC236}">
+                <a16:creationId xmlns:a16="http://schemas.microsoft.com/office/drawing/2014/main" id="{0A5F1254-83D3-DAA5-948B-CC9457AD6654}"/>
+              </a:ext>
+            </a:extLst>
+          </p:cNvPr>
+          <p:cNvSpPr txBox="1"/>
+          <p:nvPr/>
+        </p:nvSpPr>
+        <p:spPr>
+          <a:xfrm>
+            <a:off x="4537276" y="6488668"/>
+            <a:ext cx="8191983" cy="369332"/>
+          </a:xfrm>
+          <a:prstGeom prst="rect">
+            <a:avLst/>
+          </a:prstGeom>
+          <a:noFill/>
+        </p:spPr>
+        <p:txBody>
+          <a:bodyPr wrap="square">
+            <a:spAutoFit/>
+          </a:bodyPr>
+          <a:lstStyle/>
+          <a:p>
+            <a:r>
+              <a:rPr lang="en-US" dirty="0">
+                <a:hlinkClick r:id="rId3"/>
+              </a:rPr>
+              <a:t>Molnar, C. 2023. Modeling mindsets: the many cultures of learning from data.</a:t>
+            </a:r>
+            <a:endParaRPr lang="en-US" dirty="0"/>
+          </a:p>
+        </p:txBody>
+      </p:sp>
+      <p:pic>
+        <p:nvPicPr>
+          <p:cNvPr id="4" name="Picture 3">
+            <a:extLst>
+              <a:ext uri="{FF2B5EF4-FFF2-40B4-BE49-F238E27FC236}">
+                <a16:creationId xmlns:a16="http://schemas.microsoft.com/office/drawing/2014/main" id="{0ABBDEE9-B16A-2223-F62F-97D22547101D}"/>
+              </a:ext>
+            </a:extLst>
+          </p:cNvPr>
+          <p:cNvPicPr>
+            <a:picLocks noChangeAspect="1"/>
+          </p:cNvPicPr>
+          <p:nvPr/>
+        </p:nvPicPr>
+        <p:blipFill>
+          <a:blip r:embed="rId4"/>
+          <a:srcRect b="14932"/>
+          <a:stretch>
+            <a:fillRect/>
+          </a:stretch>
+        </p:blipFill>
+        <p:spPr>
+          <a:xfrm>
+            <a:off x="2209800" y="1806291"/>
+            <a:ext cx="7772400" cy="3680109"/>
+          </a:xfrm>
+          <a:prstGeom prst="rect">
+            <a:avLst/>
+          </a:prstGeom>
+        </p:spPr>
+      </p:pic>
+    </p:spTree>
+    <p:extLst>
+      <p:ext uri="{BB962C8B-B14F-4D97-AF65-F5344CB8AC3E}">
+        <p14:creationId xmlns:p14="http://schemas.microsoft.com/office/powerpoint/2010/main" val="3037110547"/>
+      </p:ext>
+    </p:extLst>
+  </p:cSld>
+  <p:clrMapOvr>
+    <a:masterClrMapping/>
+  </p:clrMapOvr>
+</p:sld>
+</file>
+
+<file path=ppt/slides/slide20.xml><?xml version="1.0" encoding="utf-8"?>
 <p:sld xmlns:a="http://schemas.openxmlformats.org/drawingml/2006/main" xmlns:r="http://schemas.openxmlformats.org/officeDocument/2006/relationships" xmlns:p="http://schemas.openxmlformats.org/presentationml/2006/main">
   <p:cSld>
     <p:spTree>
@@ -10120,623 +9288,7 @@
 </p:sld>
 </file>
 
-<file path=ppt/slides/slide23.xml><?xml version="1.0" encoding="utf-8"?>
-<p:sld xmlns:a="http://schemas.openxmlformats.org/drawingml/2006/main" xmlns:r="http://schemas.openxmlformats.org/officeDocument/2006/relationships" xmlns:p="http://schemas.openxmlformats.org/presentationml/2006/main">
-  <p:cSld>
-    <p:spTree>
-      <p:nvGrpSpPr>
-        <p:cNvPr id="1" name=""/>
-        <p:cNvGrpSpPr/>
-        <p:nvPr/>
-      </p:nvGrpSpPr>
-      <p:grpSpPr>
-        <a:xfrm>
-          <a:off x="0" y="0"/>
-          <a:ext cx="0" cy="0"/>
-          <a:chOff x="0" y="0"/>
-          <a:chExt cx="0" cy="0"/>
-        </a:xfrm>
-      </p:grpSpPr>
-      <p:sp>
-        <p:nvSpPr>
-          <p:cNvPr id="2" name="Title 1">
-            <a:extLst>
-              <a:ext uri="{FF2B5EF4-FFF2-40B4-BE49-F238E27FC236}">
-                <a16:creationId xmlns:a16="http://schemas.microsoft.com/office/drawing/2014/main" id="{8F4609B2-8DAD-0237-B6AF-7CC64EAB54FC}"/>
-              </a:ext>
-            </a:extLst>
-          </p:cNvPr>
-          <p:cNvSpPr>
-            <a:spLocks noGrp="1"/>
-          </p:cNvSpPr>
-          <p:nvPr>
-            <p:ph type="title"/>
-          </p:nvPr>
-        </p:nvSpPr>
-        <p:spPr/>
-        <p:txBody>
-          <a:bodyPr/>
-          <a:lstStyle/>
-          <a:p>
-            <a:r>
-              <a:rPr lang="en-US" dirty="0"/>
-              <a:t>Break out groups (~5min)</a:t>
-            </a:r>
-          </a:p>
-        </p:txBody>
-      </p:sp>
-      <p:sp>
-        <p:nvSpPr>
-          <p:cNvPr id="3" name="Content Placeholder 2">
-            <a:extLst>
-              <a:ext uri="{FF2B5EF4-FFF2-40B4-BE49-F238E27FC236}">
-                <a16:creationId xmlns:a16="http://schemas.microsoft.com/office/drawing/2014/main" id="{29D0A7A8-6062-EB24-E8E3-40035D8AB20C}"/>
-              </a:ext>
-            </a:extLst>
-          </p:cNvPr>
-          <p:cNvSpPr>
-            <a:spLocks noGrp="1"/>
-          </p:cNvSpPr>
-          <p:nvPr>
-            <p:ph idx="1"/>
-          </p:nvPr>
-        </p:nvSpPr>
-        <p:spPr>
-          <a:xfrm>
-            <a:off x="838200" y="1825625"/>
-            <a:ext cx="4943622" cy="4351338"/>
-          </a:xfrm>
-        </p:spPr>
-        <p:txBody>
-          <a:bodyPr/>
-          <a:lstStyle/>
-          <a:p>
-            <a:pPr marL="0" indent="0">
-              <a:buNone/>
-            </a:pPr>
-            <a:r>
-              <a:rPr lang="en-US" b="1" dirty="0"/>
-              <a:t>Talk with folks at your table</a:t>
-            </a:r>
-            <a:r>
-              <a:rPr lang="en-US" dirty="0"/>
-              <a:t>:</a:t>
-            </a:r>
-          </a:p>
-          <a:p>
-            <a:r>
-              <a:rPr lang="en-US" dirty="0"/>
-              <a:t>Names</a:t>
-            </a:r>
-          </a:p>
-          <a:p>
-            <a:r>
-              <a:rPr lang="en-US" dirty="0"/>
-              <a:t>What modeling mindset(s) you typically use in your work</a:t>
-            </a:r>
-          </a:p>
-          <a:p>
-            <a:r>
-              <a:rPr lang="en-US" dirty="0"/>
-              <a:t>What interests brought you to this workshop today</a:t>
-            </a:r>
-          </a:p>
-          <a:p>
-            <a:r>
-              <a:rPr lang="en-US" dirty="0"/>
-              <a:t>Favorite body of water (anywhere, any type)</a:t>
-            </a:r>
-          </a:p>
-        </p:txBody>
-      </p:sp>
-      <p:sp>
-        <p:nvSpPr>
-          <p:cNvPr id="4" name="TextBox 3">
-            <a:extLst>
-              <a:ext uri="{FF2B5EF4-FFF2-40B4-BE49-F238E27FC236}">
-                <a16:creationId xmlns:a16="http://schemas.microsoft.com/office/drawing/2014/main" id="{CA576C23-1DA8-0270-9411-F5836D88E740}"/>
-              </a:ext>
-            </a:extLst>
-          </p:cNvPr>
-          <p:cNvSpPr txBox="1"/>
-          <p:nvPr/>
-        </p:nvSpPr>
-        <p:spPr>
-          <a:xfrm>
-            <a:off x="4537276" y="6488668"/>
-            <a:ext cx="8191983" cy="369332"/>
-          </a:xfrm>
-          <a:prstGeom prst="rect">
-            <a:avLst/>
-          </a:prstGeom>
-          <a:noFill/>
-        </p:spPr>
-        <p:txBody>
-          <a:bodyPr wrap="square">
-            <a:spAutoFit/>
-          </a:bodyPr>
-          <a:lstStyle/>
-          <a:p>
-            <a:r>
-              <a:rPr lang="en-US" dirty="0">
-                <a:hlinkClick r:id="rId2"/>
-              </a:rPr>
-              <a:t>Molnar, C. 2023. Modeling mindsets: the many cultures of learning from data.</a:t>
-            </a:r>
-            <a:endParaRPr lang="en-US" dirty="0"/>
-          </a:p>
-        </p:txBody>
-      </p:sp>
-      <p:pic>
-        <p:nvPicPr>
-          <p:cNvPr id="5" name="Picture 4">
-            <a:extLst>
-              <a:ext uri="{FF2B5EF4-FFF2-40B4-BE49-F238E27FC236}">
-                <a16:creationId xmlns:a16="http://schemas.microsoft.com/office/drawing/2014/main" id="{989B4C0A-3C12-30B3-038B-2E26E0A88AB4}"/>
-              </a:ext>
-            </a:extLst>
-          </p:cNvPr>
-          <p:cNvPicPr>
-            <a:picLocks noChangeAspect="1"/>
-          </p:cNvPicPr>
-          <p:nvPr/>
-        </p:nvPicPr>
-        <p:blipFill>
-          <a:blip r:embed="rId3"/>
-          <a:srcRect l="-14" r="105" b="11454"/>
-          <a:stretch>
-            <a:fillRect/>
-          </a:stretch>
-        </p:blipFill>
-        <p:spPr>
-          <a:xfrm>
-            <a:off x="5962570" y="2112718"/>
-            <a:ext cx="6037171" cy="2978078"/>
-          </a:xfrm>
-          <a:prstGeom prst="rect">
-            <a:avLst/>
-          </a:prstGeom>
-        </p:spPr>
-      </p:pic>
-    </p:spTree>
-    <p:extLst>
-      <p:ext uri="{BB962C8B-B14F-4D97-AF65-F5344CB8AC3E}">
-        <p14:creationId xmlns:p14="http://schemas.microsoft.com/office/powerpoint/2010/main" val="3850885334"/>
-      </p:ext>
-    </p:extLst>
-  </p:cSld>
-  <p:clrMapOvr>
-    <a:masterClrMapping/>
-  </p:clrMapOvr>
-</p:sld>
-</file>
-
 <file path=ppt/slides/slide3.xml><?xml version="1.0" encoding="utf-8"?>
-<p:sld xmlns:a="http://schemas.openxmlformats.org/drawingml/2006/main" xmlns:r="http://schemas.openxmlformats.org/officeDocument/2006/relationships" xmlns:p="http://schemas.openxmlformats.org/presentationml/2006/main">
-  <p:cSld>
-    <p:spTree>
-      <p:nvGrpSpPr>
-        <p:cNvPr id="1" name=""/>
-        <p:cNvGrpSpPr/>
-        <p:nvPr/>
-      </p:nvGrpSpPr>
-      <p:grpSpPr>
-        <a:xfrm>
-          <a:off x="0" y="0"/>
-          <a:ext cx="0" cy="0"/>
-          <a:chOff x="0" y="0"/>
-          <a:chExt cx="0" cy="0"/>
-        </a:xfrm>
-      </p:grpSpPr>
-      <p:sp>
-        <p:nvSpPr>
-          <p:cNvPr id="2" name="Title 1">
-            <a:extLst>
-              <a:ext uri="{FF2B5EF4-FFF2-40B4-BE49-F238E27FC236}">
-                <a16:creationId xmlns:a16="http://schemas.microsoft.com/office/drawing/2014/main" id="{47CF43D2-AABB-3923-A21F-941815B0A9E9}"/>
-              </a:ext>
-            </a:extLst>
-          </p:cNvPr>
-          <p:cNvSpPr>
-            <a:spLocks noGrp="1"/>
-          </p:cNvSpPr>
-          <p:nvPr>
-            <p:ph type="ctrTitle"/>
-          </p:nvPr>
-        </p:nvSpPr>
-        <p:spPr/>
-        <p:txBody>
-          <a:bodyPr/>
-          <a:lstStyle/>
-          <a:p>
-            <a:r>
-              <a:rPr lang="en-US" dirty="0"/>
-              <a:t>What is machine learning?</a:t>
-            </a:r>
-          </a:p>
-        </p:txBody>
-      </p:sp>
-      <p:sp>
-        <p:nvSpPr>
-          <p:cNvPr id="3" name="Subtitle 2">
-            <a:extLst>
-              <a:ext uri="{FF2B5EF4-FFF2-40B4-BE49-F238E27FC236}">
-                <a16:creationId xmlns:a16="http://schemas.microsoft.com/office/drawing/2014/main" id="{9E839DD3-C76D-C5AD-AC5D-13F2B28B5729}"/>
-              </a:ext>
-            </a:extLst>
-          </p:cNvPr>
-          <p:cNvSpPr>
-            <a:spLocks noGrp="1"/>
-          </p:cNvSpPr>
-          <p:nvPr>
-            <p:ph type="subTitle" idx="1"/>
-          </p:nvPr>
-        </p:nvSpPr>
-        <p:spPr>
-          <a:xfrm>
-            <a:off x="1524000" y="3602038"/>
-            <a:ext cx="9144000" cy="472251"/>
-          </a:xfrm>
-        </p:spPr>
-        <p:txBody>
-          <a:bodyPr/>
-          <a:lstStyle/>
-          <a:p>
-            <a:r>
-              <a:rPr lang="en-US" dirty="0"/>
-              <a:t>And why is it useful (for science)?</a:t>
-            </a:r>
-          </a:p>
-        </p:txBody>
-      </p:sp>
-      <p:sp>
-        <p:nvSpPr>
-          <p:cNvPr id="4" name="Subtitle 2">
-            <a:extLst>
-              <a:ext uri="{FF2B5EF4-FFF2-40B4-BE49-F238E27FC236}">
-                <a16:creationId xmlns:a16="http://schemas.microsoft.com/office/drawing/2014/main" id="{7A84C9FD-C48D-1312-800B-AD902ED34D44}"/>
-              </a:ext>
-            </a:extLst>
-          </p:cNvPr>
-          <p:cNvSpPr txBox="1">
-            <a:spLocks/>
-          </p:cNvSpPr>
-          <p:nvPr/>
-        </p:nvSpPr>
-        <p:spPr>
-          <a:xfrm>
-            <a:off x="1524000" y="4310023"/>
-            <a:ext cx="9144000" cy="472251"/>
-          </a:xfrm>
-          <a:prstGeom prst="rect">
-            <a:avLst/>
-          </a:prstGeom>
-        </p:spPr>
-        <p:txBody>
-          <a:bodyPr vert="horz" lIns="91440" tIns="45720" rIns="91440" bIns="45720" rtlCol="0">
-            <a:normAutofit/>
-          </a:bodyPr>
-          <a:lstStyle>
-            <a:lvl1pPr marL="0" indent="0" algn="ctr" defTabSz="914400" rtl="0" eaLnBrk="1" latinLnBrk="0" hangingPunct="1">
-              <a:lnSpc>
-                <a:spcPct val="90000"/>
-              </a:lnSpc>
-              <a:spcBef>
-                <a:spcPts val="1000"/>
-              </a:spcBef>
-              <a:buFont typeface="Arial" panose="020B0604020202020204" pitchFamily="34" charset="0"/>
-              <a:buNone/>
-              <a:defRPr sz="2400" kern="1200">
-                <a:solidFill>
-                  <a:schemeClr val="tx1"/>
-                </a:solidFill>
-                <a:latin typeface="+mn-lt"/>
-                <a:ea typeface="+mn-ea"/>
-                <a:cs typeface="+mn-cs"/>
-              </a:defRPr>
-            </a:lvl1pPr>
-            <a:lvl2pPr marL="457200" indent="0" algn="ctr" defTabSz="914400" rtl="0" eaLnBrk="1" latinLnBrk="0" hangingPunct="1">
-              <a:lnSpc>
-                <a:spcPct val="90000"/>
-              </a:lnSpc>
-              <a:spcBef>
-                <a:spcPts val="500"/>
-              </a:spcBef>
-              <a:buFont typeface="Arial" panose="020B0604020202020204" pitchFamily="34" charset="0"/>
-              <a:buNone/>
-              <a:defRPr sz="2000" kern="1200">
-                <a:solidFill>
-                  <a:schemeClr val="tx1"/>
-                </a:solidFill>
-                <a:latin typeface="+mn-lt"/>
-                <a:ea typeface="+mn-ea"/>
-                <a:cs typeface="+mn-cs"/>
-              </a:defRPr>
-            </a:lvl2pPr>
-            <a:lvl3pPr marL="914400" indent="0" algn="ctr" defTabSz="914400" rtl="0" eaLnBrk="1" latinLnBrk="0" hangingPunct="1">
-              <a:lnSpc>
-                <a:spcPct val="90000"/>
-              </a:lnSpc>
-              <a:spcBef>
-                <a:spcPts val="500"/>
-              </a:spcBef>
-              <a:buFont typeface="Arial" panose="020B0604020202020204" pitchFamily="34" charset="0"/>
-              <a:buNone/>
-              <a:defRPr sz="1800" kern="1200">
-                <a:solidFill>
-                  <a:schemeClr val="tx1"/>
-                </a:solidFill>
-                <a:latin typeface="+mn-lt"/>
-                <a:ea typeface="+mn-ea"/>
-                <a:cs typeface="+mn-cs"/>
-              </a:defRPr>
-            </a:lvl3pPr>
-            <a:lvl4pPr marL="1371600" indent="0" algn="ctr" defTabSz="914400" rtl="0" eaLnBrk="1" latinLnBrk="0" hangingPunct="1">
-              <a:lnSpc>
-                <a:spcPct val="90000"/>
-              </a:lnSpc>
-              <a:spcBef>
-                <a:spcPts val="500"/>
-              </a:spcBef>
-              <a:buFont typeface="Arial" panose="020B0604020202020204" pitchFamily="34" charset="0"/>
-              <a:buNone/>
-              <a:defRPr sz="1600" kern="1200">
-                <a:solidFill>
-                  <a:schemeClr val="tx1"/>
-                </a:solidFill>
-                <a:latin typeface="+mn-lt"/>
-                <a:ea typeface="+mn-ea"/>
-                <a:cs typeface="+mn-cs"/>
-              </a:defRPr>
-            </a:lvl4pPr>
-            <a:lvl5pPr marL="1828800" indent="0" algn="ctr" defTabSz="914400" rtl="0" eaLnBrk="1" latinLnBrk="0" hangingPunct="1">
-              <a:lnSpc>
-                <a:spcPct val="90000"/>
-              </a:lnSpc>
-              <a:spcBef>
-                <a:spcPts val="500"/>
-              </a:spcBef>
-              <a:buFont typeface="Arial" panose="020B0604020202020204" pitchFamily="34" charset="0"/>
-              <a:buNone/>
-              <a:defRPr sz="1600" kern="1200">
-                <a:solidFill>
-                  <a:schemeClr val="tx1"/>
-                </a:solidFill>
-                <a:latin typeface="+mn-lt"/>
-                <a:ea typeface="+mn-ea"/>
-                <a:cs typeface="+mn-cs"/>
-              </a:defRPr>
-            </a:lvl5pPr>
-            <a:lvl6pPr marL="2286000" indent="0" algn="ctr" defTabSz="914400" rtl="0" eaLnBrk="1" latinLnBrk="0" hangingPunct="1">
-              <a:lnSpc>
-                <a:spcPct val="90000"/>
-              </a:lnSpc>
-              <a:spcBef>
-                <a:spcPts val="500"/>
-              </a:spcBef>
-              <a:buFont typeface="Arial" panose="020B0604020202020204" pitchFamily="34" charset="0"/>
-              <a:buNone/>
-              <a:defRPr sz="1600" kern="1200">
-                <a:solidFill>
-                  <a:schemeClr val="tx1"/>
-                </a:solidFill>
-                <a:latin typeface="+mn-lt"/>
-                <a:ea typeface="+mn-ea"/>
-                <a:cs typeface="+mn-cs"/>
-              </a:defRPr>
-            </a:lvl6pPr>
-            <a:lvl7pPr marL="2743200" indent="0" algn="ctr" defTabSz="914400" rtl="0" eaLnBrk="1" latinLnBrk="0" hangingPunct="1">
-              <a:lnSpc>
-                <a:spcPct val="90000"/>
-              </a:lnSpc>
-              <a:spcBef>
-                <a:spcPts val="500"/>
-              </a:spcBef>
-              <a:buFont typeface="Arial" panose="020B0604020202020204" pitchFamily="34" charset="0"/>
-              <a:buNone/>
-              <a:defRPr sz="1600" kern="1200">
-                <a:solidFill>
-                  <a:schemeClr val="tx1"/>
-                </a:solidFill>
-                <a:latin typeface="+mn-lt"/>
-                <a:ea typeface="+mn-ea"/>
-                <a:cs typeface="+mn-cs"/>
-              </a:defRPr>
-            </a:lvl7pPr>
-            <a:lvl8pPr marL="3200400" indent="0" algn="ctr" defTabSz="914400" rtl="0" eaLnBrk="1" latinLnBrk="0" hangingPunct="1">
-              <a:lnSpc>
-                <a:spcPct val="90000"/>
-              </a:lnSpc>
-              <a:spcBef>
-                <a:spcPts val="500"/>
-              </a:spcBef>
-              <a:buFont typeface="Arial" panose="020B0604020202020204" pitchFamily="34" charset="0"/>
-              <a:buNone/>
-              <a:defRPr sz="1600" kern="1200">
-                <a:solidFill>
-                  <a:schemeClr val="tx1"/>
-                </a:solidFill>
-                <a:latin typeface="+mn-lt"/>
-                <a:ea typeface="+mn-ea"/>
-                <a:cs typeface="+mn-cs"/>
-              </a:defRPr>
-            </a:lvl8pPr>
-            <a:lvl9pPr marL="3657600" indent="0" algn="ctr" defTabSz="914400" rtl="0" eaLnBrk="1" latinLnBrk="0" hangingPunct="1">
-              <a:lnSpc>
-                <a:spcPct val="90000"/>
-              </a:lnSpc>
-              <a:spcBef>
-                <a:spcPts val="500"/>
-              </a:spcBef>
-              <a:buFont typeface="Arial" panose="020B0604020202020204" pitchFamily="34" charset="0"/>
-              <a:buNone/>
-              <a:defRPr sz="1600" kern="1200">
-                <a:solidFill>
-                  <a:schemeClr val="tx1"/>
-                </a:solidFill>
-                <a:latin typeface="+mn-lt"/>
-                <a:ea typeface="+mn-ea"/>
-                <a:cs typeface="+mn-cs"/>
-              </a:defRPr>
-            </a:lvl9pPr>
-          </a:lstStyle>
-          <a:p>
-            <a:r>
-              <a:rPr lang="en-US" dirty="0"/>
-              <a:t>Grant Vagle, Jeremiah </a:t>
-            </a:r>
-            <a:r>
-              <a:rPr lang="en-US" dirty="0" err="1"/>
-              <a:t>Shrovnal</a:t>
-            </a:r>
-            <a:r>
-              <a:rPr lang="en-US" dirty="0"/>
-              <a:t>, Lynn Waterhouse</a:t>
-            </a:r>
-          </a:p>
-        </p:txBody>
-      </p:sp>
-    </p:spTree>
-    <p:extLst>
-      <p:ext uri="{BB962C8B-B14F-4D97-AF65-F5344CB8AC3E}">
-        <p14:creationId xmlns:p14="http://schemas.microsoft.com/office/powerpoint/2010/main" val="973311027"/>
-      </p:ext>
-    </p:extLst>
-  </p:cSld>
-  <p:clrMapOvr>
-    <a:masterClrMapping/>
-  </p:clrMapOvr>
-</p:sld>
-</file>
-
-<file path=ppt/slides/slide4.xml><?xml version="1.0" encoding="utf-8"?>
-<p:sld xmlns:a="http://schemas.openxmlformats.org/drawingml/2006/main" xmlns:r="http://schemas.openxmlformats.org/officeDocument/2006/relationships" xmlns:p="http://schemas.openxmlformats.org/presentationml/2006/main">
-  <p:cSld>
-    <p:spTree>
-      <p:nvGrpSpPr>
-        <p:cNvPr id="1" name=""/>
-        <p:cNvGrpSpPr/>
-        <p:nvPr/>
-      </p:nvGrpSpPr>
-      <p:grpSpPr>
-        <a:xfrm>
-          <a:off x="0" y="0"/>
-          <a:ext cx="0" cy="0"/>
-          <a:chOff x="0" y="0"/>
-          <a:chExt cx="0" cy="0"/>
-        </a:xfrm>
-      </p:grpSpPr>
-      <p:sp>
-        <p:nvSpPr>
-          <p:cNvPr id="2" name="Title 1">
-            <a:extLst>
-              <a:ext uri="{FF2B5EF4-FFF2-40B4-BE49-F238E27FC236}">
-                <a16:creationId xmlns:a16="http://schemas.microsoft.com/office/drawing/2014/main" id="{720C2576-357D-876A-70BB-664D14B59537}"/>
-              </a:ext>
-            </a:extLst>
-          </p:cNvPr>
-          <p:cNvSpPr>
-            <a:spLocks noGrp="1"/>
-          </p:cNvSpPr>
-          <p:nvPr>
-            <p:ph type="title"/>
-          </p:nvPr>
-        </p:nvSpPr>
-        <p:spPr/>
-        <p:txBody>
-          <a:bodyPr/>
-          <a:lstStyle/>
-          <a:p>
-            <a:r>
-              <a:rPr lang="en-US" dirty="0"/>
-              <a:t>Modeling mindsets:</a:t>
-            </a:r>
-          </a:p>
-        </p:txBody>
-      </p:sp>
-      <p:sp>
-        <p:nvSpPr>
-          <p:cNvPr id="5" name="TextBox 4">
-            <a:extLst>
-              <a:ext uri="{FF2B5EF4-FFF2-40B4-BE49-F238E27FC236}">
-                <a16:creationId xmlns:a16="http://schemas.microsoft.com/office/drawing/2014/main" id="{0A5F1254-83D3-DAA5-948B-CC9457AD6654}"/>
-              </a:ext>
-            </a:extLst>
-          </p:cNvPr>
-          <p:cNvSpPr txBox="1"/>
-          <p:nvPr/>
-        </p:nvSpPr>
-        <p:spPr>
-          <a:xfrm>
-            <a:off x="4537276" y="6488668"/>
-            <a:ext cx="8191983" cy="369332"/>
-          </a:xfrm>
-          <a:prstGeom prst="rect">
-            <a:avLst/>
-          </a:prstGeom>
-          <a:noFill/>
-        </p:spPr>
-        <p:txBody>
-          <a:bodyPr wrap="square">
-            <a:spAutoFit/>
-          </a:bodyPr>
-          <a:lstStyle/>
-          <a:p>
-            <a:r>
-              <a:rPr lang="en-US" dirty="0">
-                <a:hlinkClick r:id="rId3"/>
-              </a:rPr>
-              <a:t>Molnar, C. 2023. Modeling mindsets: the many cultures of learning from data.</a:t>
-            </a:r>
-            <a:endParaRPr lang="en-US" dirty="0"/>
-          </a:p>
-        </p:txBody>
-      </p:sp>
-      <p:pic>
-        <p:nvPicPr>
-          <p:cNvPr id="4" name="Picture 3">
-            <a:extLst>
-              <a:ext uri="{FF2B5EF4-FFF2-40B4-BE49-F238E27FC236}">
-                <a16:creationId xmlns:a16="http://schemas.microsoft.com/office/drawing/2014/main" id="{0ABBDEE9-B16A-2223-F62F-97D22547101D}"/>
-              </a:ext>
-            </a:extLst>
-          </p:cNvPr>
-          <p:cNvPicPr>
-            <a:picLocks noChangeAspect="1"/>
-          </p:cNvPicPr>
-          <p:nvPr/>
-        </p:nvPicPr>
-        <p:blipFill>
-          <a:blip r:embed="rId4"/>
-          <a:srcRect b="14932"/>
-          <a:stretch>
-            <a:fillRect/>
-          </a:stretch>
-        </p:blipFill>
-        <p:spPr>
-          <a:xfrm>
-            <a:off x="2209800" y="1806291"/>
-            <a:ext cx="7772400" cy="3680109"/>
-          </a:xfrm>
-          <a:prstGeom prst="rect">
-            <a:avLst/>
-          </a:prstGeom>
-        </p:spPr>
-      </p:pic>
-    </p:spTree>
-    <p:extLst>
-      <p:ext uri="{BB962C8B-B14F-4D97-AF65-F5344CB8AC3E}">
-        <p14:creationId xmlns:p14="http://schemas.microsoft.com/office/powerpoint/2010/main" val="3037110547"/>
-      </p:ext>
-    </p:extLst>
-  </p:cSld>
-  <p:clrMapOvr>
-    <a:masterClrMapping/>
-  </p:clrMapOvr>
-</p:sld>
-</file>
-
-<file path=ppt/slides/slide5.xml><?xml version="1.0" encoding="utf-8"?>
 <p:sld xmlns:a="http://schemas.openxmlformats.org/drawingml/2006/main" xmlns:r="http://schemas.openxmlformats.org/officeDocument/2006/relationships" xmlns:p="http://schemas.openxmlformats.org/presentationml/2006/main">
   <p:cSld>
     <p:spTree>
@@ -10877,7 +9429,7 @@
 </p:sld>
 </file>
 
-<file path=ppt/slides/slide6.xml><?xml version="1.0" encoding="utf-8"?>
+<file path=ppt/slides/slide4.xml><?xml version="1.0" encoding="utf-8"?>
 <p:sld xmlns:a="http://schemas.openxmlformats.org/drawingml/2006/main" xmlns:r="http://schemas.openxmlformats.org/officeDocument/2006/relationships" xmlns:p="http://schemas.openxmlformats.org/presentationml/2006/main">
   <p:cSld>
     <p:spTree>
@@ -11010,7 +9562,7 @@
 </p:sld>
 </file>
 
-<file path=ppt/slides/slide7.xml><?xml version="1.0" encoding="utf-8"?>
+<file path=ppt/slides/slide5.xml><?xml version="1.0" encoding="utf-8"?>
 <p:sld xmlns:a="http://schemas.openxmlformats.org/drawingml/2006/main" xmlns:r="http://schemas.openxmlformats.org/officeDocument/2006/relationships" xmlns:p="http://schemas.openxmlformats.org/presentationml/2006/main">
   <p:cSld>
     <p:spTree>
@@ -11143,7 +9695,7 @@
 </p:sld>
 </file>
 
-<file path=ppt/slides/slide8.xml><?xml version="1.0" encoding="utf-8"?>
+<file path=ppt/slides/slide6.xml><?xml version="1.0" encoding="utf-8"?>
 <p:sld xmlns:a="http://schemas.openxmlformats.org/drawingml/2006/main" xmlns:r="http://schemas.openxmlformats.org/officeDocument/2006/relationships" xmlns:p="http://schemas.openxmlformats.org/presentationml/2006/main">
   <p:cSld>
     <p:spTree>
@@ -11543,7 +10095,7 @@
 </p:sld>
 </file>
 
-<file path=ppt/slides/slide9.xml><?xml version="1.0" encoding="utf-8"?>
+<file path=ppt/slides/slide7.xml><?xml version="1.0" encoding="utf-8"?>
 <p:sld xmlns:a="http://schemas.openxmlformats.org/drawingml/2006/main" xmlns:r="http://schemas.openxmlformats.org/officeDocument/2006/relationships" xmlns:p="http://schemas.openxmlformats.org/presentationml/2006/main">
   <p:cSld>
     <p:spTree>
@@ -12252,6 +10804,272 @@
     <p:extLst>
       <p:ext uri="{BB962C8B-B14F-4D97-AF65-F5344CB8AC3E}">
         <p14:creationId xmlns:p14="http://schemas.microsoft.com/office/powerpoint/2010/main" val="2255730433"/>
+      </p:ext>
+    </p:extLst>
+  </p:cSld>
+  <p:clrMapOvr>
+    <a:masterClrMapping/>
+  </p:clrMapOvr>
+</p:sld>
+</file>
+
+<file path=ppt/slides/slide8.xml><?xml version="1.0" encoding="utf-8"?>
+<p:sld xmlns:a="http://schemas.openxmlformats.org/drawingml/2006/main" xmlns:r="http://schemas.openxmlformats.org/officeDocument/2006/relationships" xmlns:p="http://schemas.openxmlformats.org/presentationml/2006/main">
+  <p:cSld>
+    <p:spTree>
+      <p:nvGrpSpPr>
+        <p:cNvPr id="1" name="">
+          <a:extLst>
+            <a:ext uri="{FF2B5EF4-FFF2-40B4-BE49-F238E27FC236}">
+              <a16:creationId xmlns:a16="http://schemas.microsoft.com/office/drawing/2014/main" id="{F9812241-244B-055D-95DA-987DF4EAA2D5}"/>
+            </a:ext>
+          </a:extLst>
+        </p:cNvPr>
+        <p:cNvGrpSpPr/>
+        <p:nvPr/>
+      </p:nvGrpSpPr>
+      <p:grpSpPr>
+        <a:xfrm>
+          <a:off x="0" y="0"/>
+          <a:ext cx="0" cy="0"/>
+          <a:chOff x="0" y="0"/>
+          <a:chExt cx="0" cy="0"/>
+        </a:xfrm>
+      </p:grpSpPr>
+      <p:sp>
+        <p:nvSpPr>
+          <p:cNvPr id="2" name="Title 1">
+            <a:extLst>
+              <a:ext uri="{FF2B5EF4-FFF2-40B4-BE49-F238E27FC236}">
+                <a16:creationId xmlns:a16="http://schemas.microsoft.com/office/drawing/2014/main" id="{75FE6AA7-F871-9867-601A-1AAE31E9774B}"/>
+              </a:ext>
+            </a:extLst>
+          </p:cNvPr>
+          <p:cNvSpPr>
+            <a:spLocks noGrp="1"/>
+          </p:cNvSpPr>
+          <p:nvPr>
+            <p:ph type="title"/>
+          </p:nvPr>
+        </p:nvSpPr>
+        <p:spPr/>
+        <p:txBody>
+          <a:bodyPr/>
+          <a:lstStyle/>
+          <a:p>
+            <a:r>
+              <a:rPr lang="en-US" dirty="0"/>
+              <a:t>Modeling mindsets:</a:t>
+            </a:r>
+          </a:p>
+        </p:txBody>
+      </p:sp>
+      <p:sp>
+        <p:nvSpPr>
+          <p:cNvPr id="5" name="TextBox 4">
+            <a:extLst>
+              <a:ext uri="{FF2B5EF4-FFF2-40B4-BE49-F238E27FC236}">
+                <a16:creationId xmlns:a16="http://schemas.microsoft.com/office/drawing/2014/main" id="{0B1164BB-72D5-4A22-DFB6-60343F96D0CA}"/>
+              </a:ext>
+            </a:extLst>
+          </p:cNvPr>
+          <p:cNvSpPr txBox="1"/>
+          <p:nvPr/>
+        </p:nvSpPr>
+        <p:spPr>
+          <a:xfrm>
+            <a:off x="4537276" y="6488668"/>
+            <a:ext cx="8191983" cy="369332"/>
+          </a:xfrm>
+          <a:prstGeom prst="rect">
+            <a:avLst/>
+          </a:prstGeom>
+          <a:noFill/>
+        </p:spPr>
+        <p:txBody>
+          <a:bodyPr wrap="square">
+            <a:spAutoFit/>
+          </a:bodyPr>
+          <a:lstStyle/>
+          <a:p>
+            <a:r>
+              <a:rPr lang="en-US" dirty="0">
+                <a:hlinkClick r:id="rId3"/>
+              </a:rPr>
+              <a:t>Molnar, C. 2023. Modeling mindsets: the many cultures of learning from data.</a:t>
+            </a:r>
+            <a:endParaRPr lang="en-US" dirty="0"/>
+          </a:p>
+        </p:txBody>
+      </p:sp>
+      <p:pic>
+        <p:nvPicPr>
+          <p:cNvPr id="4" name="Picture 3">
+            <a:extLst>
+              <a:ext uri="{FF2B5EF4-FFF2-40B4-BE49-F238E27FC236}">
+                <a16:creationId xmlns:a16="http://schemas.microsoft.com/office/drawing/2014/main" id="{6F15411E-D06D-FD4C-7FF2-987BD7935E9A}"/>
+              </a:ext>
+            </a:extLst>
+          </p:cNvPr>
+          <p:cNvPicPr>
+            <a:picLocks noChangeAspect="1"/>
+          </p:cNvPicPr>
+          <p:nvPr/>
+        </p:nvPicPr>
+        <p:blipFill>
+          <a:blip r:embed="rId4"/>
+          <a:srcRect l="-14" r="105" b="11454"/>
+          <a:stretch>
+            <a:fillRect/>
+          </a:stretch>
+        </p:blipFill>
+        <p:spPr>
+          <a:xfrm>
+            <a:off x="2208628" y="1806292"/>
+            <a:ext cx="7765366" cy="3830580"/>
+          </a:xfrm>
+          <a:prstGeom prst="rect">
+            <a:avLst/>
+          </a:prstGeom>
+        </p:spPr>
+      </p:pic>
+    </p:spTree>
+    <p:extLst>
+      <p:ext uri="{BB962C8B-B14F-4D97-AF65-F5344CB8AC3E}">
+        <p14:creationId xmlns:p14="http://schemas.microsoft.com/office/powerpoint/2010/main" val="3401170566"/>
+      </p:ext>
+    </p:extLst>
+  </p:cSld>
+  <p:clrMapOvr>
+    <a:masterClrMapping/>
+  </p:clrMapOvr>
+</p:sld>
+</file>
+
+<file path=ppt/slides/slide9.xml><?xml version="1.0" encoding="utf-8"?>
+<p:sld xmlns:a="http://schemas.openxmlformats.org/drawingml/2006/main" xmlns:r="http://schemas.openxmlformats.org/officeDocument/2006/relationships" xmlns:p="http://schemas.openxmlformats.org/presentationml/2006/main">
+  <p:cSld>
+    <p:spTree>
+      <p:nvGrpSpPr>
+        <p:cNvPr id="1" name="">
+          <a:extLst>
+            <a:ext uri="{FF2B5EF4-FFF2-40B4-BE49-F238E27FC236}">
+              <a16:creationId xmlns:a16="http://schemas.microsoft.com/office/drawing/2014/main" id="{36C20D7A-E356-E09C-8D7C-C12B41C1C3E4}"/>
+            </a:ext>
+          </a:extLst>
+        </p:cNvPr>
+        <p:cNvGrpSpPr/>
+        <p:nvPr/>
+      </p:nvGrpSpPr>
+      <p:grpSpPr>
+        <a:xfrm>
+          <a:off x="0" y="0"/>
+          <a:ext cx="0" cy="0"/>
+          <a:chOff x="0" y="0"/>
+          <a:chExt cx="0" cy="0"/>
+        </a:xfrm>
+      </p:grpSpPr>
+      <p:sp>
+        <p:nvSpPr>
+          <p:cNvPr id="2" name="Title 1">
+            <a:extLst>
+              <a:ext uri="{FF2B5EF4-FFF2-40B4-BE49-F238E27FC236}">
+                <a16:creationId xmlns:a16="http://schemas.microsoft.com/office/drawing/2014/main" id="{BDE5916C-4F7D-7104-2E01-C51C9B8F3AF9}"/>
+              </a:ext>
+            </a:extLst>
+          </p:cNvPr>
+          <p:cNvSpPr>
+            <a:spLocks noGrp="1"/>
+          </p:cNvSpPr>
+          <p:nvPr>
+            <p:ph type="title"/>
+          </p:nvPr>
+        </p:nvSpPr>
+        <p:spPr/>
+        <p:txBody>
+          <a:bodyPr/>
+          <a:lstStyle/>
+          <a:p>
+            <a:r>
+              <a:rPr lang="en-US" dirty="0"/>
+              <a:t>Modeling mindsets:</a:t>
+            </a:r>
+          </a:p>
+        </p:txBody>
+      </p:sp>
+      <p:sp>
+        <p:nvSpPr>
+          <p:cNvPr id="5" name="TextBox 4">
+            <a:extLst>
+              <a:ext uri="{FF2B5EF4-FFF2-40B4-BE49-F238E27FC236}">
+                <a16:creationId xmlns:a16="http://schemas.microsoft.com/office/drawing/2014/main" id="{E9BBFA52-33A5-9A67-76AD-73E601494AD5}"/>
+              </a:ext>
+            </a:extLst>
+          </p:cNvPr>
+          <p:cNvSpPr txBox="1"/>
+          <p:nvPr/>
+        </p:nvSpPr>
+        <p:spPr>
+          <a:xfrm>
+            <a:off x="4537276" y="6488668"/>
+            <a:ext cx="8191983" cy="369332"/>
+          </a:xfrm>
+          <a:prstGeom prst="rect">
+            <a:avLst/>
+          </a:prstGeom>
+          <a:noFill/>
+        </p:spPr>
+        <p:txBody>
+          <a:bodyPr wrap="square">
+            <a:spAutoFit/>
+          </a:bodyPr>
+          <a:lstStyle/>
+          <a:p>
+            <a:r>
+              <a:rPr lang="en-US" dirty="0">
+                <a:hlinkClick r:id="rId3"/>
+              </a:rPr>
+              <a:t>Molnar, C. 2023. Modeling mindsets: the many cultures of learning from data.</a:t>
+            </a:r>
+            <a:endParaRPr lang="en-US" dirty="0"/>
+          </a:p>
+        </p:txBody>
+      </p:sp>
+      <p:pic>
+        <p:nvPicPr>
+          <p:cNvPr id="4" name="Picture 3">
+            <a:extLst>
+              <a:ext uri="{FF2B5EF4-FFF2-40B4-BE49-F238E27FC236}">
+                <a16:creationId xmlns:a16="http://schemas.microsoft.com/office/drawing/2014/main" id="{636E94A8-CD25-4464-C3DE-1303F99BC23D}"/>
+              </a:ext>
+            </a:extLst>
+          </p:cNvPr>
+          <p:cNvPicPr>
+            <a:picLocks noChangeAspect="1"/>
+          </p:cNvPicPr>
+          <p:nvPr/>
+        </p:nvPicPr>
+        <p:blipFill>
+          <a:blip r:embed="rId4"/>
+          <a:srcRect l="50001" r="105" b="11454"/>
+          <a:stretch>
+            <a:fillRect/>
+          </a:stretch>
+        </p:blipFill>
+        <p:spPr>
+          <a:xfrm>
+            <a:off x="6096000" y="1806292"/>
+            <a:ext cx="3877994" cy="3830580"/>
+          </a:xfrm>
+          <a:prstGeom prst="rect">
+            <a:avLst/>
+          </a:prstGeom>
+        </p:spPr>
+      </p:pic>
+    </p:spTree>
+    <p:extLst>
+      <p:ext uri="{BB962C8B-B14F-4D97-AF65-F5344CB8AC3E}">
+        <p14:creationId xmlns:p14="http://schemas.microsoft.com/office/powerpoint/2010/main" val="3466779110"/>
       </p:ext>
     </p:extLst>
   </p:cSld>

--- a/slides/01_what_is_ml.pptx
+++ b/slides/01_what_is_ml.pptx
@@ -8,7 +8,7 @@
     <p:notesMasterId r:id="rId22"/>
   </p:notesMasterIdLst>
   <p:sldIdLst>
-    <p:sldId id="256" r:id="rId2"/>
+    <p:sldId id="283" r:id="rId2"/>
     <p:sldId id="257" r:id="rId3"/>
     <p:sldId id="266" r:id="rId4"/>
     <p:sldId id="271" r:id="rId5"/>
@@ -5138,10 +5138,217 @@
           </a:p>
         </p:txBody>
       </p:sp>
+      <p:sp>
+        <p:nvSpPr>
+          <p:cNvPr id="4" name="Subtitle 2">
+            <a:extLst>
+              <a:ext uri="{FF2B5EF4-FFF2-40B4-BE49-F238E27FC236}">
+                <a16:creationId xmlns:a16="http://schemas.microsoft.com/office/drawing/2014/main" id="{7A84C9FD-C48D-1312-800B-AD902ED34D44}"/>
+              </a:ext>
+            </a:extLst>
+          </p:cNvPr>
+          <p:cNvSpPr txBox="1">
+            <a:spLocks/>
+          </p:cNvSpPr>
+          <p:nvPr/>
+        </p:nvSpPr>
+        <p:spPr>
+          <a:xfrm>
+            <a:off x="1524000" y="4310023"/>
+            <a:ext cx="9144000" cy="472251"/>
+          </a:xfrm>
+          <a:prstGeom prst="rect">
+            <a:avLst/>
+          </a:prstGeom>
+        </p:spPr>
+        <p:txBody>
+          <a:bodyPr vert="horz" lIns="91440" tIns="45720" rIns="91440" bIns="45720" rtlCol="0">
+            <a:normAutofit/>
+          </a:bodyPr>
+          <a:lstStyle>
+            <a:lvl1pPr marL="0" indent="0" algn="ctr" defTabSz="914400" rtl="0" eaLnBrk="1" latinLnBrk="0" hangingPunct="1">
+              <a:lnSpc>
+                <a:spcPct val="90000"/>
+              </a:lnSpc>
+              <a:spcBef>
+                <a:spcPts val="1000"/>
+              </a:spcBef>
+              <a:buFont typeface="Arial" panose="020B0604020202020204" pitchFamily="34" charset="0"/>
+              <a:buNone/>
+              <a:defRPr sz="2400" kern="1200">
+                <a:solidFill>
+                  <a:schemeClr val="tx1"/>
+                </a:solidFill>
+                <a:latin typeface="+mn-lt"/>
+                <a:ea typeface="+mn-ea"/>
+                <a:cs typeface="+mn-cs"/>
+              </a:defRPr>
+            </a:lvl1pPr>
+            <a:lvl2pPr marL="457200" indent="0" algn="ctr" defTabSz="914400" rtl="0" eaLnBrk="1" latinLnBrk="0" hangingPunct="1">
+              <a:lnSpc>
+                <a:spcPct val="90000"/>
+              </a:lnSpc>
+              <a:spcBef>
+                <a:spcPts val="500"/>
+              </a:spcBef>
+              <a:buFont typeface="Arial" panose="020B0604020202020204" pitchFamily="34" charset="0"/>
+              <a:buNone/>
+              <a:defRPr sz="2000" kern="1200">
+                <a:solidFill>
+                  <a:schemeClr val="tx1"/>
+                </a:solidFill>
+                <a:latin typeface="+mn-lt"/>
+                <a:ea typeface="+mn-ea"/>
+                <a:cs typeface="+mn-cs"/>
+              </a:defRPr>
+            </a:lvl2pPr>
+            <a:lvl3pPr marL="914400" indent="0" algn="ctr" defTabSz="914400" rtl="0" eaLnBrk="1" latinLnBrk="0" hangingPunct="1">
+              <a:lnSpc>
+                <a:spcPct val="90000"/>
+              </a:lnSpc>
+              <a:spcBef>
+                <a:spcPts val="500"/>
+              </a:spcBef>
+              <a:buFont typeface="Arial" panose="020B0604020202020204" pitchFamily="34" charset="0"/>
+              <a:buNone/>
+              <a:defRPr sz="1800" kern="1200">
+                <a:solidFill>
+                  <a:schemeClr val="tx1"/>
+                </a:solidFill>
+                <a:latin typeface="+mn-lt"/>
+                <a:ea typeface="+mn-ea"/>
+                <a:cs typeface="+mn-cs"/>
+              </a:defRPr>
+            </a:lvl3pPr>
+            <a:lvl4pPr marL="1371600" indent="0" algn="ctr" defTabSz="914400" rtl="0" eaLnBrk="1" latinLnBrk="0" hangingPunct="1">
+              <a:lnSpc>
+                <a:spcPct val="90000"/>
+              </a:lnSpc>
+              <a:spcBef>
+                <a:spcPts val="500"/>
+              </a:spcBef>
+              <a:buFont typeface="Arial" panose="020B0604020202020204" pitchFamily="34" charset="0"/>
+              <a:buNone/>
+              <a:defRPr sz="1600" kern="1200">
+                <a:solidFill>
+                  <a:schemeClr val="tx1"/>
+                </a:solidFill>
+                <a:latin typeface="+mn-lt"/>
+                <a:ea typeface="+mn-ea"/>
+                <a:cs typeface="+mn-cs"/>
+              </a:defRPr>
+            </a:lvl4pPr>
+            <a:lvl5pPr marL="1828800" indent="0" algn="ctr" defTabSz="914400" rtl="0" eaLnBrk="1" latinLnBrk="0" hangingPunct="1">
+              <a:lnSpc>
+                <a:spcPct val="90000"/>
+              </a:lnSpc>
+              <a:spcBef>
+                <a:spcPts val="500"/>
+              </a:spcBef>
+              <a:buFont typeface="Arial" panose="020B0604020202020204" pitchFamily="34" charset="0"/>
+              <a:buNone/>
+              <a:defRPr sz="1600" kern="1200">
+                <a:solidFill>
+                  <a:schemeClr val="tx1"/>
+                </a:solidFill>
+                <a:latin typeface="+mn-lt"/>
+                <a:ea typeface="+mn-ea"/>
+                <a:cs typeface="+mn-cs"/>
+              </a:defRPr>
+            </a:lvl5pPr>
+            <a:lvl6pPr marL="2286000" indent="0" algn="ctr" defTabSz="914400" rtl="0" eaLnBrk="1" latinLnBrk="0" hangingPunct="1">
+              <a:lnSpc>
+                <a:spcPct val="90000"/>
+              </a:lnSpc>
+              <a:spcBef>
+                <a:spcPts val="500"/>
+              </a:spcBef>
+              <a:buFont typeface="Arial" panose="020B0604020202020204" pitchFamily="34" charset="0"/>
+              <a:buNone/>
+              <a:defRPr sz="1600" kern="1200">
+                <a:solidFill>
+                  <a:schemeClr val="tx1"/>
+                </a:solidFill>
+                <a:latin typeface="+mn-lt"/>
+                <a:ea typeface="+mn-ea"/>
+                <a:cs typeface="+mn-cs"/>
+              </a:defRPr>
+            </a:lvl6pPr>
+            <a:lvl7pPr marL="2743200" indent="0" algn="ctr" defTabSz="914400" rtl="0" eaLnBrk="1" latinLnBrk="0" hangingPunct="1">
+              <a:lnSpc>
+                <a:spcPct val="90000"/>
+              </a:lnSpc>
+              <a:spcBef>
+                <a:spcPts val="500"/>
+              </a:spcBef>
+              <a:buFont typeface="Arial" panose="020B0604020202020204" pitchFamily="34" charset="0"/>
+              <a:buNone/>
+              <a:defRPr sz="1600" kern="1200">
+                <a:solidFill>
+                  <a:schemeClr val="tx1"/>
+                </a:solidFill>
+                <a:latin typeface="+mn-lt"/>
+                <a:ea typeface="+mn-ea"/>
+                <a:cs typeface="+mn-cs"/>
+              </a:defRPr>
+            </a:lvl7pPr>
+            <a:lvl8pPr marL="3200400" indent="0" algn="ctr" defTabSz="914400" rtl="0" eaLnBrk="1" latinLnBrk="0" hangingPunct="1">
+              <a:lnSpc>
+                <a:spcPct val="90000"/>
+              </a:lnSpc>
+              <a:spcBef>
+                <a:spcPts val="500"/>
+              </a:spcBef>
+              <a:buFont typeface="Arial" panose="020B0604020202020204" pitchFamily="34" charset="0"/>
+              <a:buNone/>
+              <a:defRPr sz="1600" kern="1200">
+                <a:solidFill>
+                  <a:schemeClr val="tx1"/>
+                </a:solidFill>
+                <a:latin typeface="+mn-lt"/>
+                <a:ea typeface="+mn-ea"/>
+                <a:cs typeface="+mn-cs"/>
+              </a:defRPr>
+            </a:lvl8pPr>
+            <a:lvl9pPr marL="3657600" indent="0" algn="ctr" defTabSz="914400" rtl="0" eaLnBrk="1" latinLnBrk="0" hangingPunct="1">
+              <a:lnSpc>
+                <a:spcPct val="90000"/>
+              </a:lnSpc>
+              <a:spcBef>
+                <a:spcPts val="500"/>
+              </a:spcBef>
+              <a:buFont typeface="Arial" panose="020B0604020202020204" pitchFamily="34" charset="0"/>
+              <a:buNone/>
+              <a:defRPr sz="1600" kern="1200">
+                <a:solidFill>
+                  <a:schemeClr val="tx1"/>
+                </a:solidFill>
+                <a:latin typeface="+mn-lt"/>
+                <a:ea typeface="+mn-ea"/>
+                <a:cs typeface="+mn-cs"/>
+              </a:defRPr>
+            </a:lvl9pPr>
+          </a:lstStyle>
+          <a:p>
+            <a:r>
+              <a:rPr lang="en-US" dirty="0"/>
+              <a:t>Grant Vagle, Jeremiah </a:t>
+            </a:r>
+            <a:r>
+              <a:rPr lang="en-US" dirty="0" err="1"/>
+              <a:t>Shrovnal</a:t>
+            </a:r>
+            <a:r>
+              <a:rPr lang="en-US" dirty="0"/>
+              <a:t>, Lynn Waterhouse</a:t>
+            </a:r>
+          </a:p>
+        </p:txBody>
+      </p:sp>
     </p:spTree>
     <p:extLst>
       <p:ext uri="{BB962C8B-B14F-4D97-AF65-F5344CB8AC3E}">
-        <p14:creationId xmlns:p14="http://schemas.microsoft.com/office/powerpoint/2010/main" val="973311027"/>
+        <p14:creationId xmlns:p14="http://schemas.microsoft.com/office/powerpoint/2010/main" val="3100786459"/>
       </p:ext>
     </p:extLst>
   </p:cSld>
